--- a/FIM_Book1_Synopsis_Objectifs_V6-01062026SHY-TE.pptx
+++ b/FIM_Book1_Synopsis_Objectifs_V6-01062026SHY-TE.pptx
@@ -3143,13 +3143,13 @@
         <p:spPr>
           <a:xfrm>
             <a:off x="0" y="0"/>
-            <a:ext cx="12188952" cy="2377440"/>
-          </a:xfrm>
-          <a:prstGeom prst="rect">
-            <a:avLst/>
-          </a:prstGeom>
-          <a:solidFill>
-            <a:srgbClr val="005050"/>
+            <a:ext cx="12188952" cy="2286000"/>
+          </a:xfrm>
+          <a:prstGeom prst="rect">
+            <a:avLst/>
+          </a:prstGeom>
+          <a:solidFill>
+            <a:srgbClr val="005555"/>
           </a:solidFill>
           <a:ln>
             <a:noFill/>
@@ -3185,14 +3185,14 @@
         </p:nvSpPr>
         <p:spPr>
           <a:xfrm>
-            <a:off x="0" y="2331720"/>
-            <a:ext cx="12188952" cy="91440"/>
-          </a:xfrm>
-          <a:prstGeom prst="rect">
-            <a:avLst/>
-          </a:prstGeom>
-          <a:solidFill>
-            <a:srgbClr val="C9A84C"/>
+            <a:off x="0" y="2267712"/>
+            <a:ext cx="12188952" cy="73152"/>
+          </a:xfrm>
+          <a:prstGeom prst="rect">
+            <a:avLst/>
+          </a:prstGeom>
+          <a:solidFill>
+            <a:srgbClr val="FF0000"/>
           </a:solidFill>
           <a:ln>
             <a:noFill/>
@@ -3222,14 +3222,57 @@
       </p:sp>
       <p:sp>
         <p:nvSpPr>
-          <p:cNvPr id="5" name="TextBox 4"/>
+          <p:cNvPr id="5" name="Rectangle 4"/>
+          <p:cNvSpPr/>
+          <p:nvPr/>
+        </p:nvSpPr>
+        <p:spPr>
+          <a:xfrm>
+            <a:off x="274320" y="109728"/>
+            <a:ext cx="2926080" cy="822960"/>
+          </a:xfrm>
+          <a:prstGeom prst="rect">
+            <a:avLst/>
+          </a:prstGeom>
+          <a:solidFill>
+            <a:srgbClr val="008080"/>
+          </a:solidFill>
+          <a:ln>
+            <a:noFill/>
+          </a:ln>
+        </p:spPr>
+        <p:style>
+          <a:lnRef idx="1">
+            <a:schemeClr val="accent1"/>
+          </a:lnRef>
+          <a:fillRef idx="3">
+            <a:schemeClr val="accent1"/>
+          </a:fillRef>
+          <a:effectRef idx="2">
+            <a:schemeClr val="accent1"/>
+          </a:effectRef>
+          <a:fontRef idx="minor">
+            <a:schemeClr val="lt1"/>
+          </a:fontRef>
+        </p:style>
+        <p:txBody>
+          <a:bodyPr rtlCol="0" anchor="ctr"/>
+          <a:lstStyle/>
+          <a:p>
+            <a:pPr algn="ctr"/>
+          </a:p>
+        </p:txBody>
+      </p:sp>
+      <p:sp>
+        <p:nvSpPr>
+          <p:cNvPr id="6" name="TextBox 5"/>
           <p:cNvSpPr txBox="1"/>
           <p:nvPr/>
         </p:nvSpPr>
         <p:spPr>
           <a:xfrm>
-            <a:off x="365760" y="182880"/>
-            <a:ext cx="3657600" cy="365760"/>
+            <a:off x="320040" y="118872"/>
+            <a:ext cx="1097280" cy="804672"/>
           </a:xfrm>
           <a:prstGeom prst="rect">
             <a:avLst/>
@@ -3244,26 +3287,137 @@
           <a:p>
             <a:pPr algn="l"/>
             <a:r>
-              <a:rPr sz="1000" b="1" i="0">
+              <a:rPr sz="3600" b="1" i="0">
                 <a:solidFill>
-                  <a:srgbClr val="C9A84C"/>
+                  <a:srgbClr val="FFFFFF"/>
                 </a:solidFill>
               </a:rPr>
-              <a:t>BOOK 1 · UM6P/APC</a:t>
-            </a:r>
-          </a:p>
-        </p:txBody>
-      </p:sp>
-      <p:sp>
-        <p:nvSpPr>
-          <p:cNvPr id="6" name="TextBox 5"/>
+              <a:t>SHY</a:t>
+            </a:r>
+          </a:p>
+        </p:txBody>
+      </p:sp>
+      <p:sp>
+        <p:nvSpPr>
+          <p:cNvPr id="7" name="TextBox 6"/>
           <p:cNvSpPr txBox="1"/>
           <p:nvPr/>
         </p:nvSpPr>
         <p:spPr>
           <a:xfrm>
-            <a:off x="457200" y="502920"/>
-            <a:ext cx="11247120" cy="1371600"/>
+            <a:off x="1371600" y="347472"/>
+            <a:ext cx="1828800" cy="411480"/>
+          </a:xfrm>
+          <a:prstGeom prst="rect">
+            <a:avLst/>
+          </a:prstGeom>
+          <a:noFill/>
+        </p:spPr>
+        <p:txBody>
+          <a:bodyPr wrap="square">
+            <a:spAutoFit/>
+          </a:bodyPr>
+          <a:lstStyle/>
+          <a:p>
+            <a:pPr algn="l"/>
+            <a:r>
+              <a:rPr sz="1400" b="1" i="0">
+                <a:solidFill>
+                  <a:srgbClr val="FFFFFF"/>
+                </a:solidFill>
+              </a:rPr>
+              <a:t>Performance</a:t>
+            </a:r>
+          </a:p>
+        </p:txBody>
+      </p:sp>
+      <p:sp>
+        <p:nvSpPr>
+          <p:cNvPr id="8" name="Rectangle 7"/>
+          <p:cNvSpPr/>
+          <p:nvPr/>
+        </p:nvSpPr>
+        <p:spPr>
+          <a:xfrm>
+            <a:off x="3337560" y="164592"/>
+            <a:ext cx="36576" cy="658368"/>
+          </a:xfrm>
+          <a:prstGeom prst="rect">
+            <a:avLst/>
+          </a:prstGeom>
+          <a:solidFill>
+            <a:srgbClr val="FF0000"/>
+          </a:solidFill>
+          <a:ln>
+            <a:noFill/>
+          </a:ln>
+        </p:spPr>
+        <p:style>
+          <a:lnRef idx="1">
+            <a:schemeClr val="accent1"/>
+          </a:lnRef>
+          <a:fillRef idx="3">
+            <a:schemeClr val="accent1"/>
+          </a:fillRef>
+          <a:effectRef idx="2">
+            <a:schemeClr val="accent1"/>
+          </a:effectRef>
+          <a:fontRef idx="minor">
+            <a:schemeClr val="lt1"/>
+          </a:fontRef>
+        </p:style>
+        <p:txBody>
+          <a:bodyPr rtlCol="0" anchor="ctr"/>
+          <a:lstStyle/>
+          <a:p>
+            <a:pPr algn="ctr"/>
+          </a:p>
+        </p:txBody>
+      </p:sp>
+      <p:sp>
+        <p:nvSpPr>
+          <p:cNvPr id="9" name="TextBox 8"/>
+          <p:cNvSpPr txBox="1"/>
+          <p:nvPr/>
+        </p:nvSpPr>
+        <p:spPr>
+          <a:xfrm>
+            <a:off x="3474720" y="164592"/>
+            <a:ext cx="8503920" cy="347472"/>
+          </a:xfrm>
+          <a:prstGeom prst="rect">
+            <a:avLst/>
+          </a:prstGeom>
+          <a:noFill/>
+        </p:spPr>
+        <p:txBody>
+          <a:bodyPr wrap="square">
+            <a:spAutoFit/>
+          </a:bodyPr>
+          <a:lstStyle/>
+          <a:p>
+            <a:pPr algn="l"/>
+            <a:r>
+              <a:rPr sz="900" b="1" i="0">
+                <a:solidFill>
+                  <a:srgbClr val="BBEEEE"/>
+                </a:solidFill>
+              </a:rPr>
+              <a:t>BOOK 1  ·  Synopsis &amp; Objectifs</a:t>
+            </a:r>
+          </a:p>
+        </p:txBody>
+      </p:sp>
+      <p:sp>
+        <p:nvSpPr>
+          <p:cNvPr id="10" name="TextBox 9"/>
+          <p:cNvSpPr txBox="1"/>
+          <p:nvPr/>
+        </p:nvSpPr>
+        <p:spPr>
+          <a:xfrm>
+            <a:off x="320040" y="960120"/>
+            <a:ext cx="11521440" cy="1143000"/>
           </a:xfrm>
           <a:prstGeom prst="rect">
             <a:avLst/>
@@ -3283,21 +3437,21 @@
                   <a:srgbClr val="FFFFFF"/>
                 </a:solidFill>
               </a:rPr>
-              <a:t>Synopsis &amp; Objectifs</a:t>
-            </a:r>
-          </a:p>
-        </p:txBody>
-      </p:sp>
-      <p:sp>
-        <p:nvSpPr>
-          <p:cNvPr id="7" name="TextBox 6"/>
+              <a:t>Votre Feuille de Route</a:t>
+            </a:r>
+          </a:p>
+        </p:txBody>
+      </p:sp>
+      <p:sp>
+        <p:nvSpPr>
+          <p:cNvPr id="11" name="TextBox 10"/>
           <p:cNvSpPr txBox="1"/>
           <p:nvPr/>
         </p:nvSpPr>
         <p:spPr>
           <a:xfrm>
-            <a:off x="457200" y="1828800"/>
-            <a:ext cx="11247120" cy="502920"/>
+            <a:off x="320040" y="1920240"/>
+            <a:ext cx="11521440" cy="347472"/>
           </a:xfrm>
           <a:prstGeom prst="rect">
             <a:avLst/>
@@ -3312,26 +3466,69 @@
           <a:p>
             <a:pPr algn="l"/>
             <a:r>
-              <a:rPr sz="1300" b="0" i="1">
+              <a:rPr sz="1200" b="0" i="1">
                 <a:solidFill>
-                  <a:srgbClr val="DDEEEE"/>
+                  <a:srgbClr val="CCEEEE"/>
                 </a:solidFill>
               </a:rPr>
-              <a:t>Cadrage stratégique de la formation FIM · Référentiel de compétences V6</a:t>
-            </a:r>
-          </a:p>
-        </p:txBody>
-      </p:sp>
-      <p:sp>
-        <p:nvSpPr>
-          <p:cNvPr id="8" name="TextBox 7"/>
-          <p:cNvSpPr txBox="1"/>
+              <a:t>Ce que vous saurez faire à la fin de cette formation</a:t>
+            </a:r>
+          </a:p>
+        </p:txBody>
+      </p:sp>
+      <p:sp>
+        <p:nvSpPr>
+          <p:cNvPr id="12" name="Rectangle 11"/>
+          <p:cNvSpPr/>
           <p:nvPr/>
         </p:nvSpPr>
         <p:spPr>
           <a:xfrm>
             <a:off x="0" y="6492240"/>
             <a:ext cx="12188952" cy="365760"/>
+          </a:xfrm>
+          <a:prstGeom prst="rect">
+            <a:avLst/>
+          </a:prstGeom>
+          <a:solidFill>
+            <a:srgbClr val="005555"/>
+          </a:solidFill>
+          <a:ln>
+            <a:noFill/>
+          </a:ln>
+        </p:spPr>
+        <p:style>
+          <a:lnRef idx="1">
+            <a:schemeClr val="accent1"/>
+          </a:lnRef>
+          <a:fillRef idx="3">
+            <a:schemeClr val="accent1"/>
+          </a:fillRef>
+          <a:effectRef idx="2">
+            <a:schemeClr val="accent1"/>
+          </a:effectRef>
+          <a:fontRef idx="minor">
+            <a:schemeClr val="lt1"/>
+          </a:fontRef>
+        </p:style>
+        <p:txBody>
+          <a:bodyPr rtlCol="0" anchor="ctr"/>
+          <a:lstStyle/>
+          <a:p>
+            <a:pPr algn="ctr"/>
+          </a:p>
+        </p:txBody>
+      </p:sp>
+      <p:sp>
+        <p:nvSpPr>
+          <p:cNvPr id="13" name="TextBox 12"/>
+          <p:cNvSpPr txBox="1"/>
+          <p:nvPr/>
+        </p:nvSpPr>
+        <p:spPr>
+          <a:xfrm>
+            <a:off x="0" y="6519672"/>
+            <a:ext cx="12188952" cy="274320"/>
           </a:xfrm>
           <a:prstGeom prst="rect">
             <a:avLst/>
@@ -3348,24 +3545,24 @@
             <a:r>
               <a:rPr sz="900" b="0" i="0">
                 <a:solidFill>
-                  <a:srgbClr val="888888"/>
+                  <a:srgbClr val="FFFFFF"/>
                 </a:solidFill>
               </a:rPr>
-              <a:t>SHY-Performance · V6-01062026SHY-TE · Référentiel UM6P/CMC 2025</a:t>
-            </a:r>
-          </a:p>
-        </p:txBody>
-      </p:sp>
-      <p:sp>
-        <p:nvSpPr>
-          <p:cNvPr id="9" name="TextBox 8"/>
+              <a:t>SHY-Performance  ·  Formation FIM  ·  V6-01062026SHY-TE</a:t>
+            </a:r>
+          </a:p>
+        </p:txBody>
+      </p:sp>
+      <p:sp>
+        <p:nvSpPr>
+          <p:cNvPr id="14" name="TextBox 13"/>
           <p:cNvSpPr txBox="1"/>
           <p:nvPr/>
         </p:nvSpPr>
         <p:spPr>
           <a:xfrm>
-            <a:off x="457200" y="2560320"/>
-            <a:ext cx="10972800" cy="731520"/>
+            <a:off x="457200" y="2514600"/>
+            <a:ext cx="11247120" cy="914400"/>
           </a:xfrm>
           <a:prstGeom prst="rect">
             <a:avLst/>
@@ -3385,8 +3582,8 @@
                   <a:srgbClr val="1A1A1A"/>
                 </a:solidFill>
               </a:rPr>
-              <a:t>Ce module définit la vision, les 7 compétences cibles (C1–C7)
-et les indicateurs de réussite du programme FIM.</a:t>
+              <a:t>À l'issue de ces 5 jours, vous serez capable de convaincre un donateur français
+de s'engager dans un don mensuel régulier au profit de l'UNICEF.</a:t>
             </a:r>
           </a:p>
         </p:txBody>
@@ -3461,13 +3658,13 @@
         <p:spPr>
           <a:xfrm>
             <a:off x="0" y="0"/>
-            <a:ext cx="12188952" cy="685800"/>
-          </a:xfrm>
-          <a:prstGeom prst="rect">
-            <a:avLst/>
-          </a:prstGeom>
-          <a:solidFill>
-            <a:srgbClr val="005050"/>
+            <a:ext cx="12188952" cy="658368"/>
+          </a:xfrm>
+          <a:prstGeom prst="rect">
+            <a:avLst/>
+          </a:prstGeom>
+          <a:solidFill>
+            <a:srgbClr val="005555"/>
           </a:solidFill>
           <a:ln>
             <a:noFill/>
@@ -3503,14 +3700,14 @@
         </p:nvSpPr>
         <p:spPr>
           <a:xfrm>
-            <a:off x="0" y="667512"/>
-            <a:ext cx="12188952" cy="36576"/>
-          </a:xfrm>
-          <a:prstGeom prst="rect">
-            <a:avLst/>
-          </a:prstGeom>
-          <a:solidFill>
-            <a:srgbClr val="C9A84C"/>
+            <a:off x="0" y="640080"/>
+            <a:ext cx="12188952" cy="54864"/>
+          </a:xfrm>
+          <a:prstGeom prst="rect">
+            <a:avLst/>
+          </a:prstGeom>
+          <a:solidFill>
+            <a:srgbClr val="FF0000"/>
           </a:solidFill>
           <a:ln>
             <a:noFill/>
@@ -3546,8 +3743,8 @@
         </p:nvSpPr>
         <p:spPr>
           <a:xfrm>
-            <a:off x="274320" y="73152"/>
-            <a:ext cx="11612880" cy="566928"/>
+            <a:off x="164592" y="64008"/>
+            <a:ext cx="685800" cy="530352"/>
           </a:xfrm>
           <a:prstGeom prst="rect">
             <a:avLst/>
@@ -3562,12 +3759,12 @@
           <a:p>
             <a:pPr algn="l"/>
             <a:r>
-              <a:rPr sz="1800" b="1" i="0">
+              <a:rPr sz="2000" b="1" i="0">
                 <a:solidFill>
                   <a:srgbClr val="FFFFFF"/>
                 </a:solidFill>
               </a:rPr>
-              <a:t>Référentiel de Compétences FIM V6 — C1 à C7</a:t>
+              <a:t>SHY</a:t>
             </a:r>
           </a:p>
         </p:txBody>
@@ -3580,14 +3777,14 @@
         </p:nvSpPr>
         <p:spPr>
           <a:xfrm>
-            <a:off x="274320" y="822960"/>
-            <a:ext cx="914400" cy="457200"/>
-          </a:xfrm>
-          <a:prstGeom prst="rect">
-            <a:avLst/>
-          </a:prstGeom>
-          <a:solidFill>
-            <a:srgbClr val="007A7A"/>
+            <a:off x="914400" y="91440"/>
+            <a:ext cx="36576" cy="475488"/>
+          </a:xfrm>
+          <a:prstGeom prst="rect">
+            <a:avLst/>
+          </a:prstGeom>
+          <a:solidFill>
+            <a:srgbClr val="FF0000"/>
           </a:solidFill>
           <a:ln>
             <a:noFill/>
@@ -3623,8 +3820,8 @@
         </p:nvSpPr>
         <p:spPr>
           <a:xfrm>
-            <a:off x="292608" y="896112"/>
-            <a:ext cx="877824" cy="347472"/>
+            <a:off x="1024128" y="91440"/>
+            <a:ext cx="10881360" cy="475488"/>
           </a:xfrm>
           <a:prstGeom prst="rect">
             <a:avLst/>
@@ -3637,14 +3834,14 @@
           </a:bodyPr>
           <a:lstStyle/>
           <a:p>
-            <a:pPr algn="ctr"/>
-            <a:r>
-              <a:rPr sz="1400" b="1" i="0">
+            <a:pPr algn="l"/>
+            <a:r>
+              <a:rPr sz="1700" b="1" i="0">
                 <a:solidFill>
-                  <a:srgbClr val="C9A84C"/>
+                  <a:srgbClr val="FFFFFF"/>
                 </a:solidFill>
               </a:rPr>
-              <a:t>C1</a:t>
+              <a:t>Les 7 Compétences que Vous Allez Développer</a:t>
             </a:r>
           </a:p>
         </p:txBody>
@@ -3657,19 +3854,17 @@
         </p:nvSpPr>
         <p:spPr>
           <a:xfrm>
-            <a:off x="1207008" y="822960"/>
-            <a:ext cx="5029200" cy="457200"/>
-          </a:xfrm>
-          <a:prstGeom prst="rect">
-            <a:avLst/>
-          </a:prstGeom>
-          <a:solidFill>
-            <a:srgbClr val="FFFFFF"/>
-          </a:solidFill>
-          <a:ln w="12700">
-            <a:solidFill>
-              <a:srgbClr val="007A7A"/>
-            </a:solidFill>
+            <a:off x="0" y="6492240"/>
+            <a:ext cx="12188952" cy="365760"/>
+          </a:xfrm>
+          <a:prstGeom prst="rect">
+            <a:avLst/>
+          </a:prstGeom>
+          <a:solidFill>
+            <a:srgbClr val="005555"/>
+          </a:solidFill>
+          <a:ln>
+            <a:noFill/>
           </a:ln>
         </p:spPr>
         <p:style>
@@ -3702,8 +3897,8 @@
         </p:nvSpPr>
         <p:spPr>
           <a:xfrm>
-            <a:off x="1280160" y="859536"/>
-            <a:ext cx="4846320" cy="384048"/>
+            <a:off x="0" y="6519672"/>
+            <a:ext cx="12188952" cy="274320"/>
           </a:xfrm>
           <a:prstGeom prst="rect">
             <a:avLst/>
@@ -3716,14 +3911,14 @@
           </a:bodyPr>
           <a:lstStyle/>
           <a:p>
-            <a:pPr algn="l"/>
-            <a:r>
-              <a:rPr sz="1100" b="1" i="0">
+            <a:pPr algn="ctr"/>
+            <a:r>
+              <a:rPr sz="900" b="0" i="0">
                 <a:solidFill>
-                  <a:srgbClr val="005050"/>
+                  <a:srgbClr val="FFFFFF"/>
                 </a:solidFill>
               </a:rPr>
-              <a:t>Accroche &amp; ouverture</a:t>
+              <a:t>SHY-Performance  ·  Formation FIM  ·  V6-01062026SHY-TE</a:t>
             </a:r>
           </a:p>
         </p:txBody>
@@ -3736,14 +3931,14 @@
         </p:nvSpPr>
         <p:spPr>
           <a:xfrm>
-            <a:off x="6254496" y="822960"/>
-            <a:ext cx="1280160" cy="457200"/>
-          </a:xfrm>
-          <a:prstGeom prst="rect">
-            <a:avLst/>
-          </a:prstGeom>
-          <a:solidFill>
-            <a:srgbClr val="C9A84C"/>
+            <a:off x="274320" y="804672"/>
+            <a:ext cx="822960" cy="493776"/>
+          </a:xfrm>
+          <a:prstGeom prst="rect">
+            <a:avLst/>
+          </a:prstGeom>
+          <a:solidFill>
+            <a:srgbClr val="005555"/>
           </a:solidFill>
           <a:ln>
             <a:noFill/>
@@ -3779,8 +3974,8 @@
         </p:nvSpPr>
         <p:spPr>
           <a:xfrm>
-            <a:off x="6272784" y="896112"/>
-            <a:ext cx="1243584" cy="347472"/>
+            <a:off x="292608" y="896112"/>
+            <a:ext cx="786384" cy="329184"/>
           </a:xfrm>
           <a:prstGeom prst="rect">
             <a:avLst/>
@@ -3795,12 +3990,12 @@
           <a:p>
             <a:pPr algn="ctr"/>
             <a:r>
-              <a:rPr sz="900" b="1" i="0">
+              <a:rPr sz="1400" b="1" i="0">
                 <a:solidFill>
-                  <a:srgbClr val="005050"/>
+                  <a:srgbClr val="FFFFFF"/>
                 </a:solidFill>
               </a:rPr>
-              <a:t>Bloom 3</a:t>
+              <a:t>C1</a:t>
             </a:r>
           </a:p>
         </p:txBody>
@@ -3813,8 +4008,8 @@
         </p:nvSpPr>
         <p:spPr>
           <a:xfrm>
-            <a:off x="7552944" y="822960"/>
-            <a:ext cx="4361688" cy="457200"/>
+            <a:off x="1115568" y="804672"/>
+            <a:ext cx="2926080" cy="493776"/>
           </a:xfrm>
           <a:prstGeom prst="rect">
             <a:avLst/>
@@ -3822,9 +4017,9 @@
           <a:solidFill>
             <a:srgbClr val="F0F7F7"/>
           </a:solidFill>
-          <a:ln w="12700">
+          <a:ln w="10160">
             <a:solidFill>
-              <a:srgbClr val="007A7A"/>
+              <a:srgbClr val="005555"/>
             </a:solidFill>
           </a:ln>
         </p:spPr>
@@ -3858,8 +4053,8 @@
         </p:nvSpPr>
         <p:spPr>
           <a:xfrm>
-            <a:off x="7626096" y="877824"/>
-            <a:ext cx="4206240" cy="384048"/>
+            <a:off x="1207008" y="896112"/>
+            <a:ext cx="2743200" cy="329184"/>
           </a:xfrm>
           <a:prstGeom prst="rect">
             <a:avLst/>
@@ -3874,12 +4069,12 @@
           <a:p>
             <a:pPr algn="l"/>
             <a:r>
-              <a:rPr sz="1000" b="0" i="1">
+              <a:rPr sz="1200" b="1" i="0">
                 <a:solidFill>
-                  <a:srgbClr val="1A1A1A"/>
+                  <a:srgbClr val="005555"/>
                 </a:solidFill>
               </a:rPr>
-              <a:t>Initier un contact naturel en &lt; 15 sec</a:t>
+              <a:t>Accroche</a:t>
             </a:r>
           </a:p>
         </p:txBody>
@@ -3892,17 +4087,19 @@
         </p:nvSpPr>
         <p:spPr>
           <a:xfrm>
-            <a:off x="274320" y="1307592"/>
-            <a:ext cx="914400" cy="457200"/>
-          </a:xfrm>
-          <a:prstGeom prst="rect">
-            <a:avLst/>
-          </a:prstGeom>
-          <a:solidFill>
-            <a:srgbClr val="005050"/>
-          </a:solidFill>
-          <a:ln>
-            <a:noFill/>
+            <a:off x="4059936" y="804672"/>
+            <a:ext cx="7854696" cy="493776"/>
+          </a:xfrm>
+          <a:prstGeom prst="rect">
+            <a:avLst/>
+          </a:prstGeom>
+          <a:solidFill>
+            <a:srgbClr val="FFFFFF"/>
+          </a:solidFill>
+          <a:ln w="6350">
+            <a:solidFill>
+              <a:srgbClr val="005555"/>
+            </a:solidFill>
           </a:ln>
         </p:spPr>
         <p:style>
@@ -3935,8 +4132,8 @@
         </p:nvSpPr>
         <p:spPr>
           <a:xfrm>
-            <a:off x="292608" y="1380744"/>
-            <a:ext cx="877824" cy="347472"/>
+            <a:off x="4169663" y="896112"/>
+            <a:ext cx="7644383" cy="329184"/>
           </a:xfrm>
           <a:prstGeom prst="rect">
             <a:avLst/>
@@ -3949,14 +4146,14 @@
           </a:bodyPr>
           <a:lstStyle/>
           <a:p>
-            <a:pPr algn="ctr"/>
-            <a:r>
-              <a:rPr sz="1400" b="1" i="0">
+            <a:pPr algn="l"/>
+            <a:r>
+              <a:rPr sz="1100" b="0" i="1">
                 <a:solidFill>
-                  <a:srgbClr val="C9A84C"/>
+                  <a:srgbClr val="1A1A1A"/>
                 </a:solidFill>
               </a:rPr>
-              <a:t>C2</a:t>
+              <a:t>Initier un contact naturel en moins de 15 secondes</a:t>
             </a:r>
           </a:p>
         </p:txBody>
@@ -3969,19 +4166,17 @@
         </p:nvSpPr>
         <p:spPr>
           <a:xfrm>
-            <a:off x="1207008" y="1307592"/>
-            <a:ext cx="5029200" cy="457200"/>
-          </a:xfrm>
-          <a:prstGeom prst="rect">
-            <a:avLst/>
-          </a:prstGeom>
-          <a:solidFill>
-            <a:srgbClr val="FFFFFF"/>
-          </a:solidFill>
-          <a:ln w="12700">
-            <a:solidFill>
-              <a:srgbClr val="005050"/>
-            </a:solidFill>
+            <a:off x="274320" y="1325880"/>
+            <a:ext cx="822960" cy="493776"/>
+          </a:xfrm>
+          <a:prstGeom prst="rect">
+            <a:avLst/>
+          </a:prstGeom>
+          <a:solidFill>
+            <a:srgbClr val="008080"/>
+          </a:solidFill>
+          <a:ln>
+            <a:noFill/>
           </a:ln>
         </p:spPr>
         <p:style>
@@ -4014,8 +4209,8 @@
         </p:nvSpPr>
         <p:spPr>
           <a:xfrm>
-            <a:off x="1280160" y="1344168"/>
-            <a:ext cx="4846320" cy="384048"/>
+            <a:off x="292608" y="1417320"/>
+            <a:ext cx="786384" cy="329184"/>
           </a:xfrm>
           <a:prstGeom prst="rect">
             <a:avLst/>
@@ -4028,14 +4223,14 @@
           </a:bodyPr>
           <a:lstStyle/>
           <a:p>
-            <a:pPr algn="l"/>
-            <a:r>
-              <a:rPr sz="1100" b="1" i="0">
+            <a:pPr algn="ctr"/>
+            <a:r>
+              <a:rPr sz="1400" b="1" i="0">
                 <a:solidFill>
-                  <a:srgbClr val="005050"/>
+                  <a:srgbClr val="FFFFFF"/>
                 </a:solidFill>
               </a:rPr>
-              <a:t>Storytelling impact</a:t>
+              <a:t>C2</a:t>
             </a:r>
           </a:p>
         </p:txBody>
@@ -4048,17 +4243,19 @@
         </p:nvSpPr>
         <p:spPr>
           <a:xfrm>
-            <a:off x="6254496" y="1307592"/>
-            <a:ext cx="1280160" cy="457200"/>
-          </a:xfrm>
-          <a:prstGeom prst="rect">
-            <a:avLst/>
-          </a:prstGeom>
-          <a:solidFill>
-            <a:srgbClr val="C9A84C"/>
-          </a:solidFill>
-          <a:ln>
-            <a:noFill/>
+            <a:off x="1115568" y="1325880"/>
+            <a:ext cx="2926080" cy="493776"/>
+          </a:xfrm>
+          <a:prstGeom prst="rect">
+            <a:avLst/>
+          </a:prstGeom>
+          <a:solidFill>
+            <a:srgbClr val="F0F7F7"/>
+          </a:solidFill>
+          <a:ln w="10160">
+            <a:solidFill>
+              <a:srgbClr val="008080"/>
+            </a:solidFill>
           </a:ln>
         </p:spPr>
         <p:style>
@@ -4091,8 +4288,8 @@
         </p:nvSpPr>
         <p:spPr>
           <a:xfrm>
-            <a:off x="6272784" y="1380744"/>
-            <a:ext cx="1243584" cy="347472"/>
+            <a:off x="1207008" y="1417320"/>
+            <a:ext cx="2743200" cy="329184"/>
           </a:xfrm>
           <a:prstGeom prst="rect">
             <a:avLst/>
@@ -4105,14 +4302,14 @@
           </a:bodyPr>
           <a:lstStyle/>
           <a:p>
-            <a:pPr algn="ctr"/>
-            <a:r>
-              <a:rPr sz="900" b="1" i="0">
+            <a:pPr algn="l"/>
+            <a:r>
+              <a:rPr sz="1200" b="1" i="0">
                 <a:solidFill>
-                  <a:srgbClr val="005050"/>
+                  <a:srgbClr val="008080"/>
                 </a:solidFill>
               </a:rPr>
-              <a:t>Bloom 3</a:t>
+              <a:t>Impact Story</a:t>
             </a:r>
           </a:p>
         </p:txBody>
@@ -4125,18 +4322,18 @@
         </p:nvSpPr>
         <p:spPr>
           <a:xfrm>
-            <a:off x="7552944" y="1307592"/>
-            <a:ext cx="4361688" cy="457200"/>
-          </a:xfrm>
-          <a:prstGeom prst="rect">
-            <a:avLst/>
-          </a:prstGeom>
-          <a:solidFill>
-            <a:srgbClr val="F0F7F7"/>
-          </a:solidFill>
-          <a:ln w="12700">
+            <a:off x="4059936" y="1325880"/>
+            <a:ext cx="7854696" cy="493776"/>
+          </a:xfrm>
+          <a:prstGeom prst="rect">
+            <a:avLst/>
+          </a:prstGeom>
+          <a:solidFill>
+            <a:srgbClr val="FFFFFF"/>
+          </a:solidFill>
+          <a:ln w="6350">
             <a:solidFill>
-              <a:srgbClr val="005050"/>
+              <a:srgbClr val="008080"/>
             </a:solidFill>
           </a:ln>
         </p:spPr>
@@ -4170,8 +4367,8 @@
         </p:nvSpPr>
         <p:spPr>
           <a:xfrm>
-            <a:off x="7626096" y="1362456"/>
-            <a:ext cx="4206240" cy="384048"/>
+            <a:off x="4169663" y="1417320"/>
+            <a:ext cx="7644383" cy="329184"/>
           </a:xfrm>
           <a:prstGeom prst="rect">
             <a:avLst/>
@@ -4186,12 +4383,12 @@
           <a:p>
             <a:pPr algn="l"/>
             <a:r>
-              <a:rPr sz="1000" b="0" i="1">
+              <a:rPr sz="1100" b="0" i="1">
                 <a:solidFill>
                   <a:srgbClr val="1A1A1A"/>
                 </a:solidFill>
               </a:rPr>
-              <a:t>Narrer une histoire bénéficiaire qui suscite l'émotion</a:t>
+              <a:t>Raconter une histoire vraie qui touche et convainc</a:t>
             </a:r>
           </a:p>
         </p:txBody>
@@ -4204,14 +4401,14 @@
         </p:nvSpPr>
         <p:spPr>
           <a:xfrm>
-            <a:off x="274320" y="1792224"/>
-            <a:ext cx="914400" cy="457200"/>
-          </a:xfrm>
-          <a:prstGeom prst="rect">
-            <a:avLst/>
-          </a:prstGeom>
-          <a:solidFill>
-            <a:srgbClr val="007A7A"/>
+            <a:off x="274320" y="1847088"/>
+            <a:ext cx="822960" cy="493776"/>
+          </a:xfrm>
+          <a:prstGeom prst="rect">
+            <a:avLst/>
+          </a:prstGeom>
+          <a:solidFill>
+            <a:srgbClr val="005555"/>
           </a:solidFill>
           <a:ln>
             <a:noFill/>
@@ -4247,8 +4444,8 @@
         </p:nvSpPr>
         <p:spPr>
           <a:xfrm>
-            <a:off x="292608" y="1865376"/>
-            <a:ext cx="877824" cy="347472"/>
+            <a:off x="292608" y="1938528"/>
+            <a:ext cx="786384" cy="329184"/>
           </a:xfrm>
           <a:prstGeom prst="rect">
             <a:avLst/>
@@ -4265,7 +4462,7 @@
             <a:r>
               <a:rPr sz="1400" b="1" i="0">
                 <a:solidFill>
-                  <a:srgbClr val="C9A84C"/>
+                  <a:srgbClr val="FFFFFF"/>
                 </a:solidFill>
               </a:rPr>
               <a:t>C3</a:t>
@@ -4281,18 +4478,18 @@
         </p:nvSpPr>
         <p:spPr>
           <a:xfrm>
-            <a:off x="1207008" y="1792224"/>
-            <a:ext cx="5029200" cy="457200"/>
-          </a:xfrm>
-          <a:prstGeom prst="rect">
-            <a:avLst/>
-          </a:prstGeom>
-          <a:solidFill>
-            <a:srgbClr val="FFFFFF"/>
-          </a:solidFill>
-          <a:ln w="12700">
+            <a:off x="1115568" y="1847088"/>
+            <a:ext cx="2926080" cy="493776"/>
+          </a:xfrm>
+          <a:prstGeom prst="rect">
+            <a:avLst/>
+          </a:prstGeom>
+          <a:solidFill>
+            <a:srgbClr val="F0F7F7"/>
+          </a:solidFill>
+          <a:ln w="10160">
             <a:solidFill>
-              <a:srgbClr val="007A7A"/>
+              <a:srgbClr val="005555"/>
             </a:solidFill>
           </a:ln>
         </p:spPr>
@@ -4326,8 +4523,8 @@
         </p:nvSpPr>
         <p:spPr>
           <a:xfrm>
-            <a:off x="1280160" y="1828800"/>
-            <a:ext cx="4846320" cy="384048"/>
+            <a:off x="1207008" y="1938528"/>
+            <a:ext cx="2743200" cy="329184"/>
           </a:xfrm>
           <a:prstGeom prst="rect">
             <a:avLst/>
@@ -4342,12 +4539,12 @@
           <a:p>
             <a:pPr algn="l"/>
             <a:r>
-              <a:rPr sz="1100" b="1" i="0">
+              <a:rPr sz="1200" b="1" i="0">
                 <a:solidFill>
-                  <a:srgbClr val="005050"/>
+                  <a:srgbClr val="005555"/>
                 </a:solidFill>
               </a:rPr>
-              <a:t>Écoute active &amp; empathie</a:t>
+              <a:t>Écoute active</a:t>
             </a:r>
           </a:p>
         </p:txBody>
@@ -4360,17 +4557,19 @@
         </p:nvSpPr>
         <p:spPr>
           <a:xfrm>
-            <a:off x="6254496" y="1792224"/>
-            <a:ext cx="1280160" cy="457200"/>
-          </a:xfrm>
-          <a:prstGeom prst="rect">
-            <a:avLst/>
-          </a:prstGeom>
-          <a:solidFill>
-            <a:srgbClr val="C9A84C"/>
-          </a:solidFill>
-          <a:ln>
-            <a:noFill/>
+            <a:off x="4059936" y="1847088"/>
+            <a:ext cx="7854696" cy="493776"/>
+          </a:xfrm>
+          <a:prstGeom prst="rect">
+            <a:avLst/>
+          </a:prstGeom>
+          <a:solidFill>
+            <a:srgbClr val="FFFFFF"/>
+          </a:solidFill>
+          <a:ln w="6350">
+            <a:solidFill>
+              <a:srgbClr val="005555"/>
+            </a:solidFill>
           </a:ln>
         </p:spPr>
         <p:style>
@@ -4403,8 +4602,8 @@
         </p:nvSpPr>
         <p:spPr>
           <a:xfrm>
-            <a:off x="6272784" y="1865376"/>
-            <a:ext cx="1243584" cy="347472"/>
+            <a:off x="4169663" y="1938528"/>
+            <a:ext cx="7644383" cy="329184"/>
           </a:xfrm>
           <a:prstGeom prst="rect">
             <a:avLst/>
@@ -4417,14 +4616,14 @@
           </a:bodyPr>
           <a:lstStyle/>
           <a:p>
-            <a:pPr algn="ctr"/>
-            <a:r>
-              <a:rPr sz="900" b="1" i="0">
+            <a:pPr algn="l"/>
+            <a:r>
+              <a:rPr sz="1100" b="0" i="1">
                 <a:solidFill>
-                  <a:srgbClr val="005050"/>
+                  <a:srgbClr val="1A1A1A"/>
                 </a:solidFill>
               </a:rPr>
-              <a:t>Bloom 4</a:t>
+              <a:t>Lire les signaux du donateur et ajuster votre discours</a:t>
             </a:r>
           </a:p>
         </p:txBody>
@@ -4437,19 +4636,17 @@
         </p:nvSpPr>
         <p:spPr>
           <a:xfrm>
-            <a:off x="7552944" y="1792224"/>
-            <a:ext cx="4361688" cy="457200"/>
-          </a:xfrm>
-          <a:prstGeom prst="rect">
-            <a:avLst/>
-          </a:prstGeom>
-          <a:solidFill>
-            <a:srgbClr val="F0F7F7"/>
-          </a:solidFill>
-          <a:ln w="12700">
-            <a:solidFill>
-              <a:srgbClr val="007A7A"/>
-            </a:solidFill>
+            <a:off x="274320" y="2368296"/>
+            <a:ext cx="822960" cy="493776"/>
+          </a:xfrm>
+          <a:prstGeom prst="rect">
+            <a:avLst/>
+          </a:prstGeom>
+          <a:solidFill>
+            <a:srgbClr val="008080"/>
+          </a:solidFill>
+          <a:ln>
+            <a:noFill/>
           </a:ln>
         </p:spPr>
         <p:style>
@@ -4482,8 +4679,8 @@
         </p:nvSpPr>
         <p:spPr>
           <a:xfrm>
-            <a:off x="7626096" y="1847088"/>
-            <a:ext cx="4206240" cy="384048"/>
+            <a:off x="292608" y="2459736"/>
+            <a:ext cx="786384" cy="329184"/>
           </a:xfrm>
           <a:prstGeom prst="rect">
             <a:avLst/>
@@ -4496,14 +4693,14 @@
           </a:bodyPr>
           <a:lstStyle/>
           <a:p>
-            <a:pPr algn="l"/>
-            <a:r>
-              <a:rPr sz="1000" b="0" i="1">
+            <a:pPr algn="ctr"/>
+            <a:r>
+              <a:rPr sz="1400" b="1" i="0">
                 <a:solidFill>
-                  <a:srgbClr val="1A1A1A"/>
+                  <a:srgbClr val="FFFFFF"/>
                 </a:solidFill>
               </a:rPr>
-              <a:t>Analyser les signaux verbaux et non-verbaux</a:t>
+              <a:t>C4</a:t>
             </a:r>
           </a:p>
         </p:txBody>
@@ -4516,17 +4713,19 @@
         </p:nvSpPr>
         <p:spPr>
           <a:xfrm>
-            <a:off x="274320" y="2276856"/>
-            <a:ext cx="914400" cy="457200"/>
-          </a:xfrm>
-          <a:prstGeom prst="rect">
-            <a:avLst/>
-          </a:prstGeom>
-          <a:solidFill>
-            <a:srgbClr val="005050"/>
-          </a:solidFill>
-          <a:ln>
-            <a:noFill/>
+            <a:off x="1115568" y="2368296"/>
+            <a:ext cx="2926080" cy="493776"/>
+          </a:xfrm>
+          <a:prstGeom prst="rect">
+            <a:avLst/>
+          </a:prstGeom>
+          <a:solidFill>
+            <a:srgbClr val="F0F7F7"/>
+          </a:solidFill>
+          <a:ln w="10160">
+            <a:solidFill>
+              <a:srgbClr val="008080"/>
+            </a:solidFill>
           </a:ln>
         </p:spPr>
         <p:style>
@@ -4559,8 +4758,8 @@
         </p:nvSpPr>
         <p:spPr>
           <a:xfrm>
-            <a:off x="292608" y="2350008"/>
-            <a:ext cx="877824" cy="347472"/>
+            <a:off x="1207008" y="2459736"/>
+            <a:ext cx="2743200" cy="329184"/>
           </a:xfrm>
           <a:prstGeom prst="rect">
             <a:avLst/>
@@ -4573,14 +4772,14 @@
           </a:bodyPr>
           <a:lstStyle/>
           <a:p>
-            <a:pPr algn="ctr"/>
-            <a:r>
-              <a:rPr sz="1400" b="1" i="0">
+            <a:pPr algn="l"/>
+            <a:r>
+              <a:rPr sz="1200" b="1" i="0">
                 <a:solidFill>
-                  <a:srgbClr val="C9A84C"/>
+                  <a:srgbClr val="008080"/>
                 </a:solidFill>
               </a:rPr>
-              <a:t>C4</a:t>
+              <a:t>Objections</a:t>
             </a:r>
           </a:p>
         </p:txBody>
@@ -4593,8 +4792,8 @@
         </p:nvSpPr>
         <p:spPr>
           <a:xfrm>
-            <a:off x="1207008" y="2276856"/>
-            <a:ext cx="5029200" cy="457200"/>
+            <a:off x="4059936" y="2368296"/>
+            <a:ext cx="7854696" cy="493776"/>
           </a:xfrm>
           <a:prstGeom prst="rect">
             <a:avLst/>
@@ -4602,9 +4801,9 @@
           <a:solidFill>
             <a:srgbClr val="FFFFFF"/>
           </a:solidFill>
-          <a:ln w="12700">
+          <a:ln w="6350">
             <a:solidFill>
-              <a:srgbClr val="005050"/>
+              <a:srgbClr val="008080"/>
             </a:solidFill>
           </a:ln>
         </p:spPr>
@@ -4638,8 +4837,8 @@
         </p:nvSpPr>
         <p:spPr>
           <a:xfrm>
-            <a:off x="1280160" y="2313432"/>
-            <a:ext cx="4846320" cy="384048"/>
+            <a:off x="4169663" y="2459736"/>
+            <a:ext cx="7644383" cy="329184"/>
           </a:xfrm>
           <a:prstGeom prst="rect">
             <a:avLst/>
@@ -4654,12 +4853,12 @@
           <a:p>
             <a:pPr algn="l"/>
             <a:r>
-              <a:rPr sz="1100" b="1" i="0">
+              <a:rPr sz="1100" b="0" i="1">
                 <a:solidFill>
-                  <a:srgbClr val="005050"/>
+                  <a:srgbClr val="1A1A1A"/>
                 </a:solidFill>
               </a:rPr>
-              <a:t>Traitement des objections</a:t>
+              <a:t>Transformer un refus en opportunité d'engagement</a:t>
             </a:r>
           </a:p>
         </p:txBody>
@@ -4672,14 +4871,14 @@
         </p:nvSpPr>
         <p:spPr>
           <a:xfrm>
-            <a:off x="6254496" y="2276856"/>
-            <a:ext cx="1280160" cy="457200"/>
-          </a:xfrm>
-          <a:prstGeom prst="rect">
-            <a:avLst/>
-          </a:prstGeom>
-          <a:solidFill>
-            <a:srgbClr val="C9A84C"/>
+            <a:off x="274320" y="2889503"/>
+            <a:ext cx="822960" cy="493776"/>
+          </a:xfrm>
+          <a:prstGeom prst="rect">
+            <a:avLst/>
+          </a:prstGeom>
+          <a:solidFill>
+            <a:srgbClr val="005555"/>
           </a:solidFill>
           <a:ln>
             <a:noFill/>
@@ -4715,8 +4914,8 @@
         </p:nvSpPr>
         <p:spPr>
           <a:xfrm>
-            <a:off x="6272784" y="2350008"/>
-            <a:ext cx="1243584" cy="347472"/>
+            <a:off x="292608" y="2980944"/>
+            <a:ext cx="786384" cy="329184"/>
           </a:xfrm>
           <a:prstGeom prst="rect">
             <a:avLst/>
@@ -4731,12 +4930,12 @@
           <a:p>
             <a:pPr algn="ctr"/>
             <a:r>
-              <a:rPr sz="900" b="1" i="0">
+              <a:rPr sz="1400" b="1" i="0">
                 <a:solidFill>
-                  <a:srgbClr val="005050"/>
+                  <a:srgbClr val="FFFFFF"/>
                 </a:solidFill>
               </a:rPr>
-              <a:t>Bloom 3</a:t>
+              <a:t>C5</a:t>
             </a:r>
           </a:p>
         </p:txBody>
@@ -4749,8 +4948,8 @@
         </p:nvSpPr>
         <p:spPr>
           <a:xfrm>
-            <a:off x="7552944" y="2276856"/>
-            <a:ext cx="4361688" cy="457200"/>
+            <a:off x="1115568" y="2889503"/>
+            <a:ext cx="2926080" cy="493776"/>
           </a:xfrm>
           <a:prstGeom prst="rect">
             <a:avLst/>
@@ -4758,9 +4957,9 @@
           <a:solidFill>
             <a:srgbClr val="F0F7F7"/>
           </a:solidFill>
-          <a:ln w="12700">
+          <a:ln w="10160">
             <a:solidFill>
-              <a:srgbClr val="005050"/>
+              <a:srgbClr val="005555"/>
             </a:solidFill>
           </a:ln>
         </p:spPr>
@@ -4794,8 +4993,8 @@
         </p:nvSpPr>
         <p:spPr>
           <a:xfrm>
-            <a:off x="7626096" y="2331720"/>
-            <a:ext cx="4206240" cy="384048"/>
+            <a:off x="1207008" y="2980944"/>
+            <a:ext cx="2743200" cy="329184"/>
           </a:xfrm>
           <a:prstGeom prst="rect">
             <a:avLst/>
@@ -4810,12 +5009,12 @@
           <a:p>
             <a:pPr algn="l"/>
             <a:r>
-              <a:rPr sz="1000" b="0" i="1">
+              <a:rPr sz="1200" b="1" i="0">
                 <a:solidFill>
-                  <a:srgbClr val="1A1A1A"/>
+                  <a:srgbClr val="005555"/>
                 </a:solidFill>
               </a:rPr>
-              <a:t>Appliquer CROC face aux 12 objections types</a:t>
+              <a:t>Engagement</a:t>
             </a:r>
           </a:p>
         </p:txBody>
@@ -4828,17 +5027,19 @@
         </p:nvSpPr>
         <p:spPr>
           <a:xfrm>
-            <a:off x="274320" y="2761488"/>
-            <a:ext cx="914400" cy="457200"/>
-          </a:xfrm>
-          <a:prstGeom prst="rect">
-            <a:avLst/>
-          </a:prstGeom>
-          <a:solidFill>
-            <a:srgbClr val="007A7A"/>
-          </a:solidFill>
-          <a:ln>
-            <a:noFill/>
+            <a:off x="4059936" y="2889503"/>
+            <a:ext cx="7854696" cy="493776"/>
+          </a:xfrm>
+          <a:prstGeom prst="rect">
+            <a:avLst/>
+          </a:prstGeom>
+          <a:solidFill>
+            <a:srgbClr val="FFFFFF"/>
+          </a:solidFill>
+          <a:ln w="6350">
+            <a:solidFill>
+              <a:srgbClr val="005555"/>
+            </a:solidFill>
           </a:ln>
         </p:spPr>
         <p:style>
@@ -4871,8 +5072,8 @@
         </p:nvSpPr>
         <p:spPr>
           <a:xfrm>
-            <a:off x="292608" y="2834640"/>
-            <a:ext cx="877824" cy="347472"/>
+            <a:off x="4169663" y="2980944"/>
+            <a:ext cx="7644383" cy="329184"/>
           </a:xfrm>
           <a:prstGeom prst="rect">
             <a:avLst/>
@@ -4885,14 +5086,14 @@
           </a:bodyPr>
           <a:lstStyle/>
           <a:p>
-            <a:pPr algn="ctr"/>
-            <a:r>
-              <a:rPr sz="1400" b="1" i="0">
+            <a:pPr algn="l"/>
+            <a:r>
+              <a:rPr sz="1100" b="0" i="1">
                 <a:solidFill>
-                  <a:srgbClr val="C9A84C"/>
+                  <a:srgbClr val="1A1A1A"/>
                 </a:solidFill>
               </a:rPr>
-              <a:t>C5</a:t>
+              <a:t>Conclure un don régulier mensuel avec confiance</a:t>
             </a:r>
           </a:p>
         </p:txBody>
@@ -4905,19 +5106,17 @@
         </p:nvSpPr>
         <p:spPr>
           <a:xfrm>
-            <a:off x="1207008" y="2761488"/>
-            <a:ext cx="5029200" cy="457200"/>
-          </a:xfrm>
-          <a:prstGeom prst="rect">
-            <a:avLst/>
-          </a:prstGeom>
-          <a:solidFill>
-            <a:srgbClr val="FFFFFF"/>
-          </a:solidFill>
-          <a:ln w="12700">
-            <a:solidFill>
-              <a:srgbClr val="007A7A"/>
-            </a:solidFill>
+            <a:off x="274320" y="3410711"/>
+            <a:ext cx="822960" cy="493776"/>
+          </a:xfrm>
+          <a:prstGeom prst="rect">
+            <a:avLst/>
+          </a:prstGeom>
+          <a:solidFill>
+            <a:srgbClr val="008080"/>
+          </a:solidFill>
+          <a:ln>
+            <a:noFill/>
           </a:ln>
         </p:spPr>
         <p:style>
@@ -4950,8 +5149,8 @@
         </p:nvSpPr>
         <p:spPr>
           <a:xfrm>
-            <a:off x="1280160" y="2798064"/>
-            <a:ext cx="4846320" cy="384048"/>
+            <a:off x="292608" y="3502151"/>
+            <a:ext cx="786384" cy="329184"/>
           </a:xfrm>
           <a:prstGeom prst="rect">
             <a:avLst/>
@@ -4964,14 +5163,14 @@
           </a:bodyPr>
           <a:lstStyle/>
           <a:p>
-            <a:pPr algn="l"/>
-            <a:r>
-              <a:rPr sz="1100" b="1" i="0">
+            <a:pPr algn="ctr"/>
+            <a:r>
+              <a:rPr sz="1400" b="1" i="0">
                 <a:solidFill>
-                  <a:srgbClr val="005050"/>
+                  <a:srgbClr val="FFFFFF"/>
                 </a:solidFill>
               </a:rPr>
-              <a:t>Engagement au don régulier</a:t>
+              <a:t>C6</a:t>
             </a:r>
           </a:p>
         </p:txBody>
@@ -4984,17 +5183,19 @@
         </p:nvSpPr>
         <p:spPr>
           <a:xfrm>
-            <a:off x="6254496" y="2761488"/>
-            <a:ext cx="1280160" cy="457200"/>
-          </a:xfrm>
-          <a:prstGeom prst="rect">
-            <a:avLst/>
-          </a:prstGeom>
-          <a:solidFill>
-            <a:srgbClr val="C9A84C"/>
-          </a:solidFill>
-          <a:ln>
-            <a:noFill/>
+            <a:off x="1115568" y="3410711"/>
+            <a:ext cx="2926080" cy="493776"/>
+          </a:xfrm>
+          <a:prstGeom prst="rect">
+            <a:avLst/>
+          </a:prstGeom>
+          <a:solidFill>
+            <a:srgbClr val="F0F7F7"/>
+          </a:solidFill>
+          <a:ln w="10160">
+            <a:solidFill>
+              <a:srgbClr val="008080"/>
+            </a:solidFill>
           </a:ln>
         </p:spPr>
         <p:style>
@@ -5027,8 +5228,8 @@
         </p:nvSpPr>
         <p:spPr>
           <a:xfrm>
-            <a:off x="6272784" y="2834640"/>
-            <a:ext cx="1243584" cy="347472"/>
+            <a:off x="1207008" y="3502151"/>
+            <a:ext cx="2743200" cy="329184"/>
           </a:xfrm>
           <a:prstGeom prst="rect">
             <a:avLst/>
@@ -5041,14 +5242,14 @@
           </a:bodyPr>
           <a:lstStyle/>
           <a:p>
-            <a:pPr algn="ctr"/>
-            <a:r>
-              <a:rPr sz="900" b="1" i="0">
+            <a:pPr algn="l"/>
+            <a:r>
+              <a:rPr sz="1200" b="1" i="0">
                 <a:solidFill>
-                  <a:srgbClr val="005050"/>
+                  <a:srgbClr val="008080"/>
                 </a:solidFill>
               </a:rPr>
-              <a:t>Bloom 3</a:t>
+              <a:t>Résilience</a:t>
             </a:r>
           </a:p>
         </p:txBody>
@@ -5061,18 +5262,18 @@
         </p:nvSpPr>
         <p:spPr>
           <a:xfrm>
-            <a:off x="7552944" y="2761488"/>
-            <a:ext cx="4361688" cy="457200"/>
-          </a:xfrm>
-          <a:prstGeom prst="rect">
-            <a:avLst/>
-          </a:prstGeom>
-          <a:solidFill>
-            <a:srgbClr val="F0F7F7"/>
-          </a:solidFill>
-          <a:ln w="12700">
+            <a:off x="4059936" y="3410711"/>
+            <a:ext cx="7854696" cy="493776"/>
+          </a:xfrm>
+          <a:prstGeom prst="rect">
+            <a:avLst/>
+          </a:prstGeom>
+          <a:solidFill>
+            <a:srgbClr val="FFFFFF"/>
+          </a:solidFill>
+          <a:ln w="6350">
             <a:solidFill>
-              <a:srgbClr val="007A7A"/>
+              <a:srgbClr val="008080"/>
             </a:solidFill>
           </a:ln>
         </p:spPr>
@@ -5106,8 +5307,8 @@
         </p:nvSpPr>
         <p:spPr>
           <a:xfrm>
-            <a:off x="7626096" y="2816352"/>
-            <a:ext cx="4206240" cy="384048"/>
+            <a:off x="4169663" y="3502151"/>
+            <a:ext cx="7644383" cy="329184"/>
           </a:xfrm>
           <a:prstGeom prst="rect">
             <a:avLst/>
@@ -5122,12 +5323,12 @@
           <a:p>
             <a:pPr algn="l"/>
             <a:r>
-              <a:rPr sz="1000" b="0" i="1">
+              <a:rPr sz="1100" b="0" i="1">
                 <a:solidFill>
                   <a:srgbClr val="1A1A1A"/>
                 </a:solidFill>
               </a:rPr>
-              <a:t>Conclure un engagement de prélèvement mensuel</a:t>
+              <a:t>Rester positif et efficace après dix refus consécutifs</a:t>
             </a:r>
           </a:p>
         </p:txBody>
@@ -5140,14 +5341,14 @@
         </p:nvSpPr>
         <p:spPr>
           <a:xfrm>
-            <a:off x="274320" y="3246120"/>
-            <a:ext cx="914400" cy="457200"/>
-          </a:xfrm>
-          <a:prstGeom prst="rect">
-            <a:avLst/>
-          </a:prstGeom>
-          <a:solidFill>
-            <a:srgbClr val="005050"/>
+            <a:off x="274320" y="3931920"/>
+            <a:ext cx="822960" cy="493776"/>
+          </a:xfrm>
+          <a:prstGeom prst="rect">
+            <a:avLst/>
+          </a:prstGeom>
+          <a:solidFill>
+            <a:srgbClr val="005555"/>
           </a:solidFill>
           <a:ln>
             <a:noFill/>
@@ -5183,8 +5384,8 @@
         </p:nvSpPr>
         <p:spPr>
           <a:xfrm>
-            <a:off x="292608" y="3319272"/>
-            <a:ext cx="877824" cy="347472"/>
+            <a:off x="292608" y="4023359"/>
+            <a:ext cx="786384" cy="329184"/>
           </a:xfrm>
           <a:prstGeom prst="rect">
             <a:avLst/>
@@ -5201,10 +5402,10 @@
             <a:r>
               <a:rPr sz="1400" b="1" i="0">
                 <a:solidFill>
-                  <a:srgbClr val="C9A84C"/>
+                  <a:srgbClr val="FFFFFF"/>
                 </a:solidFill>
               </a:rPr>
-              <a:t>C6</a:t>
+              <a:t>C7</a:t>
             </a:r>
           </a:p>
         </p:txBody>
@@ -5217,18 +5418,18 @@
         </p:nvSpPr>
         <p:spPr>
           <a:xfrm>
-            <a:off x="1207008" y="3246120"/>
-            <a:ext cx="5029200" cy="457200"/>
-          </a:xfrm>
-          <a:prstGeom prst="rect">
-            <a:avLst/>
-          </a:prstGeom>
-          <a:solidFill>
-            <a:srgbClr val="FFFFFF"/>
-          </a:solidFill>
-          <a:ln w="12700">
+            <a:off x="1115568" y="3931920"/>
+            <a:ext cx="2926080" cy="493776"/>
+          </a:xfrm>
+          <a:prstGeom prst="rect">
+            <a:avLst/>
+          </a:prstGeom>
+          <a:solidFill>
+            <a:srgbClr val="F0F7F7"/>
+          </a:solidFill>
+          <a:ln w="10160">
             <a:solidFill>
-              <a:srgbClr val="005050"/>
+              <a:srgbClr val="005555"/>
             </a:solidFill>
           </a:ln>
         </p:spPr>
@@ -5262,8 +5463,8 @@
         </p:nvSpPr>
         <p:spPr>
           <a:xfrm>
-            <a:off x="1280160" y="3282696"/>
-            <a:ext cx="4846320" cy="384048"/>
+            <a:off x="1207008" y="4023359"/>
+            <a:ext cx="2743200" cy="329184"/>
           </a:xfrm>
           <a:prstGeom prst="rect">
             <a:avLst/>
@@ -5278,12 +5479,12 @@
           <a:p>
             <a:pPr algn="l"/>
             <a:r>
-              <a:rPr sz="1100" b="1" i="0">
+              <a:rPr sz="1200" b="1" i="0">
                 <a:solidFill>
-                  <a:srgbClr val="005050"/>
+                  <a:srgbClr val="005555"/>
                 </a:solidFill>
               </a:rPr>
-              <a:t>Gestion émotionnelle</a:t>
+              <a:t>Éthique</a:t>
             </a:r>
           </a:p>
         </p:txBody>
@@ -5296,17 +5497,19 @@
         </p:nvSpPr>
         <p:spPr>
           <a:xfrm>
-            <a:off x="6254496" y="3246120"/>
-            <a:ext cx="1280160" cy="457200"/>
-          </a:xfrm>
-          <a:prstGeom prst="rect">
-            <a:avLst/>
-          </a:prstGeom>
-          <a:solidFill>
-            <a:srgbClr val="C9A84C"/>
-          </a:solidFill>
-          <a:ln>
-            <a:noFill/>
+            <a:off x="4059936" y="3931920"/>
+            <a:ext cx="7854696" cy="493776"/>
+          </a:xfrm>
+          <a:prstGeom prst="rect">
+            <a:avLst/>
+          </a:prstGeom>
+          <a:solidFill>
+            <a:srgbClr val="FFFFFF"/>
+          </a:solidFill>
+          <a:ln w="6350">
+            <a:solidFill>
+              <a:srgbClr val="005555"/>
+            </a:solidFill>
           </a:ln>
         </p:spPr>
         <p:style>
@@ -5339,8 +5542,8 @@
         </p:nvSpPr>
         <p:spPr>
           <a:xfrm>
-            <a:off x="6272784" y="3319272"/>
-            <a:ext cx="1243584" cy="347472"/>
+            <a:off x="4169663" y="4023359"/>
+            <a:ext cx="7644383" cy="329184"/>
           </a:xfrm>
           <a:prstGeom prst="rect">
             <a:avLst/>
@@ -5353,14 +5556,14 @@
           </a:bodyPr>
           <a:lstStyle/>
           <a:p>
-            <a:pPr algn="ctr"/>
-            <a:r>
-              <a:rPr sz="900" b="1" i="0">
+            <a:pPr algn="l"/>
+            <a:r>
+              <a:rPr sz="1100" b="0" i="1">
                 <a:solidFill>
-                  <a:srgbClr val="005050"/>
+                  <a:srgbClr val="1A1A1A"/>
                 </a:solidFill>
               </a:rPr>
-              <a:t>Bloom 4</a:t>
+              <a:t>Respecter les règles déontologiques en toute situation</a:t>
             </a:r>
           </a:p>
         </p:txBody>
@@ -5373,19 +5576,17 @@
         </p:nvSpPr>
         <p:spPr>
           <a:xfrm>
-            <a:off x="7552944" y="3246120"/>
-            <a:ext cx="4361688" cy="457200"/>
-          </a:xfrm>
-          <a:prstGeom prst="rect">
-            <a:avLst/>
-          </a:prstGeom>
-          <a:solidFill>
-            <a:srgbClr val="F0F7F7"/>
-          </a:solidFill>
-          <a:ln w="12700">
-            <a:solidFill>
-              <a:srgbClr val="005050"/>
-            </a:solidFill>
+            <a:off x="274320" y="4572000"/>
+            <a:ext cx="11640312" cy="347472"/>
+          </a:xfrm>
+          <a:prstGeom prst="rect">
+            <a:avLst/>
+          </a:prstGeom>
+          <a:solidFill>
+            <a:srgbClr val="FF0000"/>
+          </a:solidFill>
+          <a:ln>
+            <a:noFill/>
           </a:ln>
         </p:spPr>
         <p:style>
@@ -5418,8 +5619,8 @@
         </p:nvSpPr>
         <p:spPr>
           <a:xfrm>
-            <a:off x="7626096" y="3300984"/>
-            <a:ext cx="4206240" cy="384048"/>
+            <a:off x="411479" y="4645152"/>
+            <a:ext cx="11365992" cy="201168"/>
           </a:xfrm>
           <a:prstGeom prst="rect">
             <a:avLst/>
@@ -5434,358 +5635,12 @@
           <a:p>
             <a:pPr algn="l"/>
             <a:r>
-              <a:rPr sz="1000" b="0" i="1">
+              <a:rPr sz="1000" b="0" i="0">
                 <a:solidFill>
-                  <a:srgbClr val="1A1A1A"/>
+                  <a:srgbClr val="FFFFFF"/>
                 </a:solidFill>
               </a:rPr>
-              <a:t>Analyser et réguler sa propre réaction au refus</a:t>
-            </a:r>
-          </a:p>
-        </p:txBody>
-      </p:sp>
-      <p:sp>
-        <p:nvSpPr>
-          <p:cNvPr id="54" name="Rectangle 53"/>
-          <p:cNvSpPr/>
-          <p:nvPr/>
-        </p:nvSpPr>
-        <p:spPr>
-          <a:xfrm>
-            <a:off x="274320" y="3730752"/>
-            <a:ext cx="914400" cy="457200"/>
-          </a:xfrm>
-          <a:prstGeom prst="rect">
-            <a:avLst/>
-          </a:prstGeom>
-          <a:solidFill>
-            <a:srgbClr val="007A7A"/>
-          </a:solidFill>
-          <a:ln>
-            <a:noFill/>
-          </a:ln>
-        </p:spPr>
-        <p:style>
-          <a:lnRef idx="1">
-            <a:schemeClr val="accent1"/>
-          </a:lnRef>
-          <a:fillRef idx="3">
-            <a:schemeClr val="accent1"/>
-          </a:fillRef>
-          <a:effectRef idx="2">
-            <a:schemeClr val="accent1"/>
-          </a:effectRef>
-          <a:fontRef idx="minor">
-            <a:schemeClr val="lt1"/>
-          </a:fontRef>
-        </p:style>
-        <p:txBody>
-          <a:bodyPr rtlCol="0" anchor="ctr"/>
-          <a:lstStyle/>
-          <a:p>
-            <a:pPr algn="ctr"/>
-          </a:p>
-        </p:txBody>
-      </p:sp>
-      <p:sp>
-        <p:nvSpPr>
-          <p:cNvPr id="55" name="TextBox 54"/>
-          <p:cNvSpPr txBox="1"/>
-          <p:nvPr/>
-        </p:nvSpPr>
-        <p:spPr>
-          <a:xfrm>
-            <a:off x="292608" y="3803904"/>
-            <a:ext cx="877824" cy="347472"/>
-          </a:xfrm>
-          <a:prstGeom prst="rect">
-            <a:avLst/>
-          </a:prstGeom>
-          <a:noFill/>
-        </p:spPr>
-        <p:txBody>
-          <a:bodyPr wrap="square">
-            <a:spAutoFit/>
-          </a:bodyPr>
-          <a:lstStyle/>
-          <a:p>
-            <a:pPr algn="ctr"/>
-            <a:r>
-              <a:rPr sz="1400" b="1" i="0">
-                <a:solidFill>
-                  <a:srgbClr val="C9A84C"/>
-                </a:solidFill>
-              </a:rPr>
-              <a:t>C7</a:t>
-            </a:r>
-          </a:p>
-        </p:txBody>
-      </p:sp>
-      <p:sp>
-        <p:nvSpPr>
-          <p:cNvPr id="56" name="Rectangle 55"/>
-          <p:cNvSpPr/>
-          <p:nvPr/>
-        </p:nvSpPr>
-        <p:spPr>
-          <a:xfrm>
-            <a:off x="1207008" y="3730752"/>
-            <a:ext cx="5029200" cy="457200"/>
-          </a:xfrm>
-          <a:prstGeom prst="rect">
-            <a:avLst/>
-          </a:prstGeom>
-          <a:solidFill>
-            <a:srgbClr val="FFFFFF"/>
-          </a:solidFill>
-          <a:ln w="12700">
-            <a:solidFill>
-              <a:srgbClr val="007A7A"/>
-            </a:solidFill>
-          </a:ln>
-        </p:spPr>
-        <p:style>
-          <a:lnRef idx="1">
-            <a:schemeClr val="accent1"/>
-          </a:lnRef>
-          <a:fillRef idx="3">
-            <a:schemeClr val="accent1"/>
-          </a:fillRef>
-          <a:effectRef idx="2">
-            <a:schemeClr val="accent1"/>
-          </a:effectRef>
-          <a:fontRef idx="minor">
-            <a:schemeClr val="lt1"/>
-          </a:fontRef>
-        </p:style>
-        <p:txBody>
-          <a:bodyPr rtlCol="0" anchor="ctr"/>
-          <a:lstStyle/>
-          <a:p>
-            <a:pPr algn="ctr"/>
-          </a:p>
-        </p:txBody>
-      </p:sp>
-      <p:sp>
-        <p:nvSpPr>
-          <p:cNvPr id="57" name="TextBox 56"/>
-          <p:cNvSpPr txBox="1"/>
-          <p:nvPr/>
-        </p:nvSpPr>
-        <p:spPr>
-          <a:xfrm>
-            <a:off x="1280160" y="3767328"/>
-            <a:ext cx="4846320" cy="384048"/>
-          </a:xfrm>
-          <a:prstGeom prst="rect">
-            <a:avLst/>
-          </a:prstGeom>
-          <a:noFill/>
-        </p:spPr>
-        <p:txBody>
-          <a:bodyPr wrap="square">
-            <a:spAutoFit/>
-          </a:bodyPr>
-          <a:lstStyle/>
-          <a:p>
-            <a:pPr algn="l"/>
-            <a:r>
-              <a:rPr sz="1100" b="1" i="0">
-                <a:solidFill>
-                  <a:srgbClr val="005050"/>
-                </a:solidFill>
-              </a:rPr>
-              <a:t>Éthique &amp; conformité</a:t>
-            </a:r>
-          </a:p>
-        </p:txBody>
-      </p:sp>
-      <p:sp>
-        <p:nvSpPr>
-          <p:cNvPr id="58" name="Rectangle 57"/>
-          <p:cNvSpPr/>
-          <p:nvPr/>
-        </p:nvSpPr>
-        <p:spPr>
-          <a:xfrm>
-            <a:off x="6254496" y="3730752"/>
-            <a:ext cx="1280160" cy="457200"/>
-          </a:xfrm>
-          <a:prstGeom prst="rect">
-            <a:avLst/>
-          </a:prstGeom>
-          <a:solidFill>
-            <a:srgbClr val="C9A84C"/>
-          </a:solidFill>
-          <a:ln>
-            <a:noFill/>
-          </a:ln>
-        </p:spPr>
-        <p:style>
-          <a:lnRef idx="1">
-            <a:schemeClr val="accent1"/>
-          </a:lnRef>
-          <a:fillRef idx="3">
-            <a:schemeClr val="accent1"/>
-          </a:fillRef>
-          <a:effectRef idx="2">
-            <a:schemeClr val="accent1"/>
-          </a:effectRef>
-          <a:fontRef idx="minor">
-            <a:schemeClr val="lt1"/>
-          </a:fontRef>
-        </p:style>
-        <p:txBody>
-          <a:bodyPr rtlCol="0" anchor="ctr"/>
-          <a:lstStyle/>
-          <a:p>
-            <a:pPr algn="ctr"/>
-          </a:p>
-        </p:txBody>
-      </p:sp>
-      <p:sp>
-        <p:nvSpPr>
-          <p:cNvPr id="59" name="TextBox 58"/>
-          <p:cNvSpPr txBox="1"/>
-          <p:nvPr/>
-        </p:nvSpPr>
-        <p:spPr>
-          <a:xfrm>
-            <a:off x="6272784" y="3803904"/>
-            <a:ext cx="1243584" cy="347472"/>
-          </a:xfrm>
-          <a:prstGeom prst="rect">
-            <a:avLst/>
-          </a:prstGeom>
-          <a:noFill/>
-        </p:spPr>
-        <p:txBody>
-          <a:bodyPr wrap="square">
-            <a:spAutoFit/>
-          </a:bodyPr>
-          <a:lstStyle/>
-          <a:p>
-            <a:pPr algn="ctr"/>
-            <a:r>
-              <a:rPr sz="900" b="1" i="0">
-                <a:solidFill>
-                  <a:srgbClr val="005050"/>
-                </a:solidFill>
-              </a:rPr>
-              <a:t>Bloom 2</a:t>
-            </a:r>
-          </a:p>
-        </p:txBody>
-      </p:sp>
-      <p:sp>
-        <p:nvSpPr>
-          <p:cNvPr id="60" name="Rectangle 59"/>
-          <p:cNvSpPr/>
-          <p:nvPr/>
-        </p:nvSpPr>
-        <p:spPr>
-          <a:xfrm>
-            <a:off x="7552944" y="3730752"/>
-            <a:ext cx="4361688" cy="457200"/>
-          </a:xfrm>
-          <a:prstGeom prst="rect">
-            <a:avLst/>
-          </a:prstGeom>
-          <a:solidFill>
-            <a:srgbClr val="F0F7F7"/>
-          </a:solidFill>
-          <a:ln w="12700">
-            <a:solidFill>
-              <a:srgbClr val="007A7A"/>
-            </a:solidFill>
-          </a:ln>
-        </p:spPr>
-        <p:style>
-          <a:lnRef idx="1">
-            <a:schemeClr val="accent1"/>
-          </a:lnRef>
-          <a:fillRef idx="3">
-            <a:schemeClr val="accent1"/>
-          </a:fillRef>
-          <a:effectRef idx="2">
-            <a:schemeClr val="accent1"/>
-          </a:effectRef>
-          <a:fontRef idx="minor">
-            <a:schemeClr val="lt1"/>
-          </a:fontRef>
-        </p:style>
-        <p:txBody>
-          <a:bodyPr rtlCol="0" anchor="ctr"/>
-          <a:lstStyle/>
-          <a:p>
-            <a:pPr algn="ctr"/>
-          </a:p>
-        </p:txBody>
-      </p:sp>
-      <p:sp>
-        <p:nvSpPr>
-          <p:cNvPr id="61" name="TextBox 60"/>
-          <p:cNvSpPr txBox="1"/>
-          <p:nvPr/>
-        </p:nvSpPr>
-        <p:spPr>
-          <a:xfrm>
-            <a:off x="7626096" y="3785616"/>
-            <a:ext cx="4206240" cy="384048"/>
-          </a:xfrm>
-          <a:prstGeom prst="rect">
-            <a:avLst/>
-          </a:prstGeom>
-          <a:noFill/>
-        </p:spPr>
-        <p:txBody>
-          <a:bodyPr wrap="square">
-            <a:spAutoFit/>
-          </a:bodyPr>
-          <a:lstStyle/>
-          <a:p>
-            <a:pPr algn="l"/>
-            <a:r>
-              <a:rPr sz="1000" b="0" i="1">
-                <a:solidFill>
-                  <a:srgbClr val="1A1A1A"/>
-                </a:solidFill>
-              </a:rPr>
-              <a:t>Expliquer les règles déontologiques fundraiser</a:t>
-            </a:r>
-          </a:p>
-        </p:txBody>
-      </p:sp>
-      <p:sp>
-        <p:nvSpPr>
-          <p:cNvPr id="62" name="TextBox 61"/>
-          <p:cNvSpPr txBox="1"/>
-          <p:nvPr/>
-        </p:nvSpPr>
-        <p:spPr>
-          <a:xfrm>
-            <a:off x="0" y="6492240"/>
-            <a:ext cx="12188952" cy="365760"/>
-          </a:xfrm>
-          <a:prstGeom prst="rect">
-            <a:avLst/>
-          </a:prstGeom>
-          <a:noFill/>
-        </p:spPr>
-        <p:txBody>
-          <a:bodyPr wrap="square">
-            <a:spAutoFit/>
-          </a:bodyPr>
-          <a:lstStyle/>
-          <a:p>
-            <a:pPr algn="ctr"/>
-            <a:r>
-              <a:rPr sz="800" b="0" i="0">
-                <a:solidFill>
-                  <a:srgbClr val="888888"/>
-                </a:solidFill>
-              </a:rPr>
-              <a:t>SHY-Performance · V6-01062026SHY-TE</a:t>
+              <a:t>Votre objectif : obtenir la certification FIM avec un score ≥ 20/28 en Jour 5.</a:t>
             </a:r>
           </a:p>
         </p:txBody>
@@ -5860,13 +5715,13 @@
         <p:spPr>
           <a:xfrm>
             <a:off x="0" y="0"/>
-            <a:ext cx="12188952" cy="685800"/>
-          </a:xfrm>
-          <a:prstGeom prst="rect">
-            <a:avLst/>
-          </a:prstGeom>
-          <a:solidFill>
-            <a:srgbClr val="005050"/>
+            <a:ext cx="12188952" cy="658368"/>
+          </a:xfrm>
+          <a:prstGeom prst="rect">
+            <a:avLst/>
+          </a:prstGeom>
+          <a:solidFill>
+            <a:srgbClr val="005555"/>
           </a:solidFill>
           <a:ln>
             <a:noFill/>
@@ -5902,14 +5757,14 @@
         </p:nvSpPr>
         <p:spPr>
           <a:xfrm>
-            <a:off x="0" y="667512"/>
-            <a:ext cx="12188952" cy="36576"/>
-          </a:xfrm>
-          <a:prstGeom prst="rect">
-            <a:avLst/>
-          </a:prstGeom>
-          <a:solidFill>
-            <a:srgbClr val="C9A84C"/>
+            <a:off x="0" y="640080"/>
+            <a:ext cx="12188952" cy="54864"/>
+          </a:xfrm>
+          <a:prstGeom prst="rect">
+            <a:avLst/>
+          </a:prstGeom>
+          <a:solidFill>
+            <a:srgbClr val="FF0000"/>
           </a:solidFill>
           <a:ln>
             <a:noFill/>
@@ -5945,8 +5800,8 @@
         </p:nvSpPr>
         <p:spPr>
           <a:xfrm>
-            <a:off x="274320" y="73152"/>
-            <a:ext cx="11612880" cy="566928"/>
+            <a:off x="164592" y="64008"/>
+            <a:ext cx="685800" cy="530352"/>
           </a:xfrm>
           <a:prstGeom prst="rect">
             <a:avLst/>
@@ -5961,66 +5816,32 @@
           <a:p>
             <a:pPr algn="l"/>
             <a:r>
-              <a:rPr sz="1800" b="1" i="0">
+              <a:rPr sz="2000" b="1" i="0">
                 <a:solidFill>
                   <a:srgbClr val="FFFFFF"/>
                 </a:solidFill>
               </a:rPr>
-              <a:t>Objectifs SMART &amp; Activités d'ancrage</a:t>
-            </a:r>
-          </a:p>
-        </p:txBody>
-      </p:sp>
-      <p:sp>
-        <p:nvSpPr>
-          <p:cNvPr id="6" name="TextBox 5"/>
-          <p:cNvSpPr txBox="1"/>
-          <p:nvPr/>
-        </p:nvSpPr>
-        <p:spPr>
-          <a:xfrm>
-            <a:off x="0" y="6492240"/>
-            <a:ext cx="12188952" cy="365760"/>
-          </a:xfrm>
-          <a:prstGeom prst="rect">
-            <a:avLst/>
-          </a:prstGeom>
-          <a:noFill/>
-        </p:spPr>
-        <p:txBody>
-          <a:bodyPr wrap="square">
-            <a:spAutoFit/>
-          </a:bodyPr>
-          <a:lstStyle/>
-          <a:p>
-            <a:pPr algn="ctr"/>
-            <a:r>
-              <a:rPr sz="800" b="0" i="0">
-                <a:solidFill>
-                  <a:srgbClr val="888888"/>
-                </a:solidFill>
-              </a:rPr>
-              <a:t>SHY-Performance · V6-01062026SHY-TE</a:t>
-            </a:r>
-          </a:p>
-        </p:txBody>
-      </p:sp>
-      <p:sp>
-        <p:nvSpPr>
-          <p:cNvPr id="7" name="Rectangle 6"/>
+              <a:t>SHY</a:t>
+            </a:r>
+          </a:p>
+        </p:txBody>
+      </p:sp>
+      <p:sp>
+        <p:nvSpPr>
+          <p:cNvPr id="6" name="Rectangle 5"/>
           <p:cNvSpPr/>
           <p:nvPr/>
         </p:nvSpPr>
         <p:spPr>
           <a:xfrm>
-            <a:off x="274320" y="868680"/>
-            <a:ext cx="5486400" cy="347472"/>
-          </a:xfrm>
-          <a:prstGeom prst="rect">
-            <a:avLst/>
-          </a:prstGeom>
-          <a:solidFill>
-            <a:srgbClr val="007A7A"/>
+            <a:off x="914400" y="91440"/>
+            <a:ext cx="36576" cy="475488"/>
+          </a:xfrm>
+          <a:prstGeom prst="rect">
+            <a:avLst/>
+          </a:prstGeom>
+          <a:solidFill>
+            <a:srgbClr val="FF0000"/>
           </a:solidFill>
           <a:ln>
             <a:noFill/>
@@ -6050,14 +5871,14 @@
       </p:sp>
       <p:sp>
         <p:nvSpPr>
-          <p:cNvPr id="8" name="TextBox 7"/>
+          <p:cNvPr id="7" name="TextBox 6"/>
           <p:cNvSpPr txBox="1"/>
           <p:nvPr/>
         </p:nvSpPr>
         <p:spPr>
           <a:xfrm>
-            <a:off x="365760" y="905256"/>
-            <a:ext cx="5303520" cy="292608"/>
+            <a:off x="1024128" y="91440"/>
+            <a:ext cx="10881360" cy="475488"/>
           </a:xfrm>
           <a:prstGeom prst="rect">
             <a:avLst/>
@@ -6072,32 +5893,32 @@
           <a:p>
             <a:pPr algn="l"/>
             <a:r>
-              <a:rPr sz="1200" b="1" i="0">
+              <a:rPr sz="1700" b="1" i="0">
                 <a:solidFill>
                   <a:srgbClr val="FFFFFF"/>
                 </a:solidFill>
               </a:rPr>
-              <a:t>Objectifs globaux SMART (Bloom 2–4)</a:t>
-            </a:r>
-          </a:p>
-        </p:txBody>
-      </p:sp>
-      <p:sp>
-        <p:nvSpPr>
-          <p:cNvPr id="9" name="Rectangle 8"/>
+              <a:t>Ce que Vous Allez Accomplir — Vos Résultats Concrets</a:t>
+            </a:r>
+          </a:p>
+        </p:txBody>
+      </p:sp>
+      <p:sp>
+        <p:nvSpPr>
+          <p:cNvPr id="8" name="Rectangle 7"/>
           <p:cNvSpPr/>
           <p:nvPr/>
         </p:nvSpPr>
         <p:spPr>
           <a:xfrm>
-            <a:off x="6126480" y="868680"/>
-            <a:ext cx="5486400" cy="347472"/>
-          </a:xfrm>
-          <a:prstGeom prst="rect">
-            <a:avLst/>
-          </a:prstGeom>
-          <a:solidFill>
-            <a:srgbClr val="007A7A"/>
+            <a:off x="0" y="6492240"/>
+            <a:ext cx="12188952" cy="365760"/>
+          </a:xfrm>
+          <a:prstGeom prst="rect">
+            <a:avLst/>
+          </a:prstGeom>
+          <a:solidFill>
+            <a:srgbClr val="005555"/>
           </a:solidFill>
           <a:ln>
             <a:noFill/>
@@ -6127,14 +5948,14 @@
       </p:sp>
       <p:sp>
         <p:nvSpPr>
-          <p:cNvPr id="10" name="TextBox 9"/>
+          <p:cNvPr id="9" name="TextBox 8"/>
           <p:cNvSpPr txBox="1"/>
           <p:nvPr/>
         </p:nvSpPr>
         <p:spPr>
           <a:xfrm>
-            <a:off x="6217920" y="905256"/>
-            <a:ext cx="5303520" cy="292608"/>
+            <a:off x="0" y="6519672"/>
+            <a:ext cx="12188952" cy="274320"/>
           </a:xfrm>
           <a:prstGeom prst="rect">
             <a:avLst/>
@@ -6147,306 +5968,34 @@
           </a:bodyPr>
           <a:lstStyle/>
           <a:p>
-            <a:pPr algn="l"/>
-            <a:r>
-              <a:rPr sz="1200" b="1" i="0">
+            <a:pPr algn="ctr"/>
+            <a:r>
+              <a:rPr sz="900" b="0" i="0">
                 <a:solidFill>
                   <a:srgbClr val="FFFFFF"/>
                 </a:solidFill>
               </a:rPr>
-              <a:t>Activités d'ancrage V6</a:t>
-            </a:r>
-          </a:p>
-        </p:txBody>
-      </p:sp>
-      <p:sp>
-        <p:nvSpPr>
-          <p:cNvPr id="11" name="TextBox 10"/>
-          <p:cNvSpPr txBox="1"/>
-          <p:nvPr/>
-        </p:nvSpPr>
-        <p:spPr>
-          <a:xfrm>
-            <a:off x="365760" y="1280160"/>
-            <a:ext cx="5303520" cy="347472"/>
-          </a:xfrm>
-          <a:prstGeom prst="rect">
-            <a:avLst/>
-          </a:prstGeom>
-          <a:noFill/>
-        </p:spPr>
-        <p:txBody>
-          <a:bodyPr wrap="square">
-            <a:spAutoFit/>
-          </a:bodyPr>
-          <a:lstStyle/>
-          <a:p>
-            <a:pPr algn="l"/>
-            <a:r>
-              <a:rPr sz="1100" b="0" i="0">
-                <a:solidFill>
-                  <a:srgbClr val="1A1A1A"/>
-                </a:solidFill>
-              </a:rPr>
-              <a:t>• Nommer les 7 compétences clés du fundraiser FIM (C1–C7)</a:t>
-            </a:r>
-          </a:p>
-        </p:txBody>
-      </p:sp>
-      <p:sp>
-        <p:nvSpPr>
-          <p:cNvPr id="12" name="TextBox 11"/>
-          <p:cNvSpPr txBox="1"/>
-          <p:nvPr/>
-        </p:nvSpPr>
-        <p:spPr>
-          <a:xfrm>
-            <a:off x="365760" y="1645919"/>
-            <a:ext cx="5303520" cy="347472"/>
-          </a:xfrm>
-          <a:prstGeom prst="rect">
-            <a:avLst/>
-          </a:prstGeom>
-          <a:noFill/>
-        </p:spPr>
-        <p:txBody>
-          <a:bodyPr wrap="square">
-            <a:spAutoFit/>
-          </a:bodyPr>
-          <a:lstStyle/>
-          <a:p>
-            <a:pPr algn="l"/>
-            <a:r>
-              <a:rPr sz="1100" b="0" i="0">
-                <a:solidFill>
-                  <a:srgbClr val="1A1A1A"/>
-                </a:solidFill>
-              </a:rPr>
-              <a:t>• Expliquer le lien entre objectif personnel et mission UNICEF</a:t>
-            </a:r>
-          </a:p>
-        </p:txBody>
-      </p:sp>
-      <p:sp>
-        <p:nvSpPr>
-          <p:cNvPr id="13" name="TextBox 12"/>
-          <p:cNvSpPr txBox="1"/>
-          <p:nvPr/>
-        </p:nvSpPr>
-        <p:spPr>
-          <a:xfrm>
-            <a:off x="365760" y="2011679"/>
-            <a:ext cx="5303520" cy="347472"/>
-          </a:xfrm>
-          <a:prstGeom prst="rect">
-            <a:avLst/>
-          </a:prstGeom>
-          <a:noFill/>
-        </p:spPr>
-        <p:txBody>
-          <a:bodyPr wrap="square">
-            <a:spAutoFit/>
-          </a:bodyPr>
-          <a:lstStyle/>
-          <a:p>
-            <a:pPr algn="l"/>
-            <a:r>
-              <a:rPr sz="1100" b="0" i="0">
-                <a:solidFill>
-                  <a:srgbClr val="1A1A1A"/>
-                </a:solidFill>
-              </a:rPr>
-              <a:t>• Distinguer les niveaux de maîtrise attendus à J1, J3 et J5</a:t>
-            </a:r>
-          </a:p>
-        </p:txBody>
-      </p:sp>
-      <p:sp>
-        <p:nvSpPr>
-          <p:cNvPr id="14" name="TextBox 13"/>
-          <p:cNvSpPr txBox="1"/>
-          <p:nvPr/>
-        </p:nvSpPr>
-        <p:spPr>
-          <a:xfrm>
-            <a:off x="365760" y="2377439"/>
-            <a:ext cx="5303520" cy="347472"/>
-          </a:xfrm>
-          <a:prstGeom prst="rect">
-            <a:avLst/>
-          </a:prstGeom>
-          <a:noFill/>
-        </p:spPr>
-        <p:txBody>
-          <a:bodyPr wrap="square">
-            <a:spAutoFit/>
-          </a:bodyPr>
-          <a:lstStyle/>
-          <a:p>
-            <a:pPr algn="l"/>
-            <a:r>
-              <a:rPr sz="1100" b="0" i="0">
-                <a:solidFill>
-                  <a:srgbClr val="1A1A1A"/>
-                </a:solidFill>
-              </a:rPr>
-              <a:t>• Analyser son propre profil via l'auto-positionnement initial</a:t>
-            </a:r>
-          </a:p>
-        </p:txBody>
-      </p:sp>
-      <p:sp>
-        <p:nvSpPr>
-          <p:cNvPr id="15" name="TextBox 14"/>
-          <p:cNvSpPr txBox="1"/>
-          <p:nvPr/>
-        </p:nvSpPr>
-        <p:spPr>
-          <a:xfrm>
-            <a:off x="6217920" y="1280160"/>
-            <a:ext cx="5303520" cy="347472"/>
-          </a:xfrm>
-          <a:prstGeom prst="rect">
-            <a:avLst/>
-          </a:prstGeom>
-          <a:noFill/>
-        </p:spPr>
-        <p:txBody>
-          <a:bodyPr wrap="square">
-            <a:spAutoFit/>
-          </a:bodyPr>
-          <a:lstStyle/>
-          <a:p>
-            <a:pPr algn="l"/>
-            <a:r>
-              <a:rPr sz="1100" b="0" i="0">
-                <a:solidFill>
-                  <a:srgbClr val="1A1A1A"/>
-                </a:solidFill>
-              </a:rPr>
-              <a:t>• Carte mentale : 'Pourquoi je suis ici' → partage groupe</a:t>
-            </a:r>
-          </a:p>
-        </p:txBody>
-      </p:sp>
-      <p:sp>
-        <p:nvSpPr>
-          <p:cNvPr id="16" name="TextBox 15"/>
-          <p:cNvSpPr txBox="1"/>
-          <p:nvPr/>
-        </p:nvSpPr>
-        <p:spPr>
-          <a:xfrm>
-            <a:off x="6217920" y="1645919"/>
-            <a:ext cx="5303520" cy="347472"/>
-          </a:xfrm>
-          <a:prstGeom prst="rect">
-            <a:avLst/>
-          </a:prstGeom>
-          <a:noFill/>
-        </p:spPr>
-        <p:txBody>
-          <a:bodyPr wrap="square">
-            <a:spAutoFit/>
-          </a:bodyPr>
-          <a:lstStyle/>
-          <a:p>
-            <a:pPr algn="l"/>
-            <a:r>
-              <a:rPr sz="1100" b="0" i="0">
-                <a:solidFill>
-                  <a:srgbClr val="1A1A1A"/>
-                </a:solidFill>
-              </a:rPr>
-              <a:t>• Vision board collectif : 'Le fundraiser idéal 2026'</a:t>
-            </a:r>
-          </a:p>
-        </p:txBody>
-      </p:sp>
-      <p:sp>
-        <p:nvSpPr>
-          <p:cNvPr id="17" name="TextBox 16"/>
-          <p:cNvSpPr txBox="1"/>
-          <p:nvPr/>
-        </p:nvSpPr>
-        <p:spPr>
-          <a:xfrm>
-            <a:off x="6217920" y="2011679"/>
-            <a:ext cx="5303520" cy="347472"/>
-          </a:xfrm>
-          <a:prstGeom prst="rect">
-            <a:avLst/>
-          </a:prstGeom>
-          <a:noFill/>
-        </p:spPr>
-        <p:txBody>
-          <a:bodyPr wrap="square">
-            <a:spAutoFit/>
-          </a:bodyPr>
-          <a:lstStyle/>
-          <a:p>
-            <a:pPr algn="l"/>
-            <a:r>
-              <a:rPr sz="1100" b="0" i="0">
-                <a:solidFill>
-                  <a:srgbClr val="1A1A1A"/>
-                </a:solidFill>
-              </a:rPr>
-              <a:t>• Lecture commentée du référentiel C1–C7</a:t>
-            </a:r>
-          </a:p>
-        </p:txBody>
-      </p:sp>
-      <p:sp>
-        <p:nvSpPr>
-          <p:cNvPr id="18" name="TextBox 17"/>
-          <p:cNvSpPr txBox="1"/>
-          <p:nvPr/>
-        </p:nvSpPr>
-        <p:spPr>
-          <a:xfrm>
-            <a:off x="6217920" y="2377439"/>
-            <a:ext cx="5303520" cy="347472"/>
-          </a:xfrm>
-          <a:prstGeom prst="rect">
-            <a:avLst/>
-          </a:prstGeom>
-          <a:noFill/>
-        </p:spPr>
-        <p:txBody>
-          <a:bodyPr wrap="square">
-            <a:spAutoFit/>
-          </a:bodyPr>
-          <a:lstStyle/>
-          <a:p>
-            <a:pPr algn="l"/>
-            <a:r>
-              <a:rPr sz="1100" b="0" i="0">
-                <a:solidFill>
-                  <a:srgbClr val="1A1A1A"/>
-                </a:solidFill>
-              </a:rPr>
-              <a:t>• Discussion : 'Quelle compétence est ma plus grande force ?'</a:t>
-            </a:r>
-          </a:p>
-        </p:txBody>
-      </p:sp>
-      <p:sp>
-        <p:nvSpPr>
-          <p:cNvPr id="19" name="Rectangle 18"/>
+              <a:t>SHY-Performance  ·  Formation FIM  ·  V6-01062026SHY-TE</a:t>
+            </a:r>
+          </a:p>
+        </p:txBody>
+      </p:sp>
+      <p:sp>
+        <p:nvSpPr>
+          <p:cNvPr id="10" name="Rectangle 9"/>
           <p:cNvSpPr/>
           <p:nvPr/>
         </p:nvSpPr>
         <p:spPr>
           <a:xfrm>
-            <a:off x="274320" y="5486400"/>
-            <a:ext cx="11612880" cy="274320"/>
-          </a:xfrm>
-          <a:prstGeom prst="rect">
-            <a:avLst/>
-          </a:prstGeom>
-          <a:solidFill>
-            <a:srgbClr val="C9A84C"/>
+            <a:off x="274320" y="822960"/>
+            <a:ext cx="5669280" cy="329184"/>
+          </a:xfrm>
+          <a:prstGeom prst="rect">
+            <a:avLst/>
+          </a:prstGeom>
+          <a:solidFill>
+            <a:srgbClr val="008080"/>
           </a:solidFill>
           <a:ln>
             <a:noFill/>
@@ -6476,14 +6025,14 @@
       </p:sp>
       <p:sp>
         <p:nvSpPr>
-          <p:cNvPr id="20" name="TextBox 19"/>
+          <p:cNvPr id="11" name="TextBox 10"/>
           <p:cNvSpPr txBox="1"/>
           <p:nvPr/>
         </p:nvSpPr>
         <p:spPr>
           <a:xfrm>
-            <a:off x="365760" y="5522976"/>
-            <a:ext cx="11430000" cy="219456"/>
+            <a:off x="384048" y="868680"/>
+            <a:ext cx="5486400" cy="256032"/>
           </a:xfrm>
           <a:prstGeom prst="rect">
             <a:avLst/>
@@ -6498,13 +6047,372 @@
           <a:p>
             <a:pPr algn="l"/>
             <a:r>
-              <a:rPr sz="1000" b="1" i="0">
+              <a:rPr sz="1100" b="1" i="0">
                 <a:solidFill>
-                  <a:srgbClr val="005050"/>
+                  <a:srgbClr val="FFFFFF"/>
                 </a:solidFill>
               </a:rPr>
-              <a:t>🎯 Évaluation Book 1 — Ouverture de formation</a:t>
-            </a:r>
+              <a:t>En fin de formation, vous saurez…</a:t>
+            </a:r>
+          </a:p>
+        </p:txBody>
+      </p:sp>
+      <p:sp>
+        <p:nvSpPr>
+          <p:cNvPr id="12" name="Rectangle 11"/>
+          <p:cNvSpPr/>
+          <p:nvPr/>
+        </p:nvSpPr>
+        <p:spPr>
+          <a:xfrm>
+            <a:off x="6355080" y="822960"/>
+            <a:ext cx="5669280" cy="329184"/>
+          </a:xfrm>
+          <a:prstGeom prst="rect">
+            <a:avLst/>
+          </a:prstGeom>
+          <a:solidFill>
+            <a:srgbClr val="008080"/>
+          </a:solidFill>
+          <a:ln>
+            <a:noFill/>
+          </a:ln>
+        </p:spPr>
+        <p:style>
+          <a:lnRef idx="1">
+            <a:schemeClr val="accent1"/>
+          </a:lnRef>
+          <a:fillRef idx="3">
+            <a:schemeClr val="accent1"/>
+          </a:fillRef>
+          <a:effectRef idx="2">
+            <a:schemeClr val="accent1"/>
+          </a:effectRef>
+          <a:fontRef idx="minor">
+            <a:schemeClr val="lt1"/>
+          </a:fontRef>
+        </p:style>
+        <p:txBody>
+          <a:bodyPr rtlCol="0" anchor="ctr"/>
+          <a:lstStyle/>
+          <a:p>
+            <a:pPr algn="ctr"/>
+          </a:p>
+        </p:txBody>
+      </p:sp>
+      <p:sp>
+        <p:nvSpPr>
+          <p:cNvPr id="13" name="TextBox 12"/>
+          <p:cNvSpPr txBox="1"/>
+          <p:nvPr/>
+        </p:nvSpPr>
+        <p:spPr>
+          <a:xfrm>
+            <a:off x="6464808" y="868680"/>
+            <a:ext cx="5486400" cy="256032"/>
+          </a:xfrm>
+          <a:prstGeom prst="rect">
+            <a:avLst/>
+          </a:prstGeom>
+          <a:noFill/>
+        </p:spPr>
+        <p:txBody>
+          <a:bodyPr wrap="square">
+            <a:spAutoFit/>
+          </a:bodyPr>
+          <a:lstStyle/>
+          <a:p>
+            <a:pPr algn="l"/>
+            <a:r>
+              <a:rPr sz="1100" b="1" i="0">
+                <a:solidFill>
+                  <a:srgbClr val="FFFFFF"/>
+                </a:solidFill>
+              </a:rPr>
+              <a:t>Vous serez également capable de…</a:t>
+            </a:r>
+          </a:p>
+        </p:txBody>
+      </p:sp>
+      <p:sp>
+        <p:nvSpPr>
+          <p:cNvPr id="14" name="Rectangle 13"/>
+          <p:cNvSpPr/>
+          <p:nvPr/>
+        </p:nvSpPr>
+        <p:spPr>
+          <a:xfrm>
+            <a:off x="274320" y="1207008"/>
+            <a:ext cx="5669280" cy="402336"/>
+          </a:xfrm>
+          <a:prstGeom prst="rect">
+            <a:avLst/>
+          </a:prstGeom>
+          <a:solidFill>
+            <a:srgbClr val="F0F7F7"/>
+          </a:solidFill>
+          <a:ln w="5080">
+            <a:solidFill>
+              <a:srgbClr val="008080"/>
+            </a:solidFill>
+          </a:ln>
+        </p:spPr>
+        <p:style>
+          <a:lnRef idx="1">
+            <a:schemeClr val="accent1"/>
+          </a:lnRef>
+          <a:fillRef idx="3">
+            <a:schemeClr val="accent1"/>
+          </a:fillRef>
+          <a:effectRef idx="2">
+            <a:schemeClr val="accent1"/>
+          </a:effectRef>
+          <a:fontRef idx="minor">
+            <a:schemeClr val="lt1"/>
+          </a:fontRef>
+        </p:style>
+        <p:txBody>
+          <a:bodyPr rtlCol="0" anchor="ctr"/>
+          <a:lstStyle/>
+          <a:p>
+            <a:pPr algn="ctr"/>
+          </a:p>
+        </p:txBody>
+      </p:sp>
+      <p:sp>
+        <p:nvSpPr>
+          <p:cNvPr id="15" name="TextBox 14"/>
+          <p:cNvSpPr txBox="1"/>
+          <p:nvPr/>
+        </p:nvSpPr>
+        <p:spPr>
+          <a:xfrm>
+            <a:off x="402336" y="1261872"/>
+            <a:ext cx="5440680" cy="329184"/>
+          </a:xfrm>
+          <a:prstGeom prst="rect">
+            <a:avLst/>
+          </a:prstGeom>
+          <a:noFill/>
+        </p:spPr>
+        <p:txBody>
+          <a:bodyPr wrap="square">
+            <a:spAutoFit/>
+          </a:bodyPr>
+          <a:lstStyle/>
+          <a:p>
+            <a:pPr algn="l"/>
+            <a:r>
+              <a:rPr sz="1000" b="0" i="0">
+                <a:solidFill>
+                  <a:srgbClr val="1A1A1A"/>
+                </a:solidFill>
+              </a:rPr>
+              <a:t>• Accrocher un passant en moins de 15 secondes</a:t>
+            </a:r>
+          </a:p>
+        </p:txBody>
+      </p:sp>
+      <p:sp>
+        <p:nvSpPr>
+          <p:cNvPr id="16" name="Rectangle 15"/>
+          <p:cNvSpPr/>
+          <p:nvPr/>
+        </p:nvSpPr>
+        <p:spPr>
+          <a:xfrm>
+            <a:off x="274320" y="1627632"/>
+            <a:ext cx="5669280" cy="402336"/>
+          </a:xfrm>
+          <a:prstGeom prst="rect">
+            <a:avLst/>
+          </a:prstGeom>
+          <a:solidFill>
+            <a:srgbClr val="F0F7F7"/>
+          </a:solidFill>
+          <a:ln w="5080">
+            <a:solidFill>
+              <a:srgbClr val="008080"/>
+            </a:solidFill>
+          </a:ln>
+        </p:spPr>
+        <p:style>
+          <a:lnRef idx="1">
+            <a:schemeClr val="accent1"/>
+          </a:lnRef>
+          <a:fillRef idx="3">
+            <a:schemeClr val="accent1"/>
+          </a:fillRef>
+          <a:effectRef idx="2">
+            <a:schemeClr val="accent1"/>
+          </a:effectRef>
+          <a:fontRef idx="minor">
+            <a:schemeClr val="lt1"/>
+          </a:fontRef>
+        </p:style>
+        <p:txBody>
+          <a:bodyPr rtlCol="0" anchor="ctr"/>
+          <a:lstStyle/>
+          <a:p>
+            <a:pPr algn="ctr"/>
+          </a:p>
+        </p:txBody>
+      </p:sp>
+      <p:sp>
+        <p:nvSpPr>
+          <p:cNvPr id="17" name="TextBox 16"/>
+          <p:cNvSpPr txBox="1"/>
+          <p:nvPr/>
+        </p:nvSpPr>
+        <p:spPr>
+          <a:xfrm>
+            <a:off x="402336" y="1682496"/>
+            <a:ext cx="5440680" cy="329184"/>
+          </a:xfrm>
+          <a:prstGeom prst="rect">
+            <a:avLst/>
+          </a:prstGeom>
+          <a:noFill/>
+        </p:spPr>
+        <p:txBody>
+          <a:bodyPr wrap="square">
+            <a:spAutoFit/>
+          </a:bodyPr>
+          <a:lstStyle/>
+          <a:p>
+            <a:pPr algn="l"/>
+            <a:r>
+              <a:rPr sz="1000" b="0" i="0">
+                <a:solidFill>
+                  <a:srgbClr val="1A1A1A"/>
+                </a:solidFill>
+              </a:rPr>
+              <a:t>• Raconter l'histoire d'un enfant bénéficiaire UNICEF</a:t>
+            </a:r>
+          </a:p>
+        </p:txBody>
+      </p:sp>
+      <p:sp>
+        <p:nvSpPr>
+          <p:cNvPr id="18" name="Rectangle 17"/>
+          <p:cNvSpPr/>
+          <p:nvPr/>
+        </p:nvSpPr>
+        <p:spPr>
+          <a:xfrm>
+            <a:off x="274320" y="2048256"/>
+            <a:ext cx="5669280" cy="402336"/>
+          </a:xfrm>
+          <a:prstGeom prst="rect">
+            <a:avLst/>
+          </a:prstGeom>
+          <a:solidFill>
+            <a:srgbClr val="F0F7F7"/>
+          </a:solidFill>
+          <a:ln w="5080">
+            <a:solidFill>
+              <a:srgbClr val="008080"/>
+            </a:solidFill>
+          </a:ln>
+        </p:spPr>
+        <p:style>
+          <a:lnRef idx="1">
+            <a:schemeClr val="accent1"/>
+          </a:lnRef>
+          <a:fillRef idx="3">
+            <a:schemeClr val="accent1"/>
+          </a:fillRef>
+          <a:effectRef idx="2">
+            <a:schemeClr val="accent1"/>
+          </a:effectRef>
+          <a:fontRef idx="minor">
+            <a:schemeClr val="lt1"/>
+          </a:fontRef>
+        </p:style>
+        <p:txBody>
+          <a:bodyPr rtlCol="0" anchor="ctr"/>
+          <a:lstStyle/>
+          <a:p>
+            <a:pPr algn="ctr"/>
+          </a:p>
+        </p:txBody>
+      </p:sp>
+      <p:sp>
+        <p:nvSpPr>
+          <p:cNvPr id="19" name="TextBox 18"/>
+          <p:cNvSpPr txBox="1"/>
+          <p:nvPr/>
+        </p:nvSpPr>
+        <p:spPr>
+          <a:xfrm>
+            <a:off x="402336" y="2103120"/>
+            <a:ext cx="5440680" cy="329184"/>
+          </a:xfrm>
+          <a:prstGeom prst="rect">
+            <a:avLst/>
+          </a:prstGeom>
+          <a:noFill/>
+        </p:spPr>
+        <p:txBody>
+          <a:bodyPr wrap="square">
+            <a:spAutoFit/>
+          </a:bodyPr>
+          <a:lstStyle/>
+          <a:p>
+            <a:pPr algn="l"/>
+            <a:r>
+              <a:rPr sz="1000" b="0" i="0">
+                <a:solidFill>
+                  <a:srgbClr val="1A1A1A"/>
+                </a:solidFill>
+              </a:rPr>
+              <a:t>• Proposer un montant de don adapté au profil</a:t>
+            </a:r>
+          </a:p>
+        </p:txBody>
+      </p:sp>
+      <p:sp>
+        <p:nvSpPr>
+          <p:cNvPr id="20" name="Rectangle 19"/>
+          <p:cNvSpPr/>
+          <p:nvPr/>
+        </p:nvSpPr>
+        <p:spPr>
+          <a:xfrm>
+            <a:off x="274320" y="2468880"/>
+            <a:ext cx="5669280" cy="402336"/>
+          </a:xfrm>
+          <a:prstGeom prst="rect">
+            <a:avLst/>
+          </a:prstGeom>
+          <a:solidFill>
+            <a:srgbClr val="F0F7F7"/>
+          </a:solidFill>
+          <a:ln w="5080">
+            <a:solidFill>
+              <a:srgbClr val="008080"/>
+            </a:solidFill>
+          </a:ln>
+        </p:spPr>
+        <p:style>
+          <a:lnRef idx="1">
+            <a:schemeClr val="accent1"/>
+          </a:lnRef>
+          <a:fillRef idx="3">
+            <a:schemeClr val="accent1"/>
+          </a:fillRef>
+          <a:effectRef idx="2">
+            <a:schemeClr val="accent1"/>
+          </a:effectRef>
+          <a:fontRef idx="minor">
+            <a:schemeClr val="lt1"/>
+          </a:fontRef>
+        </p:style>
+        <p:txBody>
+          <a:bodyPr rtlCol="0" anchor="ctr"/>
+          <a:lstStyle/>
+          <a:p>
+            <a:pPr algn="ctr"/>
           </a:p>
         </p:txBody>
       </p:sp>
@@ -6516,8 +6424,638 @@
         </p:nvSpPr>
         <p:spPr>
           <a:xfrm>
-            <a:off x="365760" y="5779008"/>
-            <a:ext cx="3718560" cy="502920"/>
+            <a:off x="402336" y="2523744"/>
+            <a:ext cx="5440680" cy="329184"/>
+          </a:xfrm>
+          <a:prstGeom prst="rect">
+            <a:avLst/>
+          </a:prstGeom>
+          <a:noFill/>
+        </p:spPr>
+        <p:txBody>
+          <a:bodyPr wrap="square">
+            <a:spAutoFit/>
+          </a:bodyPr>
+          <a:lstStyle/>
+          <a:p>
+            <a:pPr algn="l"/>
+            <a:r>
+              <a:rPr sz="1000" b="0" i="0">
+                <a:solidFill>
+                  <a:srgbClr val="1A1A1A"/>
+                </a:solidFill>
+              </a:rPr>
+              <a:t>• Répondre aux 12 objections types sans hésiter</a:t>
+            </a:r>
+          </a:p>
+        </p:txBody>
+      </p:sp>
+      <p:sp>
+        <p:nvSpPr>
+          <p:cNvPr id="22" name="Rectangle 21"/>
+          <p:cNvSpPr/>
+          <p:nvPr/>
+        </p:nvSpPr>
+        <p:spPr>
+          <a:xfrm>
+            <a:off x="274320" y="2889504"/>
+            <a:ext cx="5669280" cy="402336"/>
+          </a:xfrm>
+          <a:prstGeom prst="rect">
+            <a:avLst/>
+          </a:prstGeom>
+          <a:solidFill>
+            <a:srgbClr val="F0F7F7"/>
+          </a:solidFill>
+          <a:ln w="5080">
+            <a:solidFill>
+              <a:srgbClr val="008080"/>
+            </a:solidFill>
+          </a:ln>
+        </p:spPr>
+        <p:style>
+          <a:lnRef idx="1">
+            <a:schemeClr val="accent1"/>
+          </a:lnRef>
+          <a:fillRef idx="3">
+            <a:schemeClr val="accent1"/>
+          </a:fillRef>
+          <a:effectRef idx="2">
+            <a:schemeClr val="accent1"/>
+          </a:effectRef>
+          <a:fontRef idx="minor">
+            <a:schemeClr val="lt1"/>
+          </a:fontRef>
+        </p:style>
+        <p:txBody>
+          <a:bodyPr rtlCol="0" anchor="ctr"/>
+          <a:lstStyle/>
+          <a:p>
+            <a:pPr algn="ctr"/>
+          </a:p>
+        </p:txBody>
+      </p:sp>
+      <p:sp>
+        <p:nvSpPr>
+          <p:cNvPr id="23" name="TextBox 22"/>
+          <p:cNvSpPr txBox="1"/>
+          <p:nvPr/>
+        </p:nvSpPr>
+        <p:spPr>
+          <a:xfrm>
+            <a:off x="402336" y="2944368"/>
+            <a:ext cx="5440680" cy="329184"/>
+          </a:xfrm>
+          <a:prstGeom prst="rect">
+            <a:avLst/>
+          </a:prstGeom>
+          <a:noFill/>
+        </p:spPr>
+        <p:txBody>
+          <a:bodyPr wrap="square">
+            <a:spAutoFit/>
+          </a:bodyPr>
+          <a:lstStyle/>
+          <a:p>
+            <a:pPr algn="l"/>
+            <a:r>
+              <a:rPr sz="1000" b="0" i="0">
+                <a:solidFill>
+                  <a:srgbClr val="1A1A1A"/>
+                </a:solidFill>
+              </a:rPr>
+              <a:t>• Signer un engagement de don mensuel régulier</a:t>
+            </a:r>
+          </a:p>
+        </p:txBody>
+      </p:sp>
+      <p:sp>
+        <p:nvSpPr>
+          <p:cNvPr id="24" name="Rectangle 23"/>
+          <p:cNvSpPr/>
+          <p:nvPr/>
+        </p:nvSpPr>
+        <p:spPr>
+          <a:xfrm>
+            <a:off x="6355080" y="1207008"/>
+            <a:ext cx="5669280" cy="402336"/>
+          </a:xfrm>
+          <a:prstGeom prst="rect">
+            <a:avLst/>
+          </a:prstGeom>
+          <a:solidFill>
+            <a:srgbClr val="F0F7F7"/>
+          </a:solidFill>
+          <a:ln w="5080">
+            <a:solidFill>
+              <a:srgbClr val="008080"/>
+            </a:solidFill>
+          </a:ln>
+        </p:spPr>
+        <p:style>
+          <a:lnRef idx="1">
+            <a:schemeClr val="accent1"/>
+          </a:lnRef>
+          <a:fillRef idx="3">
+            <a:schemeClr val="accent1"/>
+          </a:fillRef>
+          <a:effectRef idx="2">
+            <a:schemeClr val="accent1"/>
+          </a:effectRef>
+          <a:fontRef idx="minor">
+            <a:schemeClr val="lt1"/>
+          </a:fontRef>
+        </p:style>
+        <p:txBody>
+          <a:bodyPr rtlCol="0" anchor="ctr"/>
+          <a:lstStyle/>
+          <a:p>
+            <a:pPr algn="ctr"/>
+          </a:p>
+        </p:txBody>
+      </p:sp>
+      <p:sp>
+        <p:nvSpPr>
+          <p:cNvPr id="25" name="TextBox 24"/>
+          <p:cNvSpPr txBox="1"/>
+          <p:nvPr/>
+        </p:nvSpPr>
+        <p:spPr>
+          <a:xfrm>
+            <a:off x="6483096" y="1261872"/>
+            <a:ext cx="5440680" cy="329184"/>
+          </a:xfrm>
+          <a:prstGeom prst="rect">
+            <a:avLst/>
+          </a:prstGeom>
+          <a:noFill/>
+        </p:spPr>
+        <p:txBody>
+          <a:bodyPr wrap="square">
+            <a:spAutoFit/>
+          </a:bodyPr>
+          <a:lstStyle/>
+          <a:p>
+            <a:pPr algn="l"/>
+            <a:r>
+              <a:rPr sz="1000" b="0" i="0">
+                <a:solidFill>
+                  <a:srgbClr val="1A1A1A"/>
+                </a:solidFill>
+              </a:rPr>
+              <a:t>• Gérer un refus sans perdre votre motivation</a:t>
+            </a:r>
+          </a:p>
+        </p:txBody>
+      </p:sp>
+      <p:sp>
+        <p:nvSpPr>
+          <p:cNvPr id="26" name="Rectangle 25"/>
+          <p:cNvSpPr/>
+          <p:nvPr/>
+        </p:nvSpPr>
+        <p:spPr>
+          <a:xfrm>
+            <a:off x="6355080" y="1627632"/>
+            <a:ext cx="5669280" cy="402336"/>
+          </a:xfrm>
+          <a:prstGeom prst="rect">
+            <a:avLst/>
+          </a:prstGeom>
+          <a:solidFill>
+            <a:srgbClr val="F0F7F7"/>
+          </a:solidFill>
+          <a:ln w="5080">
+            <a:solidFill>
+              <a:srgbClr val="008080"/>
+            </a:solidFill>
+          </a:ln>
+        </p:spPr>
+        <p:style>
+          <a:lnRef idx="1">
+            <a:schemeClr val="accent1"/>
+          </a:lnRef>
+          <a:fillRef idx="3">
+            <a:schemeClr val="accent1"/>
+          </a:fillRef>
+          <a:effectRef idx="2">
+            <a:schemeClr val="accent1"/>
+          </a:effectRef>
+          <a:fontRef idx="minor">
+            <a:schemeClr val="lt1"/>
+          </a:fontRef>
+        </p:style>
+        <p:txBody>
+          <a:bodyPr rtlCol="0" anchor="ctr"/>
+          <a:lstStyle/>
+          <a:p>
+            <a:pPr algn="ctr"/>
+          </a:p>
+        </p:txBody>
+      </p:sp>
+      <p:sp>
+        <p:nvSpPr>
+          <p:cNvPr id="27" name="TextBox 26"/>
+          <p:cNvSpPr txBox="1"/>
+          <p:nvPr/>
+        </p:nvSpPr>
+        <p:spPr>
+          <a:xfrm>
+            <a:off x="6483096" y="1682496"/>
+            <a:ext cx="5440680" cy="329184"/>
+          </a:xfrm>
+          <a:prstGeom prst="rect">
+            <a:avLst/>
+          </a:prstGeom>
+          <a:noFill/>
+        </p:spPr>
+        <p:txBody>
+          <a:bodyPr wrap="square">
+            <a:spAutoFit/>
+          </a:bodyPr>
+          <a:lstStyle/>
+          <a:p>
+            <a:pPr algn="l"/>
+            <a:r>
+              <a:rPr sz="1000" b="0" i="0">
+                <a:solidFill>
+                  <a:srgbClr val="1A1A1A"/>
+                </a:solidFill>
+              </a:rPr>
+              <a:t>• Adapter votre script à chaque donateur rencontré</a:t>
+            </a:r>
+          </a:p>
+        </p:txBody>
+      </p:sp>
+      <p:sp>
+        <p:nvSpPr>
+          <p:cNvPr id="28" name="Rectangle 27"/>
+          <p:cNvSpPr/>
+          <p:nvPr/>
+        </p:nvSpPr>
+        <p:spPr>
+          <a:xfrm>
+            <a:off x="6355080" y="2048256"/>
+            <a:ext cx="5669280" cy="402336"/>
+          </a:xfrm>
+          <a:prstGeom prst="rect">
+            <a:avLst/>
+          </a:prstGeom>
+          <a:solidFill>
+            <a:srgbClr val="F0F7F7"/>
+          </a:solidFill>
+          <a:ln w="5080">
+            <a:solidFill>
+              <a:srgbClr val="008080"/>
+            </a:solidFill>
+          </a:ln>
+        </p:spPr>
+        <p:style>
+          <a:lnRef idx="1">
+            <a:schemeClr val="accent1"/>
+          </a:lnRef>
+          <a:fillRef idx="3">
+            <a:schemeClr val="accent1"/>
+          </a:fillRef>
+          <a:effectRef idx="2">
+            <a:schemeClr val="accent1"/>
+          </a:effectRef>
+          <a:fontRef idx="minor">
+            <a:schemeClr val="lt1"/>
+          </a:fontRef>
+        </p:style>
+        <p:txBody>
+          <a:bodyPr rtlCol="0" anchor="ctr"/>
+          <a:lstStyle/>
+          <a:p>
+            <a:pPr algn="ctr"/>
+          </a:p>
+        </p:txBody>
+      </p:sp>
+      <p:sp>
+        <p:nvSpPr>
+          <p:cNvPr id="29" name="TextBox 28"/>
+          <p:cNvSpPr txBox="1"/>
+          <p:nvPr/>
+        </p:nvSpPr>
+        <p:spPr>
+          <a:xfrm>
+            <a:off x="6483096" y="2103120"/>
+            <a:ext cx="5440680" cy="329184"/>
+          </a:xfrm>
+          <a:prstGeom prst="rect">
+            <a:avLst/>
+          </a:prstGeom>
+          <a:noFill/>
+        </p:spPr>
+        <p:txBody>
+          <a:bodyPr wrap="square">
+            <a:spAutoFit/>
+          </a:bodyPr>
+          <a:lstStyle/>
+          <a:p>
+            <a:pPr algn="l"/>
+            <a:r>
+              <a:rPr sz="1000" b="0" i="0">
+                <a:solidFill>
+                  <a:srgbClr val="1A1A1A"/>
+                </a:solidFill>
+              </a:rPr>
+              <a:t>• Analyser votre propre performance et vous corriger</a:t>
+            </a:r>
+          </a:p>
+        </p:txBody>
+      </p:sp>
+      <p:sp>
+        <p:nvSpPr>
+          <p:cNvPr id="30" name="Rectangle 29"/>
+          <p:cNvSpPr/>
+          <p:nvPr/>
+        </p:nvSpPr>
+        <p:spPr>
+          <a:xfrm>
+            <a:off x="6355080" y="2468880"/>
+            <a:ext cx="5669280" cy="402336"/>
+          </a:xfrm>
+          <a:prstGeom prst="rect">
+            <a:avLst/>
+          </a:prstGeom>
+          <a:solidFill>
+            <a:srgbClr val="F0F7F7"/>
+          </a:solidFill>
+          <a:ln w="5080">
+            <a:solidFill>
+              <a:srgbClr val="008080"/>
+            </a:solidFill>
+          </a:ln>
+        </p:spPr>
+        <p:style>
+          <a:lnRef idx="1">
+            <a:schemeClr val="accent1"/>
+          </a:lnRef>
+          <a:fillRef idx="3">
+            <a:schemeClr val="accent1"/>
+          </a:fillRef>
+          <a:effectRef idx="2">
+            <a:schemeClr val="accent1"/>
+          </a:effectRef>
+          <a:fontRef idx="minor">
+            <a:schemeClr val="lt1"/>
+          </a:fontRef>
+        </p:style>
+        <p:txBody>
+          <a:bodyPr rtlCol="0" anchor="ctr"/>
+          <a:lstStyle/>
+          <a:p>
+            <a:pPr algn="ctr"/>
+          </a:p>
+        </p:txBody>
+      </p:sp>
+      <p:sp>
+        <p:nvSpPr>
+          <p:cNvPr id="31" name="TextBox 30"/>
+          <p:cNvSpPr txBox="1"/>
+          <p:nvPr/>
+        </p:nvSpPr>
+        <p:spPr>
+          <a:xfrm>
+            <a:off x="6483096" y="2523744"/>
+            <a:ext cx="5440680" cy="329184"/>
+          </a:xfrm>
+          <a:prstGeom prst="rect">
+            <a:avLst/>
+          </a:prstGeom>
+          <a:noFill/>
+        </p:spPr>
+        <p:txBody>
+          <a:bodyPr wrap="square">
+            <a:spAutoFit/>
+          </a:bodyPr>
+          <a:lstStyle/>
+          <a:p>
+            <a:pPr algn="l"/>
+            <a:r>
+              <a:rPr sz="1000" b="0" i="0">
+                <a:solidFill>
+                  <a:srgbClr val="1A1A1A"/>
+                </a:solidFill>
+              </a:rPr>
+              <a:t>• Respecter la déontologie fundraiser en toute situation</a:t>
+            </a:r>
+          </a:p>
+        </p:txBody>
+      </p:sp>
+      <p:sp>
+        <p:nvSpPr>
+          <p:cNvPr id="32" name="Rectangle 31"/>
+          <p:cNvSpPr/>
+          <p:nvPr/>
+        </p:nvSpPr>
+        <p:spPr>
+          <a:xfrm>
+            <a:off x="6355080" y="2889504"/>
+            <a:ext cx="5669280" cy="402336"/>
+          </a:xfrm>
+          <a:prstGeom prst="rect">
+            <a:avLst/>
+          </a:prstGeom>
+          <a:solidFill>
+            <a:srgbClr val="F0F7F7"/>
+          </a:solidFill>
+          <a:ln w="5080">
+            <a:solidFill>
+              <a:srgbClr val="008080"/>
+            </a:solidFill>
+          </a:ln>
+        </p:spPr>
+        <p:style>
+          <a:lnRef idx="1">
+            <a:schemeClr val="accent1"/>
+          </a:lnRef>
+          <a:fillRef idx="3">
+            <a:schemeClr val="accent1"/>
+          </a:fillRef>
+          <a:effectRef idx="2">
+            <a:schemeClr val="accent1"/>
+          </a:effectRef>
+          <a:fontRef idx="minor">
+            <a:schemeClr val="lt1"/>
+          </a:fontRef>
+        </p:style>
+        <p:txBody>
+          <a:bodyPr rtlCol="0" anchor="ctr"/>
+          <a:lstStyle/>
+          <a:p>
+            <a:pPr algn="ctr"/>
+          </a:p>
+        </p:txBody>
+      </p:sp>
+      <p:sp>
+        <p:nvSpPr>
+          <p:cNvPr id="33" name="TextBox 32"/>
+          <p:cNvSpPr txBox="1"/>
+          <p:nvPr/>
+        </p:nvSpPr>
+        <p:spPr>
+          <a:xfrm>
+            <a:off x="6483096" y="2944368"/>
+            <a:ext cx="5440680" cy="329184"/>
+          </a:xfrm>
+          <a:prstGeom prst="rect">
+            <a:avLst/>
+          </a:prstGeom>
+          <a:noFill/>
+        </p:spPr>
+        <p:txBody>
+          <a:bodyPr wrap="square">
+            <a:spAutoFit/>
+          </a:bodyPr>
+          <a:lstStyle/>
+          <a:p>
+            <a:pPr algn="l"/>
+            <a:r>
+              <a:rPr sz="1000" b="0" i="0">
+                <a:solidFill>
+                  <a:srgbClr val="1A1A1A"/>
+                </a:solidFill>
+              </a:rPr>
+              <a:t>• Construire votre plan d'action personnel pour J+30</a:t>
+            </a:r>
+          </a:p>
+        </p:txBody>
+      </p:sp>
+      <p:sp>
+        <p:nvSpPr>
+          <p:cNvPr id="34" name="Rectangle 33"/>
+          <p:cNvSpPr/>
+          <p:nvPr/>
+        </p:nvSpPr>
+        <p:spPr>
+          <a:xfrm>
+            <a:off x="274320" y="5486400"/>
+            <a:ext cx="11640312" cy="274320"/>
+          </a:xfrm>
+          <a:prstGeom prst="rect">
+            <a:avLst/>
+          </a:prstGeom>
+          <a:solidFill>
+            <a:srgbClr val="FF0000"/>
+          </a:solidFill>
+          <a:ln>
+            <a:noFill/>
+          </a:ln>
+        </p:spPr>
+        <p:style>
+          <a:lnRef idx="1">
+            <a:schemeClr val="accent1"/>
+          </a:lnRef>
+          <a:fillRef idx="3">
+            <a:schemeClr val="accent1"/>
+          </a:fillRef>
+          <a:effectRef idx="2">
+            <a:schemeClr val="accent1"/>
+          </a:effectRef>
+          <a:fontRef idx="minor">
+            <a:schemeClr val="lt1"/>
+          </a:fontRef>
+        </p:style>
+        <p:txBody>
+          <a:bodyPr rtlCol="0" anchor="ctr"/>
+          <a:lstStyle/>
+          <a:p>
+            <a:pPr algn="ctr"/>
+          </a:p>
+        </p:txBody>
+      </p:sp>
+      <p:sp>
+        <p:nvSpPr>
+          <p:cNvPr id="35" name="TextBox 34"/>
+          <p:cNvSpPr txBox="1"/>
+          <p:nvPr/>
+        </p:nvSpPr>
+        <p:spPr>
+          <a:xfrm>
+            <a:off x="384048" y="5522976"/>
+            <a:ext cx="11430000" cy="219456"/>
+          </a:xfrm>
+          <a:prstGeom prst="rect">
+            <a:avLst/>
+          </a:prstGeom>
+          <a:noFill/>
+        </p:spPr>
+        <p:txBody>
+          <a:bodyPr wrap="square">
+            <a:spAutoFit/>
+          </a:bodyPr>
+          <a:lstStyle/>
+          <a:p>
+            <a:pPr algn="l"/>
+            <a:r>
+              <a:rPr sz="900" b="1" i="0">
+                <a:solidFill>
+                  <a:srgbClr val="FFFFFF"/>
+                </a:solidFill>
+              </a:rPr>
+              <a:t>Vos jalons de progression</a:t>
+            </a:r>
+          </a:p>
+        </p:txBody>
+      </p:sp>
+      <p:sp>
+        <p:nvSpPr>
+          <p:cNvPr id="36" name="Rectangle 35"/>
+          <p:cNvSpPr/>
+          <p:nvPr/>
+        </p:nvSpPr>
+        <p:spPr>
+          <a:xfrm>
+            <a:off x="274320" y="5779008"/>
+            <a:ext cx="2873502" cy="502920"/>
+          </a:xfrm>
+          <a:prstGeom prst="rect">
+            <a:avLst/>
+          </a:prstGeom>
+          <a:solidFill>
+            <a:srgbClr val="FFFFFF"/>
+          </a:solidFill>
+          <a:ln w="10160">
+            <a:solidFill>
+              <a:srgbClr val="FF0000"/>
+            </a:solidFill>
+          </a:ln>
+        </p:spPr>
+        <p:style>
+          <a:lnRef idx="1">
+            <a:schemeClr val="accent1"/>
+          </a:lnRef>
+          <a:fillRef idx="3">
+            <a:schemeClr val="accent1"/>
+          </a:fillRef>
+          <a:effectRef idx="2">
+            <a:schemeClr val="accent1"/>
+          </a:effectRef>
+          <a:fontRef idx="minor">
+            <a:schemeClr val="lt1"/>
+          </a:fontRef>
+        </p:style>
+        <p:txBody>
+          <a:bodyPr rtlCol="0" anchor="ctr"/>
+          <a:lstStyle/>
+          <a:p>
+            <a:pPr algn="ctr"/>
+          </a:p>
+        </p:txBody>
+      </p:sp>
+      <p:sp>
+        <p:nvSpPr>
+          <p:cNvPr id="37" name="TextBox 36"/>
+          <p:cNvSpPr txBox="1"/>
+          <p:nvPr/>
+        </p:nvSpPr>
+        <p:spPr>
+          <a:xfrm>
+            <a:off x="365760" y="5815584"/>
+            <a:ext cx="2745486" cy="420624"/>
           </a:xfrm>
           <a:prstGeom prst="rect">
             <a:avLst/>
@@ -6537,21 +7075,66 @@
                   <a:srgbClr val="1A1A1A"/>
                 </a:solidFill>
               </a:rPr>
-              <a:t>✓ Auto-positionnement C1–C7 (0/1/2/3) → LFI page 1</a:t>
-            </a:r>
-          </a:p>
-        </p:txBody>
-      </p:sp>
-      <p:sp>
-        <p:nvSpPr>
-          <p:cNvPr id="22" name="TextBox 21"/>
+              <a:t>✔ Dès J1 : posture et pitch 60s</a:t>
+            </a:r>
+          </a:p>
+        </p:txBody>
+      </p:sp>
+      <p:sp>
+        <p:nvSpPr>
+          <p:cNvPr id="38" name="Rectangle 37"/>
+          <p:cNvSpPr/>
+          <p:nvPr/>
+        </p:nvSpPr>
+        <p:spPr>
+          <a:xfrm>
+            <a:off x="3184398" y="5779008"/>
+            <a:ext cx="2873502" cy="502920"/>
+          </a:xfrm>
+          <a:prstGeom prst="rect">
+            <a:avLst/>
+          </a:prstGeom>
+          <a:solidFill>
+            <a:srgbClr val="FFFFFF"/>
+          </a:solidFill>
+          <a:ln w="10160">
+            <a:solidFill>
+              <a:srgbClr val="FF0000"/>
+            </a:solidFill>
+          </a:ln>
+        </p:spPr>
+        <p:style>
+          <a:lnRef idx="1">
+            <a:schemeClr val="accent1"/>
+          </a:lnRef>
+          <a:fillRef idx="3">
+            <a:schemeClr val="accent1"/>
+          </a:fillRef>
+          <a:effectRef idx="2">
+            <a:schemeClr val="accent1"/>
+          </a:effectRef>
+          <a:fontRef idx="minor">
+            <a:schemeClr val="lt1"/>
+          </a:fontRef>
+        </p:style>
+        <p:txBody>
+          <a:bodyPr rtlCol="0" anchor="ctr"/>
+          <a:lstStyle/>
+          <a:p>
+            <a:pPr algn="ctr"/>
+          </a:p>
+        </p:txBody>
+      </p:sp>
+      <p:sp>
+        <p:nvSpPr>
+          <p:cNvPr id="39" name="TextBox 38"/>
           <p:cNvSpPr txBox="1"/>
           <p:nvPr/>
         </p:nvSpPr>
         <p:spPr>
           <a:xfrm>
-            <a:off x="4175760" y="5779008"/>
-            <a:ext cx="3718560" cy="502920"/>
+            <a:off x="3275838" y="5815584"/>
+            <a:ext cx="2745486" cy="420624"/>
           </a:xfrm>
           <a:prstGeom prst="rect">
             <a:avLst/>
@@ -6571,21 +7154,66 @@
                   <a:srgbClr val="1A1A1A"/>
                 </a:solidFill>
               </a:rPr>
-              <a:t>✓ Engagement écrit sur 1 compétence prioritaire à développer</a:t>
-            </a:r>
-          </a:p>
-        </p:txBody>
-      </p:sp>
-      <p:sp>
-        <p:nvSpPr>
-          <p:cNvPr id="23" name="TextBox 22"/>
+              <a:t>✔ Dès J3 : script complet maîtrisé</a:t>
+            </a:r>
+          </a:p>
+        </p:txBody>
+      </p:sp>
+      <p:sp>
+        <p:nvSpPr>
+          <p:cNvPr id="40" name="Rectangle 39"/>
+          <p:cNvSpPr/>
+          <p:nvPr/>
+        </p:nvSpPr>
+        <p:spPr>
+          <a:xfrm>
+            <a:off x="6094476" y="5779008"/>
+            <a:ext cx="2873502" cy="502920"/>
+          </a:xfrm>
+          <a:prstGeom prst="rect">
+            <a:avLst/>
+          </a:prstGeom>
+          <a:solidFill>
+            <a:srgbClr val="FFFFFF"/>
+          </a:solidFill>
+          <a:ln w="10160">
+            <a:solidFill>
+              <a:srgbClr val="FF0000"/>
+            </a:solidFill>
+          </a:ln>
+        </p:spPr>
+        <p:style>
+          <a:lnRef idx="1">
+            <a:schemeClr val="accent1"/>
+          </a:lnRef>
+          <a:fillRef idx="3">
+            <a:schemeClr val="accent1"/>
+          </a:fillRef>
+          <a:effectRef idx="2">
+            <a:schemeClr val="accent1"/>
+          </a:effectRef>
+          <a:fontRef idx="minor">
+            <a:schemeClr val="lt1"/>
+          </a:fontRef>
+        </p:style>
+        <p:txBody>
+          <a:bodyPr rtlCol="0" anchor="ctr"/>
+          <a:lstStyle/>
+          <a:p>
+            <a:pPr algn="ctr"/>
+          </a:p>
+        </p:txBody>
+      </p:sp>
+      <p:sp>
+        <p:nvSpPr>
+          <p:cNvPr id="41" name="TextBox 40"/>
           <p:cNvSpPr txBox="1"/>
           <p:nvPr/>
         </p:nvSpPr>
         <p:spPr>
           <a:xfrm>
-            <a:off x="7985760" y="5779008"/>
-            <a:ext cx="3718560" cy="502920"/>
+            <a:off x="6185916" y="5815584"/>
+            <a:ext cx="2745486" cy="420624"/>
           </a:xfrm>
           <a:prstGeom prst="rect">
             <a:avLst/>
@@ -6605,64 +7233,32 @@
                   <a:srgbClr val="1A1A1A"/>
                 </a:solidFill>
               </a:rPr>
-              <a:t>✓ NPS d'anticipation : 'Sur 10, je me sens prêt(e) à quel niveau ?'</a:t>
-            </a:r>
-          </a:p>
-        </p:txBody>
-      </p:sp>
-      <p:sp>
-        <p:nvSpPr>
-          <p:cNvPr id="24" name="TextBox 23"/>
-          <p:cNvSpPr txBox="1"/>
-          <p:nvPr/>
-        </p:nvSpPr>
-        <p:spPr>
-          <a:xfrm>
-            <a:off x="274320" y="5047488"/>
-            <a:ext cx="2743200" cy="256032"/>
-          </a:xfrm>
-          <a:prstGeom prst="rect">
-            <a:avLst/>
-          </a:prstGeom>
-          <a:noFill/>
-        </p:spPr>
-        <p:txBody>
-          <a:bodyPr wrap="square">
-            <a:spAutoFit/>
-          </a:bodyPr>
-          <a:lstStyle/>
-          <a:p>
-            <a:pPr algn="l"/>
-            <a:r>
-              <a:rPr sz="900" b="1" i="0">
-                <a:solidFill>
-                  <a:srgbClr val="005050"/>
-                </a:solidFill>
-              </a:rPr>
-              <a:t>Taxonomie de Bloom :</a:t>
-            </a:r>
-          </a:p>
-        </p:txBody>
-      </p:sp>
-      <p:sp>
-        <p:nvSpPr>
-          <p:cNvPr id="25" name="Rectangle 24"/>
+              <a:t>✔ Dès J4 : objections gérées</a:t>
+            </a:r>
+          </a:p>
+        </p:txBody>
+      </p:sp>
+      <p:sp>
+        <p:nvSpPr>
+          <p:cNvPr id="42" name="Rectangle 41"/>
           <p:cNvSpPr/>
           <p:nvPr/>
         </p:nvSpPr>
         <p:spPr>
           <a:xfrm>
-            <a:off x="274320" y="5303520"/>
-            <a:ext cx="1920240" cy="320040"/>
-          </a:xfrm>
-          <a:prstGeom prst="rect">
-            <a:avLst/>
-          </a:prstGeom>
-          <a:solidFill>
-            <a:srgbClr val="78A5C5"/>
-          </a:solidFill>
-          <a:ln>
-            <a:noFill/>
+            <a:off x="9004554" y="5779008"/>
+            <a:ext cx="2873502" cy="502920"/>
+          </a:xfrm>
+          <a:prstGeom prst="rect">
+            <a:avLst/>
+          </a:prstGeom>
+          <a:solidFill>
+            <a:srgbClr val="FFFFFF"/>
+          </a:solidFill>
+          <a:ln w="10160">
+            <a:solidFill>
+              <a:srgbClr val="FF0000"/>
+            </a:solidFill>
           </a:ln>
         </p:spPr>
         <p:style>
@@ -6689,14 +7285,14 @@
       </p:sp>
       <p:sp>
         <p:nvSpPr>
-          <p:cNvPr id="26" name="TextBox 25"/>
+          <p:cNvPr id="43" name="TextBox 42"/>
           <p:cNvSpPr txBox="1"/>
           <p:nvPr/>
         </p:nvSpPr>
         <p:spPr>
           <a:xfrm>
-            <a:off x="320040" y="5340096"/>
-            <a:ext cx="1828800" cy="256032"/>
+            <a:off x="9095994" y="5815584"/>
+            <a:ext cx="2745486" cy="420624"/>
           </a:xfrm>
           <a:prstGeom prst="rect">
             <a:avLst/>
@@ -6709,399 +7305,14 @@
           </a:bodyPr>
           <a:lstStyle/>
           <a:p>
-            <a:pPr algn="ctr"/>
-            <a:r>
-              <a:rPr sz="800" b="1" i="0">
+            <a:pPr algn="l"/>
+            <a:r>
+              <a:rPr sz="900" b="0" i="0">
                 <a:solidFill>
-                  <a:srgbClr val="FFFFFF"/>
+                  <a:srgbClr val="1A1A1A"/>
                 </a:solidFill>
               </a:rPr>
-              <a:t>1 Se souvenir</a:t>
-            </a:r>
-          </a:p>
-        </p:txBody>
-      </p:sp>
-      <p:sp>
-        <p:nvSpPr>
-          <p:cNvPr id="27" name="Rectangle 26"/>
-          <p:cNvSpPr/>
-          <p:nvPr/>
-        </p:nvSpPr>
-        <p:spPr>
-          <a:xfrm>
-            <a:off x="2212848" y="5303520"/>
-            <a:ext cx="1920240" cy="320040"/>
-          </a:xfrm>
-          <a:prstGeom prst="rect">
-            <a:avLst/>
-          </a:prstGeom>
-          <a:solidFill>
-            <a:srgbClr val="5D9EA6"/>
-          </a:solidFill>
-          <a:ln>
-            <a:noFill/>
-          </a:ln>
-        </p:spPr>
-        <p:style>
-          <a:lnRef idx="1">
-            <a:schemeClr val="accent1"/>
-          </a:lnRef>
-          <a:fillRef idx="3">
-            <a:schemeClr val="accent1"/>
-          </a:fillRef>
-          <a:effectRef idx="2">
-            <a:schemeClr val="accent1"/>
-          </a:effectRef>
-          <a:fontRef idx="minor">
-            <a:schemeClr val="lt1"/>
-          </a:fontRef>
-        </p:style>
-        <p:txBody>
-          <a:bodyPr rtlCol="0" anchor="ctr"/>
-          <a:lstStyle/>
-          <a:p>
-            <a:pPr algn="ctr"/>
-          </a:p>
-        </p:txBody>
-      </p:sp>
-      <p:sp>
-        <p:nvSpPr>
-          <p:cNvPr id="28" name="TextBox 27"/>
-          <p:cNvSpPr txBox="1"/>
-          <p:nvPr/>
-        </p:nvSpPr>
-        <p:spPr>
-          <a:xfrm>
-            <a:off x="2258568" y="5340096"/>
-            <a:ext cx="1828800" cy="256032"/>
-          </a:xfrm>
-          <a:prstGeom prst="rect">
-            <a:avLst/>
-          </a:prstGeom>
-          <a:noFill/>
-        </p:spPr>
-        <p:txBody>
-          <a:bodyPr wrap="square">
-            <a:spAutoFit/>
-          </a:bodyPr>
-          <a:lstStyle/>
-          <a:p>
-            <a:pPr algn="ctr"/>
-            <a:r>
-              <a:rPr sz="800" b="1" i="0">
-                <a:solidFill>
-                  <a:srgbClr val="FFFFFF"/>
-                </a:solidFill>
-              </a:rPr>
-              <a:t>2 Comprendre</a:t>
-            </a:r>
-          </a:p>
-        </p:txBody>
-      </p:sp>
-      <p:sp>
-        <p:nvSpPr>
-          <p:cNvPr id="29" name="Rectangle 28"/>
-          <p:cNvSpPr/>
-          <p:nvPr/>
-        </p:nvSpPr>
-        <p:spPr>
-          <a:xfrm>
-            <a:off x="4151376" y="5303520"/>
-            <a:ext cx="1920240" cy="320040"/>
-          </a:xfrm>
-          <a:prstGeom prst="rect">
-            <a:avLst/>
-          </a:prstGeom>
-          <a:solidFill>
-            <a:srgbClr val="4A9070"/>
-          </a:solidFill>
-          <a:ln>
-            <a:noFill/>
-          </a:ln>
-        </p:spPr>
-        <p:style>
-          <a:lnRef idx="1">
-            <a:schemeClr val="accent1"/>
-          </a:lnRef>
-          <a:fillRef idx="3">
-            <a:schemeClr val="accent1"/>
-          </a:fillRef>
-          <a:effectRef idx="2">
-            <a:schemeClr val="accent1"/>
-          </a:effectRef>
-          <a:fontRef idx="minor">
-            <a:schemeClr val="lt1"/>
-          </a:fontRef>
-        </p:style>
-        <p:txBody>
-          <a:bodyPr rtlCol="0" anchor="ctr"/>
-          <a:lstStyle/>
-          <a:p>
-            <a:pPr algn="ctr"/>
-          </a:p>
-        </p:txBody>
-      </p:sp>
-      <p:sp>
-        <p:nvSpPr>
-          <p:cNvPr id="30" name="TextBox 29"/>
-          <p:cNvSpPr txBox="1"/>
-          <p:nvPr/>
-        </p:nvSpPr>
-        <p:spPr>
-          <a:xfrm>
-            <a:off x="4197096" y="5340096"/>
-            <a:ext cx="1828800" cy="256032"/>
-          </a:xfrm>
-          <a:prstGeom prst="rect">
-            <a:avLst/>
-          </a:prstGeom>
-          <a:noFill/>
-        </p:spPr>
-        <p:txBody>
-          <a:bodyPr wrap="square">
-            <a:spAutoFit/>
-          </a:bodyPr>
-          <a:lstStyle/>
-          <a:p>
-            <a:pPr algn="ctr"/>
-            <a:r>
-              <a:rPr sz="800" b="1" i="0">
-                <a:solidFill>
-                  <a:srgbClr val="FFFFFF"/>
-                </a:solidFill>
-              </a:rPr>
-              <a:t>3 Appliquer</a:t>
-            </a:r>
-          </a:p>
-        </p:txBody>
-      </p:sp>
-      <p:sp>
-        <p:nvSpPr>
-          <p:cNvPr id="31" name="Rectangle 30"/>
-          <p:cNvSpPr/>
-          <p:nvPr/>
-        </p:nvSpPr>
-        <p:spPr>
-          <a:xfrm>
-            <a:off x="6089904" y="5303520"/>
-            <a:ext cx="1920240" cy="320040"/>
-          </a:xfrm>
-          <a:prstGeom prst="rect">
-            <a:avLst/>
-          </a:prstGeom>
-          <a:solidFill>
-            <a:srgbClr val="C9A84C"/>
-          </a:solidFill>
-          <a:ln>
-            <a:noFill/>
-          </a:ln>
-        </p:spPr>
-        <p:style>
-          <a:lnRef idx="1">
-            <a:schemeClr val="accent1"/>
-          </a:lnRef>
-          <a:fillRef idx="3">
-            <a:schemeClr val="accent1"/>
-          </a:fillRef>
-          <a:effectRef idx="2">
-            <a:schemeClr val="accent1"/>
-          </a:effectRef>
-          <a:fontRef idx="minor">
-            <a:schemeClr val="lt1"/>
-          </a:fontRef>
-        </p:style>
-        <p:txBody>
-          <a:bodyPr rtlCol="0" anchor="ctr"/>
-          <a:lstStyle/>
-          <a:p>
-            <a:pPr algn="ctr"/>
-          </a:p>
-        </p:txBody>
-      </p:sp>
-      <p:sp>
-        <p:nvSpPr>
-          <p:cNvPr id="32" name="TextBox 31"/>
-          <p:cNvSpPr txBox="1"/>
-          <p:nvPr/>
-        </p:nvSpPr>
-        <p:spPr>
-          <a:xfrm>
-            <a:off x="6135624" y="5340096"/>
-            <a:ext cx="1828800" cy="256032"/>
-          </a:xfrm>
-          <a:prstGeom prst="rect">
-            <a:avLst/>
-          </a:prstGeom>
-          <a:noFill/>
-        </p:spPr>
-        <p:txBody>
-          <a:bodyPr wrap="square">
-            <a:spAutoFit/>
-          </a:bodyPr>
-          <a:lstStyle/>
-          <a:p>
-            <a:pPr algn="ctr"/>
-            <a:r>
-              <a:rPr sz="800" b="1" i="0">
-                <a:solidFill>
-                  <a:srgbClr val="FFFFFF"/>
-                </a:solidFill>
-              </a:rPr>
-              <a:t>4 Analyser</a:t>
-            </a:r>
-          </a:p>
-        </p:txBody>
-      </p:sp>
-      <p:sp>
-        <p:nvSpPr>
-          <p:cNvPr id="33" name="Rectangle 32"/>
-          <p:cNvSpPr/>
-          <p:nvPr/>
-        </p:nvSpPr>
-        <p:spPr>
-          <a:xfrm>
-            <a:off x="8028432" y="5303520"/>
-            <a:ext cx="1920240" cy="320040"/>
-          </a:xfrm>
-          <a:prstGeom prst="rect">
-            <a:avLst/>
-          </a:prstGeom>
-          <a:solidFill>
-            <a:srgbClr val="D27A42"/>
-          </a:solidFill>
-          <a:ln>
-            <a:noFill/>
-          </a:ln>
-        </p:spPr>
-        <p:style>
-          <a:lnRef idx="1">
-            <a:schemeClr val="accent1"/>
-          </a:lnRef>
-          <a:fillRef idx="3">
-            <a:schemeClr val="accent1"/>
-          </a:fillRef>
-          <a:effectRef idx="2">
-            <a:schemeClr val="accent1"/>
-          </a:effectRef>
-          <a:fontRef idx="minor">
-            <a:schemeClr val="lt1"/>
-          </a:fontRef>
-        </p:style>
-        <p:txBody>
-          <a:bodyPr rtlCol="0" anchor="ctr"/>
-          <a:lstStyle/>
-          <a:p>
-            <a:pPr algn="ctr"/>
-          </a:p>
-        </p:txBody>
-      </p:sp>
-      <p:sp>
-        <p:nvSpPr>
-          <p:cNvPr id="34" name="TextBox 33"/>
-          <p:cNvSpPr txBox="1"/>
-          <p:nvPr/>
-        </p:nvSpPr>
-        <p:spPr>
-          <a:xfrm>
-            <a:off x="8074152" y="5340096"/>
-            <a:ext cx="1828800" cy="256032"/>
-          </a:xfrm>
-          <a:prstGeom prst="rect">
-            <a:avLst/>
-          </a:prstGeom>
-          <a:noFill/>
-        </p:spPr>
-        <p:txBody>
-          <a:bodyPr wrap="square">
-            <a:spAutoFit/>
-          </a:bodyPr>
-          <a:lstStyle/>
-          <a:p>
-            <a:pPr algn="ctr"/>
-            <a:r>
-              <a:rPr sz="800" b="1" i="0">
-                <a:solidFill>
-                  <a:srgbClr val="FFFFFF"/>
-                </a:solidFill>
-              </a:rPr>
-              <a:t>5 Évaluer</a:t>
-            </a:r>
-          </a:p>
-        </p:txBody>
-      </p:sp>
-      <p:sp>
-        <p:nvSpPr>
-          <p:cNvPr id="35" name="Rectangle 34"/>
-          <p:cNvSpPr/>
-          <p:nvPr/>
-        </p:nvSpPr>
-        <p:spPr>
-          <a:xfrm>
-            <a:off x="9966960" y="5303520"/>
-            <a:ext cx="1920240" cy="320040"/>
-          </a:xfrm>
-          <a:prstGeom prst="rect">
-            <a:avLst/>
-          </a:prstGeom>
-          <a:solidFill>
-            <a:srgbClr val="C0392B"/>
-          </a:solidFill>
-          <a:ln>
-            <a:noFill/>
-          </a:ln>
-        </p:spPr>
-        <p:style>
-          <a:lnRef idx="1">
-            <a:schemeClr val="accent1"/>
-          </a:lnRef>
-          <a:fillRef idx="3">
-            <a:schemeClr val="accent1"/>
-          </a:fillRef>
-          <a:effectRef idx="2">
-            <a:schemeClr val="accent1"/>
-          </a:effectRef>
-          <a:fontRef idx="minor">
-            <a:schemeClr val="lt1"/>
-          </a:fontRef>
-        </p:style>
-        <p:txBody>
-          <a:bodyPr rtlCol="0" anchor="ctr"/>
-          <a:lstStyle/>
-          <a:p>
-            <a:pPr algn="ctr"/>
-          </a:p>
-        </p:txBody>
-      </p:sp>
-      <p:sp>
-        <p:nvSpPr>
-          <p:cNvPr id="36" name="TextBox 35"/>
-          <p:cNvSpPr txBox="1"/>
-          <p:nvPr/>
-        </p:nvSpPr>
-        <p:spPr>
-          <a:xfrm>
-            <a:off x="10012680" y="5340096"/>
-            <a:ext cx="1828800" cy="256032"/>
-          </a:xfrm>
-          <a:prstGeom prst="rect">
-            <a:avLst/>
-          </a:prstGeom>
-          <a:noFill/>
-        </p:spPr>
-        <p:txBody>
-          <a:bodyPr wrap="square">
-            <a:spAutoFit/>
-          </a:bodyPr>
-          <a:lstStyle/>
-          <a:p>
-            <a:pPr algn="ctr"/>
-            <a:r>
-              <a:rPr sz="800" b="1" i="0">
-                <a:solidFill>
-                  <a:srgbClr val="FFFFFF"/>
-                </a:solidFill>
-              </a:rPr>
-              <a:t>6 Créer</a:t>
+              <a:t>✔ J5 : certification obtenue</a:t>
             </a:r>
           </a:p>
         </p:txBody>
@@ -7176,13 +7387,13 @@
         <p:spPr>
           <a:xfrm>
             <a:off x="0" y="0"/>
-            <a:ext cx="12188952" cy="685800"/>
-          </a:xfrm>
-          <a:prstGeom prst="rect">
-            <a:avLst/>
-          </a:prstGeom>
-          <a:solidFill>
-            <a:srgbClr val="005050"/>
+            <a:ext cx="12188952" cy="658368"/>
+          </a:xfrm>
+          <a:prstGeom prst="rect">
+            <a:avLst/>
+          </a:prstGeom>
+          <a:solidFill>
+            <a:srgbClr val="005555"/>
           </a:solidFill>
           <a:ln>
             <a:noFill/>
@@ -7218,14 +7429,14 @@
         </p:nvSpPr>
         <p:spPr>
           <a:xfrm>
-            <a:off x="0" y="667512"/>
-            <a:ext cx="12188952" cy="36576"/>
-          </a:xfrm>
-          <a:prstGeom prst="rect">
-            <a:avLst/>
-          </a:prstGeom>
-          <a:solidFill>
-            <a:srgbClr val="C9A84C"/>
+            <a:off x="0" y="640080"/>
+            <a:ext cx="12188952" cy="54864"/>
+          </a:xfrm>
+          <a:prstGeom prst="rect">
+            <a:avLst/>
+          </a:prstGeom>
+          <a:solidFill>
+            <a:srgbClr val="FF0000"/>
           </a:solidFill>
           <a:ln>
             <a:noFill/>
@@ -7261,8 +7472,8 @@
         </p:nvSpPr>
         <p:spPr>
           <a:xfrm>
-            <a:off x="274320" y="73152"/>
-            <a:ext cx="11612880" cy="566928"/>
+            <a:off x="164592" y="64008"/>
+            <a:ext cx="685800" cy="530352"/>
           </a:xfrm>
           <a:prstGeom prst="rect">
             <a:avLst/>
@@ -7277,12 +7488,12 @@
           <a:p>
             <a:pPr algn="l"/>
             <a:r>
-              <a:rPr sz="1800" b="1" i="0">
+              <a:rPr sz="2000" b="1" i="0">
                 <a:solidFill>
                   <a:srgbClr val="FFFFFF"/>
                 </a:solidFill>
               </a:rPr>
-              <a:t>Indicateurs de Réussite &amp; Modèle Kirkpatrick</a:t>
+              <a:t>SHY</a:t>
             </a:r>
           </a:p>
         </p:txBody>
@@ -7295,14 +7506,14 @@
         </p:nvSpPr>
         <p:spPr>
           <a:xfrm>
-            <a:off x="274320" y="822960"/>
-            <a:ext cx="2743200" cy="320040"/>
-          </a:xfrm>
-          <a:prstGeom prst="rect">
-            <a:avLst/>
-          </a:prstGeom>
-          <a:solidFill>
-            <a:srgbClr val="007A7A"/>
+            <a:off x="914400" y="91440"/>
+            <a:ext cx="36576" cy="475488"/>
+          </a:xfrm>
+          <a:prstGeom prst="rect">
+            <a:avLst/>
+          </a:prstGeom>
+          <a:solidFill>
+            <a:srgbClr val="FF0000"/>
           </a:solidFill>
           <a:ln>
             <a:noFill/>
@@ -7338,8 +7549,8 @@
         </p:nvSpPr>
         <p:spPr>
           <a:xfrm>
-            <a:off x="347472" y="877824"/>
-            <a:ext cx="2596896" cy="237744"/>
+            <a:off x="1024128" y="91440"/>
+            <a:ext cx="10881360" cy="475488"/>
           </a:xfrm>
           <a:prstGeom prst="rect">
             <a:avLst/>
@@ -7354,12 +7565,12 @@
           <a:p>
             <a:pPr algn="l"/>
             <a:r>
-              <a:rPr sz="1000" b="1" i="0">
+              <a:rPr sz="1700" b="1" i="0">
                 <a:solidFill>
                   <a:srgbClr val="FFFFFF"/>
                 </a:solidFill>
               </a:rPr>
-              <a:t>Niveau Kirkpatrick</a:t>
+              <a:t>Votre Progression — De Débutant à Fundraiser Certifié</a:t>
             </a:r>
           </a:p>
         </p:txBody>
@@ -7372,14 +7583,14 @@
         </p:nvSpPr>
         <p:spPr>
           <a:xfrm>
-            <a:off x="3035808" y="822960"/>
-            <a:ext cx="2743200" cy="320040"/>
-          </a:xfrm>
-          <a:prstGeom prst="rect">
-            <a:avLst/>
-          </a:prstGeom>
-          <a:solidFill>
-            <a:srgbClr val="007A7A"/>
+            <a:off x="0" y="6492240"/>
+            <a:ext cx="12188952" cy="365760"/>
+          </a:xfrm>
+          <a:prstGeom prst="rect">
+            <a:avLst/>
+          </a:prstGeom>
+          <a:solidFill>
+            <a:srgbClr val="005555"/>
           </a:solidFill>
           <a:ln>
             <a:noFill/>
@@ -7415,8 +7626,8 @@
         </p:nvSpPr>
         <p:spPr>
           <a:xfrm>
-            <a:off x="3108960" y="877824"/>
-            <a:ext cx="2596896" cy="237744"/>
+            <a:off x="0" y="6519672"/>
+            <a:ext cx="12188952" cy="274320"/>
           </a:xfrm>
           <a:prstGeom prst="rect">
             <a:avLst/>
@@ -7429,14 +7640,14 @@
           </a:bodyPr>
           <a:lstStyle/>
           <a:p>
-            <a:pPr algn="l"/>
-            <a:r>
-              <a:rPr sz="1000" b="1" i="0">
+            <a:pPr algn="ctr"/>
+            <a:r>
+              <a:rPr sz="900" b="0" i="0">
                 <a:solidFill>
                   <a:srgbClr val="FFFFFF"/>
                 </a:solidFill>
               </a:rPr>
-              <a:t>Dimension</a:t>
+              <a:t>SHY-Performance  ·  Formation FIM  ·  V6-01062026SHY-TE</a:t>
             </a:r>
           </a:p>
         </p:txBody>
@@ -7449,14 +7660,14 @@
         </p:nvSpPr>
         <p:spPr>
           <a:xfrm>
-            <a:off x="5797296" y="822960"/>
-            <a:ext cx="3657600" cy="320040"/>
-          </a:xfrm>
-          <a:prstGeom prst="rect">
-            <a:avLst/>
-          </a:prstGeom>
-          <a:solidFill>
-            <a:srgbClr val="007A7A"/>
+            <a:off x="274320" y="804672"/>
+            <a:ext cx="2834640" cy="502920"/>
+          </a:xfrm>
+          <a:prstGeom prst="rect">
+            <a:avLst/>
+          </a:prstGeom>
+          <a:solidFill>
+            <a:srgbClr val="555555"/>
           </a:solidFill>
           <a:ln>
             <a:noFill/>
@@ -7492,8 +7703,8 @@
         </p:nvSpPr>
         <p:spPr>
           <a:xfrm>
-            <a:off x="5870448" y="877824"/>
-            <a:ext cx="3511296" cy="237744"/>
+            <a:off x="384048" y="822960"/>
+            <a:ext cx="2615184" cy="466344"/>
           </a:xfrm>
           <a:prstGeom prst="rect">
             <a:avLst/>
@@ -7506,14 +7717,15 @@
           </a:bodyPr>
           <a:lstStyle/>
           <a:p>
-            <a:pPr algn="l"/>
-            <a:r>
-              <a:rPr sz="1000" b="1" i="0">
+            <a:pPr algn="ctr"/>
+            <a:r>
+              <a:rPr sz="1100" b="1" i="0">
                 <a:solidFill>
                   <a:srgbClr val="FFFFFF"/>
                 </a:solidFill>
               </a:rPr>
-              <a:t>Outil de mesure</a:t>
+              <a:t>Avant la
+formation</a:t>
             </a:r>
           </a:p>
         </p:txBody>
@@ -7526,17 +7738,19 @@
         </p:nvSpPr>
         <p:spPr>
           <a:xfrm>
-            <a:off x="9473184" y="822960"/>
-            <a:ext cx="2468880" cy="320040"/>
-          </a:xfrm>
-          <a:prstGeom prst="rect">
-            <a:avLst/>
-          </a:prstGeom>
-          <a:solidFill>
-            <a:srgbClr val="007A7A"/>
-          </a:solidFill>
-          <a:ln>
-            <a:noFill/>
+            <a:off x="274320" y="1307592"/>
+            <a:ext cx="2834640" cy="3749039"/>
+          </a:xfrm>
+          <a:prstGeom prst="rect">
+            <a:avLst/>
+          </a:prstGeom>
+          <a:solidFill>
+            <a:srgbClr val="EEEEEE"/>
+          </a:solidFill>
+          <a:ln w="19050">
+            <a:solidFill>
+              <a:srgbClr val="555555"/>
+            </a:solidFill>
           </a:ln>
         </p:spPr>
         <p:style>
@@ -7569,8 +7783,8 @@
         </p:nvSpPr>
         <p:spPr>
           <a:xfrm>
-            <a:off x="9546336" y="877824"/>
-            <a:ext cx="2322576" cy="237744"/>
+            <a:off x="411479" y="1417320"/>
+            <a:ext cx="2560320" cy="3474720"/>
           </a:xfrm>
           <a:prstGeom prst="rect">
             <a:avLst/>
@@ -7585,37 +7799,72 @@
           <a:p>
             <a:pPr algn="l"/>
             <a:r>
-              <a:rPr sz="1000" b="1" i="0">
+              <a:rPr sz="1200" b="0" i="0">
                 <a:solidFill>
-                  <a:srgbClr val="FFFFFF"/>
+                  <a:srgbClr val="1A1A1A"/>
                 </a:solidFill>
               </a:rPr>
-              <a:t>Seuil de réussite</a:t>
-            </a:r>
-          </a:p>
-        </p:txBody>
-      </p:sp>
-      <p:sp>
-        <p:nvSpPr>
-          <p:cNvPr id="14" name="Rectangle 13"/>
+              <a:t>Vous connaissez peu le
+fundraising de rue.
+Vous appréhendez peut-être
+le premier contact.</a:t>
+            </a:r>
+          </a:p>
+        </p:txBody>
+      </p:sp>
+      <p:sp>
+        <p:nvSpPr>
+          <p:cNvPr id="14" name="TextBox 13"/>
+          <p:cNvSpPr txBox="1"/>
+          <p:nvPr/>
+        </p:nvSpPr>
+        <p:spPr>
+          <a:xfrm>
+            <a:off x="3127248" y="2468880"/>
+            <a:ext cx="274320" cy="731520"/>
+          </a:xfrm>
+          <a:prstGeom prst="rect">
+            <a:avLst/>
+          </a:prstGeom>
+          <a:noFill/>
+        </p:spPr>
+        <p:txBody>
+          <a:bodyPr wrap="square">
+            <a:spAutoFit/>
+          </a:bodyPr>
+          <a:lstStyle/>
+          <a:p>
+            <a:pPr algn="l"/>
+            <a:r>
+              <a:rPr sz="2200" b="1" i="0">
+                <a:solidFill>
+                  <a:srgbClr val="008080"/>
+                </a:solidFill>
+              </a:rPr>
+              <a:t>→</a:t>
+            </a:r>
+          </a:p>
+        </p:txBody>
+      </p:sp>
+      <p:sp>
+        <p:nvSpPr>
+          <p:cNvPr id="15" name="Rectangle 14"/>
           <p:cNvSpPr/>
           <p:nvPr/>
         </p:nvSpPr>
         <p:spPr>
           <a:xfrm>
-            <a:off x="274320" y="1170432"/>
-            <a:ext cx="2743200" cy="548640"/>
-          </a:xfrm>
-          <a:prstGeom prst="rect">
-            <a:avLst/>
-          </a:prstGeom>
-          <a:solidFill>
-            <a:srgbClr val="F0F7F7"/>
-          </a:solidFill>
-          <a:ln w="6350">
-            <a:solidFill>
-              <a:srgbClr val="007A7A"/>
-            </a:solidFill>
+            <a:off x="3255263" y="804672"/>
+            <a:ext cx="2834640" cy="502920"/>
+          </a:xfrm>
+          <a:prstGeom prst="rect">
+            <a:avLst/>
+          </a:prstGeom>
+          <a:solidFill>
+            <a:srgbClr val="008080"/>
+          </a:solidFill>
+          <a:ln>
+            <a:noFill/>
           </a:ln>
         </p:spPr>
         <p:style>
@@ -7642,14 +7891,14 @@
       </p:sp>
       <p:sp>
         <p:nvSpPr>
-          <p:cNvPr id="15" name="TextBox 14"/>
+          <p:cNvPr id="16" name="TextBox 15"/>
           <p:cNvSpPr txBox="1"/>
           <p:nvPr/>
         </p:nvSpPr>
         <p:spPr>
           <a:xfrm>
-            <a:off x="347472" y="1225296"/>
-            <a:ext cx="2596896" cy="457200"/>
+            <a:off x="3364991" y="822960"/>
+            <a:ext cx="2615184" cy="466344"/>
           </a:xfrm>
           <a:prstGeom prst="rect">
             <a:avLst/>
@@ -7662,28 +7911,28 @@
           </a:bodyPr>
           <a:lstStyle/>
           <a:p>
-            <a:pPr algn="l"/>
-            <a:r>
-              <a:rPr sz="1000" b="1" i="0">
+            <a:pPr algn="ctr"/>
+            <a:r>
+              <a:rPr sz="1100" b="1" i="0">
                 <a:solidFill>
-                  <a:srgbClr val="005050"/>
+                  <a:srgbClr val="FFFFFF"/>
                 </a:solidFill>
               </a:rPr>
-              <a:t>Niv. 1 — Réaction</a:t>
-            </a:r>
-          </a:p>
-        </p:txBody>
-      </p:sp>
-      <p:sp>
-        <p:nvSpPr>
-          <p:cNvPr id="16" name="Rectangle 15"/>
+              <a:t>Après J1–J2</a:t>
+            </a:r>
+          </a:p>
+        </p:txBody>
+      </p:sp>
+      <p:sp>
+        <p:nvSpPr>
+          <p:cNvPr id="17" name="Rectangle 16"/>
           <p:cNvSpPr/>
           <p:nvPr/>
         </p:nvSpPr>
         <p:spPr>
           <a:xfrm>
-            <a:off x="3035808" y="1170432"/>
-            <a:ext cx="2743200" cy="548640"/>
+            <a:off x="3255263" y="1307592"/>
+            <a:ext cx="2834640" cy="3749039"/>
           </a:xfrm>
           <a:prstGeom prst="rect">
             <a:avLst/>
@@ -7691,9 +7940,9 @@
           <a:solidFill>
             <a:srgbClr val="F0F7F7"/>
           </a:solidFill>
-          <a:ln w="6350">
+          <a:ln w="19050">
             <a:solidFill>
-              <a:srgbClr val="007A7A"/>
+              <a:srgbClr val="008080"/>
             </a:solidFill>
           </a:ln>
         </p:spPr>
@@ -7721,14 +7970,14 @@
       </p:sp>
       <p:sp>
         <p:nvSpPr>
-          <p:cNvPr id="17" name="TextBox 16"/>
+          <p:cNvPr id="18" name="TextBox 17"/>
           <p:cNvSpPr txBox="1"/>
           <p:nvPr/>
         </p:nvSpPr>
         <p:spPr>
           <a:xfrm>
-            <a:off x="3108960" y="1225296"/>
-            <a:ext cx="2596896" cy="457200"/>
+            <a:off x="3392423" y="1417320"/>
+            <a:ext cx="2560320" cy="3474720"/>
           </a:xfrm>
           <a:prstGeom prst="rect">
             <a:avLst/>
@@ -7743,37 +7992,72 @@
           <a:p>
             <a:pPr algn="l"/>
             <a:r>
-              <a:rPr sz="1000" b="0" i="0">
+              <a:rPr sz="1200" b="0" i="0">
                 <a:solidFill>
                   <a:srgbClr val="1A1A1A"/>
                 </a:solidFill>
               </a:rPr>
-              <a:t>Satisfaction apprenant</a:t>
-            </a:r>
-          </a:p>
-        </p:txBody>
-      </p:sp>
-      <p:sp>
-        <p:nvSpPr>
-          <p:cNvPr id="18" name="Rectangle 17"/>
+              <a:t>Vous comprenez la cause
+et le modèle du don.
+Vous êtes prêt(e) à
+construire votre discours.</a:t>
+            </a:r>
+          </a:p>
+        </p:txBody>
+      </p:sp>
+      <p:sp>
+        <p:nvSpPr>
+          <p:cNvPr id="19" name="TextBox 18"/>
+          <p:cNvSpPr txBox="1"/>
+          <p:nvPr/>
+        </p:nvSpPr>
+        <p:spPr>
+          <a:xfrm>
+            <a:off x="6108192" y="2468880"/>
+            <a:ext cx="274320" cy="731520"/>
+          </a:xfrm>
+          <a:prstGeom prst="rect">
+            <a:avLst/>
+          </a:prstGeom>
+          <a:noFill/>
+        </p:spPr>
+        <p:txBody>
+          <a:bodyPr wrap="square">
+            <a:spAutoFit/>
+          </a:bodyPr>
+          <a:lstStyle/>
+          <a:p>
+            <a:pPr algn="l"/>
+            <a:r>
+              <a:rPr sz="2200" b="1" i="0">
+                <a:solidFill>
+                  <a:srgbClr val="008080"/>
+                </a:solidFill>
+              </a:rPr>
+              <a:t>→</a:t>
+            </a:r>
+          </a:p>
+        </p:txBody>
+      </p:sp>
+      <p:sp>
+        <p:nvSpPr>
+          <p:cNvPr id="20" name="Rectangle 19"/>
           <p:cNvSpPr/>
           <p:nvPr/>
         </p:nvSpPr>
         <p:spPr>
           <a:xfrm>
-            <a:off x="5797296" y="1170432"/>
-            <a:ext cx="3657600" cy="548640"/>
-          </a:xfrm>
-          <a:prstGeom prst="rect">
-            <a:avLst/>
-          </a:prstGeom>
-          <a:solidFill>
-            <a:srgbClr val="F0F7F7"/>
-          </a:solidFill>
-          <a:ln w="6350">
-            <a:solidFill>
-              <a:srgbClr val="007A7A"/>
-            </a:solidFill>
+            <a:off x="6236207" y="804672"/>
+            <a:ext cx="2834640" cy="502920"/>
+          </a:xfrm>
+          <a:prstGeom prst="rect">
+            <a:avLst/>
+          </a:prstGeom>
+          <a:solidFill>
+            <a:srgbClr val="1A7A1A"/>
+          </a:solidFill>
+          <a:ln>
+            <a:noFill/>
           </a:ln>
         </p:spPr>
         <p:style>
@@ -7800,14 +8084,14 @@
       </p:sp>
       <p:sp>
         <p:nvSpPr>
-          <p:cNvPr id="19" name="TextBox 18"/>
+          <p:cNvPr id="21" name="TextBox 20"/>
           <p:cNvSpPr txBox="1"/>
           <p:nvPr/>
         </p:nvSpPr>
         <p:spPr>
           <a:xfrm>
-            <a:off x="5870448" y="1225296"/>
-            <a:ext cx="3511296" cy="457200"/>
+            <a:off x="6345936" y="822960"/>
+            <a:ext cx="2615184" cy="466344"/>
           </a:xfrm>
           <a:prstGeom prst="rect">
             <a:avLst/>
@@ -7820,38 +8104,38 @@
           </a:bodyPr>
           <a:lstStyle/>
           <a:p>
-            <a:pPr algn="l"/>
-            <a:r>
-              <a:rPr sz="1000" b="0" i="0">
+            <a:pPr algn="ctr"/>
+            <a:r>
+              <a:rPr sz="1100" b="1" i="0">
                 <a:solidFill>
-                  <a:srgbClr val="1A1A1A"/>
+                  <a:srgbClr val="FFFFFF"/>
                 </a:solidFill>
               </a:rPr>
-              <a:t>Questionnaire fin J chaque jour</a:t>
-            </a:r>
-          </a:p>
-        </p:txBody>
-      </p:sp>
-      <p:sp>
-        <p:nvSpPr>
-          <p:cNvPr id="20" name="Rectangle 19"/>
+              <a:t>Après J3–J4</a:t>
+            </a:r>
+          </a:p>
+        </p:txBody>
+      </p:sp>
+      <p:sp>
+        <p:nvSpPr>
+          <p:cNvPr id="22" name="Rectangle 21"/>
           <p:cNvSpPr/>
           <p:nvPr/>
         </p:nvSpPr>
         <p:spPr>
           <a:xfrm>
-            <a:off x="9473184" y="1170432"/>
-            <a:ext cx="2468880" cy="548640"/>
-          </a:xfrm>
-          <a:prstGeom prst="rect">
-            <a:avLst/>
-          </a:prstGeom>
-          <a:solidFill>
-            <a:srgbClr val="F0F7F7"/>
-          </a:solidFill>
-          <a:ln w="6350">
+            <a:off x="6236207" y="1307592"/>
+            <a:ext cx="2834640" cy="3749039"/>
+          </a:xfrm>
+          <a:prstGeom prst="rect">
+            <a:avLst/>
+          </a:prstGeom>
+          <a:solidFill>
+            <a:srgbClr val="CCEECC"/>
+          </a:solidFill>
+          <a:ln w="19050">
             <a:solidFill>
-              <a:srgbClr val="007A7A"/>
+              <a:srgbClr val="1A7A1A"/>
             </a:solidFill>
           </a:ln>
         </p:spPr>
@@ -7879,14 +8163,14 @@
       </p:sp>
       <p:sp>
         <p:nvSpPr>
-          <p:cNvPr id="21" name="TextBox 20"/>
+          <p:cNvPr id="23" name="TextBox 22"/>
           <p:cNvSpPr txBox="1"/>
           <p:nvPr/>
         </p:nvSpPr>
         <p:spPr>
           <a:xfrm>
-            <a:off x="9546336" y="1225296"/>
-            <a:ext cx="2322576" cy="457200"/>
+            <a:off x="6373368" y="1417320"/>
+            <a:ext cx="2560320" cy="3474720"/>
           </a:xfrm>
           <a:prstGeom prst="rect">
             <a:avLst/>
@@ -7901,37 +8185,72 @@
           <a:p>
             <a:pPr algn="l"/>
             <a:r>
-              <a:rPr sz="1000" b="0" i="0">
+              <a:rPr sz="1200" b="0" i="0">
                 <a:solidFill>
                   <a:srgbClr val="1A1A1A"/>
                 </a:solidFill>
               </a:rPr>
-              <a:t>NPS ≥ 8/10</a:t>
-            </a:r>
-          </a:p>
-        </p:txBody>
-      </p:sp>
-      <p:sp>
-        <p:nvSpPr>
-          <p:cNvPr id="22" name="Rectangle 21"/>
+              <a:t>Vous maîtrisez le script
+et gérez les objections.
+Vous vous sentez à l'aise
+en simulation.</a:t>
+            </a:r>
+          </a:p>
+        </p:txBody>
+      </p:sp>
+      <p:sp>
+        <p:nvSpPr>
+          <p:cNvPr id="24" name="TextBox 23"/>
+          <p:cNvSpPr txBox="1"/>
+          <p:nvPr/>
+        </p:nvSpPr>
+        <p:spPr>
+          <a:xfrm>
+            <a:off x="9089136" y="2468880"/>
+            <a:ext cx="274320" cy="731520"/>
+          </a:xfrm>
+          <a:prstGeom prst="rect">
+            <a:avLst/>
+          </a:prstGeom>
+          <a:noFill/>
+        </p:spPr>
+        <p:txBody>
+          <a:bodyPr wrap="square">
+            <a:spAutoFit/>
+          </a:bodyPr>
+          <a:lstStyle/>
+          <a:p>
+            <a:pPr algn="l"/>
+            <a:r>
+              <a:rPr sz="2200" b="1" i="0">
+                <a:solidFill>
+                  <a:srgbClr val="008080"/>
+                </a:solidFill>
+              </a:rPr>
+              <a:t>→</a:t>
+            </a:r>
+          </a:p>
+        </p:txBody>
+      </p:sp>
+      <p:sp>
+        <p:nvSpPr>
+          <p:cNvPr id="25" name="Rectangle 24"/>
           <p:cNvSpPr/>
           <p:nvPr/>
         </p:nvSpPr>
         <p:spPr>
           <a:xfrm>
-            <a:off x="274320" y="1737360"/>
-            <a:ext cx="2743200" cy="548640"/>
-          </a:xfrm>
-          <a:prstGeom prst="rect">
-            <a:avLst/>
-          </a:prstGeom>
-          <a:solidFill>
-            <a:srgbClr val="FFFFFF"/>
-          </a:solidFill>
-          <a:ln w="6350">
-            <a:solidFill>
-              <a:srgbClr val="007A7A"/>
-            </a:solidFill>
+            <a:off x="9217151" y="804672"/>
+            <a:ext cx="2834640" cy="502920"/>
+          </a:xfrm>
+          <a:prstGeom prst="rect">
+            <a:avLst/>
+          </a:prstGeom>
+          <a:solidFill>
+            <a:srgbClr val="FF0000"/>
+          </a:solidFill>
+          <a:ln>
+            <a:noFill/>
           </a:ln>
         </p:spPr>
         <p:style>
@@ -7958,14 +8277,14 @@
       </p:sp>
       <p:sp>
         <p:nvSpPr>
-          <p:cNvPr id="23" name="TextBox 22"/>
+          <p:cNvPr id="26" name="TextBox 25"/>
           <p:cNvSpPr txBox="1"/>
           <p:nvPr/>
         </p:nvSpPr>
         <p:spPr>
           <a:xfrm>
-            <a:off x="347472" y="1792224"/>
-            <a:ext cx="2596896" cy="457200"/>
+            <a:off x="9326879" y="822960"/>
+            <a:ext cx="2615184" cy="466344"/>
           </a:xfrm>
           <a:prstGeom prst="rect">
             <a:avLst/>
@@ -7978,38 +8297,39 @@
           </a:bodyPr>
           <a:lstStyle/>
           <a:p>
-            <a:pPr algn="l"/>
-            <a:r>
-              <a:rPr sz="1000" b="1" i="0">
+            <a:pPr algn="ctr"/>
+            <a:r>
+              <a:rPr sz="1100" b="1" i="0">
                 <a:solidFill>
-                  <a:srgbClr val="005050"/>
+                  <a:srgbClr val="FFFFFF"/>
                 </a:solidFill>
               </a:rPr>
-              <a:t>Niv. 2 — Apprentissage</a:t>
-            </a:r>
-          </a:p>
-        </p:txBody>
-      </p:sp>
-      <p:sp>
-        <p:nvSpPr>
-          <p:cNvPr id="24" name="Rectangle 23"/>
+              <a:t>Après J5
+(certifié)</a:t>
+            </a:r>
+          </a:p>
+        </p:txBody>
+      </p:sp>
+      <p:sp>
+        <p:nvSpPr>
+          <p:cNvPr id="27" name="Rectangle 26"/>
           <p:cNvSpPr/>
           <p:nvPr/>
         </p:nvSpPr>
         <p:spPr>
           <a:xfrm>
-            <a:off x="3035808" y="1737360"/>
-            <a:ext cx="2743200" cy="548640"/>
-          </a:xfrm>
-          <a:prstGeom prst="rect">
-            <a:avLst/>
-          </a:prstGeom>
-          <a:solidFill>
-            <a:srgbClr val="FFFFFF"/>
-          </a:solidFill>
-          <a:ln w="6350">
+            <a:off x="9217151" y="1307592"/>
+            <a:ext cx="2834640" cy="3749039"/>
+          </a:xfrm>
+          <a:prstGeom prst="rect">
+            <a:avLst/>
+          </a:prstGeom>
+          <a:solidFill>
+            <a:srgbClr val="FFCCCC"/>
+          </a:solidFill>
+          <a:ln w="19050">
             <a:solidFill>
-              <a:srgbClr val="007A7A"/>
+              <a:srgbClr val="FF0000"/>
             </a:solidFill>
           </a:ln>
         </p:spPr>
@@ -8037,14 +8357,14 @@
       </p:sp>
       <p:sp>
         <p:nvSpPr>
-          <p:cNvPr id="25" name="TextBox 24"/>
+          <p:cNvPr id="28" name="TextBox 27"/>
           <p:cNvSpPr txBox="1"/>
           <p:nvPr/>
         </p:nvSpPr>
         <p:spPr>
           <a:xfrm>
-            <a:off x="3108960" y="1792224"/>
-            <a:ext cx="2596896" cy="457200"/>
+            <a:off x="9354311" y="1417320"/>
+            <a:ext cx="2560320" cy="3474720"/>
           </a:xfrm>
           <a:prstGeom prst="rect">
             <a:avLst/>
@@ -8059,37 +8379,38 @@
           <a:p>
             <a:pPr algn="l"/>
             <a:r>
-              <a:rPr sz="1000" b="0" i="0">
+              <a:rPr sz="1200" b="0" i="0">
                 <a:solidFill>
                   <a:srgbClr val="1A1A1A"/>
                 </a:solidFill>
               </a:rPr>
-              <a:t>Compétences acquises</a:t>
-            </a:r>
-          </a:p>
-        </p:txBody>
-      </p:sp>
-      <p:sp>
-        <p:nvSpPr>
-          <p:cNvPr id="26" name="Rectangle 25"/>
+              <a:t>Vous avez obtenu votre
+certification FIM.
+Vous êtes opérationnel(le)
+dès demain sur le terrain.</a:t>
+            </a:r>
+          </a:p>
+        </p:txBody>
+      </p:sp>
+      <p:sp>
+        <p:nvSpPr>
+          <p:cNvPr id="29" name="Rectangle 28"/>
           <p:cNvSpPr/>
           <p:nvPr/>
         </p:nvSpPr>
         <p:spPr>
           <a:xfrm>
-            <a:off x="5797296" y="1737360"/>
-            <a:ext cx="3657600" cy="548640"/>
-          </a:xfrm>
-          <a:prstGeom prst="rect">
-            <a:avLst/>
-          </a:prstGeom>
-          <a:solidFill>
-            <a:srgbClr val="FFFFFF"/>
-          </a:solidFill>
-          <a:ln w="6350">
-            <a:solidFill>
-              <a:srgbClr val="007A7A"/>
-            </a:solidFill>
+            <a:off x="274320" y="5257800"/>
+            <a:ext cx="11640312" cy="384048"/>
+          </a:xfrm>
+          <a:prstGeom prst="rect">
+            <a:avLst/>
+          </a:prstGeom>
+          <a:solidFill>
+            <a:srgbClr val="008080"/>
+          </a:solidFill>
+          <a:ln>
+            <a:noFill/>
           </a:ln>
         </p:spPr>
         <p:style>
@@ -8116,14 +8437,14 @@
       </p:sp>
       <p:sp>
         <p:nvSpPr>
-          <p:cNvPr id="27" name="TextBox 26"/>
+          <p:cNvPr id="30" name="TextBox 29"/>
           <p:cNvSpPr txBox="1"/>
           <p:nvPr/>
         </p:nvSpPr>
         <p:spPr>
           <a:xfrm>
-            <a:off x="5870448" y="1792224"/>
-            <a:ext cx="3511296" cy="457200"/>
+            <a:off x="411479" y="5330952"/>
+            <a:ext cx="11365992" cy="237744"/>
           </a:xfrm>
           <a:prstGeom prst="rect">
             <a:avLst/>
@@ -8140,755 +8461,10 @@
             <a:r>
               <a:rPr sz="1000" b="0" i="0">
                 <a:solidFill>
-                  <a:srgbClr val="1A1A1A"/>
+                  <a:srgbClr val="FFFFFF"/>
                 </a:solidFill>
               </a:rPr>
-              <a:t>Grilles C1–C7 fin J3 et J5</a:t>
-            </a:r>
-          </a:p>
-        </p:txBody>
-      </p:sp>
-      <p:sp>
-        <p:nvSpPr>
-          <p:cNvPr id="28" name="Rectangle 27"/>
-          <p:cNvSpPr/>
-          <p:nvPr/>
-        </p:nvSpPr>
-        <p:spPr>
-          <a:xfrm>
-            <a:off x="9473184" y="1737360"/>
-            <a:ext cx="2468880" cy="548640"/>
-          </a:xfrm>
-          <a:prstGeom prst="rect">
-            <a:avLst/>
-          </a:prstGeom>
-          <a:solidFill>
-            <a:srgbClr val="FFFFFF"/>
-          </a:solidFill>
-          <a:ln w="6350">
-            <a:solidFill>
-              <a:srgbClr val="007A7A"/>
-            </a:solidFill>
-          </a:ln>
-        </p:spPr>
-        <p:style>
-          <a:lnRef idx="1">
-            <a:schemeClr val="accent1"/>
-          </a:lnRef>
-          <a:fillRef idx="3">
-            <a:schemeClr val="accent1"/>
-          </a:fillRef>
-          <a:effectRef idx="2">
-            <a:schemeClr val="accent1"/>
-          </a:effectRef>
-          <a:fontRef idx="minor">
-            <a:schemeClr val="lt1"/>
-          </a:fontRef>
-        </p:style>
-        <p:txBody>
-          <a:bodyPr rtlCol="0" anchor="ctr"/>
-          <a:lstStyle/>
-          <a:p>
-            <a:pPr algn="ctr"/>
-          </a:p>
-        </p:txBody>
-      </p:sp>
-      <p:sp>
-        <p:nvSpPr>
-          <p:cNvPr id="29" name="TextBox 28"/>
-          <p:cNvSpPr txBox="1"/>
-          <p:nvPr/>
-        </p:nvSpPr>
-        <p:spPr>
-          <a:xfrm>
-            <a:off x="9546336" y="1792224"/>
-            <a:ext cx="2322576" cy="457200"/>
-          </a:xfrm>
-          <a:prstGeom prst="rect">
-            <a:avLst/>
-          </a:prstGeom>
-          <a:noFill/>
-        </p:spPr>
-        <p:txBody>
-          <a:bodyPr wrap="square">
-            <a:spAutoFit/>
-          </a:bodyPr>
-          <a:lstStyle/>
-          <a:p>
-            <a:pPr algn="l"/>
-            <a:r>
-              <a:rPr sz="1000" b="0" i="0">
-                <a:solidFill>
-                  <a:srgbClr val="1A1A1A"/>
-                </a:solidFill>
-              </a:rPr>
-              <a:t>Score ≥ 71% (20/28)</a:t>
-            </a:r>
-          </a:p>
-        </p:txBody>
-      </p:sp>
-      <p:sp>
-        <p:nvSpPr>
-          <p:cNvPr id="30" name="Rectangle 29"/>
-          <p:cNvSpPr/>
-          <p:nvPr/>
-        </p:nvSpPr>
-        <p:spPr>
-          <a:xfrm>
-            <a:off x="274320" y="2304288"/>
-            <a:ext cx="2743200" cy="548640"/>
-          </a:xfrm>
-          <a:prstGeom prst="rect">
-            <a:avLst/>
-          </a:prstGeom>
-          <a:solidFill>
-            <a:srgbClr val="F0F7F7"/>
-          </a:solidFill>
-          <a:ln w="6350">
-            <a:solidFill>
-              <a:srgbClr val="007A7A"/>
-            </a:solidFill>
-          </a:ln>
-        </p:spPr>
-        <p:style>
-          <a:lnRef idx="1">
-            <a:schemeClr val="accent1"/>
-          </a:lnRef>
-          <a:fillRef idx="3">
-            <a:schemeClr val="accent1"/>
-          </a:fillRef>
-          <a:effectRef idx="2">
-            <a:schemeClr val="accent1"/>
-          </a:effectRef>
-          <a:fontRef idx="minor">
-            <a:schemeClr val="lt1"/>
-          </a:fontRef>
-        </p:style>
-        <p:txBody>
-          <a:bodyPr rtlCol="0" anchor="ctr"/>
-          <a:lstStyle/>
-          <a:p>
-            <a:pPr algn="ctr"/>
-          </a:p>
-        </p:txBody>
-      </p:sp>
-      <p:sp>
-        <p:nvSpPr>
-          <p:cNvPr id="31" name="TextBox 30"/>
-          <p:cNvSpPr txBox="1"/>
-          <p:nvPr/>
-        </p:nvSpPr>
-        <p:spPr>
-          <a:xfrm>
-            <a:off x="347472" y="2359152"/>
-            <a:ext cx="2596896" cy="457200"/>
-          </a:xfrm>
-          <a:prstGeom prst="rect">
-            <a:avLst/>
-          </a:prstGeom>
-          <a:noFill/>
-        </p:spPr>
-        <p:txBody>
-          <a:bodyPr wrap="square">
-            <a:spAutoFit/>
-          </a:bodyPr>
-          <a:lstStyle/>
-          <a:p>
-            <a:pPr algn="l"/>
-            <a:r>
-              <a:rPr sz="1000" b="1" i="0">
-                <a:solidFill>
-                  <a:srgbClr val="005050"/>
-                </a:solidFill>
-              </a:rPr>
-              <a:t>Niv. 3 — Comportement</a:t>
-            </a:r>
-          </a:p>
-        </p:txBody>
-      </p:sp>
-      <p:sp>
-        <p:nvSpPr>
-          <p:cNvPr id="32" name="Rectangle 31"/>
-          <p:cNvSpPr/>
-          <p:nvPr/>
-        </p:nvSpPr>
-        <p:spPr>
-          <a:xfrm>
-            <a:off x="3035808" y="2304288"/>
-            <a:ext cx="2743200" cy="548640"/>
-          </a:xfrm>
-          <a:prstGeom prst="rect">
-            <a:avLst/>
-          </a:prstGeom>
-          <a:solidFill>
-            <a:srgbClr val="F0F7F7"/>
-          </a:solidFill>
-          <a:ln w="6350">
-            <a:solidFill>
-              <a:srgbClr val="007A7A"/>
-            </a:solidFill>
-          </a:ln>
-        </p:spPr>
-        <p:style>
-          <a:lnRef idx="1">
-            <a:schemeClr val="accent1"/>
-          </a:lnRef>
-          <a:fillRef idx="3">
-            <a:schemeClr val="accent1"/>
-          </a:fillRef>
-          <a:effectRef idx="2">
-            <a:schemeClr val="accent1"/>
-          </a:effectRef>
-          <a:fontRef idx="minor">
-            <a:schemeClr val="lt1"/>
-          </a:fontRef>
-        </p:style>
-        <p:txBody>
-          <a:bodyPr rtlCol="0" anchor="ctr"/>
-          <a:lstStyle/>
-          <a:p>
-            <a:pPr algn="ctr"/>
-          </a:p>
-        </p:txBody>
-      </p:sp>
-      <p:sp>
-        <p:nvSpPr>
-          <p:cNvPr id="33" name="TextBox 32"/>
-          <p:cNvSpPr txBox="1"/>
-          <p:nvPr/>
-        </p:nvSpPr>
-        <p:spPr>
-          <a:xfrm>
-            <a:off x="3108960" y="2359152"/>
-            <a:ext cx="2596896" cy="457200"/>
-          </a:xfrm>
-          <a:prstGeom prst="rect">
-            <a:avLst/>
-          </a:prstGeom>
-          <a:noFill/>
-        </p:spPr>
-        <p:txBody>
-          <a:bodyPr wrap="square">
-            <a:spAutoFit/>
-          </a:bodyPr>
-          <a:lstStyle/>
-          <a:p>
-            <a:pPr algn="l"/>
-            <a:r>
-              <a:rPr sz="1000" b="0" i="0">
-                <a:solidFill>
-                  <a:srgbClr val="1A1A1A"/>
-                </a:solidFill>
-              </a:rPr>
-              <a:t>Transfert terrain</a:t>
-            </a:r>
-          </a:p>
-        </p:txBody>
-      </p:sp>
-      <p:sp>
-        <p:nvSpPr>
-          <p:cNvPr id="34" name="Rectangle 33"/>
-          <p:cNvSpPr/>
-          <p:nvPr/>
-        </p:nvSpPr>
-        <p:spPr>
-          <a:xfrm>
-            <a:off x="5797296" y="2304288"/>
-            <a:ext cx="3657600" cy="548640"/>
-          </a:xfrm>
-          <a:prstGeom prst="rect">
-            <a:avLst/>
-          </a:prstGeom>
-          <a:solidFill>
-            <a:srgbClr val="F0F7F7"/>
-          </a:solidFill>
-          <a:ln w="6350">
-            <a:solidFill>
-              <a:srgbClr val="007A7A"/>
-            </a:solidFill>
-          </a:ln>
-        </p:spPr>
-        <p:style>
-          <a:lnRef idx="1">
-            <a:schemeClr val="accent1"/>
-          </a:lnRef>
-          <a:fillRef idx="3">
-            <a:schemeClr val="accent1"/>
-          </a:fillRef>
-          <a:effectRef idx="2">
-            <a:schemeClr val="accent1"/>
-          </a:effectRef>
-          <a:fontRef idx="minor">
-            <a:schemeClr val="lt1"/>
-          </a:fontRef>
-        </p:style>
-        <p:txBody>
-          <a:bodyPr rtlCol="0" anchor="ctr"/>
-          <a:lstStyle/>
-          <a:p>
-            <a:pPr algn="ctr"/>
-          </a:p>
-        </p:txBody>
-      </p:sp>
-      <p:sp>
-        <p:nvSpPr>
-          <p:cNvPr id="35" name="TextBox 34"/>
-          <p:cNvSpPr txBox="1"/>
-          <p:nvPr/>
-        </p:nvSpPr>
-        <p:spPr>
-          <a:xfrm>
-            <a:off x="5870448" y="2359152"/>
-            <a:ext cx="3511296" cy="457200"/>
-          </a:xfrm>
-          <a:prstGeom prst="rect">
-            <a:avLst/>
-          </a:prstGeom>
-          <a:noFill/>
-        </p:spPr>
-        <p:txBody>
-          <a:bodyPr wrap="square">
-            <a:spAutoFit/>
-          </a:bodyPr>
-          <a:lstStyle/>
-          <a:p>
-            <a:pPr algn="l"/>
-            <a:r>
-              <a:rPr sz="1000" b="0" i="0">
-                <a:solidFill>
-                  <a:srgbClr val="1A1A1A"/>
-                </a:solidFill>
-              </a:rPr>
-              <a:t>Observation terrain J+15</a:t>
-            </a:r>
-          </a:p>
-        </p:txBody>
-      </p:sp>
-      <p:sp>
-        <p:nvSpPr>
-          <p:cNvPr id="36" name="Rectangle 35"/>
-          <p:cNvSpPr/>
-          <p:nvPr/>
-        </p:nvSpPr>
-        <p:spPr>
-          <a:xfrm>
-            <a:off x="9473184" y="2304288"/>
-            <a:ext cx="2468880" cy="548640"/>
-          </a:xfrm>
-          <a:prstGeom prst="rect">
-            <a:avLst/>
-          </a:prstGeom>
-          <a:solidFill>
-            <a:srgbClr val="F0F7F7"/>
-          </a:solidFill>
-          <a:ln w="6350">
-            <a:solidFill>
-              <a:srgbClr val="007A7A"/>
-            </a:solidFill>
-          </a:ln>
-        </p:spPr>
-        <p:style>
-          <a:lnRef idx="1">
-            <a:schemeClr val="accent1"/>
-          </a:lnRef>
-          <a:fillRef idx="3">
-            <a:schemeClr val="accent1"/>
-          </a:fillRef>
-          <a:effectRef idx="2">
-            <a:schemeClr val="accent1"/>
-          </a:effectRef>
-          <a:fontRef idx="minor">
-            <a:schemeClr val="lt1"/>
-          </a:fontRef>
-        </p:style>
-        <p:txBody>
-          <a:bodyPr rtlCol="0" anchor="ctr"/>
-          <a:lstStyle/>
-          <a:p>
-            <a:pPr algn="ctr"/>
-          </a:p>
-        </p:txBody>
-      </p:sp>
-      <p:sp>
-        <p:nvSpPr>
-          <p:cNvPr id="37" name="TextBox 36"/>
-          <p:cNvSpPr txBox="1"/>
-          <p:nvPr/>
-        </p:nvSpPr>
-        <p:spPr>
-          <a:xfrm>
-            <a:off x="9546336" y="2359152"/>
-            <a:ext cx="2322576" cy="457200"/>
-          </a:xfrm>
-          <a:prstGeom prst="rect">
-            <a:avLst/>
-          </a:prstGeom>
-          <a:noFill/>
-        </p:spPr>
-        <p:txBody>
-          <a:bodyPr wrap="square">
-            <a:spAutoFit/>
-          </a:bodyPr>
-          <a:lstStyle/>
-          <a:p>
-            <a:pPr algn="l"/>
-            <a:r>
-              <a:rPr sz="1000" b="0" i="0">
-                <a:solidFill>
-                  <a:srgbClr val="1A1A1A"/>
-                </a:solidFill>
-              </a:rPr>
-              <a:t>≥ 5 critères sur 7 observés</a:t>
-            </a:r>
-          </a:p>
-        </p:txBody>
-      </p:sp>
-      <p:sp>
-        <p:nvSpPr>
-          <p:cNvPr id="38" name="Rectangle 37"/>
-          <p:cNvSpPr/>
-          <p:nvPr/>
-        </p:nvSpPr>
-        <p:spPr>
-          <a:xfrm>
-            <a:off x="274320" y="2871216"/>
-            <a:ext cx="2743200" cy="548640"/>
-          </a:xfrm>
-          <a:prstGeom prst="rect">
-            <a:avLst/>
-          </a:prstGeom>
-          <a:solidFill>
-            <a:srgbClr val="FFFFFF"/>
-          </a:solidFill>
-          <a:ln w="6350">
-            <a:solidFill>
-              <a:srgbClr val="007A7A"/>
-            </a:solidFill>
-          </a:ln>
-        </p:spPr>
-        <p:style>
-          <a:lnRef idx="1">
-            <a:schemeClr val="accent1"/>
-          </a:lnRef>
-          <a:fillRef idx="3">
-            <a:schemeClr val="accent1"/>
-          </a:fillRef>
-          <a:effectRef idx="2">
-            <a:schemeClr val="accent1"/>
-          </a:effectRef>
-          <a:fontRef idx="minor">
-            <a:schemeClr val="lt1"/>
-          </a:fontRef>
-        </p:style>
-        <p:txBody>
-          <a:bodyPr rtlCol="0" anchor="ctr"/>
-          <a:lstStyle/>
-          <a:p>
-            <a:pPr algn="ctr"/>
-          </a:p>
-        </p:txBody>
-      </p:sp>
-      <p:sp>
-        <p:nvSpPr>
-          <p:cNvPr id="39" name="TextBox 38"/>
-          <p:cNvSpPr txBox="1"/>
-          <p:nvPr/>
-        </p:nvSpPr>
-        <p:spPr>
-          <a:xfrm>
-            <a:off x="347472" y="2926080"/>
-            <a:ext cx="2596896" cy="457200"/>
-          </a:xfrm>
-          <a:prstGeom prst="rect">
-            <a:avLst/>
-          </a:prstGeom>
-          <a:noFill/>
-        </p:spPr>
-        <p:txBody>
-          <a:bodyPr wrap="square">
-            <a:spAutoFit/>
-          </a:bodyPr>
-          <a:lstStyle/>
-          <a:p>
-            <a:pPr algn="l"/>
-            <a:r>
-              <a:rPr sz="1000" b="1" i="0">
-                <a:solidFill>
-                  <a:srgbClr val="005050"/>
-                </a:solidFill>
-              </a:rPr>
-              <a:t>Niv. 4 — Résultats</a:t>
-            </a:r>
-          </a:p>
-        </p:txBody>
-      </p:sp>
-      <p:sp>
-        <p:nvSpPr>
-          <p:cNvPr id="40" name="Rectangle 39"/>
-          <p:cNvSpPr/>
-          <p:nvPr/>
-        </p:nvSpPr>
-        <p:spPr>
-          <a:xfrm>
-            <a:off x="3035808" y="2871216"/>
-            <a:ext cx="2743200" cy="548640"/>
-          </a:xfrm>
-          <a:prstGeom prst="rect">
-            <a:avLst/>
-          </a:prstGeom>
-          <a:solidFill>
-            <a:srgbClr val="FFFFFF"/>
-          </a:solidFill>
-          <a:ln w="6350">
-            <a:solidFill>
-              <a:srgbClr val="007A7A"/>
-            </a:solidFill>
-          </a:ln>
-        </p:spPr>
-        <p:style>
-          <a:lnRef idx="1">
-            <a:schemeClr val="accent1"/>
-          </a:lnRef>
-          <a:fillRef idx="3">
-            <a:schemeClr val="accent1"/>
-          </a:fillRef>
-          <a:effectRef idx="2">
-            <a:schemeClr val="accent1"/>
-          </a:effectRef>
-          <a:fontRef idx="minor">
-            <a:schemeClr val="lt1"/>
-          </a:fontRef>
-        </p:style>
-        <p:txBody>
-          <a:bodyPr rtlCol="0" anchor="ctr"/>
-          <a:lstStyle/>
-          <a:p>
-            <a:pPr algn="ctr"/>
-          </a:p>
-        </p:txBody>
-      </p:sp>
-      <p:sp>
-        <p:nvSpPr>
-          <p:cNvPr id="41" name="TextBox 40"/>
-          <p:cNvSpPr txBox="1"/>
-          <p:nvPr/>
-        </p:nvSpPr>
-        <p:spPr>
-          <a:xfrm>
-            <a:off x="3108960" y="2926080"/>
-            <a:ext cx="2596896" cy="457200"/>
-          </a:xfrm>
-          <a:prstGeom prst="rect">
-            <a:avLst/>
-          </a:prstGeom>
-          <a:noFill/>
-        </p:spPr>
-        <p:txBody>
-          <a:bodyPr wrap="square">
-            <a:spAutoFit/>
-          </a:bodyPr>
-          <a:lstStyle/>
-          <a:p>
-            <a:pPr algn="l"/>
-            <a:r>
-              <a:rPr sz="1000" b="0" i="0">
-                <a:solidFill>
-                  <a:srgbClr val="1A1A1A"/>
-                </a:solidFill>
-              </a:rPr>
-              <a:t>Impact KPI fundraising</a:t>
-            </a:r>
-          </a:p>
-        </p:txBody>
-      </p:sp>
-      <p:sp>
-        <p:nvSpPr>
-          <p:cNvPr id="42" name="Rectangle 41"/>
-          <p:cNvSpPr/>
-          <p:nvPr/>
-        </p:nvSpPr>
-        <p:spPr>
-          <a:xfrm>
-            <a:off x="5797296" y="2871216"/>
-            <a:ext cx="3657600" cy="548640"/>
-          </a:xfrm>
-          <a:prstGeom prst="rect">
-            <a:avLst/>
-          </a:prstGeom>
-          <a:solidFill>
-            <a:srgbClr val="FFFFFF"/>
-          </a:solidFill>
-          <a:ln w="6350">
-            <a:solidFill>
-              <a:srgbClr val="007A7A"/>
-            </a:solidFill>
-          </a:ln>
-        </p:spPr>
-        <p:style>
-          <a:lnRef idx="1">
-            <a:schemeClr val="accent1"/>
-          </a:lnRef>
-          <a:fillRef idx="3">
-            <a:schemeClr val="accent1"/>
-          </a:fillRef>
-          <a:effectRef idx="2">
-            <a:schemeClr val="accent1"/>
-          </a:effectRef>
-          <a:fontRef idx="minor">
-            <a:schemeClr val="lt1"/>
-          </a:fontRef>
-        </p:style>
-        <p:txBody>
-          <a:bodyPr rtlCol="0" anchor="ctr"/>
-          <a:lstStyle/>
-          <a:p>
-            <a:pPr algn="ctr"/>
-          </a:p>
-        </p:txBody>
-      </p:sp>
-      <p:sp>
-        <p:nvSpPr>
-          <p:cNvPr id="43" name="TextBox 42"/>
-          <p:cNvSpPr txBox="1"/>
-          <p:nvPr/>
-        </p:nvSpPr>
-        <p:spPr>
-          <a:xfrm>
-            <a:off x="5870448" y="2926080"/>
-            <a:ext cx="3511296" cy="457200"/>
-          </a:xfrm>
-          <a:prstGeom prst="rect">
-            <a:avLst/>
-          </a:prstGeom>
-          <a:noFill/>
-        </p:spPr>
-        <p:txBody>
-          <a:bodyPr wrap="square">
-            <a:spAutoFit/>
-          </a:bodyPr>
-          <a:lstStyle/>
-          <a:p>
-            <a:pPr algn="l"/>
-            <a:r>
-              <a:rPr sz="1000" b="0" i="0">
-                <a:solidFill>
-                  <a:srgbClr val="1A1A1A"/>
-                </a:solidFill>
-              </a:rPr>
-              <a:t>Suivi conversions J+30 &amp; J+90</a:t>
-            </a:r>
-          </a:p>
-        </p:txBody>
-      </p:sp>
-      <p:sp>
-        <p:nvSpPr>
-          <p:cNvPr id="44" name="Rectangle 43"/>
-          <p:cNvSpPr/>
-          <p:nvPr/>
-        </p:nvSpPr>
-        <p:spPr>
-          <a:xfrm>
-            <a:off x="9473184" y="2871216"/>
-            <a:ext cx="2468880" cy="548640"/>
-          </a:xfrm>
-          <a:prstGeom prst="rect">
-            <a:avLst/>
-          </a:prstGeom>
-          <a:solidFill>
-            <a:srgbClr val="FFFFFF"/>
-          </a:solidFill>
-          <a:ln w="6350">
-            <a:solidFill>
-              <a:srgbClr val="007A7A"/>
-            </a:solidFill>
-          </a:ln>
-        </p:spPr>
-        <p:style>
-          <a:lnRef idx="1">
-            <a:schemeClr val="accent1"/>
-          </a:lnRef>
-          <a:fillRef idx="3">
-            <a:schemeClr val="accent1"/>
-          </a:fillRef>
-          <a:effectRef idx="2">
-            <a:schemeClr val="accent1"/>
-          </a:effectRef>
-          <a:fontRef idx="minor">
-            <a:schemeClr val="lt1"/>
-          </a:fontRef>
-        </p:style>
-        <p:txBody>
-          <a:bodyPr rtlCol="0" anchor="ctr"/>
-          <a:lstStyle/>
-          <a:p>
-            <a:pPr algn="ctr"/>
-          </a:p>
-        </p:txBody>
-      </p:sp>
-      <p:sp>
-        <p:nvSpPr>
-          <p:cNvPr id="45" name="TextBox 44"/>
-          <p:cNvSpPr txBox="1"/>
-          <p:nvPr/>
-        </p:nvSpPr>
-        <p:spPr>
-          <a:xfrm>
-            <a:off x="9546336" y="2926080"/>
-            <a:ext cx="2322576" cy="457200"/>
-          </a:xfrm>
-          <a:prstGeom prst="rect">
-            <a:avLst/>
-          </a:prstGeom>
-          <a:noFill/>
-        </p:spPr>
-        <p:txBody>
-          <a:bodyPr wrap="square">
-            <a:spAutoFit/>
-          </a:bodyPr>
-          <a:lstStyle/>
-          <a:p>
-            <a:pPr algn="l"/>
-            <a:r>
-              <a:rPr sz="1000" b="0" i="0">
-                <a:solidFill>
-                  <a:srgbClr val="1A1A1A"/>
-                </a:solidFill>
-              </a:rPr>
-              <a:t>≥ 1 don/heure terrain</a:t>
-            </a:r>
-          </a:p>
-        </p:txBody>
-      </p:sp>
-      <p:sp>
-        <p:nvSpPr>
-          <p:cNvPr id="46" name="TextBox 45"/>
-          <p:cNvSpPr txBox="1"/>
-          <p:nvPr/>
-        </p:nvSpPr>
-        <p:spPr>
-          <a:xfrm>
-            <a:off x="0" y="6492240"/>
-            <a:ext cx="12188952" cy="365760"/>
-          </a:xfrm>
-          <a:prstGeom prst="rect">
-            <a:avLst/>
-          </a:prstGeom>
-          <a:noFill/>
-        </p:spPr>
-        <p:txBody>
-          <a:bodyPr wrap="square">
-            <a:spAutoFit/>
-          </a:bodyPr>
-          <a:lstStyle/>
-          <a:p>
-            <a:pPr algn="ctr"/>
-            <a:r>
-              <a:rPr sz="800" b="0" i="0">
-                <a:solidFill>
-                  <a:srgbClr val="888888"/>
-                </a:solidFill>
-              </a:rPr>
-              <a:t>SHY-Performance · V6-01062026SHY-TE</a:t>
+              <a:t>La progression est individuelle. Votre formateur adapte son accompagnement à votre rythme.</a:t>
             </a:r>
           </a:p>
         </p:txBody>

--- a/FIM_Book1_Synopsis_Objectifs_V6-01062026SHY-TE.pptx
+++ b/FIM_Book1_Synopsis_Objectifs_V6-01062026SHY-TE.pptx
@@ -3143,7 +3143,7 @@
         <p:spPr>
           <a:xfrm>
             <a:off x="0" y="0"/>
-            <a:ext cx="12188952" cy="2286000"/>
+            <a:ext cx="12188952" cy="2331720"/>
           </a:xfrm>
           <a:prstGeom prst="rect">
             <a:avLst/>
@@ -3185,14 +3185,14 @@
         </p:nvSpPr>
         <p:spPr>
           <a:xfrm>
-            <a:off x="0" y="2267712"/>
-            <a:ext cx="12188952" cy="73152"/>
-          </a:xfrm>
-          <a:prstGeom prst="rect">
-            <a:avLst/>
-          </a:prstGeom>
-          <a:solidFill>
-            <a:srgbClr val="FF0000"/>
+            <a:off x="0" y="2313432"/>
+            <a:ext cx="12188952" cy="54864"/>
+          </a:xfrm>
+          <a:prstGeom prst="rect">
+            <a:avLst/>
+          </a:prstGeom>
+          <a:solidFill>
+            <a:srgbClr val="00AAAA"/>
           </a:solidFill>
           <a:ln>
             <a:noFill/>
@@ -3222,20 +3222,214 @@
       </p:sp>
       <p:sp>
         <p:nvSpPr>
-          <p:cNvPr id="5" name="Rectangle 4"/>
+          <p:cNvPr id="5" name="TextBox 4"/>
+          <p:cNvSpPr txBox="1"/>
+          <p:nvPr/>
+        </p:nvSpPr>
+        <p:spPr>
+          <a:xfrm>
+            <a:off x="347472" y="91440"/>
+            <a:ext cx="3200400" cy="438912"/>
+          </a:xfrm>
+          <a:prstGeom prst="rect">
+            <a:avLst/>
+          </a:prstGeom>
+          <a:noFill/>
+        </p:spPr>
+        <p:txBody>
+          <a:bodyPr wrap="square">
+            <a:spAutoFit/>
+          </a:bodyPr>
+          <a:lstStyle/>
+          <a:p>
+            <a:pPr algn="l"/>
+            <a:r>
+              <a:rPr sz="2200" b="1" i="0">
+                <a:solidFill>
+                  <a:srgbClr val="FFFFFF"/>
+                </a:solidFill>
+              </a:rPr>
+              <a:t>SHY-Performance</a:t>
+            </a:r>
+          </a:p>
+        </p:txBody>
+      </p:sp>
+      <p:sp>
+        <p:nvSpPr>
+          <p:cNvPr id="6" name="TextBox 5"/>
+          <p:cNvSpPr txBox="1"/>
+          <p:nvPr/>
+        </p:nvSpPr>
+        <p:spPr>
+          <a:xfrm>
+            <a:off x="347472" y="530352"/>
+            <a:ext cx="7772400" cy="347472"/>
+          </a:xfrm>
+          <a:prstGeom prst="rect">
+            <a:avLst/>
+          </a:prstGeom>
+          <a:noFill/>
+        </p:spPr>
+        <p:txBody>
+          <a:bodyPr wrap="square">
+            <a:spAutoFit/>
+          </a:bodyPr>
+          <a:lstStyle/>
+          <a:p>
+            <a:pPr algn="l"/>
+            <a:r>
+              <a:rPr sz="1000" b="0" i="1">
+                <a:solidFill>
+                  <a:srgbClr val="BBEEEE"/>
+                </a:solidFill>
+              </a:rPr>
+              <a:t>Formation Initiale Module — Fundraising Téléphonique UNICEF</a:t>
+            </a:r>
+          </a:p>
+        </p:txBody>
+      </p:sp>
+      <p:sp>
+        <p:nvSpPr>
+          <p:cNvPr id="7" name="TextBox 6"/>
+          <p:cNvSpPr txBox="1"/>
+          <p:nvPr/>
+        </p:nvSpPr>
+        <p:spPr>
+          <a:xfrm>
+            <a:off x="347472" y="932688"/>
+            <a:ext cx="7772400" cy="292608"/>
+          </a:xfrm>
+          <a:prstGeom prst="rect">
+            <a:avLst/>
+          </a:prstGeom>
+          <a:noFill/>
+        </p:spPr>
+        <p:txBody>
+          <a:bodyPr wrap="square">
+            <a:spAutoFit/>
+          </a:bodyPr>
+          <a:lstStyle/>
+          <a:p>
+            <a:pPr algn="l"/>
+            <a:r>
+              <a:rPr sz="900" b="1" i="0">
+                <a:solidFill>
+                  <a:srgbClr val="88DDDD"/>
+                </a:solidFill>
+              </a:rPr>
+              <a:t>BOOK 1  ·  Synopsis &amp; Objectifs  ·  SHY-Performance × FIDELIS × UNICEF France</a:t>
+            </a:r>
+          </a:p>
+        </p:txBody>
+      </p:sp>
+      <p:sp>
+        <p:nvSpPr>
+          <p:cNvPr id="8" name="TextBox 7"/>
+          <p:cNvSpPr txBox="1"/>
+          <p:nvPr/>
+        </p:nvSpPr>
+        <p:spPr>
+          <a:xfrm>
+            <a:off x="347472" y="1207008"/>
+            <a:ext cx="10515600" cy="914400"/>
+          </a:xfrm>
+          <a:prstGeom prst="rect">
+            <a:avLst/>
+          </a:prstGeom>
+          <a:noFill/>
+        </p:spPr>
+        <p:txBody>
+          <a:bodyPr wrap="square">
+            <a:spAutoFit/>
+          </a:bodyPr>
+          <a:lstStyle/>
+          <a:p>
+            <a:pPr algn="l"/>
+            <a:r>
+              <a:rPr sz="3000" b="1" i="0">
+                <a:solidFill>
+                  <a:srgbClr val="FFFFFF"/>
+                </a:solidFill>
+              </a:rPr>
+              <a:t>Vos Objectifs de Formation</a:t>
+            </a:r>
+          </a:p>
+        </p:txBody>
+      </p:sp>
+      <p:sp>
+        <p:nvSpPr>
+          <p:cNvPr id="9" name="TextBox 8"/>
+          <p:cNvSpPr txBox="1"/>
+          <p:nvPr/>
+        </p:nvSpPr>
+        <p:spPr>
+          <a:xfrm>
+            <a:off x="347472" y="1901952"/>
+            <a:ext cx="10515600" cy="402336"/>
+          </a:xfrm>
+          <a:prstGeom prst="rect">
+            <a:avLst/>
+          </a:prstGeom>
+          <a:noFill/>
+        </p:spPr>
+        <p:txBody>
+          <a:bodyPr wrap="square">
+            <a:spAutoFit/>
+          </a:bodyPr>
+          <a:lstStyle/>
+          <a:p>
+            <a:pPr algn="l"/>
+            <a:r>
+              <a:rPr sz="1200" b="0" i="1">
+                <a:solidFill>
+                  <a:srgbClr val="CCEEEE"/>
+                </a:solidFill>
+              </a:rPr>
+              <a:t>Ce que vous saurez faire à l'issue des 5 jours FIM</a:t>
+            </a:r>
+          </a:p>
+        </p:txBody>
+      </p:sp>
+      <p:pic>
+        <p:nvPicPr>
+          <p:cNvPr id="10" name="Picture 9" descr="shy_logo_v2.png"/>
+          <p:cNvPicPr>
+            <a:picLocks noChangeAspect="1"/>
+          </p:cNvPicPr>
+          <p:nvPr/>
+        </p:nvPicPr>
+        <p:blipFill>
+          <a:blip r:embed="rId2"/>
+          <a:stretch>
+            <a:fillRect/>
+          </a:stretch>
+        </p:blipFill>
+        <p:spPr>
+          <a:xfrm>
+            <a:off x="11247120" y="45720"/>
+            <a:ext cx="822960" cy="804672"/>
+          </a:xfrm>
+          <a:prstGeom prst="rect">
+            <a:avLst/>
+          </a:prstGeom>
+        </p:spPr>
+      </p:pic>
+      <p:sp>
+        <p:nvSpPr>
+          <p:cNvPr id="11" name="Rectangle 10"/>
           <p:cNvSpPr/>
           <p:nvPr/>
         </p:nvSpPr>
         <p:spPr>
           <a:xfrm>
-            <a:off x="274320" y="109728"/>
-            <a:ext cx="2926080" cy="822960"/>
-          </a:xfrm>
-          <a:prstGeom prst="rect">
-            <a:avLst/>
-          </a:prstGeom>
-          <a:solidFill>
-            <a:srgbClr val="008080"/>
+            <a:off x="0" y="6492240"/>
+            <a:ext cx="12188952" cy="365760"/>
+          </a:xfrm>
+          <a:prstGeom prst="rect">
+            <a:avLst/>
+          </a:prstGeom>
+          <a:solidFill>
+            <a:srgbClr val="005555"/>
           </a:solidFill>
           <a:ln>
             <a:noFill/>
@@ -3265,14 +3459,14 @@
       </p:sp>
       <p:sp>
         <p:nvSpPr>
-          <p:cNvPr id="6" name="TextBox 5"/>
+          <p:cNvPr id="12" name="TextBox 11"/>
           <p:cNvSpPr txBox="1"/>
           <p:nvPr/>
         </p:nvSpPr>
         <p:spPr>
           <a:xfrm>
-            <a:off x="320040" y="118872"/>
-            <a:ext cx="1097280" cy="804672"/>
+            <a:off x="0" y="6519672"/>
+            <a:ext cx="12188952" cy="274320"/>
           </a:xfrm>
           <a:prstGeom prst="rect">
             <a:avLst/>
@@ -3285,28 +3479,28 @@
           </a:bodyPr>
           <a:lstStyle/>
           <a:p>
-            <a:pPr algn="l"/>
-            <a:r>
-              <a:rPr sz="3600" b="1" i="0">
+            <a:pPr algn="ctr"/>
+            <a:r>
+              <a:rPr sz="800" b="0" i="0">
                 <a:solidFill>
                   <a:srgbClr val="FFFFFF"/>
                 </a:solidFill>
               </a:rPr>
-              <a:t>SHY</a:t>
-            </a:r>
-          </a:p>
-        </p:txBody>
-      </p:sp>
-      <p:sp>
-        <p:nvSpPr>
-          <p:cNvPr id="7" name="TextBox 6"/>
+              <a:t>SHY-Performance  ·  Formation FIM  ·  UNICEF France  ·  V6-01062026SHY-TE</a:t>
+            </a:r>
+          </a:p>
+        </p:txBody>
+      </p:sp>
+      <p:sp>
+        <p:nvSpPr>
+          <p:cNvPr id="13" name="TextBox 12"/>
           <p:cNvSpPr txBox="1"/>
           <p:nvPr/>
         </p:nvSpPr>
         <p:spPr>
           <a:xfrm>
-            <a:off x="1371600" y="347472"/>
-            <a:ext cx="1828800" cy="411480"/>
+            <a:off x="457200" y="2514600"/>
+            <a:ext cx="10789920" cy="822960"/>
           </a:xfrm>
           <a:prstGeom prst="rect">
             <a:avLst/>
@@ -3321,269 +3515,13 @@
           <a:p>
             <a:pPr algn="l"/>
             <a:r>
-              <a:rPr sz="1400" b="1" i="0">
-                <a:solidFill>
-                  <a:srgbClr val="FFFFFF"/>
+              <a:rPr sz="1400" b="0" i="0">
+                <a:solidFill>
+                  <a:srgbClr val="1A1A1A"/>
                 </a:solidFill>
               </a:rPr>
-              <a:t>Performance</a:t>
-            </a:r>
-          </a:p>
-        </p:txBody>
-      </p:sp>
-      <p:sp>
-        <p:nvSpPr>
-          <p:cNvPr id="8" name="Rectangle 7"/>
-          <p:cNvSpPr/>
-          <p:nvPr/>
-        </p:nvSpPr>
-        <p:spPr>
-          <a:xfrm>
-            <a:off x="3337560" y="164592"/>
-            <a:ext cx="36576" cy="658368"/>
-          </a:xfrm>
-          <a:prstGeom prst="rect">
-            <a:avLst/>
-          </a:prstGeom>
-          <a:solidFill>
-            <a:srgbClr val="FF0000"/>
-          </a:solidFill>
-          <a:ln>
-            <a:noFill/>
-          </a:ln>
-        </p:spPr>
-        <p:style>
-          <a:lnRef idx="1">
-            <a:schemeClr val="accent1"/>
-          </a:lnRef>
-          <a:fillRef idx="3">
-            <a:schemeClr val="accent1"/>
-          </a:fillRef>
-          <a:effectRef idx="2">
-            <a:schemeClr val="accent1"/>
-          </a:effectRef>
-          <a:fontRef idx="minor">
-            <a:schemeClr val="lt1"/>
-          </a:fontRef>
-        </p:style>
-        <p:txBody>
-          <a:bodyPr rtlCol="0" anchor="ctr"/>
-          <a:lstStyle/>
-          <a:p>
-            <a:pPr algn="ctr"/>
-          </a:p>
-        </p:txBody>
-      </p:sp>
-      <p:sp>
-        <p:nvSpPr>
-          <p:cNvPr id="9" name="TextBox 8"/>
-          <p:cNvSpPr txBox="1"/>
-          <p:nvPr/>
-        </p:nvSpPr>
-        <p:spPr>
-          <a:xfrm>
-            <a:off x="3474720" y="164592"/>
-            <a:ext cx="8503920" cy="347472"/>
-          </a:xfrm>
-          <a:prstGeom prst="rect">
-            <a:avLst/>
-          </a:prstGeom>
-          <a:noFill/>
-        </p:spPr>
-        <p:txBody>
-          <a:bodyPr wrap="square">
-            <a:spAutoFit/>
-          </a:bodyPr>
-          <a:lstStyle/>
-          <a:p>
-            <a:pPr algn="l"/>
-            <a:r>
-              <a:rPr sz="900" b="1" i="0">
-                <a:solidFill>
-                  <a:srgbClr val="BBEEEE"/>
-                </a:solidFill>
-              </a:rPr>
-              <a:t>BOOK 1  ·  Synopsis &amp; Objectifs</a:t>
-            </a:r>
-          </a:p>
-        </p:txBody>
-      </p:sp>
-      <p:sp>
-        <p:nvSpPr>
-          <p:cNvPr id="10" name="TextBox 9"/>
-          <p:cNvSpPr txBox="1"/>
-          <p:nvPr/>
-        </p:nvSpPr>
-        <p:spPr>
-          <a:xfrm>
-            <a:off x="320040" y="960120"/>
-            <a:ext cx="11521440" cy="1143000"/>
-          </a:xfrm>
-          <a:prstGeom prst="rect">
-            <a:avLst/>
-          </a:prstGeom>
-          <a:noFill/>
-        </p:spPr>
-        <p:txBody>
-          <a:bodyPr wrap="square">
-            <a:spAutoFit/>
-          </a:bodyPr>
-          <a:lstStyle/>
-          <a:p>
-            <a:pPr algn="l"/>
-            <a:r>
-              <a:rPr sz="3000" b="1" i="0">
-                <a:solidFill>
-                  <a:srgbClr val="FFFFFF"/>
-                </a:solidFill>
-              </a:rPr>
-              <a:t>Votre Feuille de Route</a:t>
-            </a:r>
-          </a:p>
-        </p:txBody>
-      </p:sp>
-      <p:sp>
-        <p:nvSpPr>
-          <p:cNvPr id="11" name="TextBox 10"/>
-          <p:cNvSpPr txBox="1"/>
-          <p:nvPr/>
-        </p:nvSpPr>
-        <p:spPr>
-          <a:xfrm>
-            <a:off x="320040" y="1920240"/>
-            <a:ext cx="11521440" cy="347472"/>
-          </a:xfrm>
-          <a:prstGeom prst="rect">
-            <a:avLst/>
-          </a:prstGeom>
-          <a:noFill/>
-        </p:spPr>
-        <p:txBody>
-          <a:bodyPr wrap="square">
-            <a:spAutoFit/>
-          </a:bodyPr>
-          <a:lstStyle/>
-          <a:p>
-            <a:pPr algn="l"/>
-            <a:r>
-              <a:rPr sz="1200" b="0" i="1">
-                <a:solidFill>
-                  <a:srgbClr val="CCEEEE"/>
-                </a:solidFill>
-              </a:rPr>
-              <a:t>Ce que vous saurez faire à la fin de cette formation</a:t>
-            </a:r>
-          </a:p>
-        </p:txBody>
-      </p:sp>
-      <p:sp>
-        <p:nvSpPr>
-          <p:cNvPr id="12" name="Rectangle 11"/>
-          <p:cNvSpPr/>
-          <p:nvPr/>
-        </p:nvSpPr>
-        <p:spPr>
-          <a:xfrm>
-            <a:off x="0" y="6492240"/>
-            <a:ext cx="12188952" cy="365760"/>
-          </a:xfrm>
-          <a:prstGeom prst="rect">
-            <a:avLst/>
-          </a:prstGeom>
-          <a:solidFill>
-            <a:srgbClr val="005555"/>
-          </a:solidFill>
-          <a:ln>
-            <a:noFill/>
-          </a:ln>
-        </p:spPr>
-        <p:style>
-          <a:lnRef idx="1">
-            <a:schemeClr val="accent1"/>
-          </a:lnRef>
-          <a:fillRef idx="3">
-            <a:schemeClr val="accent1"/>
-          </a:fillRef>
-          <a:effectRef idx="2">
-            <a:schemeClr val="accent1"/>
-          </a:effectRef>
-          <a:fontRef idx="minor">
-            <a:schemeClr val="lt1"/>
-          </a:fontRef>
-        </p:style>
-        <p:txBody>
-          <a:bodyPr rtlCol="0" anchor="ctr"/>
-          <a:lstStyle/>
-          <a:p>
-            <a:pPr algn="ctr"/>
-          </a:p>
-        </p:txBody>
-      </p:sp>
-      <p:sp>
-        <p:nvSpPr>
-          <p:cNvPr id="13" name="TextBox 12"/>
-          <p:cNvSpPr txBox="1"/>
-          <p:nvPr/>
-        </p:nvSpPr>
-        <p:spPr>
-          <a:xfrm>
-            <a:off x="0" y="6519672"/>
-            <a:ext cx="12188952" cy="274320"/>
-          </a:xfrm>
-          <a:prstGeom prst="rect">
-            <a:avLst/>
-          </a:prstGeom>
-          <a:noFill/>
-        </p:spPr>
-        <p:txBody>
-          <a:bodyPr wrap="square">
-            <a:spAutoFit/>
-          </a:bodyPr>
-          <a:lstStyle/>
-          <a:p>
-            <a:pPr algn="ctr"/>
-            <a:r>
-              <a:rPr sz="900" b="0" i="0">
-                <a:solidFill>
-                  <a:srgbClr val="FFFFFF"/>
-                </a:solidFill>
-              </a:rPr>
-              <a:t>SHY-Performance  ·  Formation FIM  ·  V6-01062026SHY-TE</a:t>
-            </a:r>
-          </a:p>
-        </p:txBody>
-      </p:sp>
-      <p:sp>
-        <p:nvSpPr>
-          <p:cNvPr id="14" name="TextBox 13"/>
-          <p:cNvSpPr txBox="1"/>
-          <p:nvPr/>
-        </p:nvSpPr>
-        <p:spPr>
-          <a:xfrm>
-            <a:off x="457200" y="2514600"/>
-            <a:ext cx="11247120" cy="914400"/>
-          </a:xfrm>
-          <a:prstGeom prst="rect">
-            <a:avLst/>
-          </a:prstGeom>
-          <a:noFill/>
-        </p:spPr>
-        <p:txBody>
-          <a:bodyPr wrap="square">
-            <a:spAutoFit/>
-          </a:bodyPr>
-          <a:lstStyle/>
-          <a:p>
-            <a:pPr algn="l"/>
-            <a:r>
-              <a:rPr sz="1400" b="0" i="0">
-                <a:solidFill>
-                  <a:srgbClr val="1A1A1A"/>
-                </a:solidFill>
-              </a:rPr>
-              <a:t>À l'issue de ces 5 jours, vous serez capable de convaincre un donateur français
-de s'engager dans un don mensuel régulier au profit de l'UNICEF.</a:t>
+              <a:t>À l'issue de ces 5 jours, vous serez capable de conduire un appel de collecte de dons
+au nom de l'UNICEF, de la phrase d'accroche jusqu'à la validation du Prélèvement Automatique.</a:t>
             </a:r>
           </a:p>
         </p:txBody>
@@ -3658,7 +3596,7 @@
         <p:spPr>
           <a:xfrm>
             <a:off x="0" y="0"/>
-            <a:ext cx="12188952" cy="658368"/>
+            <a:ext cx="12188952" cy="685800"/>
           </a:xfrm>
           <a:prstGeom prst="rect">
             <a:avLst/>
@@ -3700,14 +3638,14 @@
         </p:nvSpPr>
         <p:spPr>
           <a:xfrm>
-            <a:off x="0" y="640080"/>
-            <a:ext cx="12188952" cy="54864"/>
-          </a:xfrm>
-          <a:prstGeom prst="rect">
-            <a:avLst/>
-          </a:prstGeom>
-          <a:solidFill>
-            <a:srgbClr val="FF0000"/>
+            <a:off x="0" y="667512"/>
+            <a:ext cx="12188952" cy="45720"/>
+          </a:xfrm>
+          <a:prstGeom prst="rect">
+            <a:avLst/>
+          </a:prstGeom>
+          <a:solidFill>
+            <a:srgbClr val="00AAAA"/>
           </a:solidFill>
           <a:ln>
             <a:noFill/>
@@ -3743,8 +3681,8 @@
         </p:nvSpPr>
         <p:spPr>
           <a:xfrm>
-            <a:off x="164592" y="64008"/>
-            <a:ext cx="685800" cy="530352"/>
+            <a:off x="164592" y="73152"/>
+            <a:ext cx="2011680" cy="347472"/>
           </a:xfrm>
           <a:prstGeom prst="rect">
             <a:avLst/>
@@ -3759,12 +3697,12 @@
           <a:p>
             <a:pPr algn="l"/>
             <a:r>
-              <a:rPr sz="2000" b="1" i="0">
+              <a:rPr sz="1400" b="1" i="0">
                 <a:solidFill>
                   <a:srgbClr val="FFFFFF"/>
                 </a:solidFill>
               </a:rPr>
-              <a:t>SHY</a:t>
+              <a:t>SHY-Performance</a:t>
             </a:r>
           </a:p>
         </p:txBody>
@@ -3777,14 +3715,14 @@
         </p:nvSpPr>
         <p:spPr>
           <a:xfrm>
-            <a:off x="914400" y="91440"/>
-            <a:ext cx="36576" cy="475488"/>
-          </a:xfrm>
-          <a:prstGeom prst="rect">
-            <a:avLst/>
-          </a:prstGeom>
-          <a:solidFill>
-            <a:srgbClr val="FF0000"/>
+            <a:off x="2286000" y="91440"/>
+            <a:ext cx="36576" cy="502920"/>
+          </a:xfrm>
+          <a:prstGeom prst="rect">
+            <a:avLst/>
+          </a:prstGeom>
+          <a:solidFill>
+            <a:srgbClr val="00AAAA"/>
           </a:solidFill>
           <a:ln>
             <a:noFill/>
@@ -3820,8 +3758,8 @@
         </p:nvSpPr>
         <p:spPr>
           <a:xfrm>
-            <a:off x="1024128" y="91440"/>
-            <a:ext cx="10881360" cy="475488"/>
+            <a:off x="2423160" y="91440"/>
+            <a:ext cx="9235440" cy="502920"/>
           </a:xfrm>
           <a:prstGeom prst="rect">
             <a:avLst/>
@@ -3836,19 +3774,43 @@
           <a:p>
             <a:pPr algn="l"/>
             <a:r>
-              <a:rPr sz="1700" b="1" i="0">
+              <a:rPr sz="1600" b="1" i="0">
                 <a:solidFill>
                   <a:srgbClr val="FFFFFF"/>
                 </a:solidFill>
               </a:rPr>
-              <a:t>Les 7 Compétences que Vous Allez Développer</a:t>
-            </a:r>
-          </a:p>
-        </p:txBody>
-      </p:sp>
-      <p:sp>
-        <p:nvSpPr>
-          <p:cNvPr id="8" name="Rectangle 7"/>
+              <a:t>Vos 3 Dimensions de Compétence</a:t>
+            </a:r>
+          </a:p>
+        </p:txBody>
+      </p:sp>
+      <p:pic>
+        <p:nvPicPr>
+          <p:cNvPr id="8" name="Picture 7" descr="shy_logo_v2.png"/>
+          <p:cNvPicPr>
+            <a:picLocks noChangeAspect="1"/>
+          </p:cNvPicPr>
+          <p:nvPr/>
+        </p:nvPicPr>
+        <p:blipFill>
+          <a:blip r:embed="rId2"/>
+          <a:stretch>
+            <a:fillRect/>
+          </a:stretch>
+        </p:blipFill>
+        <p:spPr>
+          <a:xfrm>
+            <a:off x="11247120" y="0"/>
+            <a:ext cx="822960" cy="676656"/>
+          </a:xfrm>
+          <a:prstGeom prst="rect">
+            <a:avLst/>
+          </a:prstGeom>
+        </p:spPr>
+      </p:pic>
+      <p:sp>
+        <p:nvSpPr>
+          <p:cNvPr id="9" name="Rectangle 8"/>
           <p:cNvSpPr/>
           <p:nvPr/>
         </p:nvSpPr>
@@ -3891,7 +3853,7 @@
       </p:sp>
       <p:sp>
         <p:nvSpPr>
-          <p:cNvPr id="9" name="TextBox 8"/>
+          <p:cNvPr id="10" name="TextBox 9"/>
           <p:cNvSpPr txBox="1"/>
           <p:nvPr/>
         </p:nvSpPr>
@@ -3913,26 +3875,26 @@
           <a:p>
             <a:pPr algn="ctr"/>
             <a:r>
-              <a:rPr sz="900" b="0" i="0">
+              <a:rPr sz="800" b="0" i="0">
                 <a:solidFill>
                   <a:srgbClr val="FFFFFF"/>
                 </a:solidFill>
               </a:rPr>
-              <a:t>SHY-Performance  ·  Formation FIM  ·  V6-01062026SHY-TE</a:t>
-            </a:r>
-          </a:p>
-        </p:txBody>
-      </p:sp>
-      <p:sp>
-        <p:nvSpPr>
-          <p:cNvPr id="10" name="Rectangle 9"/>
+              <a:t>SHY-Performance  ·  Formation FIM  ·  UNICEF France  ·  V6-01062026SHY-TE</a:t>
+            </a:r>
+          </a:p>
+        </p:txBody>
+      </p:sp>
+      <p:sp>
+        <p:nvSpPr>
+          <p:cNvPr id="11" name="Rectangle 10"/>
           <p:cNvSpPr/>
           <p:nvPr/>
         </p:nvSpPr>
         <p:spPr>
           <a:xfrm>
             <a:off x="274320" y="804672"/>
-            <a:ext cx="822960" cy="493776"/>
+            <a:ext cx="3822191" cy="475488"/>
           </a:xfrm>
           <a:prstGeom prst="rect">
             <a:avLst/>
@@ -3968,14 +3930,14 @@
       </p:sp>
       <p:sp>
         <p:nvSpPr>
-          <p:cNvPr id="11" name="TextBox 10"/>
+          <p:cNvPr id="12" name="TextBox 11"/>
           <p:cNvSpPr txBox="1"/>
           <p:nvPr/>
         </p:nvSpPr>
         <p:spPr>
           <a:xfrm>
-            <a:off x="292608" y="896112"/>
-            <a:ext cx="786384" cy="329184"/>
+            <a:off x="384048" y="822960"/>
+            <a:ext cx="3657600" cy="274320"/>
           </a:xfrm>
           <a:prstGeom prst="rect">
             <a:avLst/>
@@ -3988,36 +3950,70 @@
           </a:bodyPr>
           <a:lstStyle/>
           <a:p>
-            <a:pPr algn="ctr"/>
+            <a:pPr algn="l"/>
             <a:r>
               <a:rPr sz="1400" b="1" i="0">
                 <a:solidFill>
                   <a:srgbClr val="FFFFFF"/>
                 </a:solidFill>
               </a:rPr>
-              <a:t>C1</a:t>
-            </a:r>
-          </a:p>
-        </p:txBody>
-      </p:sp>
-      <p:sp>
-        <p:nvSpPr>
-          <p:cNvPr id="12" name="Rectangle 11"/>
+              <a:t>SAVOIR</a:t>
+            </a:r>
+          </a:p>
+        </p:txBody>
+      </p:sp>
+      <p:sp>
+        <p:nvSpPr>
+          <p:cNvPr id="13" name="TextBox 12"/>
+          <p:cNvSpPr txBox="1"/>
+          <p:nvPr/>
+        </p:nvSpPr>
+        <p:spPr>
+          <a:xfrm>
+            <a:off x="384048" y="1097280"/>
+            <a:ext cx="3657600" cy="201168"/>
+          </a:xfrm>
+          <a:prstGeom prst="rect">
+            <a:avLst/>
+          </a:prstGeom>
+          <a:noFill/>
+        </p:spPr>
+        <p:txBody>
+          <a:bodyPr wrap="square">
+            <a:spAutoFit/>
+          </a:bodyPr>
+          <a:lstStyle/>
+          <a:p>
+            <a:pPr algn="l"/>
+            <a:r>
+              <a:rPr sz="900" b="0" i="0">
+                <a:solidFill>
+                  <a:srgbClr val="CCEEEE"/>
+                </a:solidFill>
+              </a:rPr>
+              <a:t>Connaissance de la cause</a:t>
+            </a:r>
+          </a:p>
+        </p:txBody>
+      </p:sp>
+      <p:sp>
+        <p:nvSpPr>
+          <p:cNvPr id="14" name="Rectangle 13"/>
           <p:cNvSpPr/>
           <p:nvPr/>
         </p:nvSpPr>
         <p:spPr>
           <a:xfrm>
-            <a:off x="1115568" y="804672"/>
-            <a:ext cx="2926080" cy="493776"/>
-          </a:xfrm>
-          <a:prstGeom prst="rect">
-            <a:avLst/>
-          </a:prstGeom>
-          <a:solidFill>
-            <a:srgbClr val="F0F7F7"/>
-          </a:solidFill>
-          <a:ln w="10160">
+            <a:off x="274320" y="1316736"/>
+            <a:ext cx="3822191" cy="457200"/>
+          </a:xfrm>
+          <a:prstGeom prst="rect">
+            <a:avLst/>
+          </a:prstGeom>
+          <a:solidFill>
+            <a:srgbClr val="FFFFFF"/>
+          </a:solidFill>
+          <a:ln w="5080">
             <a:solidFill>
               <a:srgbClr val="005555"/>
             </a:solidFill>
@@ -4047,14 +4043,14 @@
       </p:sp>
       <p:sp>
         <p:nvSpPr>
-          <p:cNvPr id="13" name="TextBox 12"/>
+          <p:cNvPr id="15" name="TextBox 14"/>
           <p:cNvSpPr txBox="1"/>
           <p:nvPr/>
         </p:nvSpPr>
         <p:spPr>
           <a:xfrm>
-            <a:off x="1207008" y="896112"/>
-            <a:ext cx="2743200" cy="329184"/>
+            <a:off x="384048" y="1371600"/>
+            <a:ext cx="3621024" cy="365760"/>
           </a:xfrm>
           <a:prstGeom prst="rect">
             <a:avLst/>
@@ -4069,34 +4065,34 @@
           <a:p>
             <a:pPr algn="l"/>
             <a:r>
-              <a:rPr sz="1200" b="1" i="0">
-                <a:solidFill>
-                  <a:srgbClr val="005555"/>
+              <a:rPr sz="900" b="0" i="0">
+                <a:solidFill>
+                  <a:srgbClr val="1A1A1A"/>
                 </a:solidFill>
               </a:rPr>
-              <a:t>Accroche</a:t>
-            </a:r>
-          </a:p>
-        </p:txBody>
-      </p:sp>
-      <p:sp>
-        <p:nvSpPr>
-          <p:cNvPr id="14" name="Rectangle 13"/>
+              <a:t>• Présenter l'UNICEF, sa mission, son histoire (75 ans, 190 pays)</a:t>
+            </a:r>
+          </a:p>
+        </p:txBody>
+      </p:sp>
+      <p:sp>
+        <p:nvSpPr>
+          <p:cNvPr id="16" name="Rectangle 15"/>
           <p:cNvSpPr/>
           <p:nvPr/>
         </p:nvSpPr>
         <p:spPr>
           <a:xfrm>
-            <a:off x="4059936" y="804672"/>
-            <a:ext cx="7854696" cy="493776"/>
-          </a:xfrm>
-          <a:prstGeom prst="rect">
-            <a:avLst/>
-          </a:prstGeom>
-          <a:solidFill>
-            <a:srgbClr val="FFFFFF"/>
-          </a:solidFill>
-          <a:ln w="6350">
+            <a:off x="274320" y="1792224"/>
+            <a:ext cx="3822191" cy="457200"/>
+          </a:xfrm>
+          <a:prstGeom prst="rect">
+            <a:avLst/>
+          </a:prstGeom>
+          <a:solidFill>
+            <a:srgbClr val="F0F7F7"/>
+          </a:solidFill>
+          <a:ln w="5080">
             <a:solidFill>
               <a:srgbClr val="005555"/>
             </a:solidFill>
@@ -4126,14 +4122,14 @@
       </p:sp>
       <p:sp>
         <p:nvSpPr>
-          <p:cNvPr id="15" name="TextBox 14"/>
+          <p:cNvPr id="17" name="TextBox 16"/>
           <p:cNvSpPr txBox="1"/>
           <p:nvPr/>
         </p:nvSpPr>
         <p:spPr>
           <a:xfrm>
-            <a:off x="4169663" y="896112"/>
-            <a:ext cx="7644383" cy="329184"/>
+            <a:off x="384048" y="1847088"/>
+            <a:ext cx="3621024" cy="365760"/>
           </a:xfrm>
           <a:prstGeom prst="rect">
             <a:avLst/>
@@ -4148,35 +4144,37 @@
           <a:p>
             <a:pPr algn="l"/>
             <a:r>
-              <a:rPr sz="1100" b="0" i="1">
+              <a:rPr sz="900" b="0" i="0">
                 <a:solidFill>
                   <a:srgbClr val="1A1A1A"/>
                 </a:solidFill>
               </a:rPr>
-              <a:t>Initier un contact naturel en moins de 15 secondes</a:t>
-            </a:r>
-          </a:p>
-        </p:txBody>
-      </p:sp>
-      <p:sp>
-        <p:nvSpPr>
-          <p:cNvPr id="16" name="Rectangle 15"/>
+              <a:t>• Expliquer la malnutrition aigüe sévère et le rôle des sachets RUTF (92g)</a:t>
+            </a:r>
+          </a:p>
+        </p:txBody>
+      </p:sp>
+      <p:sp>
+        <p:nvSpPr>
+          <p:cNvPr id="18" name="Rectangle 17"/>
           <p:cNvSpPr/>
           <p:nvPr/>
         </p:nvSpPr>
         <p:spPr>
           <a:xfrm>
-            <a:off x="274320" y="1325880"/>
-            <a:ext cx="822960" cy="493776"/>
-          </a:xfrm>
-          <a:prstGeom prst="rect">
-            <a:avLst/>
-          </a:prstGeom>
-          <a:solidFill>
-            <a:srgbClr val="008080"/>
-          </a:solidFill>
-          <a:ln>
-            <a:noFill/>
+            <a:off x="274320" y="2267712"/>
+            <a:ext cx="3822191" cy="457200"/>
+          </a:xfrm>
+          <a:prstGeom prst="rect">
+            <a:avLst/>
+          </a:prstGeom>
+          <a:solidFill>
+            <a:srgbClr val="FFFFFF"/>
+          </a:solidFill>
+          <a:ln w="5080">
+            <a:solidFill>
+              <a:srgbClr val="005555"/>
+            </a:solidFill>
           </a:ln>
         </p:spPr>
         <p:style>
@@ -4203,14 +4201,14 @@
       </p:sp>
       <p:sp>
         <p:nvSpPr>
-          <p:cNvPr id="17" name="TextBox 16"/>
+          <p:cNvPr id="19" name="TextBox 18"/>
           <p:cNvSpPr txBox="1"/>
           <p:nvPr/>
         </p:nvSpPr>
         <p:spPr>
           <a:xfrm>
-            <a:off x="292608" y="1417320"/>
-            <a:ext cx="786384" cy="329184"/>
+            <a:off x="384048" y="2322576"/>
+            <a:ext cx="3621024" cy="365760"/>
           </a:xfrm>
           <a:prstGeom prst="rect">
             <a:avLst/>
@@ -4223,28 +4221,28 @@
           </a:bodyPr>
           <a:lstStyle/>
           <a:p>
-            <a:pPr algn="ctr"/>
-            <a:r>
-              <a:rPr sz="1400" b="1" i="0">
-                <a:solidFill>
-                  <a:srgbClr val="FFFFFF"/>
+            <a:pPr algn="l"/>
+            <a:r>
+              <a:rPr sz="900" b="0" i="0">
+                <a:solidFill>
+                  <a:srgbClr val="1A1A1A"/>
                 </a:solidFill>
               </a:rPr>
-              <a:t>C2</a:t>
-            </a:r>
-          </a:p>
-        </p:txBody>
-      </p:sp>
-      <p:sp>
-        <p:nvSpPr>
-          <p:cNvPr id="18" name="Rectangle 17"/>
+              <a:t>• Situer le secteur associatif (Loi 1901, Comité de la Charte, Bloctel, RGPD)</a:t>
+            </a:r>
+          </a:p>
+        </p:txBody>
+      </p:sp>
+      <p:sp>
+        <p:nvSpPr>
+          <p:cNvPr id="20" name="Rectangle 19"/>
           <p:cNvSpPr/>
           <p:nvPr/>
         </p:nvSpPr>
         <p:spPr>
           <a:xfrm>
-            <a:off x="1115568" y="1325880"/>
-            <a:ext cx="2926080" cy="493776"/>
+            <a:off x="274320" y="2743200"/>
+            <a:ext cx="3822191" cy="457200"/>
           </a:xfrm>
           <a:prstGeom prst="rect">
             <a:avLst/>
@@ -4252,9 +4250,9 @@
           <a:solidFill>
             <a:srgbClr val="F0F7F7"/>
           </a:solidFill>
-          <a:ln w="10160">
+          <a:ln w="5080">
             <a:solidFill>
-              <a:srgbClr val="008080"/>
+              <a:srgbClr val="005555"/>
             </a:solidFill>
           </a:ln>
         </p:spPr>
@@ -4282,14 +4280,14 @@
       </p:sp>
       <p:sp>
         <p:nvSpPr>
-          <p:cNvPr id="19" name="TextBox 18"/>
+          <p:cNvPr id="21" name="TextBox 20"/>
           <p:cNvSpPr txBox="1"/>
           <p:nvPr/>
         </p:nvSpPr>
         <p:spPr>
           <a:xfrm>
-            <a:off x="1207008" y="1417320"/>
-            <a:ext cx="2743200" cy="329184"/>
+            <a:off x="384048" y="2798064"/>
+            <a:ext cx="3621024" cy="365760"/>
           </a:xfrm>
           <a:prstGeom prst="rect">
             <a:avLst/>
@@ -4304,26 +4302,26 @@
           <a:p>
             <a:pPr algn="l"/>
             <a:r>
-              <a:rPr sz="1200" b="1" i="0">
-                <a:solidFill>
-                  <a:srgbClr val="008080"/>
+              <a:rPr sz="900" b="0" i="0">
+                <a:solidFill>
+                  <a:srgbClr val="1A1A1A"/>
                 </a:solidFill>
               </a:rPr>
-              <a:t>Impact Story</a:t>
-            </a:r>
-          </a:p>
-        </p:txBody>
-      </p:sp>
-      <p:sp>
-        <p:nvSpPr>
-          <p:cNvPr id="20" name="Rectangle 19"/>
+              <a:t>• Citer les arguments de légitimité UNICEF</a:t>
+            </a:r>
+          </a:p>
+        </p:txBody>
+      </p:sp>
+      <p:sp>
+        <p:nvSpPr>
+          <p:cNvPr id="22" name="Rectangle 21"/>
           <p:cNvSpPr/>
           <p:nvPr/>
         </p:nvSpPr>
         <p:spPr>
           <a:xfrm>
-            <a:off x="4059936" y="1325880"/>
-            <a:ext cx="7854696" cy="493776"/>
+            <a:off x="274320" y="3218688"/>
+            <a:ext cx="3822191" cy="457200"/>
           </a:xfrm>
           <a:prstGeom prst="rect">
             <a:avLst/>
@@ -4331,9 +4329,9 @@
           <a:solidFill>
             <a:srgbClr val="FFFFFF"/>
           </a:solidFill>
-          <a:ln w="6350">
+          <a:ln w="5080">
             <a:solidFill>
-              <a:srgbClr val="008080"/>
+              <a:srgbClr val="005555"/>
             </a:solidFill>
           </a:ln>
         </p:spPr>
@@ -4361,14 +4359,14 @@
       </p:sp>
       <p:sp>
         <p:nvSpPr>
-          <p:cNvPr id="21" name="TextBox 20"/>
+          <p:cNvPr id="23" name="TextBox 22"/>
           <p:cNvSpPr txBox="1"/>
           <p:nvPr/>
         </p:nvSpPr>
         <p:spPr>
           <a:xfrm>
-            <a:off x="4169663" y="1417320"/>
-            <a:ext cx="7644383" cy="329184"/>
+            <a:off x="384048" y="3273552"/>
+            <a:ext cx="3621024" cy="365760"/>
           </a:xfrm>
           <a:prstGeom prst="rect">
             <a:avLst/>
@@ -4383,35 +4381,37 @@
           <a:p>
             <a:pPr algn="l"/>
             <a:r>
-              <a:rPr sz="1100" b="0" i="1">
+              <a:rPr sz="900" b="0" i="0">
                 <a:solidFill>
                   <a:srgbClr val="1A1A1A"/>
                 </a:solidFill>
               </a:rPr>
-              <a:t>Raconter une histoire vraie qui touche et convainc</a:t>
-            </a:r>
-          </a:p>
-        </p:txBody>
-      </p:sp>
-      <p:sp>
-        <p:nvSpPr>
-          <p:cNvPr id="22" name="Rectangle 21"/>
+              <a:t>• Connaître les 3 principes humanitaires fondamentaux</a:t>
+            </a:r>
+          </a:p>
+        </p:txBody>
+      </p:sp>
+      <p:sp>
+        <p:nvSpPr>
+          <p:cNvPr id="24" name="Rectangle 23"/>
           <p:cNvSpPr/>
           <p:nvPr/>
         </p:nvSpPr>
         <p:spPr>
           <a:xfrm>
-            <a:off x="274320" y="1847088"/>
-            <a:ext cx="822960" cy="493776"/>
-          </a:xfrm>
-          <a:prstGeom prst="rect">
-            <a:avLst/>
-          </a:prstGeom>
-          <a:solidFill>
-            <a:srgbClr val="005555"/>
-          </a:solidFill>
-          <a:ln>
-            <a:noFill/>
+            <a:off x="274320" y="3694176"/>
+            <a:ext cx="3822191" cy="457200"/>
+          </a:xfrm>
+          <a:prstGeom prst="rect">
+            <a:avLst/>
+          </a:prstGeom>
+          <a:solidFill>
+            <a:srgbClr val="F0F7F7"/>
+          </a:solidFill>
+          <a:ln w="5080">
+            <a:solidFill>
+              <a:srgbClr val="005555"/>
+            </a:solidFill>
           </a:ln>
         </p:spPr>
         <p:style>
@@ -4438,14 +4438,14 @@
       </p:sp>
       <p:sp>
         <p:nvSpPr>
-          <p:cNvPr id="23" name="TextBox 22"/>
+          <p:cNvPr id="25" name="TextBox 24"/>
           <p:cNvSpPr txBox="1"/>
           <p:nvPr/>
         </p:nvSpPr>
         <p:spPr>
           <a:xfrm>
-            <a:off x="292608" y="1938528"/>
-            <a:ext cx="786384" cy="329184"/>
+            <a:off x="384048" y="3749039"/>
+            <a:ext cx="3621024" cy="365760"/>
           </a:xfrm>
           <a:prstGeom prst="rect">
             <a:avLst/>
@@ -4458,39 +4458,37 @@
           </a:bodyPr>
           <a:lstStyle/>
           <a:p>
-            <a:pPr algn="ctr"/>
-            <a:r>
-              <a:rPr sz="1400" b="1" i="0">
-                <a:solidFill>
-                  <a:srgbClr val="FFFFFF"/>
+            <a:pPr algn="l"/>
+            <a:r>
+              <a:rPr sz="900" b="0" i="0">
+                <a:solidFill>
+                  <a:srgbClr val="1A1A1A"/>
                 </a:solidFill>
               </a:rPr>
-              <a:t>C3</a:t>
-            </a:r>
-          </a:p>
-        </p:txBody>
-      </p:sp>
-      <p:sp>
-        <p:nvSpPr>
-          <p:cNvPr id="24" name="Rectangle 23"/>
+              <a:t>• Comprendre Conquête vs Fidélisation/Réactivation</a:t>
+            </a:r>
+          </a:p>
+        </p:txBody>
+      </p:sp>
+      <p:sp>
+        <p:nvSpPr>
+          <p:cNvPr id="26" name="Rectangle 25"/>
           <p:cNvSpPr/>
           <p:nvPr/>
         </p:nvSpPr>
         <p:spPr>
           <a:xfrm>
-            <a:off x="1115568" y="1847088"/>
-            <a:ext cx="2926080" cy="493776"/>
-          </a:xfrm>
-          <a:prstGeom prst="rect">
-            <a:avLst/>
-          </a:prstGeom>
-          <a:solidFill>
-            <a:srgbClr val="F0F7F7"/>
-          </a:solidFill>
-          <a:ln w="10160">
-            <a:solidFill>
-              <a:srgbClr val="005555"/>
-            </a:solidFill>
+            <a:off x="4251959" y="804672"/>
+            <a:ext cx="3822191" cy="475488"/>
+          </a:xfrm>
+          <a:prstGeom prst="rect">
+            <a:avLst/>
+          </a:prstGeom>
+          <a:solidFill>
+            <a:srgbClr val="008080"/>
+          </a:solidFill>
+          <a:ln>
+            <a:noFill/>
           </a:ln>
         </p:spPr>
         <p:style>
@@ -4517,14 +4515,14 @@
       </p:sp>
       <p:sp>
         <p:nvSpPr>
-          <p:cNvPr id="25" name="TextBox 24"/>
+          <p:cNvPr id="27" name="TextBox 26"/>
           <p:cNvSpPr txBox="1"/>
           <p:nvPr/>
         </p:nvSpPr>
         <p:spPr>
           <a:xfrm>
-            <a:off x="1207008" y="1938528"/>
-            <a:ext cx="2743200" cy="329184"/>
+            <a:off x="4361688" y="822960"/>
+            <a:ext cx="3657600" cy="274320"/>
           </a:xfrm>
           <a:prstGeom prst="rect">
             <a:avLst/>
@@ -4539,26 +4537,60 @@
           <a:p>
             <a:pPr algn="l"/>
             <a:r>
-              <a:rPr sz="1200" b="1" i="0">
-                <a:solidFill>
-                  <a:srgbClr val="005555"/>
+              <a:rPr sz="1400" b="1" i="0">
+                <a:solidFill>
+                  <a:srgbClr val="FFFFFF"/>
                 </a:solidFill>
               </a:rPr>
-              <a:t>Écoute active</a:t>
-            </a:r>
-          </a:p>
-        </p:txBody>
-      </p:sp>
-      <p:sp>
-        <p:nvSpPr>
-          <p:cNvPr id="26" name="Rectangle 25"/>
+              <a:t>SAVOIR-FAIRE</a:t>
+            </a:r>
+          </a:p>
+        </p:txBody>
+      </p:sp>
+      <p:sp>
+        <p:nvSpPr>
+          <p:cNvPr id="28" name="TextBox 27"/>
+          <p:cNvSpPr txBox="1"/>
+          <p:nvPr/>
+        </p:nvSpPr>
+        <p:spPr>
+          <a:xfrm>
+            <a:off x="4361688" y="1097280"/>
+            <a:ext cx="3657600" cy="201168"/>
+          </a:xfrm>
+          <a:prstGeom prst="rect">
+            <a:avLst/>
+          </a:prstGeom>
+          <a:noFill/>
+        </p:spPr>
+        <p:txBody>
+          <a:bodyPr wrap="square">
+            <a:spAutoFit/>
+          </a:bodyPr>
+          <a:lstStyle/>
+          <a:p>
+            <a:pPr algn="l"/>
+            <a:r>
+              <a:rPr sz="900" b="0" i="0">
+                <a:solidFill>
+                  <a:srgbClr val="CCEEEE"/>
+                </a:solidFill>
+              </a:rPr>
+              <a:t>Technique d'appel &amp; qualification</a:t>
+            </a:r>
+          </a:p>
+        </p:txBody>
+      </p:sp>
+      <p:sp>
+        <p:nvSpPr>
+          <p:cNvPr id="29" name="Rectangle 28"/>
           <p:cNvSpPr/>
           <p:nvPr/>
         </p:nvSpPr>
         <p:spPr>
           <a:xfrm>
-            <a:off x="4059936" y="1847088"/>
-            <a:ext cx="7854696" cy="493776"/>
+            <a:off x="4251959" y="1316736"/>
+            <a:ext cx="3822191" cy="457200"/>
           </a:xfrm>
           <a:prstGeom prst="rect">
             <a:avLst/>
@@ -4566,9 +4598,9 @@
           <a:solidFill>
             <a:srgbClr val="FFFFFF"/>
           </a:solidFill>
-          <a:ln w="6350">
+          <a:ln w="5080">
             <a:solidFill>
-              <a:srgbClr val="005555"/>
+              <a:srgbClr val="008080"/>
             </a:solidFill>
           </a:ln>
         </p:spPr>
@@ -4596,14 +4628,14 @@
       </p:sp>
       <p:sp>
         <p:nvSpPr>
-          <p:cNvPr id="27" name="TextBox 26"/>
+          <p:cNvPr id="30" name="TextBox 29"/>
           <p:cNvSpPr txBox="1"/>
           <p:nvPr/>
         </p:nvSpPr>
         <p:spPr>
           <a:xfrm>
-            <a:off x="4169663" y="1938528"/>
-            <a:ext cx="7644383" cy="329184"/>
+            <a:off x="4361688" y="1371600"/>
+            <a:ext cx="3621024" cy="365760"/>
           </a:xfrm>
           <a:prstGeom prst="rect">
             <a:avLst/>
@@ -4618,35 +4650,37 @@
           <a:p>
             <a:pPr algn="l"/>
             <a:r>
-              <a:rPr sz="1100" b="0" i="1">
+              <a:rPr sz="900" b="0" i="0">
                 <a:solidFill>
                   <a:srgbClr val="1A1A1A"/>
                 </a:solidFill>
               </a:rPr>
-              <a:t>Lire les signaux du donateur et ajuster votre discours</a:t>
-            </a:r>
-          </a:p>
-        </p:txBody>
-      </p:sp>
-      <p:sp>
-        <p:nvSpPr>
-          <p:cNvPr id="28" name="Rectangle 27"/>
+              <a:t>• Appliquer les 5 règles officielles de l'accroche téléphonique</a:t>
+            </a:r>
+          </a:p>
+        </p:txBody>
+      </p:sp>
+      <p:sp>
+        <p:nvSpPr>
+          <p:cNvPr id="31" name="Rectangle 30"/>
           <p:cNvSpPr/>
           <p:nvPr/>
         </p:nvSpPr>
         <p:spPr>
           <a:xfrm>
-            <a:off x="274320" y="2368296"/>
-            <a:ext cx="822960" cy="493776"/>
-          </a:xfrm>
-          <a:prstGeom prst="rect">
-            <a:avLst/>
-          </a:prstGeom>
-          <a:solidFill>
-            <a:srgbClr val="008080"/>
-          </a:solidFill>
-          <a:ln>
-            <a:noFill/>
+            <a:off x="4251959" y="1792224"/>
+            <a:ext cx="3822191" cy="457200"/>
+          </a:xfrm>
+          <a:prstGeom prst="rect">
+            <a:avLst/>
+          </a:prstGeom>
+          <a:solidFill>
+            <a:srgbClr val="F0F7F7"/>
+          </a:solidFill>
+          <a:ln w="5080">
+            <a:solidFill>
+              <a:srgbClr val="008080"/>
+            </a:solidFill>
           </a:ln>
         </p:spPr>
         <p:style>
@@ -4673,14 +4707,14 @@
       </p:sp>
       <p:sp>
         <p:nvSpPr>
-          <p:cNvPr id="29" name="TextBox 28"/>
+          <p:cNvPr id="32" name="TextBox 31"/>
           <p:cNvSpPr txBox="1"/>
           <p:nvPr/>
         </p:nvSpPr>
         <p:spPr>
           <a:xfrm>
-            <a:off x="292608" y="2459736"/>
-            <a:ext cx="786384" cy="329184"/>
+            <a:off x="4361688" y="1847088"/>
+            <a:ext cx="3621024" cy="365760"/>
           </a:xfrm>
           <a:prstGeom prst="rect">
             <a:avLst/>
@@ -4693,36 +4727,36 @@
           </a:bodyPr>
           <a:lstStyle/>
           <a:p>
-            <a:pPr algn="ctr"/>
-            <a:r>
-              <a:rPr sz="1400" b="1" i="0">
-                <a:solidFill>
-                  <a:srgbClr val="FFFFFF"/>
+            <a:pPr algn="l"/>
+            <a:r>
+              <a:rPr sz="900" b="0" i="0">
+                <a:solidFill>
+                  <a:srgbClr val="1A1A1A"/>
                 </a:solidFill>
               </a:rPr>
-              <a:t>C4</a:t>
-            </a:r>
-          </a:p>
-        </p:txBody>
-      </p:sp>
-      <p:sp>
-        <p:nvSpPr>
-          <p:cNvPr id="30" name="Rectangle 29"/>
+              <a:t>• Conduire le script officiel UNICEF en 7 étapes</a:t>
+            </a:r>
+          </a:p>
+        </p:txBody>
+      </p:sp>
+      <p:sp>
+        <p:nvSpPr>
+          <p:cNvPr id="33" name="Rectangle 32"/>
           <p:cNvSpPr/>
           <p:nvPr/>
         </p:nvSpPr>
         <p:spPr>
           <a:xfrm>
-            <a:off x="1115568" y="2368296"/>
-            <a:ext cx="2926080" cy="493776"/>
-          </a:xfrm>
-          <a:prstGeom prst="rect">
-            <a:avLst/>
-          </a:prstGeom>
-          <a:solidFill>
-            <a:srgbClr val="F0F7F7"/>
-          </a:solidFill>
-          <a:ln w="10160">
+            <a:off x="4251959" y="2267712"/>
+            <a:ext cx="3822191" cy="457200"/>
+          </a:xfrm>
+          <a:prstGeom prst="rect">
+            <a:avLst/>
+          </a:prstGeom>
+          <a:solidFill>
+            <a:srgbClr val="FFFFFF"/>
+          </a:solidFill>
+          <a:ln w="5080">
             <a:solidFill>
               <a:srgbClr val="008080"/>
             </a:solidFill>
@@ -4752,14 +4786,14 @@
       </p:sp>
       <p:sp>
         <p:nvSpPr>
-          <p:cNvPr id="31" name="TextBox 30"/>
+          <p:cNvPr id="34" name="TextBox 33"/>
           <p:cNvSpPr txBox="1"/>
           <p:nvPr/>
         </p:nvSpPr>
         <p:spPr>
           <a:xfrm>
-            <a:off x="1207008" y="2459736"/>
-            <a:ext cx="2743200" cy="329184"/>
+            <a:off x="4361688" y="2322576"/>
+            <a:ext cx="3621024" cy="365760"/>
           </a:xfrm>
           <a:prstGeom prst="rect">
             <a:avLst/>
@@ -4774,34 +4808,34 @@
           <a:p>
             <a:pPr algn="l"/>
             <a:r>
-              <a:rPr sz="1200" b="1" i="0">
-                <a:solidFill>
-                  <a:srgbClr val="008080"/>
+              <a:rPr sz="900" b="0" i="0">
+                <a:solidFill>
+                  <a:srgbClr val="1A1A1A"/>
                 </a:solidFill>
               </a:rPr>
-              <a:t>Objections</a:t>
-            </a:r>
-          </a:p>
-        </p:txBody>
-      </p:sp>
-      <p:sp>
-        <p:nvSpPr>
-          <p:cNvPr id="32" name="Rectangle 31"/>
+              <a:t>• Qualifier chaque appel selon la nomenclature FIDELIS (DON/INDÉCIS/REFUS)</a:t>
+            </a:r>
+          </a:p>
+        </p:txBody>
+      </p:sp>
+      <p:sp>
+        <p:nvSpPr>
+          <p:cNvPr id="35" name="Rectangle 34"/>
           <p:cNvSpPr/>
           <p:nvPr/>
         </p:nvSpPr>
         <p:spPr>
           <a:xfrm>
-            <a:off x="4059936" y="2368296"/>
-            <a:ext cx="7854696" cy="493776"/>
-          </a:xfrm>
-          <a:prstGeom prst="rect">
-            <a:avLst/>
-          </a:prstGeom>
-          <a:solidFill>
-            <a:srgbClr val="FFFFFF"/>
-          </a:solidFill>
-          <a:ln w="6350">
+            <a:off x="4251959" y="2743200"/>
+            <a:ext cx="3822191" cy="457200"/>
+          </a:xfrm>
+          <a:prstGeom prst="rect">
+            <a:avLst/>
+          </a:prstGeom>
+          <a:solidFill>
+            <a:srgbClr val="F0F7F7"/>
+          </a:solidFill>
+          <a:ln w="5080">
             <a:solidFill>
               <a:srgbClr val="008080"/>
             </a:solidFill>
@@ -4831,14 +4865,14 @@
       </p:sp>
       <p:sp>
         <p:nvSpPr>
-          <p:cNvPr id="33" name="TextBox 32"/>
+          <p:cNvPr id="36" name="TextBox 35"/>
           <p:cNvSpPr txBox="1"/>
           <p:nvPr/>
         </p:nvSpPr>
         <p:spPr>
           <a:xfrm>
-            <a:off x="4169663" y="2459736"/>
-            <a:ext cx="7644383" cy="329184"/>
+            <a:off x="4361688" y="2798064"/>
+            <a:ext cx="3621024" cy="365760"/>
           </a:xfrm>
           <a:prstGeom prst="rect">
             <a:avLst/>
@@ -4853,35 +4887,37 @@
           <a:p>
             <a:pPr algn="l"/>
             <a:r>
-              <a:rPr sz="1100" b="0" i="1">
+              <a:rPr sz="900" b="0" i="0">
                 <a:solidFill>
                   <a:srgbClr val="1A1A1A"/>
                 </a:solidFill>
               </a:rPr>
-              <a:t>Transformer un refus en opportunité d'engagement</a:t>
-            </a:r>
-          </a:p>
-        </p:txBody>
-      </p:sp>
-      <p:sp>
-        <p:nvSpPr>
-          <p:cNvPr id="34" name="Rectangle 33"/>
+              <a:t>• Gérer les 4 modes de validation du don (IBAN à chaud, PA en ligne, PEL, PA courrier)</a:t>
+            </a:r>
+          </a:p>
+        </p:txBody>
+      </p:sp>
+      <p:sp>
+        <p:nvSpPr>
+          <p:cNvPr id="37" name="Rectangle 36"/>
           <p:cNvSpPr/>
           <p:nvPr/>
         </p:nvSpPr>
         <p:spPr>
           <a:xfrm>
-            <a:off x="274320" y="2889503"/>
-            <a:ext cx="822960" cy="493776"/>
-          </a:xfrm>
-          <a:prstGeom prst="rect">
-            <a:avLst/>
-          </a:prstGeom>
-          <a:solidFill>
-            <a:srgbClr val="005555"/>
-          </a:solidFill>
-          <a:ln>
-            <a:noFill/>
+            <a:off x="4251959" y="3218688"/>
+            <a:ext cx="3822191" cy="457200"/>
+          </a:xfrm>
+          <a:prstGeom prst="rect">
+            <a:avLst/>
+          </a:prstGeom>
+          <a:solidFill>
+            <a:srgbClr val="FFFFFF"/>
+          </a:solidFill>
+          <a:ln w="5080">
+            <a:solidFill>
+              <a:srgbClr val="008080"/>
+            </a:solidFill>
           </a:ln>
         </p:spPr>
         <p:style>
@@ -4908,14 +4944,14 @@
       </p:sp>
       <p:sp>
         <p:nvSpPr>
-          <p:cNvPr id="35" name="TextBox 34"/>
+          <p:cNvPr id="38" name="TextBox 37"/>
           <p:cNvSpPr txBox="1"/>
           <p:nvPr/>
         </p:nvSpPr>
         <p:spPr>
           <a:xfrm>
-            <a:off x="292608" y="2980944"/>
-            <a:ext cx="786384" cy="329184"/>
+            <a:off x="4361688" y="3273552"/>
+            <a:ext cx="3621024" cy="365760"/>
           </a:xfrm>
           <a:prstGeom prst="rect">
             <a:avLst/>
@@ -4928,28 +4964,28 @@
           </a:bodyPr>
           <a:lstStyle/>
           <a:p>
-            <a:pPr algn="ctr"/>
-            <a:r>
-              <a:rPr sz="1400" b="1" i="0">
-                <a:solidFill>
-                  <a:srgbClr val="FFFFFF"/>
+            <a:pPr algn="l"/>
+            <a:r>
+              <a:rPr sz="900" b="0" i="0">
+                <a:solidFill>
+                  <a:srgbClr val="1A1A1A"/>
                 </a:solidFill>
               </a:rPr>
-              <a:t>C5</a:t>
-            </a:r>
-          </a:p>
-        </p:txBody>
-      </p:sp>
-      <p:sp>
-        <p:nvSpPr>
-          <p:cNvPr id="36" name="Rectangle 35"/>
+              <a:t>• Traiter les 15 objections types par la méthode AAR</a:t>
+            </a:r>
+          </a:p>
+        </p:txBody>
+      </p:sp>
+      <p:sp>
+        <p:nvSpPr>
+          <p:cNvPr id="39" name="Rectangle 38"/>
           <p:cNvSpPr/>
           <p:nvPr/>
         </p:nvSpPr>
         <p:spPr>
           <a:xfrm>
-            <a:off x="1115568" y="2889503"/>
-            <a:ext cx="2926080" cy="493776"/>
+            <a:off x="4251959" y="3694176"/>
+            <a:ext cx="3822191" cy="457200"/>
           </a:xfrm>
           <a:prstGeom prst="rect">
             <a:avLst/>
@@ -4957,9 +4993,9 @@
           <a:solidFill>
             <a:srgbClr val="F0F7F7"/>
           </a:solidFill>
-          <a:ln w="10160">
+          <a:ln w="5080">
             <a:solidFill>
-              <a:srgbClr val="005555"/>
+              <a:srgbClr val="008080"/>
             </a:solidFill>
           </a:ln>
         </p:spPr>
@@ -4987,14 +5023,14 @@
       </p:sp>
       <p:sp>
         <p:nvSpPr>
-          <p:cNvPr id="37" name="TextBox 36"/>
+          <p:cNvPr id="40" name="TextBox 39"/>
           <p:cNvSpPr txBox="1"/>
           <p:nvPr/>
         </p:nvSpPr>
         <p:spPr>
           <a:xfrm>
-            <a:off x="1207008" y="2980944"/>
-            <a:ext cx="2743200" cy="329184"/>
+            <a:off x="4361688" y="3749039"/>
+            <a:ext cx="3621024" cy="365760"/>
           </a:xfrm>
           <a:prstGeom prst="rect">
             <a:avLst/>
@@ -5009,37 +5045,35 @@
           <a:p>
             <a:pPr algn="l"/>
             <a:r>
-              <a:rPr sz="1200" b="1" i="0">
-                <a:solidFill>
-                  <a:srgbClr val="005555"/>
+              <a:rPr sz="900" b="0" i="0">
+                <a:solidFill>
+                  <a:srgbClr val="1A1A1A"/>
                 </a:solidFill>
               </a:rPr>
-              <a:t>Engagement</a:t>
-            </a:r>
-          </a:p>
-        </p:txBody>
-      </p:sp>
-      <p:sp>
-        <p:nvSpPr>
-          <p:cNvPr id="38" name="Rectangle 37"/>
+              <a:t>• Atteindre l'objectif de 9 CU/H minimum en production</a:t>
+            </a:r>
+          </a:p>
+        </p:txBody>
+      </p:sp>
+      <p:sp>
+        <p:nvSpPr>
+          <p:cNvPr id="41" name="Rectangle 40"/>
           <p:cNvSpPr/>
           <p:nvPr/>
         </p:nvSpPr>
         <p:spPr>
           <a:xfrm>
-            <a:off x="4059936" y="2889503"/>
-            <a:ext cx="7854696" cy="493776"/>
-          </a:xfrm>
-          <a:prstGeom prst="rect">
-            <a:avLst/>
-          </a:prstGeom>
-          <a:solidFill>
-            <a:srgbClr val="FFFFFF"/>
-          </a:solidFill>
-          <a:ln w="6350">
-            <a:solidFill>
-              <a:srgbClr val="005555"/>
-            </a:solidFill>
+            <a:off x="8229600" y="804672"/>
+            <a:ext cx="3822191" cy="475488"/>
+          </a:xfrm>
+          <a:prstGeom prst="rect">
+            <a:avLst/>
+          </a:prstGeom>
+          <a:solidFill>
+            <a:srgbClr val="006A6A"/>
+          </a:solidFill>
+          <a:ln>
+            <a:noFill/>
           </a:ln>
         </p:spPr>
         <p:style>
@@ -5066,14 +5100,14 @@
       </p:sp>
       <p:sp>
         <p:nvSpPr>
-          <p:cNvPr id="39" name="TextBox 38"/>
+          <p:cNvPr id="42" name="TextBox 41"/>
           <p:cNvSpPr txBox="1"/>
           <p:nvPr/>
         </p:nvSpPr>
         <p:spPr>
           <a:xfrm>
-            <a:off x="4169663" y="2980944"/>
-            <a:ext cx="7644383" cy="329184"/>
+            <a:off x="8339327" y="822960"/>
+            <a:ext cx="3657600" cy="274320"/>
           </a:xfrm>
           <a:prstGeom prst="rect">
             <a:avLst/>
@@ -5088,35 +5122,71 @@
           <a:p>
             <a:pPr algn="l"/>
             <a:r>
-              <a:rPr sz="1100" b="0" i="1">
-                <a:solidFill>
-                  <a:srgbClr val="1A1A1A"/>
+              <a:rPr sz="1400" b="1" i="0">
+                <a:solidFill>
+                  <a:srgbClr val="FFFFFF"/>
                 </a:solidFill>
               </a:rPr>
-              <a:t>Conclure un don régulier mensuel avec confiance</a:t>
-            </a:r>
-          </a:p>
-        </p:txBody>
-      </p:sp>
-      <p:sp>
-        <p:nvSpPr>
-          <p:cNvPr id="40" name="Rectangle 39"/>
+              <a:t>SAVOIR-ÊTRE</a:t>
+            </a:r>
+          </a:p>
+        </p:txBody>
+      </p:sp>
+      <p:sp>
+        <p:nvSpPr>
+          <p:cNvPr id="43" name="TextBox 42"/>
+          <p:cNvSpPr txBox="1"/>
+          <p:nvPr/>
+        </p:nvSpPr>
+        <p:spPr>
+          <a:xfrm>
+            <a:off x="8339327" y="1097280"/>
+            <a:ext cx="3657600" cy="201168"/>
+          </a:xfrm>
+          <a:prstGeom prst="rect">
+            <a:avLst/>
+          </a:prstGeom>
+          <a:noFill/>
+        </p:spPr>
+        <p:txBody>
+          <a:bodyPr wrap="square">
+            <a:spAutoFit/>
+          </a:bodyPr>
+          <a:lstStyle/>
+          <a:p>
+            <a:pPr algn="l"/>
+            <a:r>
+              <a:rPr sz="900" b="0" i="0">
+                <a:solidFill>
+                  <a:srgbClr val="CCEEEE"/>
+                </a:solidFill>
+              </a:rPr>
+              <a:t>Posture &amp; conviction</a:t>
+            </a:r>
+          </a:p>
+        </p:txBody>
+      </p:sp>
+      <p:sp>
+        <p:nvSpPr>
+          <p:cNvPr id="44" name="Rectangle 43"/>
           <p:cNvSpPr/>
           <p:nvPr/>
         </p:nvSpPr>
         <p:spPr>
           <a:xfrm>
-            <a:off x="274320" y="3410711"/>
-            <a:ext cx="822960" cy="493776"/>
-          </a:xfrm>
-          <a:prstGeom prst="rect">
-            <a:avLst/>
-          </a:prstGeom>
-          <a:solidFill>
-            <a:srgbClr val="008080"/>
-          </a:solidFill>
-          <a:ln>
-            <a:noFill/>
+            <a:off x="8229600" y="1316736"/>
+            <a:ext cx="3822191" cy="457200"/>
+          </a:xfrm>
+          <a:prstGeom prst="rect">
+            <a:avLst/>
+          </a:prstGeom>
+          <a:solidFill>
+            <a:srgbClr val="FFFFFF"/>
+          </a:solidFill>
+          <a:ln w="5080">
+            <a:solidFill>
+              <a:srgbClr val="006A6A"/>
+            </a:solidFill>
           </a:ln>
         </p:spPr>
         <p:style>
@@ -5143,14 +5213,14 @@
       </p:sp>
       <p:sp>
         <p:nvSpPr>
-          <p:cNvPr id="41" name="TextBox 40"/>
+          <p:cNvPr id="45" name="TextBox 44"/>
           <p:cNvSpPr txBox="1"/>
           <p:nvPr/>
         </p:nvSpPr>
         <p:spPr>
           <a:xfrm>
-            <a:off x="292608" y="3502151"/>
-            <a:ext cx="786384" cy="329184"/>
+            <a:off x="8339327" y="1371600"/>
+            <a:ext cx="3621024" cy="365760"/>
           </a:xfrm>
           <a:prstGeom prst="rect">
             <a:avLst/>
@@ -5163,28 +5233,28 @@
           </a:bodyPr>
           <a:lstStyle/>
           <a:p>
-            <a:pPr algn="ctr"/>
-            <a:r>
-              <a:rPr sz="1400" b="1" i="0">
-                <a:solidFill>
-                  <a:srgbClr val="FFFFFF"/>
+            <a:pPr algn="l"/>
+            <a:r>
+              <a:rPr sz="900" b="0" i="0">
+                <a:solidFill>
+                  <a:srgbClr val="1A1A1A"/>
                 </a:solidFill>
               </a:rPr>
-              <a:t>C6</a:t>
-            </a:r>
-          </a:p>
-        </p:txBody>
-      </p:sp>
-      <p:sp>
-        <p:nvSpPr>
-          <p:cNvPr id="42" name="Rectangle 41"/>
+              <a:t>• Maintenir un ton chaleureux, souriant et naturel tout au long de l'appel</a:t>
+            </a:r>
+          </a:p>
+        </p:txBody>
+      </p:sp>
+      <p:sp>
+        <p:nvSpPr>
+          <p:cNvPr id="46" name="Rectangle 45"/>
           <p:cNvSpPr/>
           <p:nvPr/>
         </p:nvSpPr>
         <p:spPr>
           <a:xfrm>
-            <a:off x="1115568" y="3410711"/>
-            <a:ext cx="2926080" cy="493776"/>
+            <a:off x="8229600" y="1792224"/>
+            <a:ext cx="3822191" cy="457200"/>
           </a:xfrm>
           <a:prstGeom prst="rect">
             <a:avLst/>
@@ -5192,9 +5262,9 @@
           <a:solidFill>
             <a:srgbClr val="F0F7F7"/>
           </a:solidFill>
-          <a:ln w="10160">
+          <a:ln w="5080">
             <a:solidFill>
-              <a:srgbClr val="008080"/>
+              <a:srgbClr val="006A6A"/>
             </a:solidFill>
           </a:ln>
         </p:spPr>
@@ -5222,14 +5292,14 @@
       </p:sp>
       <p:sp>
         <p:nvSpPr>
-          <p:cNvPr id="43" name="TextBox 42"/>
+          <p:cNvPr id="47" name="TextBox 46"/>
           <p:cNvSpPr txBox="1"/>
           <p:nvPr/>
         </p:nvSpPr>
         <p:spPr>
           <a:xfrm>
-            <a:off x="1207008" y="3502151"/>
-            <a:ext cx="2743200" cy="329184"/>
+            <a:off x="8339327" y="1847088"/>
+            <a:ext cx="3621024" cy="365760"/>
           </a:xfrm>
           <a:prstGeom prst="rect">
             <a:avLst/>
@@ -5244,26 +5314,26 @@
           <a:p>
             <a:pPr algn="l"/>
             <a:r>
-              <a:rPr sz="1200" b="1" i="0">
-                <a:solidFill>
-                  <a:srgbClr val="008080"/>
+              <a:rPr sz="900" b="0" i="0">
+                <a:solidFill>
+                  <a:srgbClr val="1A1A1A"/>
                 </a:solidFill>
               </a:rPr>
-              <a:t>Résilience</a:t>
-            </a:r>
-          </a:p>
-        </p:txBody>
-      </p:sp>
-      <p:sp>
-        <p:nvSpPr>
-          <p:cNvPr id="44" name="Rectangle 43"/>
+              <a:t>• Gérer les objections sensibles avec calme et professionnalisme</a:t>
+            </a:r>
+          </a:p>
+        </p:txBody>
+      </p:sp>
+      <p:sp>
+        <p:nvSpPr>
+          <p:cNvPr id="48" name="Rectangle 47"/>
           <p:cNvSpPr/>
           <p:nvPr/>
         </p:nvSpPr>
         <p:spPr>
           <a:xfrm>
-            <a:off x="4059936" y="3410711"/>
-            <a:ext cx="7854696" cy="493776"/>
+            <a:off x="8229600" y="2267712"/>
+            <a:ext cx="3822191" cy="457200"/>
           </a:xfrm>
           <a:prstGeom prst="rect">
             <a:avLst/>
@@ -5271,9 +5341,9 @@
           <a:solidFill>
             <a:srgbClr val="FFFFFF"/>
           </a:solidFill>
-          <a:ln w="6350">
+          <a:ln w="5080">
             <a:solidFill>
-              <a:srgbClr val="008080"/>
+              <a:srgbClr val="006A6A"/>
             </a:solidFill>
           </a:ln>
         </p:spPr>
@@ -5301,14 +5371,14 @@
       </p:sp>
       <p:sp>
         <p:nvSpPr>
-          <p:cNvPr id="45" name="TextBox 44"/>
+          <p:cNvPr id="49" name="TextBox 48"/>
           <p:cNvSpPr txBox="1"/>
           <p:nvPr/>
         </p:nvSpPr>
         <p:spPr>
           <a:xfrm>
-            <a:off x="4169663" y="3502151"/>
-            <a:ext cx="7644383" cy="329184"/>
+            <a:off x="8339327" y="2322576"/>
+            <a:ext cx="3621024" cy="365760"/>
           </a:xfrm>
           <a:prstGeom prst="rect">
             <a:avLst/>
@@ -5323,35 +5393,37 @@
           <a:p>
             <a:pPr algn="l"/>
             <a:r>
-              <a:rPr sz="1100" b="0" i="1">
+              <a:rPr sz="900" b="0" i="0">
                 <a:solidFill>
                   <a:srgbClr val="1A1A1A"/>
                 </a:solidFill>
               </a:rPr>
-              <a:t>Rester positif et efficace après dix refus consécutifs</a:t>
-            </a:r>
-          </a:p>
-        </p:txBody>
-      </p:sp>
-      <p:sp>
-        <p:nvSpPr>
-          <p:cNvPr id="46" name="Rectangle 45"/>
+              <a:t>• Transmettre une conviction sincère pour la mission UNICEF</a:t>
+            </a:r>
+          </a:p>
+        </p:txBody>
+      </p:sp>
+      <p:sp>
+        <p:nvSpPr>
+          <p:cNvPr id="50" name="Rectangle 49"/>
           <p:cNvSpPr/>
           <p:nvPr/>
         </p:nvSpPr>
         <p:spPr>
           <a:xfrm>
-            <a:off x="274320" y="3931920"/>
-            <a:ext cx="822960" cy="493776"/>
-          </a:xfrm>
-          <a:prstGeom prst="rect">
-            <a:avLst/>
-          </a:prstGeom>
-          <a:solidFill>
-            <a:srgbClr val="005555"/>
-          </a:solidFill>
-          <a:ln>
-            <a:noFill/>
+            <a:off x="8229600" y="2743200"/>
+            <a:ext cx="3822191" cy="457200"/>
+          </a:xfrm>
+          <a:prstGeom prst="rect">
+            <a:avLst/>
+          </a:prstGeom>
+          <a:solidFill>
+            <a:srgbClr val="F0F7F7"/>
+          </a:solidFill>
+          <a:ln w="5080">
+            <a:solidFill>
+              <a:srgbClr val="006A6A"/>
+            </a:solidFill>
           </a:ln>
         </p:spPr>
         <p:style>
@@ -5378,14 +5450,14 @@
       </p:sp>
       <p:sp>
         <p:nvSpPr>
-          <p:cNvPr id="47" name="TextBox 46"/>
+          <p:cNvPr id="51" name="TextBox 50"/>
           <p:cNvSpPr txBox="1"/>
           <p:nvPr/>
         </p:nvSpPr>
         <p:spPr>
           <a:xfrm>
-            <a:off x="292608" y="4023359"/>
-            <a:ext cx="786384" cy="329184"/>
+            <a:off x="8339327" y="2798064"/>
+            <a:ext cx="3621024" cy="365760"/>
           </a:xfrm>
           <a:prstGeom prst="rect">
             <a:avLst/>
@@ -5398,38 +5470,38 @@
           </a:bodyPr>
           <a:lstStyle/>
           <a:p>
-            <a:pPr algn="ctr"/>
-            <a:r>
-              <a:rPr sz="1400" b="1" i="0">
-                <a:solidFill>
-                  <a:srgbClr val="FFFFFF"/>
+            <a:pPr algn="l"/>
+            <a:r>
+              <a:rPr sz="900" b="0" i="0">
+                <a:solidFill>
+                  <a:srgbClr val="1A1A1A"/>
                 </a:solidFill>
               </a:rPr>
-              <a:t>C7</a:t>
-            </a:r>
-          </a:p>
-        </p:txBody>
-      </p:sp>
-      <p:sp>
-        <p:nvSpPr>
-          <p:cNvPr id="48" name="Rectangle 47"/>
+              <a:t>• Intégrer le mantra : «Le refus d'aujourd'hui peut être le don de demain»</a:t>
+            </a:r>
+          </a:p>
+        </p:txBody>
+      </p:sp>
+      <p:sp>
+        <p:nvSpPr>
+          <p:cNvPr id="52" name="Rectangle 51"/>
           <p:cNvSpPr/>
           <p:nvPr/>
         </p:nvSpPr>
         <p:spPr>
           <a:xfrm>
-            <a:off x="1115568" y="3931920"/>
-            <a:ext cx="2926080" cy="493776"/>
-          </a:xfrm>
-          <a:prstGeom prst="rect">
-            <a:avLst/>
-          </a:prstGeom>
-          <a:solidFill>
-            <a:srgbClr val="F0F7F7"/>
-          </a:solidFill>
-          <a:ln w="10160">
+            <a:off x="8229600" y="3218688"/>
+            <a:ext cx="3822191" cy="457200"/>
+          </a:xfrm>
+          <a:prstGeom prst="rect">
+            <a:avLst/>
+          </a:prstGeom>
+          <a:solidFill>
+            <a:srgbClr val="FFFFFF"/>
+          </a:solidFill>
+          <a:ln w="5080">
             <a:solidFill>
-              <a:srgbClr val="005555"/>
+              <a:srgbClr val="006A6A"/>
             </a:solidFill>
           </a:ln>
         </p:spPr>
@@ -5457,14 +5529,14 @@
       </p:sp>
       <p:sp>
         <p:nvSpPr>
-          <p:cNvPr id="49" name="TextBox 48"/>
+          <p:cNvPr id="53" name="TextBox 52"/>
           <p:cNvSpPr txBox="1"/>
           <p:nvPr/>
         </p:nvSpPr>
         <p:spPr>
           <a:xfrm>
-            <a:off x="1207008" y="4023359"/>
-            <a:ext cx="2743200" cy="329184"/>
+            <a:off x="8339327" y="3273552"/>
+            <a:ext cx="3621024" cy="365760"/>
           </a:xfrm>
           <a:prstGeom prst="rect">
             <a:avLst/>
@@ -5479,36 +5551,36 @@
           <a:p>
             <a:pPr algn="l"/>
             <a:r>
-              <a:rPr sz="1200" b="1" i="0">
-                <a:solidFill>
-                  <a:srgbClr val="005555"/>
+              <a:rPr sz="900" b="0" i="0">
+                <a:solidFill>
+                  <a:srgbClr val="1A1A1A"/>
                 </a:solidFill>
               </a:rPr>
-              <a:t>Éthique</a:t>
-            </a:r>
-          </a:p>
-        </p:txBody>
-      </p:sp>
-      <p:sp>
-        <p:nvSpPr>
-          <p:cNvPr id="50" name="Rectangle 49"/>
+              <a:t>• Adopter une posture de représentant digne de la cause humanitaire</a:t>
+            </a:r>
+          </a:p>
+        </p:txBody>
+      </p:sp>
+      <p:sp>
+        <p:nvSpPr>
+          <p:cNvPr id="54" name="Rectangle 53"/>
           <p:cNvSpPr/>
           <p:nvPr/>
         </p:nvSpPr>
         <p:spPr>
           <a:xfrm>
-            <a:off x="4059936" y="3931920"/>
-            <a:ext cx="7854696" cy="493776"/>
-          </a:xfrm>
-          <a:prstGeom prst="rect">
-            <a:avLst/>
-          </a:prstGeom>
-          <a:solidFill>
-            <a:srgbClr val="FFFFFF"/>
-          </a:solidFill>
-          <a:ln w="6350">
+            <a:off x="8229600" y="3694176"/>
+            <a:ext cx="3822191" cy="457200"/>
+          </a:xfrm>
+          <a:prstGeom prst="rect">
+            <a:avLst/>
+          </a:prstGeom>
+          <a:solidFill>
+            <a:srgbClr val="F0F7F7"/>
+          </a:solidFill>
+          <a:ln w="5080">
             <a:solidFill>
-              <a:srgbClr val="005555"/>
+              <a:srgbClr val="006A6A"/>
             </a:solidFill>
           </a:ln>
         </p:spPr>
@@ -5536,14 +5608,14 @@
       </p:sp>
       <p:sp>
         <p:nvSpPr>
-          <p:cNvPr id="51" name="TextBox 50"/>
+          <p:cNvPr id="55" name="TextBox 54"/>
           <p:cNvSpPr txBox="1"/>
           <p:nvPr/>
         </p:nvSpPr>
         <p:spPr>
           <a:xfrm>
-            <a:off x="4169663" y="4023359"/>
-            <a:ext cx="7644383" cy="329184"/>
+            <a:off x="8339327" y="3749039"/>
+            <a:ext cx="3621024" cy="365760"/>
           </a:xfrm>
           <a:prstGeom prst="rect">
             <a:avLst/>
@@ -5558,89 +5630,12 @@
           <a:p>
             <a:pPr algn="l"/>
             <a:r>
-              <a:rPr sz="1100" b="0" i="1">
+              <a:rPr sz="900" b="0" i="0">
                 <a:solidFill>
                   <a:srgbClr val="1A1A1A"/>
                 </a:solidFill>
               </a:rPr>
-              <a:t>Respecter les règles déontologiques en toute situation</a:t>
-            </a:r>
-          </a:p>
-        </p:txBody>
-      </p:sp>
-      <p:sp>
-        <p:nvSpPr>
-          <p:cNvPr id="52" name="Rectangle 51"/>
-          <p:cNvSpPr/>
-          <p:nvPr/>
-        </p:nvSpPr>
-        <p:spPr>
-          <a:xfrm>
-            <a:off x="274320" y="4572000"/>
-            <a:ext cx="11640312" cy="347472"/>
-          </a:xfrm>
-          <a:prstGeom prst="rect">
-            <a:avLst/>
-          </a:prstGeom>
-          <a:solidFill>
-            <a:srgbClr val="FF0000"/>
-          </a:solidFill>
-          <a:ln>
-            <a:noFill/>
-          </a:ln>
-        </p:spPr>
-        <p:style>
-          <a:lnRef idx="1">
-            <a:schemeClr val="accent1"/>
-          </a:lnRef>
-          <a:fillRef idx="3">
-            <a:schemeClr val="accent1"/>
-          </a:fillRef>
-          <a:effectRef idx="2">
-            <a:schemeClr val="accent1"/>
-          </a:effectRef>
-          <a:fontRef idx="minor">
-            <a:schemeClr val="lt1"/>
-          </a:fontRef>
-        </p:style>
-        <p:txBody>
-          <a:bodyPr rtlCol="0" anchor="ctr"/>
-          <a:lstStyle/>
-          <a:p>
-            <a:pPr algn="ctr"/>
-          </a:p>
-        </p:txBody>
-      </p:sp>
-      <p:sp>
-        <p:nvSpPr>
-          <p:cNvPr id="53" name="TextBox 52"/>
-          <p:cNvSpPr txBox="1"/>
-          <p:nvPr/>
-        </p:nvSpPr>
-        <p:spPr>
-          <a:xfrm>
-            <a:off x="411479" y="4645152"/>
-            <a:ext cx="11365992" cy="201168"/>
-          </a:xfrm>
-          <a:prstGeom prst="rect">
-            <a:avLst/>
-          </a:prstGeom>
-          <a:noFill/>
-        </p:spPr>
-        <p:txBody>
-          <a:bodyPr wrap="square">
-            <a:spAutoFit/>
-          </a:bodyPr>
-          <a:lstStyle/>
-          <a:p>
-            <a:pPr algn="l"/>
-            <a:r>
-              <a:rPr sz="1000" b="0" i="0">
-                <a:solidFill>
-                  <a:srgbClr val="FFFFFF"/>
-                </a:solidFill>
-              </a:rPr>
-              <a:t>Votre objectif : obtenir la certification FIM avec un score ≥ 20/28 en Jour 5.</a:t>
+              <a:t>• Respecter systématiquement les règles éthiques du secteur associatif</a:t>
             </a:r>
           </a:p>
         </p:txBody>
@@ -5715,7 +5710,7 @@
         <p:spPr>
           <a:xfrm>
             <a:off x="0" y="0"/>
-            <a:ext cx="12188952" cy="658368"/>
+            <a:ext cx="12188952" cy="685800"/>
           </a:xfrm>
           <a:prstGeom prst="rect">
             <a:avLst/>
@@ -5757,14 +5752,14 @@
         </p:nvSpPr>
         <p:spPr>
           <a:xfrm>
-            <a:off x="0" y="640080"/>
-            <a:ext cx="12188952" cy="54864"/>
-          </a:xfrm>
-          <a:prstGeom prst="rect">
-            <a:avLst/>
-          </a:prstGeom>
-          <a:solidFill>
-            <a:srgbClr val="FF0000"/>
+            <a:off x="0" y="667512"/>
+            <a:ext cx="12188952" cy="45720"/>
+          </a:xfrm>
+          <a:prstGeom prst="rect">
+            <a:avLst/>
+          </a:prstGeom>
+          <a:solidFill>
+            <a:srgbClr val="00AAAA"/>
           </a:solidFill>
           <a:ln>
             <a:noFill/>
@@ -5800,8 +5795,8 @@
         </p:nvSpPr>
         <p:spPr>
           <a:xfrm>
-            <a:off x="164592" y="64008"/>
-            <a:ext cx="685800" cy="530352"/>
+            <a:off x="164592" y="73152"/>
+            <a:ext cx="2011680" cy="347472"/>
           </a:xfrm>
           <a:prstGeom prst="rect">
             <a:avLst/>
@@ -5816,12 +5811,12 @@
           <a:p>
             <a:pPr algn="l"/>
             <a:r>
-              <a:rPr sz="2000" b="1" i="0">
+              <a:rPr sz="1400" b="1" i="0">
                 <a:solidFill>
                   <a:srgbClr val="FFFFFF"/>
                 </a:solidFill>
               </a:rPr>
-              <a:t>SHY</a:t>
+              <a:t>SHY-Performance</a:t>
             </a:r>
           </a:p>
         </p:txBody>
@@ -5834,14 +5829,14 @@
         </p:nvSpPr>
         <p:spPr>
           <a:xfrm>
-            <a:off x="914400" y="91440"/>
-            <a:ext cx="36576" cy="475488"/>
-          </a:xfrm>
-          <a:prstGeom prst="rect">
-            <a:avLst/>
-          </a:prstGeom>
-          <a:solidFill>
-            <a:srgbClr val="FF0000"/>
+            <a:off x="2286000" y="91440"/>
+            <a:ext cx="36576" cy="502920"/>
+          </a:xfrm>
+          <a:prstGeom prst="rect">
+            <a:avLst/>
+          </a:prstGeom>
+          <a:solidFill>
+            <a:srgbClr val="00AAAA"/>
           </a:solidFill>
           <a:ln>
             <a:noFill/>
@@ -5877,8 +5872,8 @@
         </p:nvSpPr>
         <p:spPr>
           <a:xfrm>
-            <a:off x="1024128" y="91440"/>
-            <a:ext cx="10881360" cy="475488"/>
+            <a:off x="2423160" y="91440"/>
+            <a:ext cx="9235440" cy="502920"/>
           </a:xfrm>
           <a:prstGeom prst="rect">
             <a:avLst/>
@@ -5893,19 +5888,43 @@
           <a:p>
             <a:pPr algn="l"/>
             <a:r>
-              <a:rPr sz="1700" b="1" i="0">
+              <a:rPr sz="1600" b="1" i="0">
                 <a:solidFill>
                   <a:srgbClr val="FFFFFF"/>
                 </a:solidFill>
               </a:rPr>
-              <a:t>Ce que Vous Allez Accomplir — Vos Résultats Concrets</a:t>
-            </a:r>
-          </a:p>
-        </p:txBody>
-      </p:sp>
-      <p:sp>
-        <p:nvSpPr>
-          <p:cNvPr id="8" name="Rectangle 7"/>
+              <a:t>Vos Indicateurs de Performance — Nomenclature FIDELIS</a:t>
+            </a:r>
+          </a:p>
+        </p:txBody>
+      </p:sp>
+      <p:pic>
+        <p:nvPicPr>
+          <p:cNvPr id="8" name="Picture 7" descr="shy_logo_v2.png"/>
+          <p:cNvPicPr>
+            <a:picLocks noChangeAspect="1"/>
+          </p:cNvPicPr>
+          <p:nvPr/>
+        </p:nvPicPr>
+        <p:blipFill>
+          <a:blip r:embed="rId2"/>
+          <a:stretch>
+            <a:fillRect/>
+          </a:stretch>
+        </p:blipFill>
+        <p:spPr>
+          <a:xfrm>
+            <a:off x="11247120" y="0"/>
+            <a:ext cx="822960" cy="676656"/>
+          </a:xfrm>
+          <a:prstGeom prst="rect">
+            <a:avLst/>
+          </a:prstGeom>
+        </p:spPr>
+      </p:pic>
+      <p:sp>
+        <p:nvSpPr>
+          <p:cNvPr id="9" name="Rectangle 8"/>
           <p:cNvSpPr/>
           <p:nvPr/>
         </p:nvSpPr>
@@ -5948,7 +5967,7 @@
       </p:sp>
       <p:sp>
         <p:nvSpPr>
-          <p:cNvPr id="9" name="TextBox 8"/>
+          <p:cNvPr id="10" name="TextBox 9"/>
           <p:cNvSpPr txBox="1"/>
           <p:nvPr/>
         </p:nvSpPr>
@@ -5970,32 +5989,32 @@
           <a:p>
             <a:pPr algn="ctr"/>
             <a:r>
-              <a:rPr sz="900" b="0" i="0">
+              <a:rPr sz="800" b="0" i="0">
                 <a:solidFill>
                   <a:srgbClr val="FFFFFF"/>
                 </a:solidFill>
               </a:rPr>
-              <a:t>SHY-Performance  ·  Formation FIM  ·  V6-01062026SHY-TE</a:t>
-            </a:r>
-          </a:p>
-        </p:txBody>
-      </p:sp>
-      <p:sp>
-        <p:nvSpPr>
-          <p:cNvPr id="10" name="Rectangle 9"/>
+              <a:t>SHY-Performance  ·  Formation FIM  ·  UNICEF France  ·  V6-01062026SHY-TE</a:t>
+            </a:r>
+          </a:p>
+        </p:txBody>
+      </p:sp>
+      <p:sp>
+        <p:nvSpPr>
+          <p:cNvPr id="11" name="Rectangle 10"/>
           <p:cNvSpPr/>
           <p:nvPr/>
         </p:nvSpPr>
         <p:spPr>
           <a:xfrm>
-            <a:off x="274320" y="822960"/>
-            <a:ext cx="5669280" cy="329184"/>
-          </a:xfrm>
-          <a:prstGeom prst="rect">
-            <a:avLst/>
-          </a:prstGeom>
-          <a:solidFill>
-            <a:srgbClr val="008080"/>
+            <a:off x="274320" y="804672"/>
+            <a:ext cx="932688" cy="274320"/>
+          </a:xfrm>
+          <a:prstGeom prst="rect">
+            <a:avLst/>
+          </a:prstGeom>
+          <a:solidFill>
+            <a:srgbClr val="005555"/>
           </a:solidFill>
           <a:ln>
             <a:noFill/>
@@ -6025,14 +6044,14 @@
       </p:sp>
       <p:sp>
         <p:nvSpPr>
-          <p:cNvPr id="11" name="TextBox 10"/>
+          <p:cNvPr id="12" name="TextBox 11"/>
           <p:cNvSpPr txBox="1"/>
           <p:nvPr/>
         </p:nvSpPr>
         <p:spPr>
           <a:xfrm>
-            <a:off x="384048" y="868680"/>
-            <a:ext cx="5486400" cy="256032"/>
+            <a:off x="329184" y="841248"/>
+            <a:ext cx="841248" cy="219456"/>
           </a:xfrm>
           <a:prstGeom prst="rect">
             <a:avLst/>
@@ -6047,32 +6066,32 @@
           <a:p>
             <a:pPr algn="l"/>
             <a:r>
-              <a:rPr sz="1100" b="1" i="0">
+              <a:rPr sz="900" b="1" i="0">
                 <a:solidFill>
                   <a:srgbClr val="FFFFFF"/>
                 </a:solidFill>
               </a:rPr>
-              <a:t>En fin de formation, vous saurez…</a:t>
-            </a:r>
-          </a:p>
-        </p:txBody>
-      </p:sp>
-      <p:sp>
-        <p:nvSpPr>
-          <p:cNvPr id="12" name="Rectangle 11"/>
+              <a:t>Code</a:t>
+            </a:r>
+          </a:p>
+        </p:txBody>
+      </p:sp>
+      <p:sp>
+        <p:nvSpPr>
+          <p:cNvPr id="13" name="Rectangle 12"/>
           <p:cNvSpPr/>
           <p:nvPr/>
         </p:nvSpPr>
         <p:spPr>
           <a:xfrm>
-            <a:off x="6355080" y="822960"/>
-            <a:ext cx="5669280" cy="329184"/>
-          </a:xfrm>
-          <a:prstGeom prst="rect">
-            <a:avLst/>
-          </a:prstGeom>
-          <a:solidFill>
-            <a:srgbClr val="008080"/>
+            <a:off x="1234440" y="804672"/>
+            <a:ext cx="2990088" cy="274320"/>
+          </a:xfrm>
+          <a:prstGeom prst="rect">
+            <a:avLst/>
+          </a:prstGeom>
+          <a:solidFill>
+            <a:srgbClr val="005555"/>
           </a:solidFill>
           <a:ln>
             <a:noFill/>
@@ -6102,14 +6121,14 @@
       </p:sp>
       <p:sp>
         <p:nvSpPr>
-          <p:cNvPr id="13" name="TextBox 12"/>
+          <p:cNvPr id="14" name="TextBox 13"/>
           <p:cNvSpPr txBox="1"/>
           <p:nvPr/>
         </p:nvSpPr>
         <p:spPr>
           <a:xfrm>
-            <a:off x="6464808" y="868680"/>
-            <a:ext cx="5486400" cy="256032"/>
+            <a:off x="1289304" y="841248"/>
+            <a:ext cx="2898648" cy="219456"/>
           </a:xfrm>
           <a:prstGeom prst="rect">
             <a:avLst/>
@@ -6124,37 +6143,35 @@
           <a:p>
             <a:pPr algn="l"/>
             <a:r>
-              <a:rPr sz="1100" b="1" i="0">
+              <a:rPr sz="900" b="1" i="0">
                 <a:solidFill>
                   <a:srgbClr val="FFFFFF"/>
                 </a:solidFill>
               </a:rPr>
-              <a:t>Vous serez également capable de…</a:t>
-            </a:r>
-          </a:p>
-        </p:txBody>
-      </p:sp>
-      <p:sp>
-        <p:nvSpPr>
-          <p:cNvPr id="14" name="Rectangle 13"/>
+              <a:t>Libellé complet</a:t>
+            </a:r>
+          </a:p>
+        </p:txBody>
+      </p:sp>
+      <p:sp>
+        <p:nvSpPr>
+          <p:cNvPr id="15" name="Rectangle 14"/>
           <p:cNvSpPr/>
           <p:nvPr/>
         </p:nvSpPr>
         <p:spPr>
           <a:xfrm>
-            <a:off x="274320" y="1207008"/>
-            <a:ext cx="5669280" cy="402336"/>
-          </a:xfrm>
-          <a:prstGeom prst="rect">
-            <a:avLst/>
-          </a:prstGeom>
-          <a:solidFill>
-            <a:srgbClr val="F0F7F7"/>
-          </a:solidFill>
-          <a:ln w="5080">
-            <a:solidFill>
-              <a:srgbClr val="008080"/>
-            </a:solidFill>
+            <a:off x="4251960" y="804672"/>
+            <a:ext cx="5212080" cy="274320"/>
+          </a:xfrm>
+          <a:prstGeom prst="rect">
+            <a:avLst/>
+          </a:prstGeom>
+          <a:solidFill>
+            <a:srgbClr val="005555"/>
+          </a:solidFill>
+          <a:ln>
+            <a:noFill/>
           </a:ln>
         </p:spPr>
         <p:style>
@@ -6181,14 +6198,14 @@
       </p:sp>
       <p:sp>
         <p:nvSpPr>
-          <p:cNvPr id="15" name="TextBox 14"/>
+          <p:cNvPr id="16" name="TextBox 15"/>
           <p:cNvSpPr txBox="1"/>
           <p:nvPr/>
         </p:nvSpPr>
         <p:spPr>
           <a:xfrm>
-            <a:off x="402336" y="1261872"/>
-            <a:ext cx="5440680" cy="329184"/>
+            <a:off x="4306824" y="841248"/>
+            <a:ext cx="5120640" cy="219456"/>
           </a:xfrm>
           <a:prstGeom prst="rect">
             <a:avLst/>
@@ -6203,37 +6220,35 @@
           <a:p>
             <a:pPr algn="l"/>
             <a:r>
-              <a:rPr sz="1000" b="0" i="0">
-                <a:solidFill>
-                  <a:srgbClr val="1A1A1A"/>
+              <a:rPr sz="900" b="1" i="0">
+                <a:solidFill>
+                  <a:srgbClr val="FFFFFF"/>
                 </a:solidFill>
               </a:rPr>
-              <a:t>• Accrocher un passant en moins de 15 secondes</a:t>
-            </a:r>
-          </a:p>
-        </p:txBody>
-      </p:sp>
-      <p:sp>
-        <p:nvSpPr>
-          <p:cNvPr id="16" name="Rectangle 15"/>
+              <a:t>Définition opérationnelle</a:t>
+            </a:r>
+          </a:p>
+        </p:txBody>
+      </p:sp>
+      <p:sp>
+        <p:nvSpPr>
+          <p:cNvPr id="17" name="Rectangle 16"/>
           <p:cNvSpPr/>
           <p:nvPr/>
         </p:nvSpPr>
         <p:spPr>
           <a:xfrm>
-            <a:off x="274320" y="1627632"/>
-            <a:ext cx="5669280" cy="402336"/>
-          </a:xfrm>
-          <a:prstGeom prst="rect">
-            <a:avLst/>
-          </a:prstGeom>
-          <a:solidFill>
-            <a:srgbClr val="F0F7F7"/>
-          </a:solidFill>
-          <a:ln w="5080">
-            <a:solidFill>
-              <a:srgbClr val="008080"/>
-            </a:solidFill>
+            <a:off x="9491472" y="804672"/>
+            <a:ext cx="2423160" cy="274320"/>
+          </a:xfrm>
+          <a:prstGeom prst="rect">
+            <a:avLst/>
+          </a:prstGeom>
+          <a:solidFill>
+            <a:srgbClr val="005555"/>
+          </a:solidFill>
+          <a:ln>
+            <a:noFill/>
           </a:ln>
         </p:spPr>
         <p:style>
@@ -6260,14 +6275,14 @@
       </p:sp>
       <p:sp>
         <p:nvSpPr>
-          <p:cNvPr id="17" name="TextBox 16"/>
+          <p:cNvPr id="18" name="TextBox 17"/>
           <p:cNvSpPr txBox="1"/>
           <p:nvPr/>
         </p:nvSpPr>
         <p:spPr>
           <a:xfrm>
-            <a:off x="402336" y="1682496"/>
-            <a:ext cx="5440680" cy="329184"/>
+            <a:off x="9546336" y="841248"/>
+            <a:ext cx="2331720" cy="219456"/>
           </a:xfrm>
           <a:prstGeom prst="rect">
             <a:avLst/>
@@ -6282,37 +6297,35 @@
           <a:p>
             <a:pPr algn="l"/>
             <a:r>
-              <a:rPr sz="1000" b="0" i="0">
-                <a:solidFill>
-                  <a:srgbClr val="1A1A1A"/>
+              <a:rPr sz="900" b="1" i="0">
+                <a:solidFill>
+                  <a:srgbClr val="FFFFFF"/>
                 </a:solidFill>
               </a:rPr>
-              <a:t>• Raconter l'histoire d'un enfant bénéficiaire UNICEF</a:t>
-            </a:r>
-          </a:p>
-        </p:txBody>
-      </p:sp>
-      <p:sp>
-        <p:nvSpPr>
-          <p:cNvPr id="18" name="Rectangle 17"/>
+              <a:t>Objectif</a:t>
+            </a:r>
+          </a:p>
+        </p:txBody>
+      </p:sp>
+      <p:sp>
+        <p:nvSpPr>
+          <p:cNvPr id="19" name="Rectangle 18"/>
           <p:cNvSpPr/>
           <p:nvPr/>
         </p:nvSpPr>
         <p:spPr>
           <a:xfrm>
-            <a:off x="274320" y="2048256"/>
-            <a:ext cx="5669280" cy="402336"/>
-          </a:xfrm>
-          <a:prstGeom prst="rect">
-            <a:avLst/>
-          </a:prstGeom>
-          <a:solidFill>
-            <a:srgbClr val="F0F7F7"/>
-          </a:solidFill>
-          <a:ln w="5080">
-            <a:solidFill>
-              <a:srgbClr val="008080"/>
-            </a:solidFill>
+            <a:off x="274320" y="1097280"/>
+            <a:ext cx="932688" cy="594360"/>
+          </a:xfrm>
+          <a:prstGeom prst="rect">
+            <a:avLst/>
+          </a:prstGeom>
+          <a:solidFill>
+            <a:srgbClr val="005555"/>
+          </a:solidFill>
+          <a:ln>
+            <a:noFill/>
           </a:ln>
         </p:spPr>
         <p:style>
@@ -6339,14 +6352,14 @@
       </p:sp>
       <p:sp>
         <p:nvSpPr>
-          <p:cNvPr id="19" name="TextBox 18"/>
+          <p:cNvPr id="20" name="TextBox 19"/>
           <p:cNvSpPr txBox="1"/>
           <p:nvPr/>
         </p:nvSpPr>
         <p:spPr>
           <a:xfrm>
-            <a:off x="402336" y="2103120"/>
-            <a:ext cx="5440680" cy="329184"/>
+            <a:off x="329184" y="1188720"/>
+            <a:ext cx="841248" cy="457200"/>
           </a:xfrm>
           <a:prstGeom prst="rect">
             <a:avLst/>
@@ -6359,39 +6372,37 @@
           </a:bodyPr>
           <a:lstStyle/>
           <a:p>
-            <a:pPr algn="l"/>
-            <a:r>
-              <a:rPr sz="1000" b="0" i="0">
-                <a:solidFill>
-                  <a:srgbClr val="1A1A1A"/>
+            <a:pPr algn="ctr"/>
+            <a:r>
+              <a:rPr sz="900" b="1" i="0">
+                <a:solidFill>
+                  <a:srgbClr val="FFFFFF"/>
                 </a:solidFill>
               </a:rPr>
-              <a:t>• Proposer un montant de don adapté au profil</a:t>
-            </a:r>
-          </a:p>
-        </p:txBody>
-      </p:sp>
-      <p:sp>
-        <p:nvSpPr>
-          <p:cNvPr id="20" name="Rectangle 19"/>
+              <a:t>CU/H</a:t>
+            </a:r>
+          </a:p>
+        </p:txBody>
+      </p:sp>
+      <p:sp>
+        <p:nvSpPr>
+          <p:cNvPr id="21" name="Rectangle 20"/>
           <p:cNvSpPr/>
           <p:nvPr/>
         </p:nvSpPr>
         <p:spPr>
           <a:xfrm>
-            <a:off x="274320" y="2468880"/>
-            <a:ext cx="5669280" cy="402336"/>
-          </a:xfrm>
-          <a:prstGeom prst="rect">
-            <a:avLst/>
-          </a:prstGeom>
-          <a:solidFill>
-            <a:srgbClr val="F0F7F7"/>
-          </a:solidFill>
-          <a:ln w="5080">
-            <a:solidFill>
-              <a:srgbClr val="008080"/>
-            </a:solidFill>
+            <a:off x="1234440" y="1097280"/>
+            <a:ext cx="2990088" cy="594360"/>
+          </a:xfrm>
+          <a:prstGeom prst="rect">
+            <a:avLst/>
+          </a:prstGeom>
+          <a:solidFill>
+            <a:srgbClr val="FFFFFF"/>
+          </a:solidFill>
+          <a:ln>
+            <a:noFill/>
           </a:ln>
         </p:spPr>
         <p:style>
@@ -6418,14 +6429,14 @@
       </p:sp>
       <p:sp>
         <p:nvSpPr>
-          <p:cNvPr id="21" name="TextBox 20"/>
+          <p:cNvPr id="22" name="TextBox 21"/>
           <p:cNvSpPr txBox="1"/>
           <p:nvPr/>
         </p:nvSpPr>
         <p:spPr>
           <a:xfrm>
-            <a:off x="402336" y="2523744"/>
-            <a:ext cx="5440680" cy="329184"/>
+            <a:off x="1325880" y="1188720"/>
+            <a:ext cx="2852928" cy="457200"/>
           </a:xfrm>
           <a:prstGeom prst="rect">
             <a:avLst/>
@@ -6440,37 +6451,35 @@
           <a:p>
             <a:pPr algn="l"/>
             <a:r>
-              <a:rPr sz="1000" b="0" i="0">
-                <a:solidFill>
-                  <a:srgbClr val="1A1A1A"/>
+              <a:rPr sz="1000" b="1" i="0">
+                <a:solidFill>
+                  <a:srgbClr val="005555"/>
                 </a:solidFill>
               </a:rPr>
-              <a:t>• Répondre aux 12 objections types sans hésiter</a:t>
-            </a:r>
-          </a:p>
-        </p:txBody>
-      </p:sp>
-      <p:sp>
-        <p:nvSpPr>
-          <p:cNvPr id="22" name="Rectangle 21"/>
+              <a:t>Contacts Utiles / Heure</a:t>
+            </a:r>
+          </a:p>
+        </p:txBody>
+      </p:sp>
+      <p:sp>
+        <p:nvSpPr>
+          <p:cNvPr id="23" name="Rectangle 22"/>
           <p:cNvSpPr/>
           <p:nvPr/>
         </p:nvSpPr>
         <p:spPr>
           <a:xfrm>
-            <a:off x="274320" y="2889504"/>
-            <a:ext cx="5669280" cy="402336"/>
-          </a:xfrm>
-          <a:prstGeom prst="rect">
-            <a:avLst/>
-          </a:prstGeom>
-          <a:solidFill>
-            <a:srgbClr val="F0F7F7"/>
-          </a:solidFill>
-          <a:ln w="5080">
-            <a:solidFill>
-              <a:srgbClr val="008080"/>
-            </a:solidFill>
+            <a:off x="4251960" y="1097280"/>
+            <a:ext cx="5212080" cy="594360"/>
+          </a:xfrm>
+          <a:prstGeom prst="rect">
+            <a:avLst/>
+          </a:prstGeom>
+          <a:solidFill>
+            <a:srgbClr val="FFFFFF"/>
+          </a:solidFill>
+          <a:ln>
+            <a:noFill/>
           </a:ln>
         </p:spPr>
         <p:style>
@@ -6497,14 +6506,14 @@
       </p:sp>
       <p:sp>
         <p:nvSpPr>
-          <p:cNvPr id="23" name="TextBox 22"/>
+          <p:cNvPr id="24" name="TextBox 23"/>
           <p:cNvSpPr txBox="1"/>
           <p:nvPr/>
         </p:nvSpPr>
         <p:spPr>
           <a:xfrm>
-            <a:off x="402336" y="2944368"/>
-            <a:ext cx="5440680" cy="329184"/>
+            <a:off x="4343400" y="1170432"/>
+            <a:ext cx="5074920" cy="502920"/>
           </a:xfrm>
           <a:prstGeom prst="rect">
             <a:avLst/>
@@ -6519,37 +6528,35 @@
           <a:p>
             <a:pPr algn="l"/>
             <a:r>
-              <a:rPr sz="1000" b="0" i="0">
+              <a:rPr sz="900" b="0" i="1">
                 <a:solidFill>
                   <a:srgbClr val="1A1A1A"/>
                 </a:solidFill>
               </a:rPr>
-              <a:t>• Signer un engagement de don mensuel régulier</a:t>
-            </a:r>
-          </a:p>
-        </p:txBody>
-      </p:sp>
-      <p:sp>
-        <p:nvSpPr>
-          <p:cNvPr id="24" name="Rectangle 23"/>
+              <a:t>Nombre de contacts qualifiés (DON/INDÉCIS/REFUS) par heure de production</a:t>
+            </a:r>
+          </a:p>
+        </p:txBody>
+      </p:sp>
+      <p:sp>
+        <p:nvSpPr>
+          <p:cNvPr id="25" name="Rectangle 24"/>
           <p:cNvSpPr/>
           <p:nvPr/>
         </p:nvSpPr>
         <p:spPr>
           <a:xfrm>
-            <a:off x="6355080" y="1207008"/>
-            <a:ext cx="5669280" cy="402336"/>
-          </a:xfrm>
-          <a:prstGeom prst="rect">
-            <a:avLst/>
-          </a:prstGeom>
-          <a:solidFill>
-            <a:srgbClr val="F0F7F7"/>
-          </a:solidFill>
-          <a:ln w="5080">
-            <a:solidFill>
-              <a:srgbClr val="008080"/>
-            </a:solidFill>
+            <a:off x="9491472" y="1097280"/>
+            <a:ext cx="2423160" cy="594360"/>
+          </a:xfrm>
+          <a:prstGeom prst="rect">
+            <a:avLst/>
+          </a:prstGeom>
+          <a:solidFill>
+            <a:srgbClr val="008080"/>
+          </a:solidFill>
+          <a:ln>
+            <a:noFill/>
           </a:ln>
         </p:spPr>
         <p:style>
@@ -6576,14 +6583,14 @@
       </p:sp>
       <p:sp>
         <p:nvSpPr>
-          <p:cNvPr id="25" name="TextBox 24"/>
+          <p:cNvPr id="26" name="TextBox 25"/>
           <p:cNvSpPr txBox="1"/>
           <p:nvPr/>
         </p:nvSpPr>
         <p:spPr>
           <a:xfrm>
-            <a:off x="6483096" y="1261872"/>
-            <a:ext cx="5440680" cy="329184"/>
+            <a:off x="9582912" y="1234439"/>
+            <a:ext cx="2286000" cy="393192"/>
           </a:xfrm>
           <a:prstGeom prst="rect">
             <a:avLst/>
@@ -6596,39 +6603,37 @@
           </a:bodyPr>
           <a:lstStyle/>
           <a:p>
-            <a:pPr algn="l"/>
-            <a:r>
-              <a:rPr sz="1000" b="0" i="0">
-                <a:solidFill>
-                  <a:srgbClr val="1A1A1A"/>
+            <a:pPr algn="ctr"/>
+            <a:r>
+              <a:rPr sz="1000" b="1" i="0">
+                <a:solidFill>
+                  <a:srgbClr val="FFFFFF"/>
                 </a:solidFill>
               </a:rPr>
-              <a:t>• Gérer un refus sans perdre votre motivation</a:t>
-            </a:r>
-          </a:p>
-        </p:txBody>
-      </p:sp>
-      <p:sp>
-        <p:nvSpPr>
-          <p:cNvPr id="26" name="Rectangle 25"/>
+              <a:t>≥ 9 CU/H</a:t>
+            </a:r>
+          </a:p>
+        </p:txBody>
+      </p:sp>
+      <p:sp>
+        <p:nvSpPr>
+          <p:cNvPr id="27" name="Rectangle 26"/>
           <p:cNvSpPr/>
           <p:nvPr/>
         </p:nvSpPr>
         <p:spPr>
           <a:xfrm>
-            <a:off x="6355080" y="1627632"/>
-            <a:ext cx="5669280" cy="402336"/>
-          </a:xfrm>
-          <a:prstGeom prst="rect">
-            <a:avLst/>
-          </a:prstGeom>
-          <a:solidFill>
-            <a:srgbClr val="F0F7F7"/>
-          </a:solidFill>
-          <a:ln w="5080">
-            <a:solidFill>
-              <a:srgbClr val="008080"/>
-            </a:solidFill>
+            <a:off x="274320" y="1709928"/>
+            <a:ext cx="932688" cy="594360"/>
+          </a:xfrm>
+          <a:prstGeom prst="rect">
+            <a:avLst/>
+          </a:prstGeom>
+          <a:solidFill>
+            <a:srgbClr val="005555"/>
+          </a:solidFill>
+          <a:ln>
+            <a:noFill/>
           </a:ln>
         </p:spPr>
         <p:style>
@@ -6655,14 +6660,14 @@
       </p:sp>
       <p:sp>
         <p:nvSpPr>
-          <p:cNvPr id="27" name="TextBox 26"/>
+          <p:cNvPr id="28" name="TextBox 27"/>
           <p:cNvSpPr txBox="1"/>
           <p:nvPr/>
         </p:nvSpPr>
         <p:spPr>
           <a:xfrm>
-            <a:off x="6483096" y="1682496"/>
-            <a:ext cx="5440680" cy="329184"/>
+            <a:off x="329184" y="1801368"/>
+            <a:ext cx="841248" cy="457200"/>
           </a:xfrm>
           <a:prstGeom prst="rect">
             <a:avLst/>
@@ -6675,28 +6680,28 @@
           </a:bodyPr>
           <a:lstStyle/>
           <a:p>
-            <a:pPr algn="l"/>
-            <a:r>
-              <a:rPr sz="1000" b="0" i="0">
-                <a:solidFill>
-                  <a:srgbClr val="1A1A1A"/>
+            <a:pPr algn="ctr"/>
+            <a:r>
+              <a:rPr sz="900" b="1" i="0">
+                <a:solidFill>
+                  <a:srgbClr val="FFFFFF"/>
                 </a:solidFill>
               </a:rPr>
-              <a:t>• Adapter votre script à chaque donateur rencontré</a:t>
-            </a:r>
-          </a:p>
-        </p:txBody>
-      </p:sp>
-      <p:sp>
-        <p:nvSpPr>
-          <p:cNvPr id="28" name="Rectangle 27"/>
+              <a:t>TX Transfo</a:t>
+            </a:r>
+          </a:p>
+        </p:txBody>
+      </p:sp>
+      <p:sp>
+        <p:nvSpPr>
+          <p:cNvPr id="29" name="Rectangle 28"/>
           <p:cNvSpPr/>
           <p:nvPr/>
         </p:nvSpPr>
         <p:spPr>
           <a:xfrm>
-            <a:off x="6355080" y="2048256"/>
-            <a:ext cx="5669280" cy="402336"/>
+            <a:off x="1234440" y="1709928"/>
+            <a:ext cx="2990088" cy="594360"/>
           </a:xfrm>
           <a:prstGeom prst="rect">
             <a:avLst/>
@@ -6704,10 +6709,8 @@
           <a:solidFill>
             <a:srgbClr val="F0F7F7"/>
           </a:solidFill>
-          <a:ln w="5080">
-            <a:solidFill>
-              <a:srgbClr val="008080"/>
-            </a:solidFill>
+          <a:ln>
+            <a:noFill/>
           </a:ln>
         </p:spPr>
         <p:style>
@@ -6734,14 +6737,14 @@
       </p:sp>
       <p:sp>
         <p:nvSpPr>
-          <p:cNvPr id="29" name="TextBox 28"/>
+          <p:cNvPr id="30" name="TextBox 29"/>
           <p:cNvSpPr txBox="1"/>
           <p:nvPr/>
         </p:nvSpPr>
         <p:spPr>
           <a:xfrm>
-            <a:off x="6483096" y="2103120"/>
-            <a:ext cx="5440680" cy="329184"/>
+            <a:off x="1325880" y="1801368"/>
+            <a:ext cx="2852928" cy="457200"/>
           </a:xfrm>
           <a:prstGeom prst="rect">
             <a:avLst/>
@@ -6756,26 +6759,26 @@
           <a:p>
             <a:pPr algn="l"/>
             <a:r>
-              <a:rPr sz="1000" b="0" i="0">
-                <a:solidFill>
-                  <a:srgbClr val="1A1A1A"/>
+              <a:rPr sz="1000" b="1" i="0">
+                <a:solidFill>
+                  <a:srgbClr val="005555"/>
                 </a:solidFill>
               </a:rPr>
-              <a:t>• Analyser votre propre performance et vous corriger</a:t>
-            </a:r>
-          </a:p>
-        </p:txBody>
-      </p:sp>
-      <p:sp>
-        <p:nvSpPr>
-          <p:cNvPr id="30" name="Rectangle 29"/>
+              <a:t>Taux de Transformation</a:t>
+            </a:r>
+          </a:p>
+        </p:txBody>
+      </p:sp>
+      <p:sp>
+        <p:nvSpPr>
+          <p:cNvPr id="31" name="Rectangle 30"/>
           <p:cNvSpPr/>
           <p:nvPr/>
         </p:nvSpPr>
         <p:spPr>
           <a:xfrm>
-            <a:off x="6355080" y="2468880"/>
-            <a:ext cx="5669280" cy="402336"/>
+            <a:off x="4251960" y="1709928"/>
+            <a:ext cx="5212080" cy="594360"/>
           </a:xfrm>
           <a:prstGeom prst="rect">
             <a:avLst/>
@@ -6783,10 +6786,8 @@
           <a:solidFill>
             <a:srgbClr val="F0F7F7"/>
           </a:solidFill>
-          <a:ln w="5080">
-            <a:solidFill>
-              <a:srgbClr val="008080"/>
-            </a:solidFill>
+          <a:ln>
+            <a:noFill/>
           </a:ln>
         </p:spPr>
         <p:style>
@@ -6813,14 +6814,14 @@
       </p:sp>
       <p:sp>
         <p:nvSpPr>
-          <p:cNvPr id="31" name="TextBox 30"/>
+          <p:cNvPr id="32" name="TextBox 31"/>
           <p:cNvSpPr txBox="1"/>
           <p:nvPr/>
         </p:nvSpPr>
         <p:spPr>
           <a:xfrm>
-            <a:off x="6483096" y="2523744"/>
-            <a:ext cx="5440680" cy="329184"/>
+            <a:off x="4343400" y="1783080"/>
+            <a:ext cx="5074920" cy="502920"/>
           </a:xfrm>
           <a:prstGeom prst="rect">
             <a:avLst/>
@@ -6835,37 +6836,35 @@
           <a:p>
             <a:pPr algn="l"/>
             <a:r>
-              <a:rPr sz="1000" b="0" i="0">
+              <a:rPr sz="900" b="0" i="1">
                 <a:solidFill>
                   <a:srgbClr val="1A1A1A"/>
                 </a:solidFill>
               </a:rPr>
-              <a:t>• Respecter la déontologie fundraiser en toute situation</a:t>
-            </a:r>
-          </a:p>
-        </p:txBody>
-      </p:sp>
-      <p:sp>
-        <p:nvSpPr>
-          <p:cNvPr id="32" name="Rectangle 31"/>
+              <a:t>% de PEL/PA obtenus parmi les Contacts Utiles — mesure l'efficacité au don régulier</a:t>
+            </a:r>
+          </a:p>
+        </p:txBody>
+      </p:sp>
+      <p:sp>
+        <p:nvSpPr>
+          <p:cNvPr id="33" name="Rectangle 32"/>
           <p:cNvSpPr/>
           <p:nvPr/>
         </p:nvSpPr>
         <p:spPr>
           <a:xfrm>
-            <a:off x="6355080" y="2889504"/>
-            <a:ext cx="5669280" cy="402336"/>
-          </a:xfrm>
-          <a:prstGeom prst="rect">
-            <a:avLst/>
-          </a:prstGeom>
-          <a:solidFill>
-            <a:srgbClr val="F0F7F7"/>
-          </a:solidFill>
-          <a:ln w="5080">
-            <a:solidFill>
-              <a:srgbClr val="008080"/>
-            </a:solidFill>
+            <a:off x="9491472" y="1709928"/>
+            <a:ext cx="2423160" cy="594360"/>
+          </a:xfrm>
+          <a:prstGeom prst="rect">
+            <a:avLst/>
+          </a:prstGeom>
+          <a:solidFill>
+            <a:srgbClr val="008080"/>
+          </a:solidFill>
+          <a:ln>
+            <a:noFill/>
           </a:ln>
         </p:spPr>
         <p:style>
@@ -6892,14 +6891,14 @@
       </p:sp>
       <p:sp>
         <p:nvSpPr>
-          <p:cNvPr id="33" name="TextBox 32"/>
+          <p:cNvPr id="34" name="TextBox 33"/>
           <p:cNvSpPr txBox="1"/>
           <p:nvPr/>
         </p:nvSpPr>
         <p:spPr>
           <a:xfrm>
-            <a:off x="6483096" y="2944368"/>
-            <a:ext cx="5440680" cy="329184"/>
+            <a:off x="9582912" y="1847088"/>
+            <a:ext cx="2286000" cy="393192"/>
           </a:xfrm>
           <a:prstGeom prst="rect">
             <a:avLst/>
@@ -6912,34 +6911,34 @@
           </a:bodyPr>
           <a:lstStyle/>
           <a:p>
-            <a:pPr algn="l"/>
-            <a:r>
-              <a:rPr sz="1000" b="0" i="0">
-                <a:solidFill>
-                  <a:srgbClr val="1A1A1A"/>
+            <a:pPr algn="ctr"/>
+            <a:r>
+              <a:rPr sz="1000" b="1" i="0">
+                <a:solidFill>
+                  <a:srgbClr val="FFFFFF"/>
                 </a:solidFill>
               </a:rPr>
-              <a:t>• Construire votre plan d'action personnel pour J+30</a:t>
-            </a:r>
-          </a:p>
-        </p:txBody>
-      </p:sp>
-      <p:sp>
-        <p:nvSpPr>
-          <p:cNvPr id="34" name="Rectangle 33"/>
+              <a:t>Cible FIDELIS</a:t>
+            </a:r>
+          </a:p>
+        </p:txBody>
+      </p:sp>
+      <p:sp>
+        <p:nvSpPr>
+          <p:cNvPr id="35" name="Rectangle 34"/>
           <p:cNvSpPr/>
           <p:nvPr/>
         </p:nvSpPr>
         <p:spPr>
           <a:xfrm>
-            <a:off x="274320" y="5486400"/>
-            <a:ext cx="11640312" cy="274320"/>
-          </a:xfrm>
-          <a:prstGeom prst="rect">
-            <a:avLst/>
-          </a:prstGeom>
-          <a:solidFill>
-            <a:srgbClr val="FF0000"/>
+            <a:off x="274320" y="2322576"/>
+            <a:ext cx="932688" cy="594360"/>
+          </a:xfrm>
+          <a:prstGeom prst="rect">
+            <a:avLst/>
+          </a:prstGeom>
+          <a:solidFill>
+            <a:srgbClr val="005555"/>
           </a:solidFill>
           <a:ln>
             <a:noFill/>
@@ -6969,14 +6968,14 @@
       </p:sp>
       <p:sp>
         <p:nvSpPr>
-          <p:cNvPr id="35" name="TextBox 34"/>
+          <p:cNvPr id="36" name="TextBox 35"/>
           <p:cNvSpPr txBox="1"/>
           <p:nvPr/>
         </p:nvSpPr>
         <p:spPr>
           <a:xfrm>
-            <a:off x="384048" y="5522976"/>
-            <a:ext cx="11430000" cy="219456"/>
+            <a:off x="329184" y="2414016"/>
+            <a:ext cx="841248" cy="457200"/>
           </a:xfrm>
           <a:prstGeom prst="rect">
             <a:avLst/>
@@ -6989,28 +6988,28 @@
           </a:bodyPr>
           <a:lstStyle/>
           <a:p>
-            <a:pPr algn="l"/>
+            <a:pPr algn="ctr"/>
             <a:r>
               <a:rPr sz="900" b="1" i="0">
                 <a:solidFill>
                   <a:srgbClr val="FFFFFF"/>
                 </a:solidFill>
               </a:rPr>
-              <a:t>Vos jalons de progression</a:t>
-            </a:r>
-          </a:p>
-        </p:txBody>
-      </p:sp>
-      <p:sp>
-        <p:nvSpPr>
-          <p:cNvPr id="36" name="Rectangle 35"/>
+              <a:t>PDC</a:t>
+            </a:r>
+          </a:p>
+        </p:txBody>
+      </p:sp>
+      <p:sp>
+        <p:nvSpPr>
+          <p:cNvPr id="37" name="Rectangle 36"/>
           <p:cNvSpPr/>
           <p:nvPr/>
         </p:nvSpPr>
         <p:spPr>
           <a:xfrm>
-            <a:off x="274320" y="5779008"/>
-            <a:ext cx="2873502" cy="502920"/>
+            <a:off x="1234440" y="2322576"/>
+            <a:ext cx="2990088" cy="594360"/>
           </a:xfrm>
           <a:prstGeom prst="rect">
             <a:avLst/>
@@ -7018,10 +7017,8 @@
           <a:solidFill>
             <a:srgbClr val="FFFFFF"/>
           </a:solidFill>
-          <a:ln w="10160">
-            <a:solidFill>
-              <a:srgbClr val="FF0000"/>
-            </a:solidFill>
+          <a:ln>
+            <a:noFill/>
           </a:ln>
         </p:spPr>
         <p:style>
@@ -7048,14 +7045,14 @@
       </p:sp>
       <p:sp>
         <p:nvSpPr>
-          <p:cNvPr id="37" name="TextBox 36"/>
+          <p:cNvPr id="38" name="TextBox 37"/>
           <p:cNvSpPr txBox="1"/>
           <p:nvPr/>
         </p:nvSpPr>
         <p:spPr>
           <a:xfrm>
-            <a:off x="365760" y="5815584"/>
-            <a:ext cx="2745486" cy="420624"/>
+            <a:off x="1325880" y="2414016"/>
+            <a:ext cx="2852928" cy="457200"/>
           </a:xfrm>
           <a:prstGeom prst="rect">
             <a:avLst/>
@@ -7070,26 +7067,26 @@
           <a:p>
             <a:pPr algn="l"/>
             <a:r>
-              <a:rPr sz="900" b="0" i="0">
-                <a:solidFill>
-                  <a:srgbClr val="1A1A1A"/>
+              <a:rPr sz="1000" b="1" i="0">
+                <a:solidFill>
+                  <a:srgbClr val="005555"/>
                 </a:solidFill>
               </a:rPr>
-              <a:t>✔ Dès J1 : posture et pitch 60s</a:t>
-            </a:r>
-          </a:p>
-        </p:txBody>
-      </p:sp>
-      <p:sp>
-        <p:nvSpPr>
-          <p:cNvPr id="38" name="Rectangle 37"/>
+              <a:t>Plan de Charge</a:t>
+            </a:r>
+          </a:p>
+        </p:txBody>
+      </p:sp>
+      <p:sp>
+        <p:nvSpPr>
+          <p:cNvPr id="39" name="Rectangle 38"/>
           <p:cNvSpPr/>
           <p:nvPr/>
         </p:nvSpPr>
         <p:spPr>
           <a:xfrm>
-            <a:off x="3184398" y="5779008"/>
-            <a:ext cx="2873502" cy="502920"/>
+            <a:off x="4251960" y="2322576"/>
+            <a:ext cx="5212080" cy="594360"/>
           </a:xfrm>
           <a:prstGeom prst="rect">
             <a:avLst/>
@@ -7097,10 +7094,8 @@
           <a:solidFill>
             <a:srgbClr val="FFFFFF"/>
           </a:solidFill>
-          <a:ln w="10160">
-            <a:solidFill>
-              <a:srgbClr val="FF0000"/>
-            </a:solidFill>
+          <a:ln>
+            <a:noFill/>
           </a:ln>
         </p:spPr>
         <p:style>
@@ -7127,14 +7122,14 @@
       </p:sp>
       <p:sp>
         <p:nvSpPr>
-          <p:cNvPr id="39" name="TextBox 38"/>
+          <p:cNvPr id="40" name="TextBox 39"/>
           <p:cNvSpPr txBox="1"/>
           <p:nvPr/>
         </p:nvSpPr>
         <p:spPr>
           <a:xfrm>
-            <a:off x="3275838" y="5815584"/>
-            <a:ext cx="2745486" cy="420624"/>
+            <a:off x="4343400" y="2395728"/>
+            <a:ext cx="5074920" cy="502920"/>
           </a:xfrm>
           <a:prstGeom prst="rect">
             <a:avLst/>
@@ -7149,37 +7144,35 @@
           <a:p>
             <a:pPr algn="l"/>
             <a:r>
-              <a:rPr sz="900" b="0" i="0">
+              <a:rPr sz="900" b="0" i="1">
                 <a:solidFill>
                   <a:srgbClr val="1A1A1A"/>
                 </a:solidFill>
               </a:rPr>
-              <a:t>✔ Dès J3 : script complet maîtrisé</a:t>
-            </a:r>
-          </a:p>
-        </p:txBody>
-      </p:sp>
-      <p:sp>
-        <p:nvSpPr>
-          <p:cNvPr id="40" name="Rectangle 39"/>
+              <a:t>Volume mensuel de dons réguliers à atteindre selon FIDELIS × UNICEF France</a:t>
+            </a:r>
+          </a:p>
+        </p:txBody>
+      </p:sp>
+      <p:sp>
+        <p:nvSpPr>
+          <p:cNvPr id="41" name="Rectangle 40"/>
           <p:cNvSpPr/>
           <p:nvPr/>
         </p:nvSpPr>
         <p:spPr>
           <a:xfrm>
-            <a:off x="6094476" y="5779008"/>
-            <a:ext cx="2873502" cy="502920"/>
-          </a:xfrm>
-          <a:prstGeom prst="rect">
-            <a:avLst/>
-          </a:prstGeom>
-          <a:solidFill>
-            <a:srgbClr val="FFFFFF"/>
-          </a:solidFill>
-          <a:ln w="10160">
-            <a:solidFill>
-              <a:srgbClr val="FF0000"/>
-            </a:solidFill>
+            <a:off x="9491472" y="2322576"/>
+            <a:ext cx="2423160" cy="594360"/>
+          </a:xfrm>
+          <a:prstGeom prst="rect">
+            <a:avLst/>
+          </a:prstGeom>
+          <a:solidFill>
+            <a:srgbClr val="008080"/>
+          </a:solidFill>
+          <a:ln>
+            <a:noFill/>
           </a:ln>
         </p:spPr>
         <p:style>
@@ -7206,14 +7199,14 @@
       </p:sp>
       <p:sp>
         <p:nvSpPr>
-          <p:cNvPr id="41" name="TextBox 40"/>
+          <p:cNvPr id="42" name="TextBox 41"/>
           <p:cNvSpPr txBox="1"/>
           <p:nvPr/>
         </p:nvSpPr>
         <p:spPr>
           <a:xfrm>
-            <a:off x="6185916" y="5815584"/>
-            <a:ext cx="2745486" cy="420624"/>
+            <a:off x="9582912" y="2459736"/>
+            <a:ext cx="2286000" cy="393192"/>
           </a:xfrm>
           <a:prstGeom prst="rect">
             <a:avLst/>
@@ -7226,39 +7219,37 @@
           </a:bodyPr>
           <a:lstStyle/>
           <a:p>
-            <a:pPr algn="l"/>
-            <a:r>
-              <a:rPr sz="900" b="0" i="0">
-                <a:solidFill>
-                  <a:srgbClr val="1A1A1A"/>
+            <a:pPr algn="ctr"/>
+            <a:r>
+              <a:rPr sz="1000" b="1" i="0">
+                <a:solidFill>
+                  <a:srgbClr val="FFFFFF"/>
                 </a:solidFill>
               </a:rPr>
-              <a:t>✔ Dès J4 : objections gérées</a:t>
-            </a:r>
-          </a:p>
-        </p:txBody>
-      </p:sp>
-      <p:sp>
-        <p:nvSpPr>
-          <p:cNvPr id="42" name="Rectangle 41"/>
+              <a:t>Volume défini</a:t>
+            </a:r>
+          </a:p>
+        </p:txBody>
+      </p:sp>
+      <p:sp>
+        <p:nvSpPr>
+          <p:cNvPr id="43" name="Rectangle 42"/>
           <p:cNvSpPr/>
           <p:nvPr/>
         </p:nvSpPr>
         <p:spPr>
           <a:xfrm>
-            <a:off x="9004554" y="5779008"/>
-            <a:ext cx="2873502" cy="502920"/>
-          </a:xfrm>
-          <a:prstGeom prst="rect">
-            <a:avLst/>
-          </a:prstGeom>
-          <a:solidFill>
-            <a:srgbClr val="FFFFFF"/>
-          </a:solidFill>
-          <a:ln w="10160">
-            <a:solidFill>
-              <a:srgbClr val="FF0000"/>
-            </a:solidFill>
+            <a:off x="274320" y="2935224"/>
+            <a:ext cx="932688" cy="594360"/>
+          </a:xfrm>
+          <a:prstGeom prst="rect">
+            <a:avLst/>
+          </a:prstGeom>
+          <a:solidFill>
+            <a:srgbClr val="005555"/>
+          </a:solidFill>
+          <a:ln>
+            <a:noFill/>
           </a:ln>
         </p:spPr>
         <p:style>
@@ -7285,14 +7276,14 @@
       </p:sp>
       <p:sp>
         <p:nvSpPr>
-          <p:cNvPr id="43" name="TextBox 42"/>
+          <p:cNvPr id="44" name="TextBox 43"/>
           <p:cNvSpPr txBox="1"/>
           <p:nvPr/>
         </p:nvSpPr>
         <p:spPr>
           <a:xfrm>
-            <a:off x="9095994" y="5815584"/>
-            <a:ext cx="2745486" cy="420624"/>
+            <a:off x="329184" y="3026664"/>
+            <a:ext cx="841248" cy="457200"/>
           </a:xfrm>
           <a:prstGeom prst="rect">
             <a:avLst/>
@@ -7305,14 +7296,861 @@
           </a:bodyPr>
           <a:lstStyle/>
           <a:p>
+            <a:pPr algn="ctr"/>
+            <a:r>
+              <a:rPr sz="900" b="1" i="0">
+                <a:solidFill>
+                  <a:srgbClr val="FFFFFF"/>
+                </a:solidFill>
+              </a:rPr>
+              <a:t>PEL</a:t>
+            </a:r>
+          </a:p>
+        </p:txBody>
+      </p:sp>
+      <p:sp>
+        <p:nvSpPr>
+          <p:cNvPr id="45" name="Rectangle 44"/>
+          <p:cNvSpPr/>
+          <p:nvPr/>
+        </p:nvSpPr>
+        <p:spPr>
+          <a:xfrm>
+            <a:off x="1234440" y="2935224"/>
+            <a:ext cx="2990088" cy="594360"/>
+          </a:xfrm>
+          <a:prstGeom prst="rect">
+            <a:avLst/>
+          </a:prstGeom>
+          <a:solidFill>
+            <a:srgbClr val="F0F7F7"/>
+          </a:solidFill>
+          <a:ln>
+            <a:noFill/>
+          </a:ln>
+        </p:spPr>
+        <p:style>
+          <a:lnRef idx="1">
+            <a:schemeClr val="accent1"/>
+          </a:lnRef>
+          <a:fillRef idx="3">
+            <a:schemeClr val="accent1"/>
+          </a:fillRef>
+          <a:effectRef idx="2">
+            <a:schemeClr val="accent1"/>
+          </a:effectRef>
+          <a:fontRef idx="minor">
+            <a:schemeClr val="lt1"/>
+          </a:fontRef>
+        </p:style>
+        <p:txBody>
+          <a:bodyPr rtlCol="0" anchor="ctr"/>
+          <a:lstStyle/>
+          <a:p>
+            <a:pPr algn="ctr"/>
+          </a:p>
+        </p:txBody>
+      </p:sp>
+      <p:sp>
+        <p:nvSpPr>
+          <p:cNvPr id="46" name="TextBox 45"/>
+          <p:cNvSpPr txBox="1"/>
+          <p:nvPr/>
+        </p:nvSpPr>
+        <p:spPr>
+          <a:xfrm>
+            <a:off x="1325880" y="3026664"/>
+            <a:ext cx="2852928" cy="457200"/>
+          </a:xfrm>
+          <a:prstGeom prst="rect">
+            <a:avLst/>
+          </a:prstGeom>
+          <a:noFill/>
+        </p:spPr>
+        <p:txBody>
+          <a:bodyPr wrap="square">
+            <a:spAutoFit/>
+          </a:bodyPr>
+          <a:lstStyle/>
+          <a:p>
             <a:pPr algn="l"/>
             <a:r>
-              <a:rPr sz="900" b="0" i="0">
+              <a:rPr sz="1000" b="1" i="0">
+                <a:solidFill>
+                  <a:srgbClr val="005555"/>
+                </a:solidFill>
+              </a:rPr>
+              <a:t>Promesse En Ligne</a:t>
+            </a:r>
+          </a:p>
+        </p:txBody>
+      </p:sp>
+      <p:sp>
+        <p:nvSpPr>
+          <p:cNvPr id="47" name="Rectangle 46"/>
+          <p:cNvSpPr/>
+          <p:nvPr/>
+        </p:nvSpPr>
+        <p:spPr>
+          <a:xfrm>
+            <a:off x="4251960" y="2935224"/>
+            <a:ext cx="5212080" cy="594360"/>
+          </a:xfrm>
+          <a:prstGeom prst="rect">
+            <a:avLst/>
+          </a:prstGeom>
+          <a:solidFill>
+            <a:srgbClr val="F0F7F7"/>
+          </a:solidFill>
+          <a:ln>
+            <a:noFill/>
+          </a:ln>
+        </p:spPr>
+        <p:style>
+          <a:lnRef idx="1">
+            <a:schemeClr val="accent1"/>
+          </a:lnRef>
+          <a:fillRef idx="3">
+            <a:schemeClr val="accent1"/>
+          </a:fillRef>
+          <a:effectRef idx="2">
+            <a:schemeClr val="accent1"/>
+          </a:effectRef>
+          <a:fontRef idx="minor">
+            <a:schemeClr val="lt1"/>
+          </a:fontRef>
+        </p:style>
+        <p:txBody>
+          <a:bodyPr rtlCol="0" anchor="ctr"/>
+          <a:lstStyle/>
+          <a:p>
+            <a:pPr algn="ctr"/>
+          </a:p>
+        </p:txBody>
+      </p:sp>
+      <p:sp>
+        <p:nvSpPr>
+          <p:cNvPr id="48" name="TextBox 47"/>
+          <p:cNvSpPr txBox="1"/>
+          <p:nvPr/>
+        </p:nvSpPr>
+        <p:spPr>
+          <a:xfrm>
+            <a:off x="4343400" y="3008376"/>
+            <a:ext cx="5074920" cy="502920"/>
+          </a:xfrm>
+          <a:prstGeom prst="rect">
+            <a:avLst/>
+          </a:prstGeom>
+          <a:noFill/>
+        </p:spPr>
+        <p:txBody>
+          <a:bodyPr wrap="square">
+            <a:spAutoFit/>
+          </a:bodyPr>
+          <a:lstStyle/>
+          <a:p>
+            <a:pPr algn="l"/>
+            <a:r>
+              <a:rPr sz="900" b="0" i="1">
                 <a:solidFill>
                   <a:srgbClr val="1A1A1A"/>
                 </a:solidFill>
               </a:rPr>
-              <a:t>✔ J5 : certification obtenue</a:t>
+              <a:t>Prospect ayant accepté de valider son don en ligne (lien envoyé en direct)</a:t>
+            </a:r>
+          </a:p>
+        </p:txBody>
+      </p:sp>
+      <p:sp>
+        <p:nvSpPr>
+          <p:cNvPr id="49" name="Rectangle 48"/>
+          <p:cNvSpPr/>
+          <p:nvPr/>
+        </p:nvSpPr>
+        <p:spPr>
+          <a:xfrm>
+            <a:off x="9491472" y="2935224"/>
+            <a:ext cx="2423160" cy="594360"/>
+          </a:xfrm>
+          <a:prstGeom prst="rect">
+            <a:avLst/>
+          </a:prstGeom>
+          <a:solidFill>
+            <a:srgbClr val="008080"/>
+          </a:solidFill>
+          <a:ln>
+            <a:noFill/>
+          </a:ln>
+        </p:spPr>
+        <p:style>
+          <a:lnRef idx="1">
+            <a:schemeClr val="accent1"/>
+          </a:lnRef>
+          <a:fillRef idx="3">
+            <a:schemeClr val="accent1"/>
+          </a:fillRef>
+          <a:effectRef idx="2">
+            <a:schemeClr val="accent1"/>
+          </a:effectRef>
+          <a:fontRef idx="minor">
+            <a:schemeClr val="lt1"/>
+          </a:fontRef>
+        </p:style>
+        <p:txBody>
+          <a:bodyPr rtlCol="0" anchor="ctr"/>
+          <a:lstStyle/>
+          <a:p>
+            <a:pPr algn="ctr"/>
+          </a:p>
+        </p:txBody>
+      </p:sp>
+      <p:sp>
+        <p:nvSpPr>
+          <p:cNvPr id="50" name="TextBox 49"/>
+          <p:cNvSpPr txBox="1"/>
+          <p:nvPr/>
+        </p:nvSpPr>
+        <p:spPr>
+          <a:xfrm>
+            <a:off x="9582912" y="3072384"/>
+            <a:ext cx="2286000" cy="393192"/>
+          </a:xfrm>
+          <a:prstGeom prst="rect">
+            <a:avLst/>
+          </a:prstGeom>
+          <a:noFill/>
+        </p:spPr>
+        <p:txBody>
+          <a:bodyPr wrap="square">
+            <a:spAutoFit/>
+          </a:bodyPr>
+          <a:lstStyle/>
+          <a:p>
+            <a:pPr algn="ctr"/>
+            <a:r>
+              <a:rPr sz="1000" b="1" i="0">
+                <a:solidFill>
+                  <a:srgbClr val="FFFFFF"/>
+                </a:solidFill>
+              </a:rPr>
+              <a:t>Comptabilisé TX</a:t>
+            </a:r>
+          </a:p>
+        </p:txBody>
+      </p:sp>
+      <p:sp>
+        <p:nvSpPr>
+          <p:cNvPr id="51" name="Rectangle 50"/>
+          <p:cNvSpPr/>
+          <p:nvPr/>
+        </p:nvSpPr>
+        <p:spPr>
+          <a:xfrm>
+            <a:off x="274320" y="3547872"/>
+            <a:ext cx="932688" cy="594360"/>
+          </a:xfrm>
+          <a:prstGeom prst="rect">
+            <a:avLst/>
+          </a:prstGeom>
+          <a:solidFill>
+            <a:srgbClr val="005555"/>
+          </a:solidFill>
+          <a:ln>
+            <a:noFill/>
+          </a:ln>
+        </p:spPr>
+        <p:style>
+          <a:lnRef idx="1">
+            <a:schemeClr val="accent1"/>
+          </a:lnRef>
+          <a:fillRef idx="3">
+            <a:schemeClr val="accent1"/>
+          </a:fillRef>
+          <a:effectRef idx="2">
+            <a:schemeClr val="accent1"/>
+          </a:effectRef>
+          <a:fontRef idx="minor">
+            <a:schemeClr val="lt1"/>
+          </a:fontRef>
+        </p:style>
+        <p:txBody>
+          <a:bodyPr rtlCol="0" anchor="ctr"/>
+          <a:lstStyle/>
+          <a:p>
+            <a:pPr algn="ctr"/>
+          </a:p>
+        </p:txBody>
+      </p:sp>
+      <p:sp>
+        <p:nvSpPr>
+          <p:cNvPr id="52" name="TextBox 51"/>
+          <p:cNvSpPr txBox="1"/>
+          <p:nvPr/>
+        </p:nvSpPr>
+        <p:spPr>
+          <a:xfrm>
+            <a:off x="329184" y="3639312"/>
+            <a:ext cx="841248" cy="457200"/>
+          </a:xfrm>
+          <a:prstGeom prst="rect">
+            <a:avLst/>
+          </a:prstGeom>
+          <a:noFill/>
+        </p:spPr>
+        <p:txBody>
+          <a:bodyPr wrap="square">
+            <a:spAutoFit/>
+          </a:bodyPr>
+          <a:lstStyle/>
+          <a:p>
+            <a:pPr algn="ctr"/>
+            <a:r>
+              <a:rPr sz="900" b="1" i="0">
+                <a:solidFill>
+                  <a:srgbClr val="FFFFFF"/>
+                </a:solidFill>
+              </a:rPr>
+              <a:t>PA</a:t>
+            </a:r>
+          </a:p>
+        </p:txBody>
+      </p:sp>
+      <p:sp>
+        <p:nvSpPr>
+          <p:cNvPr id="53" name="Rectangle 52"/>
+          <p:cNvSpPr/>
+          <p:nvPr/>
+        </p:nvSpPr>
+        <p:spPr>
+          <a:xfrm>
+            <a:off x="1234440" y="3547872"/>
+            <a:ext cx="2990088" cy="594360"/>
+          </a:xfrm>
+          <a:prstGeom prst="rect">
+            <a:avLst/>
+          </a:prstGeom>
+          <a:solidFill>
+            <a:srgbClr val="FFFFFF"/>
+          </a:solidFill>
+          <a:ln>
+            <a:noFill/>
+          </a:ln>
+        </p:spPr>
+        <p:style>
+          <a:lnRef idx="1">
+            <a:schemeClr val="accent1"/>
+          </a:lnRef>
+          <a:fillRef idx="3">
+            <a:schemeClr val="accent1"/>
+          </a:fillRef>
+          <a:effectRef idx="2">
+            <a:schemeClr val="accent1"/>
+          </a:effectRef>
+          <a:fontRef idx="minor">
+            <a:schemeClr val="lt1"/>
+          </a:fontRef>
+        </p:style>
+        <p:txBody>
+          <a:bodyPr rtlCol="0" anchor="ctr"/>
+          <a:lstStyle/>
+          <a:p>
+            <a:pPr algn="ctr"/>
+          </a:p>
+        </p:txBody>
+      </p:sp>
+      <p:sp>
+        <p:nvSpPr>
+          <p:cNvPr id="54" name="TextBox 53"/>
+          <p:cNvSpPr txBox="1"/>
+          <p:nvPr/>
+        </p:nvSpPr>
+        <p:spPr>
+          <a:xfrm>
+            <a:off x="1325880" y="3639312"/>
+            <a:ext cx="2852928" cy="457200"/>
+          </a:xfrm>
+          <a:prstGeom prst="rect">
+            <a:avLst/>
+          </a:prstGeom>
+          <a:noFill/>
+        </p:spPr>
+        <p:txBody>
+          <a:bodyPr wrap="square">
+            <a:spAutoFit/>
+          </a:bodyPr>
+          <a:lstStyle/>
+          <a:p>
+            <a:pPr algn="l"/>
+            <a:r>
+              <a:rPr sz="1000" b="1" i="0">
+                <a:solidFill>
+                  <a:srgbClr val="005555"/>
+                </a:solidFill>
+              </a:rPr>
+              <a:t>Prélèvement Automatique</a:t>
+            </a:r>
+          </a:p>
+        </p:txBody>
+      </p:sp>
+      <p:sp>
+        <p:nvSpPr>
+          <p:cNvPr id="55" name="Rectangle 54"/>
+          <p:cNvSpPr/>
+          <p:nvPr/>
+        </p:nvSpPr>
+        <p:spPr>
+          <a:xfrm>
+            <a:off x="4251960" y="3547872"/>
+            <a:ext cx="5212080" cy="594360"/>
+          </a:xfrm>
+          <a:prstGeom prst="rect">
+            <a:avLst/>
+          </a:prstGeom>
+          <a:solidFill>
+            <a:srgbClr val="FFFFFF"/>
+          </a:solidFill>
+          <a:ln>
+            <a:noFill/>
+          </a:ln>
+        </p:spPr>
+        <p:style>
+          <a:lnRef idx="1">
+            <a:schemeClr val="accent1"/>
+          </a:lnRef>
+          <a:fillRef idx="3">
+            <a:schemeClr val="accent1"/>
+          </a:fillRef>
+          <a:effectRef idx="2">
+            <a:schemeClr val="accent1"/>
+          </a:effectRef>
+          <a:fontRef idx="minor">
+            <a:schemeClr val="lt1"/>
+          </a:fontRef>
+        </p:style>
+        <p:txBody>
+          <a:bodyPr rtlCol="0" anchor="ctr"/>
+          <a:lstStyle/>
+          <a:p>
+            <a:pPr algn="ctr"/>
+          </a:p>
+        </p:txBody>
+      </p:sp>
+      <p:sp>
+        <p:nvSpPr>
+          <p:cNvPr id="56" name="TextBox 55"/>
+          <p:cNvSpPr txBox="1"/>
+          <p:nvPr/>
+        </p:nvSpPr>
+        <p:spPr>
+          <a:xfrm>
+            <a:off x="4343400" y="3621024"/>
+            <a:ext cx="5074920" cy="502920"/>
+          </a:xfrm>
+          <a:prstGeom prst="rect">
+            <a:avLst/>
+          </a:prstGeom>
+          <a:noFill/>
+        </p:spPr>
+        <p:txBody>
+          <a:bodyPr wrap="square">
+            <a:spAutoFit/>
+          </a:bodyPr>
+          <a:lstStyle/>
+          <a:p>
+            <a:pPr algn="l"/>
+            <a:r>
+              <a:rPr sz="900" b="0" i="1">
+                <a:solidFill>
+                  <a:srgbClr val="1A1A1A"/>
+                </a:solidFill>
+              </a:rPr>
+              <a:t>Don régulier sécurisé par mandat SEPA (IBAN à chaud, PA en ligne, PA courrier)</a:t>
+            </a:r>
+          </a:p>
+        </p:txBody>
+      </p:sp>
+      <p:sp>
+        <p:nvSpPr>
+          <p:cNvPr id="57" name="Rectangle 56"/>
+          <p:cNvSpPr/>
+          <p:nvPr/>
+        </p:nvSpPr>
+        <p:spPr>
+          <a:xfrm>
+            <a:off x="9491472" y="3547872"/>
+            <a:ext cx="2423160" cy="594360"/>
+          </a:xfrm>
+          <a:prstGeom prst="rect">
+            <a:avLst/>
+          </a:prstGeom>
+          <a:solidFill>
+            <a:srgbClr val="008080"/>
+          </a:solidFill>
+          <a:ln>
+            <a:noFill/>
+          </a:ln>
+        </p:spPr>
+        <p:style>
+          <a:lnRef idx="1">
+            <a:schemeClr val="accent1"/>
+          </a:lnRef>
+          <a:fillRef idx="3">
+            <a:schemeClr val="accent1"/>
+          </a:fillRef>
+          <a:effectRef idx="2">
+            <a:schemeClr val="accent1"/>
+          </a:effectRef>
+          <a:fontRef idx="minor">
+            <a:schemeClr val="lt1"/>
+          </a:fontRef>
+        </p:style>
+        <p:txBody>
+          <a:bodyPr rtlCol="0" anchor="ctr"/>
+          <a:lstStyle/>
+          <a:p>
+            <a:pPr algn="ctr"/>
+          </a:p>
+        </p:txBody>
+      </p:sp>
+      <p:sp>
+        <p:nvSpPr>
+          <p:cNvPr id="58" name="TextBox 57"/>
+          <p:cNvSpPr txBox="1"/>
+          <p:nvPr/>
+        </p:nvSpPr>
+        <p:spPr>
+          <a:xfrm>
+            <a:off x="9582912" y="3685032"/>
+            <a:ext cx="2286000" cy="393192"/>
+          </a:xfrm>
+          <a:prstGeom prst="rect">
+            <a:avLst/>
+          </a:prstGeom>
+          <a:noFill/>
+        </p:spPr>
+        <p:txBody>
+          <a:bodyPr wrap="square">
+            <a:spAutoFit/>
+          </a:bodyPr>
+          <a:lstStyle/>
+          <a:p>
+            <a:pPr algn="ctr"/>
+            <a:r>
+              <a:rPr sz="1000" b="1" i="0">
+                <a:solidFill>
+                  <a:srgbClr val="FFFFFF"/>
+                </a:solidFill>
+              </a:rPr>
+              <a:t>Produit unique</a:t>
+            </a:r>
+          </a:p>
+        </p:txBody>
+      </p:sp>
+      <p:sp>
+        <p:nvSpPr>
+          <p:cNvPr id="59" name="Rectangle 58"/>
+          <p:cNvSpPr/>
+          <p:nvPr/>
+        </p:nvSpPr>
+        <p:spPr>
+          <a:xfrm>
+            <a:off x="274320" y="4160520"/>
+            <a:ext cx="932688" cy="594360"/>
+          </a:xfrm>
+          <a:prstGeom prst="rect">
+            <a:avLst/>
+          </a:prstGeom>
+          <a:solidFill>
+            <a:srgbClr val="005555"/>
+          </a:solidFill>
+          <a:ln>
+            <a:noFill/>
+          </a:ln>
+        </p:spPr>
+        <p:style>
+          <a:lnRef idx="1">
+            <a:schemeClr val="accent1"/>
+          </a:lnRef>
+          <a:fillRef idx="3">
+            <a:schemeClr val="accent1"/>
+          </a:fillRef>
+          <a:effectRef idx="2">
+            <a:schemeClr val="accent1"/>
+          </a:effectRef>
+          <a:fontRef idx="minor">
+            <a:schemeClr val="lt1"/>
+          </a:fontRef>
+        </p:style>
+        <p:txBody>
+          <a:bodyPr rtlCol="0" anchor="ctr"/>
+          <a:lstStyle/>
+          <a:p>
+            <a:pPr algn="ctr"/>
+          </a:p>
+        </p:txBody>
+      </p:sp>
+      <p:sp>
+        <p:nvSpPr>
+          <p:cNvPr id="60" name="TextBox 59"/>
+          <p:cNvSpPr txBox="1"/>
+          <p:nvPr/>
+        </p:nvSpPr>
+        <p:spPr>
+          <a:xfrm>
+            <a:off x="329184" y="4251959"/>
+            <a:ext cx="841248" cy="457200"/>
+          </a:xfrm>
+          <a:prstGeom prst="rect">
+            <a:avLst/>
+          </a:prstGeom>
+          <a:noFill/>
+        </p:spPr>
+        <p:txBody>
+          <a:bodyPr wrap="square">
+            <a:spAutoFit/>
+          </a:bodyPr>
+          <a:lstStyle/>
+          <a:p>
+            <a:pPr algn="ctr"/>
+            <a:r>
+              <a:rPr sz="900" b="1" i="0">
+                <a:solidFill>
+                  <a:srgbClr val="FFFFFF"/>
+                </a:solidFill>
+              </a:rPr>
+              <a:t>Qualification</a:t>
+            </a:r>
+          </a:p>
+        </p:txBody>
+      </p:sp>
+      <p:sp>
+        <p:nvSpPr>
+          <p:cNvPr id="61" name="Rectangle 60"/>
+          <p:cNvSpPr/>
+          <p:nvPr/>
+        </p:nvSpPr>
+        <p:spPr>
+          <a:xfrm>
+            <a:off x="1234440" y="4160520"/>
+            <a:ext cx="2990088" cy="594360"/>
+          </a:xfrm>
+          <a:prstGeom prst="rect">
+            <a:avLst/>
+          </a:prstGeom>
+          <a:solidFill>
+            <a:srgbClr val="F0F7F7"/>
+          </a:solidFill>
+          <a:ln>
+            <a:noFill/>
+          </a:ln>
+        </p:spPr>
+        <p:style>
+          <a:lnRef idx="1">
+            <a:schemeClr val="accent1"/>
+          </a:lnRef>
+          <a:fillRef idx="3">
+            <a:schemeClr val="accent1"/>
+          </a:fillRef>
+          <a:effectRef idx="2">
+            <a:schemeClr val="accent1"/>
+          </a:effectRef>
+          <a:fontRef idx="minor">
+            <a:schemeClr val="lt1"/>
+          </a:fontRef>
+        </p:style>
+        <p:txBody>
+          <a:bodyPr rtlCol="0" anchor="ctr"/>
+          <a:lstStyle/>
+          <a:p>
+            <a:pPr algn="ctr"/>
+          </a:p>
+        </p:txBody>
+      </p:sp>
+      <p:sp>
+        <p:nvSpPr>
+          <p:cNvPr id="62" name="TextBox 61"/>
+          <p:cNvSpPr txBox="1"/>
+          <p:nvPr/>
+        </p:nvSpPr>
+        <p:spPr>
+          <a:xfrm>
+            <a:off x="1325880" y="4251959"/>
+            <a:ext cx="2852928" cy="457200"/>
+          </a:xfrm>
+          <a:prstGeom prst="rect">
+            <a:avLst/>
+          </a:prstGeom>
+          <a:noFill/>
+        </p:spPr>
+        <p:txBody>
+          <a:bodyPr wrap="square">
+            <a:spAutoFit/>
+          </a:bodyPr>
+          <a:lstStyle/>
+          <a:p>
+            <a:pPr algn="l"/>
+            <a:r>
+              <a:rPr sz="1000" b="1" i="0">
+                <a:solidFill>
+                  <a:srgbClr val="005555"/>
+                </a:solidFill>
+              </a:rPr>
+              <a:t>Conformité des qualifications</a:t>
+            </a:r>
+          </a:p>
+        </p:txBody>
+      </p:sp>
+      <p:sp>
+        <p:nvSpPr>
+          <p:cNvPr id="63" name="Rectangle 62"/>
+          <p:cNvSpPr/>
+          <p:nvPr/>
+        </p:nvSpPr>
+        <p:spPr>
+          <a:xfrm>
+            <a:off x="4251960" y="4160520"/>
+            <a:ext cx="5212080" cy="594360"/>
+          </a:xfrm>
+          <a:prstGeom prst="rect">
+            <a:avLst/>
+          </a:prstGeom>
+          <a:solidFill>
+            <a:srgbClr val="F0F7F7"/>
+          </a:solidFill>
+          <a:ln>
+            <a:noFill/>
+          </a:ln>
+        </p:spPr>
+        <p:style>
+          <a:lnRef idx="1">
+            <a:schemeClr val="accent1"/>
+          </a:lnRef>
+          <a:fillRef idx="3">
+            <a:schemeClr val="accent1"/>
+          </a:fillRef>
+          <a:effectRef idx="2">
+            <a:schemeClr val="accent1"/>
+          </a:effectRef>
+          <a:fontRef idx="minor">
+            <a:schemeClr val="lt1"/>
+          </a:fontRef>
+        </p:style>
+        <p:txBody>
+          <a:bodyPr rtlCol="0" anchor="ctr"/>
+          <a:lstStyle/>
+          <a:p>
+            <a:pPr algn="ctr"/>
+          </a:p>
+        </p:txBody>
+      </p:sp>
+      <p:sp>
+        <p:nvSpPr>
+          <p:cNvPr id="64" name="TextBox 63"/>
+          <p:cNvSpPr txBox="1"/>
+          <p:nvPr/>
+        </p:nvSpPr>
+        <p:spPr>
+          <a:xfrm>
+            <a:off x="4343400" y="4233672"/>
+            <a:ext cx="5074920" cy="502920"/>
+          </a:xfrm>
+          <a:prstGeom prst="rect">
+            <a:avLst/>
+          </a:prstGeom>
+          <a:noFill/>
+        </p:spPr>
+        <p:txBody>
+          <a:bodyPr wrap="square">
+            <a:spAutoFit/>
+          </a:bodyPr>
+          <a:lstStyle/>
+          <a:p>
+            <a:pPr algn="l"/>
+            <a:r>
+              <a:rPr sz="900" b="0" i="1">
+                <a:solidFill>
+                  <a:srgbClr val="1A1A1A"/>
+                </a:solidFill>
+              </a:rPr>
+              <a:t>Taux de qualifications d'appels correctement renseignées (DON/INDÉCIS/REFUS)</a:t>
+            </a:r>
+          </a:p>
+        </p:txBody>
+      </p:sp>
+      <p:sp>
+        <p:nvSpPr>
+          <p:cNvPr id="65" name="Rectangle 64"/>
+          <p:cNvSpPr/>
+          <p:nvPr/>
+        </p:nvSpPr>
+        <p:spPr>
+          <a:xfrm>
+            <a:off x="9491472" y="4160520"/>
+            <a:ext cx="2423160" cy="594360"/>
+          </a:xfrm>
+          <a:prstGeom prst="rect">
+            <a:avLst/>
+          </a:prstGeom>
+          <a:solidFill>
+            <a:srgbClr val="008080"/>
+          </a:solidFill>
+          <a:ln>
+            <a:noFill/>
+          </a:ln>
+        </p:spPr>
+        <p:style>
+          <a:lnRef idx="1">
+            <a:schemeClr val="accent1"/>
+          </a:lnRef>
+          <a:fillRef idx="3">
+            <a:schemeClr val="accent1"/>
+          </a:fillRef>
+          <a:effectRef idx="2">
+            <a:schemeClr val="accent1"/>
+          </a:effectRef>
+          <a:fontRef idx="minor">
+            <a:schemeClr val="lt1"/>
+          </a:fontRef>
+        </p:style>
+        <p:txBody>
+          <a:bodyPr rtlCol="0" anchor="ctr"/>
+          <a:lstStyle/>
+          <a:p>
+            <a:pPr algn="ctr"/>
+          </a:p>
+        </p:txBody>
+      </p:sp>
+      <p:sp>
+        <p:nvSpPr>
+          <p:cNvPr id="66" name="TextBox 65"/>
+          <p:cNvSpPr txBox="1"/>
+          <p:nvPr/>
+        </p:nvSpPr>
+        <p:spPr>
+          <a:xfrm>
+            <a:off x="9582912" y="4297680"/>
+            <a:ext cx="2286000" cy="393192"/>
+          </a:xfrm>
+          <a:prstGeom prst="rect">
+            <a:avLst/>
+          </a:prstGeom>
+          <a:noFill/>
+        </p:spPr>
+        <p:txBody>
+          <a:bodyPr wrap="square">
+            <a:spAutoFit/>
+          </a:bodyPr>
+          <a:lstStyle/>
+          <a:p>
+            <a:pPr algn="ctr"/>
+            <a:r>
+              <a:rPr sz="1000" b="1" i="0">
+                <a:solidFill>
+                  <a:srgbClr val="FFFFFF"/>
+                </a:solidFill>
+              </a:rPr>
+              <a:t>≥ 50% qualité</a:t>
             </a:r>
           </a:p>
         </p:txBody>
@@ -7387,7 +8225,7 @@
         <p:spPr>
           <a:xfrm>
             <a:off x="0" y="0"/>
-            <a:ext cx="12188952" cy="658368"/>
+            <a:ext cx="12188952" cy="685800"/>
           </a:xfrm>
           <a:prstGeom prst="rect">
             <a:avLst/>
@@ -7429,14 +8267,14 @@
         </p:nvSpPr>
         <p:spPr>
           <a:xfrm>
-            <a:off x="0" y="640080"/>
-            <a:ext cx="12188952" cy="54864"/>
-          </a:xfrm>
-          <a:prstGeom prst="rect">
-            <a:avLst/>
-          </a:prstGeom>
-          <a:solidFill>
-            <a:srgbClr val="FF0000"/>
+            <a:off x="0" y="667512"/>
+            <a:ext cx="12188952" cy="45720"/>
+          </a:xfrm>
+          <a:prstGeom prst="rect">
+            <a:avLst/>
+          </a:prstGeom>
+          <a:solidFill>
+            <a:srgbClr val="00AAAA"/>
           </a:solidFill>
           <a:ln>
             <a:noFill/>
@@ -7472,8 +8310,8 @@
         </p:nvSpPr>
         <p:spPr>
           <a:xfrm>
-            <a:off x="164592" y="64008"/>
-            <a:ext cx="685800" cy="530352"/>
+            <a:off x="164592" y="73152"/>
+            <a:ext cx="2011680" cy="347472"/>
           </a:xfrm>
           <a:prstGeom prst="rect">
             <a:avLst/>
@@ -7488,12 +8326,12 @@
           <a:p>
             <a:pPr algn="l"/>
             <a:r>
-              <a:rPr sz="2000" b="1" i="0">
+              <a:rPr sz="1400" b="1" i="0">
                 <a:solidFill>
                   <a:srgbClr val="FFFFFF"/>
                 </a:solidFill>
               </a:rPr>
-              <a:t>SHY</a:t>
+              <a:t>SHY-Performance</a:t>
             </a:r>
           </a:p>
         </p:txBody>
@@ -7506,14 +8344,14 @@
         </p:nvSpPr>
         <p:spPr>
           <a:xfrm>
-            <a:off x="914400" y="91440"/>
-            <a:ext cx="36576" cy="475488"/>
-          </a:xfrm>
-          <a:prstGeom prst="rect">
-            <a:avLst/>
-          </a:prstGeom>
-          <a:solidFill>
-            <a:srgbClr val="FF0000"/>
+            <a:off x="2286000" y="91440"/>
+            <a:ext cx="36576" cy="502920"/>
+          </a:xfrm>
+          <a:prstGeom prst="rect">
+            <a:avLst/>
+          </a:prstGeom>
+          <a:solidFill>
+            <a:srgbClr val="00AAAA"/>
           </a:solidFill>
           <a:ln>
             <a:noFill/>
@@ -7549,8 +8387,8 @@
         </p:nvSpPr>
         <p:spPr>
           <a:xfrm>
-            <a:off x="1024128" y="91440"/>
-            <a:ext cx="10881360" cy="475488"/>
+            <a:off x="2423160" y="91440"/>
+            <a:ext cx="9235440" cy="502920"/>
           </a:xfrm>
           <a:prstGeom prst="rect">
             <a:avLst/>
@@ -7565,19 +8403,43 @@
           <a:p>
             <a:pPr algn="l"/>
             <a:r>
-              <a:rPr sz="1700" b="1" i="0">
+              <a:rPr sz="1600" b="1" i="0">
                 <a:solidFill>
                   <a:srgbClr val="FFFFFF"/>
                 </a:solidFill>
               </a:rPr>
-              <a:t>Votre Progression — De Débutant à Fundraiser Certifié</a:t>
-            </a:r>
-          </a:p>
-        </p:txBody>
-      </p:sp>
-      <p:sp>
-        <p:nvSpPr>
-          <p:cNvPr id="8" name="Rectangle 7"/>
+              <a:t>Les 4 Modes de Validation du Don — Votre Arsenal de Closing</a:t>
+            </a:r>
+          </a:p>
+        </p:txBody>
+      </p:sp>
+      <p:pic>
+        <p:nvPicPr>
+          <p:cNvPr id="8" name="Picture 7" descr="shy_logo_v2.png"/>
+          <p:cNvPicPr>
+            <a:picLocks noChangeAspect="1"/>
+          </p:cNvPicPr>
+          <p:nvPr/>
+        </p:nvPicPr>
+        <p:blipFill>
+          <a:blip r:embed="rId2"/>
+          <a:stretch>
+            <a:fillRect/>
+          </a:stretch>
+        </p:blipFill>
+        <p:spPr>
+          <a:xfrm>
+            <a:off x="11247120" y="0"/>
+            <a:ext cx="822960" cy="676656"/>
+          </a:xfrm>
+          <a:prstGeom prst="rect">
+            <a:avLst/>
+          </a:prstGeom>
+        </p:spPr>
+      </p:pic>
+      <p:sp>
+        <p:nvSpPr>
+          <p:cNvPr id="9" name="Rectangle 8"/>
           <p:cNvSpPr/>
           <p:nvPr/>
         </p:nvSpPr>
@@ -7620,7 +8482,7 @@
       </p:sp>
       <p:sp>
         <p:nvSpPr>
-          <p:cNvPr id="9" name="TextBox 8"/>
+          <p:cNvPr id="10" name="TextBox 9"/>
           <p:cNvSpPr txBox="1"/>
           <p:nvPr/>
         </p:nvSpPr>
@@ -7642,32 +8504,32 @@
           <a:p>
             <a:pPr algn="ctr"/>
             <a:r>
-              <a:rPr sz="900" b="0" i="0">
+              <a:rPr sz="800" b="0" i="0">
                 <a:solidFill>
                   <a:srgbClr val="FFFFFF"/>
                 </a:solidFill>
               </a:rPr>
-              <a:t>SHY-Performance  ·  Formation FIM  ·  V6-01062026SHY-TE</a:t>
-            </a:r>
-          </a:p>
-        </p:txBody>
-      </p:sp>
-      <p:sp>
-        <p:nvSpPr>
-          <p:cNvPr id="10" name="Rectangle 9"/>
+              <a:t>SHY-Performance  ·  Formation FIM  ·  UNICEF France  ·  V6-01062026SHY-TE</a:t>
+            </a:r>
+          </a:p>
+        </p:txBody>
+      </p:sp>
+      <p:sp>
+        <p:nvSpPr>
+          <p:cNvPr id="11" name="Rectangle 10"/>
           <p:cNvSpPr/>
           <p:nvPr/>
         </p:nvSpPr>
         <p:spPr>
           <a:xfrm>
             <a:off x="274320" y="804672"/>
-            <a:ext cx="2834640" cy="502920"/>
-          </a:xfrm>
-          <a:prstGeom prst="rect">
-            <a:avLst/>
-          </a:prstGeom>
-          <a:solidFill>
-            <a:srgbClr val="555555"/>
+            <a:ext cx="2816352" cy="594360"/>
+          </a:xfrm>
+          <a:prstGeom prst="rect">
+            <a:avLst/>
+          </a:prstGeom>
+          <a:solidFill>
+            <a:srgbClr val="005555"/>
           </a:solidFill>
           <a:ln>
             <a:noFill/>
@@ -7697,14 +8559,14 @@
       </p:sp>
       <p:sp>
         <p:nvSpPr>
-          <p:cNvPr id="11" name="TextBox 10"/>
+          <p:cNvPr id="12" name="TextBox 11"/>
           <p:cNvSpPr txBox="1"/>
           <p:nvPr/>
         </p:nvSpPr>
         <p:spPr>
           <a:xfrm>
             <a:off x="384048" y="822960"/>
-            <a:ext cx="2615184" cy="466344"/>
+            <a:ext cx="2596896" cy="557784"/>
           </a:xfrm>
           <a:prstGeom prst="rect">
             <a:avLst/>
@@ -7719,37 +8581,37 @@
           <a:p>
             <a:pPr algn="ctr"/>
             <a:r>
-              <a:rPr sz="1100" b="1" i="0">
+              <a:rPr sz="1200" b="1" i="0">
                 <a:solidFill>
                   <a:srgbClr val="FFFFFF"/>
                 </a:solidFill>
               </a:rPr>
-              <a:t>Avant la
-formation</a:t>
-            </a:r>
-          </a:p>
-        </p:txBody>
-      </p:sp>
-      <p:sp>
-        <p:nvSpPr>
-          <p:cNvPr id="12" name="Rectangle 11"/>
+              <a:t>MODE 1
+IBAN à Chaud</a:t>
+            </a:r>
+          </a:p>
+        </p:txBody>
+      </p:sp>
+      <p:sp>
+        <p:nvSpPr>
+          <p:cNvPr id="13" name="Rectangle 12"/>
           <p:cNvSpPr/>
           <p:nvPr/>
         </p:nvSpPr>
         <p:spPr>
           <a:xfrm>
-            <a:off x="274320" y="1307592"/>
-            <a:ext cx="2834640" cy="3749039"/>
-          </a:xfrm>
-          <a:prstGeom prst="rect">
-            <a:avLst/>
-          </a:prstGeom>
-          <a:solidFill>
-            <a:srgbClr val="EEEEEE"/>
+            <a:off x="274320" y="1399032"/>
+            <a:ext cx="2816352" cy="4114800"/>
+          </a:xfrm>
+          <a:prstGeom prst="rect">
+            <a:avLst/>
+          </a:prstGeom>
+          <a:solidFill>
+            <a:srgbClr val="FFFFFF"/>
           </a:solidFill>
           <a:ln w="19050">
             <a:solidFill>
-              <a:srgbClr val="555555"/>
+              <a:srgbClr val="005555"/>
             </a:solidFill>
           </a:ln>
         </p:spPr>
@@ -7777,14 +8639,14 @@
       </p:sp>
       <p:sp>
         <p:nvSpPr>
-          <p:cNvPr id="13" name="TextBox 12"/>
+          <p:cNvPr id="14" name="TextBox 13"/>
           <p:cNvSpPr txBox="1"/>
           <p:nvPr/>
         </p:nvSpPr>
         <p:spPr>
           <a:xfrm>
-            <a:off x="411479" y="1417320"/>
-            <a:ext cx="2560320" cy="3474720"/>
+            <a:off x="411479" y="1472184"/>
+            <a:ext cx="2542032" cy="3877056"/>
           </a:xfrm>
           <a:prstGeom prst="rect">
             <a:avLst/>
@@ -7799,49 +8661,17 @@
           <a:p>
             <a:pPr algn="l"/>
             <a:r>
-              <a:rPr sz="1200" b="0" i="0">
+              <a:rPr sz="1000" b="0" i="0">
                 <a:solidFill>
                   <a:srgbClr val="1A1A1A"/>
                 </a:solidFill>
               </a:rPr>
-              <a:t>Vous connaissez peu le
-fundraising de rue.
-Vous appréhendez peut-être
-le premier contact.</a:t>
-            </a:r>
-          </a:p>
-        </p:txBody>
-      </p:sp>
-      <p:sp>
-        <p:nvSpPr>
-          <p:cNvPr id="14" name="TextBox 13"/>
-          <p:cNvSpPr txBox="1"/>
-          <p:nvPr/>
-        </p:nvSpPr>
-        <p:spPr>
-          <a:xfrm>
-            <a:off x="3127248" y="2468880"/>
-            <a:ext cx="274320" cy="731520"/>
-          </a:xfrm>
-          <a:prstGeom prst="rect">
-            <a:avLst/>
-          </a:prstGeom>
-          <a:noFill/>
-        </p:spPr>
-        <p:txBody>
-          <a:bodyPr wrap="square">
-            <a:spAutoFit/>
-          </a:bodyPr>
-          <a:lstStyle/>
-          <a:p>
-            <a:pPr algn="l"/>
-            <a:r>
-              <a:rPr sz="2200" b="1" i="0">
-                <a:solidFill>
-                  <a:srgbClr val="008080"/>
-                </a:solidFill>
-              </a:rPr>
-              <a:t>→</a:t>
+              <a:t>Le prospect dicte son IBAN directement lors de l'appel.
+✔ Validation immédiate
+✔ Sécurisation mandat SEPA
+✔ Confirmation par SMS
+→ Mode le plus efficace
+Prioritaire en conquête</a:t>
             </a:r>
           </a:p>
         </p:txBody>
@@ -7854,8 +8684,8 @@
         </p:nvSpPr>
         <p:spPr>
           <a:xfrm>
-            <a:off x="3255263" y="804672"/>
-            <a:ext cx="2834640" cy="502920"/>
+            <a:off x="3200400" y="804672"/>
+            <a:ext cx="2816352" cy="594360"/>
           </a:xfrm>
           <a:prstGeom prst="rect">
             <a:avLst/>
@@ -7897,8 +8727,8 @@
         </p:nvSpPr>
         <p:spPr>
           <a:xfrm>
-            <a:off x="3364991" y="822960"/>
-            <a:ext cx="2615184" cy="466344"/>
+            <a:off x="3310128" y="822960"/>
+            <a:ext cx="2596896" cy="557784"/>
           </a:xfrm>
           <a:prstGeom prst="rect">
             <a:avLst/>
@@ -7913,12 +8743,13 @@
           <a:p>
             <a:pPr algn="ctr"/>
             <a:r>
-              <a:rPr sz="1100" b="1" i="0">
+              <a:rPr sz="1200" b="1" i="0">
                 <a:solidFill>
                   <a:srgbClr val="FFFFFF"/>
                 </a:solidFill>
               </a:rPr>
-              <a:t>Après J1–J2</a:t>
+              <a:t>MODE 2
+PA en Ligne — Direct</a:t>
             </a:r>
           </a:p>
         </p:txBody>
@@ -7931,14 +8762,14 @@
         </p:nvSpPr>
         <p:spPr>
           <a:xfrm>
-            <a:off x="3255263" y="1307592"/>
-            <a:ext cx="2834640" cy="3749039"/>
-          </a:xfrm>
-          <a:prstGeom prst="rect">
-            <a:avLst/>
-          </a:prstGeom>
-          <a:solidFill>
-            <a:srgbClr val="F0F7F7"/>
+            <a:off x="3200400" y="1399032"/>
+            <a:ext cx="2816352" cy="4114800"/>
+          </a:xfrm>
+          <a:prstGeom prst="rect">
+            <a:avLst/>
+          </a:prstGeom>
+          <a:solidFill>
+            <a:srgbClr val="FFFFFF"/>
           </a:solidFill>
           <a:ln w="19050">
             <a:solidFill>
@@ -7976,8 +8807,8 @@
         </p:nvSpPr>
         <p:spPr>
           <a:xfrm>
-            <a:off x="3392423" y="1417320"/>
-            <a:ext cx="2560320" cy="3474720"/>
+            <a:off x="3337560" y="1472184"/>
+            <a:ext cx="2542032" cy="3877056"/>
           </a:xfrm>
           <a:prstGeom prst="rect">
             <a:avLst/>
@@ -7992,69 +8823,36 @@
           <a:p>
             <a:pPr algn="l"/>
             <a:r>
-              <a:rPr sz="1200" b="0" i="0">
+              <a:rPr sz="1000" b="0" i="0">
                 <a:solidFill>
                   <a:srgbClr val="1A1A1A"/>
                 </a:solidFill>
               </a:rPr>
-              <a:t>Vous comprenez la cause
-et le modèle du don.
-Vous êtes prêt(e) à
-construire votre discours.</a:t>
-            </a:r>
-          </a:p>
-        </p:txBody>
-      </p:sp>
-      <p:sp>
-        <p:nvSpPr>
-          <p:cNvPr id="19" name="TextBox 18"/>
-          <p:cNvSpPr txBox="1"/>
-          <p:nvPr/>
-        </p:nvSpPr>
-        <p:spPr>
-          <a:xfrm>
-            <a:off x="6108192" y="2468880"/>
-            <a:ext cx="274320" cy="731520"/>
-          </a:xfrm>
-          <a:prstGeom prst="rect">
-            <a:avLst/>
-          </a:prstGeom>
-          <a:noFill/>
-        </p:spPr>
-        <p:txBody>
-          <a:bodyPr wrap="square">
-            <a:spAutoFit/>
-          </a:bodyPr>
-          <a:lstStyle/>
-          <a:p>
-            <a:pPr algn="l"/>
-            <a:r>
-              <a:rPr sz="2200" b="1" i="0">
-                <a:solidFill>
-                  <a:srgbClr val="008080"/>
-                </a:solidFill>
-              </a:rPr>
-              <a:t>→</a:t>
-            </a:r>
-          </a:p>
-        </p:txBody>
-      </p:sp>
-      <p:sp>
-        <p:nvSpPr>
-          <p:cNvPr id="20" name="Rectangle 19"/>
+              <a:t>Vous envoyez un lien de paiement sécurisé pendant l'appel.
+✔ Prospect valide seul en temps réel
+✔ Confirmation email automatique
+✔ Zéro saisie IBAN par téléphone
+→ Pour les prospects méfiants sur l'IBAN</a:t>
+            </a:r>
+          </a:p>
+        </p:txBody>
+      </p:sp>
+      <p:sp>
+        <p:nvSpPr>
+          <p:cNvPr id="19" name="Rectangle 18"/>
           <p:cNvSpPr/>
           <p:nvPr/>
         </p:nvSpPr>
         <p:spPr>
           <a:xfrm>
-            <a:off x="6236207" y="804672"/>
-            <a:ext cx="2834640" cy="502920"/>
-          </a:xfrm>
-          <a:prstGeom prst="rect">
-            <a:avLst/>
-          </a:prstGeom>
-          <a:solidFill>
-            <a:srgbClr val="1A7A1A"/>
+            <a:off x="6126480" y="804672"/>
+            <a:ext cx="2816352" cy="594360"/>
+          </a:xfrm>
+          <a:prstGeom prst="rect">
+            <a:avLst/>
+          </a:prstGeom>
+          <a:solidFill>
+            <a:srgbClr val="006A6A"/>
           </a:solidFill>
           <a:ln>
             <a:noFill/>
@@ -8084,14 +8882,14 @@
       </p:sp>
       <p:sp>
         <p:nvSpPr>
-          <p:cNvPr id="21" name="TextBox 20"/>
+          <p:cNvPr id="20" name="TextBox 19"/>
           <p:cNvSpPr txBox="1"/>
           <p:nvPr/>
         </p:nvSpPr>
         <p:spPr>
           <a:xfrm>
-            <a:off x="6345936" y="822960"/>
-            <a:ext cx="2615184" cy="466344"/>
+            <a:off x="6236208" y="822960"/>
+            <a:ext cx="2596896" cy="557784"/>
           </a:xfrm>
           <a:prstGeom prst="rect">
             <a:avLst/>
@@ -8106,36 +8904,37 @@
           <a:p>
             <a:pPr algn="ctr"/>
             <a:r>
-              <a:rPr sz="1100" b="1" i="0">
+              <a:rPr sz="1200" b="1" i="0">
                 <a:solidFill>
                   <a:srgbClr val="FFFFFF"/>
                 </a:solidFill>
               </a:rPr>
-              <a:t>Après J3–J4</a:t>
-            </a:r>
-          </a:p>
-        </p:txBody>
-      </p:sp>
-      <p:sp>
-        <p:nvSpPr>
-          <p:cNvPr id="22" name="Rectangle 21"/>
+              <a:t>MODE 3
+Promesse PA en Ligne (PEL)</a:t>
+            </a:r>
+          </a:p>
+        </p:txBody>
+      </p:sp>
+      <p:sp>
+        <p:nvSpPr>
+          <p:cNvPr id="21" name="Rectangle 20"/>
           <p:cNvSpPr/>
           <p:nvPr/>
         </p:nvSpPr>
         <p:spPr>
           <a:xfrm>
-            <a:off x="6236207" y="1307592"/>
-            <a:ext cx="2834640" cy="3749039"/>
-          </a:xfrm>
-          <a:prstGeom prst="rect">
-            <a:avLst/>
-          </a:prstGeom>
-          <a:solidFill>
-            <a:srgbClr val="CCEECC"/>
+            <a:off x="6126480" y="1399032"/>
+            <a:ext cx="2816352" cy="4114800"/>
+          </a:xfrm>
+          <a:prstGeom prst="rect">
+            <a:avLst/>
+          </a:prstGeom>
+          <a:solidFill>
+            <a:srgbClr val="FFFFFF"/>
           </a:solidFill>
           <a:ln w="19050">
             <a:solidFill>
-              <a:srgbClr val="1A7A1A"/>
+              <a:srgbClr val="006A6A"/>
             </a:solidFill>
           </a:ln>
         </p:spPr>
@@ -8163,14 +8962,14 @@
       </p:sp>
       <p:sp>
         <p:nvSpPr>
-          <p:cNvPr id="23" name="TextBox 22"/>
+          <p:cNvPr id="22" name="TextBox 21"/>
           <p:cNvSpPr txBox="1"/>
           <p:nvPr/>
         </p:nvSpPr>
         <p:spPr>
           <a:xfrm>
-            <a:off x="6373368" y="1417320"/>
-            <a:ext cx="2560320" cy="3474720"/>
+            <a:off x="6263640" y="1472184"/>
+            <a:ext cx="2542032" cy="3877056"/>
           </a:xfrm>
           <a:prstGeom prst="rect">
             <a:avLst/>
@@ -8185,69 +8984,36 @@
           <a:p>
             <a:pPr algn="l"/>
             <a:r>
-              <a:rPr sz="1200" b="0" i="0">
+              <a:rPr sz="1000" b="0" i="0">
                 <a:solidFill>
                   <a:srgbClr val="1A1A1A"/>
                 </a:solidFill>
               </a:rPr>
-              <a:t>Vous maîtrisez le script
-et gérez les objections.
-Vous vous sentez à l'aise
-en simulation.</a:t>
-            </a:r>
-          </a:p>
-        </p:txBody>
-      </p:sp>
-      <p:sp>
-        <p:nvSpPr>
-          <p:cNvPr id="24" name="TextBox 23"/>
-          <p:cNvSpPr txBox="1"/>
-          <p:nvPr/>
-        </p:nvSpPr>
-        <p:spPr>
-          <a:xfrm>
-            <a:off x="9089136" y="2468880"/>
-            <a:ext cx="274320" cy="731520"/>
-          </a:xfrm>
-          <a:prstGeom prst="rect">
-            <a:avLst/>
-          </a:prstGeom>
-          <a:noFill/>
-        </p:spPr>
-        <p:txBody>
-          <a:bodyPr wrap="square">
-            <a:spAutoFit/>
-          </a:bodyPr>
-          <a:lstStyle/>
-          <a:p>
-            <a:pPr algn="l"/>
-            <a:r>
-              <a:rPr sz="2200" b="1" i="0">
-                <a:solidFill>
-                  <a:srgbClr val="008080"/>
-                </a:solidFill>
-              </a:rPr>
-              <a:t>→</a:t>
-            </a:r>
-          </a:p>
-        </p:txBody>
-      </p:sp>
-      <p:sp>
-        <p:nvSpPr>
-          <p:cNvPr id="25" name="Rectangle 24"/>
+              <a:t>Le prospect s'engage à valider le lien après l'appel.
+✔ Lien envoyé par SMS / email
+✔ Relance automatique J+1
+✔ Comptabilisé dans le TX Transfo
+→ Pour les indécis à fort potentiel</a:t>
+            </a:r>
+          </a:p>
+        </p:txBody>
+      </p:sp>
+      <p:sp>
+        <p:nvSpPr>
+          <p:cNvPr id="23" name="Rectangle 22"/>
           <p:cNvSpPr/>
           <p:nvPr/>
         </p:nvSpPr>
         <p:spPr>
           <a:xfrm>
-            <a:off x="9217151" y="804672"/>
-            <a:ext cx="2834640" cy="502920"/>
-          </a:xfrm>
-          <a:prstGeom prst="rect">
-            <a:avLst/>
-          </a:prstGeom>
-          <a:solidFill>
-            <a:srgbClr val="FF0000"/>
+            <a:off x="9052560" y="804672"/>
+            <a:ext cx="2816352" cy="594360"/>
+          </a:xfrm>
+          <a:prstGeom prst="rect">
+            <a:avLst/>
+          </a:prstGeom>
+          <a:solidFill>
+            <a:srgbClr val="00AAAA"/>
           </a:solidFill>
           <a:ln>
             <a:noFill/>
@@ -8277,14 +9043,14 @@
       </p:sp>
       <p:sp>
         <p:nvSpPr>
-          <p:cNvPr id="26" name="TextBox 25"/>
+          <p:cNvPr id="24" name="TextBox 23"/>
           <p:cNvSpPr txBox="1"/>
           <p:nvPr/>
         </p:nvSpPr>
         <p:spPr>
           <a:xfrm>
-            <a:off x="9326879" y="822960"/>
-            <a:ext cx="2615184" cy="466344"/>
+            <a:off x="9162288" y="822960"/>
+            <a:ext cx="2596896" cy="557784"/>
           </a:xfrm>
           <a:prstGeom prst="rect">
             <a:avLst/>
@@ -8299,37 +9065,37 @@
           <a:p>
             <a:pPr algn="ctr"/>
             <a:r>
-              <a:rPr sz="1100" b="1" i="0">
+              <a:rPr sz="1200" b="1" i="0">
                 <a:solidFill>
                   <a:srgbClr val="FFFFFF"/>
                 </a:solidFill>
               </a:rPr>
-              <a:t>Après J5
-(certifié)</a:t>
-            </a:r>
-          </a:p>
-        </p:txBody>
-      </p:sp>
-      <p:sp>
-        <p:nvSpPr>
-          <p:cNvPr id="27" name="Rectangle 26"/>
+              <a:t>MODE 4
+PA Courrier</a:t>
+            </a:r>
+          </a:p>
+        </p:txBody>
+      </p:sp>
+      <p:sp>
+        <p:nvSpPr>
+          <p:cNvPr id="25" name="Rectangle 24"/>
           <p:cNvSpPr/>
           <p:nvPr/>
         </p:nvSpPr>
         <p:spPr>
           <a:xfrm>
-            <a:off x="9217151" y="1307592"/>
-            <a:ext cx="2834640" cy="3749039"/>
-          </a:xfrm>
-          <a:prstGeom prst="rect">
-            <a:avLst/>
-          </a:prstGeom>
-          <a:solidFill>
-            <a:srgbClr val="FFCCCC"/>
+            <a:off x="9052560" y="1399032"/>
+            <a:ext cx="2816352" cy="4114800"/>
+          </a:xfrm>
+          <a:prstGeom prst="rect">
+            <a:avLst/>
+          </a:prstGeom>
+          <a:solidFill>
+            <a:srgbClr val="FFFFFF"/>
           </a:solidFill>
           <a:ln w="19050">
             <a:solidFill>
-              <a:srgbClr val="FF0000"/>
+              <a:srgbClr val="00AAAA"/>
             </a:solidFill>
           </a:ln>
         </p:spPr>
@@ -8357,14 +9123,14 @@
       </p:sp>
       <p:sp>
         <p:nvSpPr>
-          <p:cNvPr id="28" name="TextBox 27"/>
+          <p:cNvPr id="26" name="TextBox 25"/>
           <p:cNvSpPr txBox="1"/>
           <p:nvPr/>
         </p:nvSpPr>
         <p:spPr>
           <a:xfrm>
-            <a:off x="9354311" y="1417320"/>
-            <a:ext cx="2560320" cy="3474720"/>
+            <a:off x="9189720" y="1472184"/>
+            <a:ext cx="2542032" cy="3877056"/>
           </a:xfrm>
           <a:prstGeom prst="rect">
             <a:avLst/>
@@ -8379,29 +9145,30 @@
           <a:p>
             <a:pPr algn="l"/>
             <a:r>
-              <a:rPr sz="1200" b="0" i="0">
+              <a:rPr sz="1000" b="0" i="0">
                 <a:solidFill>
                   <a:srgbClr val="1A1A1A"/>
                 </a:solidFill>
               </a:rPr>
-              <a:t>Vous avez obtenu votre
-certification FIM.
-Vous êtes opérationnel(le)
-dès demain sur le terrain.</a:t>
-            </a:r>
-          </a:p>
-        </p:txBody>
-      </p:sp>
-      <p:sp>
-        <p:nvSpPr>
-          <p:cNvPr id="29" name="Rectangle 28"/>
+              <a:t>Envoi d'un formulaire papier avec enveloppe T pré-affranchie.
+✔ Pour les seniors moins digitaux
+✔ Mandat SEPA envoyé par voie postale
+✔ Délai de retour : 5–10 jours
+→ Alternative quand les autres modes échouent</a:t>
+            </a:r>
+          </a:p>
+        </p:txBody>
+      </p:sp>
+      <p:sp>
+        <p:nvSpPr>
+          <p:cNvPr id="27" name="Rectangle 26"/>
           <p:cNvSpPr/>
           <p:nvPr/>
         </p:nvSpPr>
         <p:spPr>
           <a:xfrm>
-            <a:off x="274320" y="5257800"/>
-            <a:ext cx="11640312" cy="384048"/>
+            <a:off x="274320" y="5669280"/>
+            <a:ext cx="11640312" cy="402336"/>
           </a:xfrm>
           <a:prstGeom prst="rect">
             <a:avLst/>
@@ -8437,14 +9204,14 @@
       </p:sp>
       <p:sp>
         <p:nvSpPr>
-          <p:cNvPr id="30" name="TextBox 29"/>
+          <p:cNvPr id="28" name="TextBox 27"/>
           <p:cNvSpPr txBox="1"/>
           <p:nvPr/>
         </p:nvSpPr>
         <p:spPr>
           <a:xfrm>
-            <a:off x="411479" y="5330952"/>
-            <a:ext cx="11365992" cy="237744"/>
+            <a:off x="411479" y="5742432"/>
+            <a:ext cx="11365992" cy="256032"/>
           </a:xfrm>
           <a:prstGeom prst="rect">
             <a:avLst/>
@@ -8464,7 +9231,7 @@
                   <a:srgbClr val="FFFFFF"/>
                 </a:solidFill>
               </a:rPr>
-              <a:t>La progression est individuelle. Votre formateur adapte son accompagnement à votre rythme.</a:t>
+              <a:t>Votre priorité : proposer le MODE 1 (IBAN à chaud) en premier. Si refus, enchaîner Mode 2 → Mode 3 → Mode 4. Ne jamais sauter directement au Mode 4.</a:t>
             </a:r>
           </a:p>
         </p:txBody>

--- a/FIM_Book1_Synopsis_Objectifs_V6-01062026SHY-TE.pptx
+++ b/FIM_Book1_Synopsis_Objectifs_V6-01062026SHY-TE.pptx
@@ -3149,7 +3149,7 @@
             <a:avLst/>
           </a:prstGeom>
           <a:solidFill>
-            <a:srgbClr val="005555"/>
+            <a:srgbClr val="005050"/>
           </a:solidFill>
           <a:ln>
             <a:noFill/>
@@ -3229,7 +3229,7 @@
         <p:spPr>
           <a:xfrm>
             <a:off x="347472" y="91440"/>
-            <a:ext cx="3200400" cy="438912"/>
+            <a:ext cx="4572000" cy="402336"/>
           </a:xfrm>
           <a:prstGeom prst="rect">
             <a:avLst/>
@@ -3262,8 +3262,8 @@
         </p:nvSpPr>
         <p:spPr>
           <a:xfrm>
-            <a:off x="347472" y="530352"/>
-            <a:ext cx="7772400" cy="347472"/>
+            <a:off x="347472" y="493776"/>
+            <a:ext cx="8229600" cy="329184"/>
           </a:xfrm>
           <a:prstGeom prst="rect">
             <a:avLst/>
@@ -3296,8 +3296,8 @@
         </p:nvSpPr>
         <p:spPr>
           <a:xfrm>
-            <a:off x="347472" y="932688"/>
-            <a:ext cx="7772400" cy="292608"/>
+            <a:off x="347472" y="877824"/>
+            <a:ext cx="8229600" cy="274320"/>
           </a:xfrm>
           <a:prstGeom prst="rect">
             <a:avLst/>
@@ -3330,8 +3330,8 @@
         </p:nvSpPr>
         <p:spPr>
           <a:xfrm>
-            <a:off x="347472" y="1207008"/>
-            <a:ext cx="10515600" cy="914400"/>
+            <a:off x="347472" y="1188720"/>
+            <a:ext cx="10515600" cy="960120"/>
           </a:xfrm>
           <a:prstGeom prst="rect">
             <a:avLst/>
@@ -3346,7 +3346,7 @@
           <a:p>
             <a:pPr algn="l"/>
             <a:r>
-              <a:rPr sz="3000" b="1" i="0">
+              <a:rPr sz="2900" b="1" i="0">
                 <a:solidFill>
                   <a:srgbClr val="FFFFFF"/>
                 </a:solidFill>
@@ -3364,8 +3364,8 @@
         </p:nvSpPr>
         <p:spPr>
           <a:xfrm>
-            <a:off x="347472" y="1901952"/>
-            <a:ext cx="10515600" cy="402336"/>
+            <a:off x="347472" y="1920240"/>
+            <a:ext cx="10515600" cy="384048"/>
           </a:xfrm>
           <a:prstGeom prst="rect">
             <a:avLst/>
@@ -3385,7 +3385,7 @@
                   <a:srgbClr val="CCEEEE"/>
                 </a:solidFill>
               </a:rPr>
-              <a:t>Ce que vous saurez faire à l'issue des 5 jours FIM</a:t>
+              <a:t>Ce que vous saurez faire à l'issue des 5 jours + 2 ateliers FIM</a:t>
             </a:r>
           </a:p>
         </p:txBody>
@@ -3406,8 +3406,8 @@
         </p:blipFill>
         <p:spPr>
           <a:xfrm>
-            <a:off x="11247120" y="45720"/>
-            <a:ext cx="822960" cy="804672"/>
+            <a:off x="11228832" y="0"/>
+            <a:ext cx="841248" cy="676656"/>
           </a:xfrm>
           <a:prstGeom prst="rect">
             <a:avLst/>
@@ -3429,7 +3429,7 @@
             <a:avLst/>
           </a:prstGeom>
           <a:solidFill>
-            <a:srgbClr val="005555"/>
+            <a:srgbClr val="005050"/>
           </a:solidFill>
           <a:ln>
             <a:noFill/>
@@ -3520,7 +3520,7 @@
                   <a:srgbClr val="1A1A1A"/>
                 </a:solidFill>
               </a:rPr>
-              <a:t>À l'issue de ces 5 jours, vous serez capable de conduire un appel de collecte de dons
+              <a:t>À l'issue de ces 7 jours, vous serez capable de conduire un appel de collecte de dons
 au nom de l'UNICEF, de la phrase d'accroche jusqu'à la validation du Prélèvement Automatique.</a:t>
             </a:r>
           </a:p>
@@ -3602,7 +3602,7 @@
             <a:avLst/>
           </a:prstGeom>
           <a:solidFill>
-            <a:srgbClr val="005555"/>
+            <a:srgbClr val="005050"/>
           </a:solidFill>
           <a:ln>
             <a:noFill/>
@@ -3681,8 +3681,8 @@
         </p:nvSpPr>
         <p:spPr>
           <a:xfrm>
-            <a:off x="164592" y="73152"/>
-            <a:ext cx="2011680" cy="347472"/>
+            <a:off x="164592" y="91440"/>
+            <a:ext cx="1920240" cy="329184"/>
           </a:xfrm>
           <a:prstGeom prst="rect">
             <a:avLst/>
@@ -3715,8 +3715,8 @@
         </p:nvSpPr>
         <p:spPr>
           <a:xfrm>
-            <a:off x="2286000" y="91440"/>
-            <a:ext cx="36576" cy="502920"/>
+            <a:off x="2212848" y="109728"/>
+            <a:ext cx="36576" cy="475488"/>
           </a:xfrm>
           <a:prstGeom prst="rect">
             <a:avLst/>
@@ -3758,8 +3758,8 @@
         </p:nvSpPr>
         <p:spPr>
           <a:xfrm>
-            <a:off x="2423160" y="91440"/>
-            <a:ext cx="9235440" cy="502920"/>
+            <a:off x="2350008" y="91440"/>
+            <a:ext cx="8823960" cy="502920"/>
           </a:xfrm>
           <a:prstGeom prst="rect">
             <a:avLst/>
@@ -3779,7 +3779,7 @@
                   <a:srgbClr val="FFFFFF"/>
                 </a:solidFill>
               </a:rPr>
-              <a:t>Vos 3 Dimensions de Compétence</a:t>
+              <a:t>Vos 3 Dimensions de Compétence — SAVOIR / SAVOIR-FAIRE / SAVOIR-ÊTRE</a:t>
             </a:r>
           </a:p>
         </p:txBody>
@@ -3800,8 +3800,8 @@
         </p:blipFill>
         <p:spPr>
           <a:xfrm>
-            <a:off x="11247120" y="0"/>
-            <a:ext cx="822960" cy="676656"/>
+            <a:off x="11228832" y="0"/>
+            <a:ext cx="841248" cy="676656"/>
           </a:xfrm>
           <a:prstGeom prst="rect">
             <a:avLst/>
@@ -3823,7 +3823,7 @@
             <a:avLst/>
           </a:prstGeom>
           <a:solidFill>
-            <a:srgbClr val="005555"/>
+            <a:srgbClr val="005050"/>
           </a:solidFill>
           <a:ln>
             <a:noFill/>
@@ -3900,7 +3900,7 @@
             <a:avLst/>
           </a:prstGeom>
           <a:solidFill>
-            <a:srgbClr val="005555"/>
+            <a:srgbClr val="005050"/>
           </a:solidFill>
           <a:ln>
             <a:noFill/>
@@ -4015,7 +4015,7 @@
           </a:solidFill>
           <a:ln w="5080">
             <a:solidFill>
-              <a:srgbClr val="005555"/>
+              <a:srgbClr val="005050"/>
             </a:solidFill>
           </a:ln>
         </p:spPr>
@@ -4094,7 +4094,7 @@
           </a:solidFill>
           <a:ln w="5080">
             <a:solidFill>
-              <a:srgbClr val="005555"/>
+              <a:srgbClr val="005050"/>
             </a:solidFill>
           </a:ln>
         </p:spPr>
@@ -4173,7 +4173,7 @@
           </a:solidFill>
           <a:ln w="5080">
             <a:solidFill>
-              <a:srgbClr val="005555"/>
+              <a:srgbClr val="005050"/>
             </a:solidFill>
           </a:ln>
         </p:spPr>
@@ -4252,7 +4252,7 @@
           </a:solidFill>
           <a:ln w="5080">
             <a:solidFill>
-              <a:srgbClr val="005555"/>
+              <a:srgbClr val="005050"/>
             </a:solidFill>
           </a:ln>
         </p:spPr>
@@ -4331,7 +4331,7 @@
           </a:solidFill>
           <a:ln w="5080">
             <a:solidFill>
-              <a:srgbClr val="005555"/>
+              <a:srgbClr val="005050"/>
             </a:solidFill>
           </a:ln>
         </p:spPr>
@@ -4410,7 +4410,7 @@
           </a:solidFill>
           <a:ln w="5080">
             <a:solidFill>
-              <a:srgbClr val="005555"/>
+              <a:srgbClr val="005050"/>
             </a:solidFill>
           </a:ln>
         </p:spPr>
@@ -4892,7 +4892,7 @@
                   <a:srgbClr val="1A1A1A"/>
                 </a:solidFill>
               </a:rPr>
-              <a:t>• Gérer les 4 modes de validation du don (IBAN à chaud, PA en ligne, PEL, PA courrier)</a:t>
+              <a:t>• Gérer les 4 modes de validation du don</a:t>
             </a:r>
           </a:p>
         </p:txBody>
@@ -5635,7 +5635,7 @@
                   <a:srgbClr val="1A1A1A"/>
                 </a:solidFill>
               </a:rPr>
-              <a:t>• Respecter systématiquement les règles éthiques du secteur associatif</a:t>
+              <a:t>• Respecter systématiquement les règles éthiques du secteur</a:t>
             </a:r>
           </a:p>
         </p:txBody>
@@ -5716,7 +5716,7 @@
             <a:avLst/>
           </a:prstGeom>
           <a:solidFill>
-            <a:srgbClr val="005555"/>
+            <a:srgbClr val="005050"/>
           </a:solidFill>
           <a:ln>
             <a:noFill/>
@@ -5795,8 +5795,8 @@
         </p:nvSpPr>
         <p:spPr>
           <a:xfrm>
-            <a:off x="164592" y="73152"/>
-            <a:ext cx="2011680" cy="347472"/>
+            <a:off x="164592" y="91440"/>
+            <a:ext cx="1920240" cy="329184"/>
           </a:xfrm>
           <a:prstGeom prst="rect">
             <a:avLst/>
@@ -5829,8 +5829,8 @@
         </p:nvSpPr>
         <p:spPr>
           <a:xfrm>
-            <a:off x="2286000" y="91440"/>
-            <a:ext cx="36576" cy="502920"/>
+            <a:off x="2212848" y="109728"/>
+            <a:ext cx="36576" cy="475488"/>
           </a:xfrm>
           <a:prstGeom prst="rect">
             <a:avLst/>
@@ -5872,8 +5872,8 @@
         </p:nvSpPr>
         <p:spPr>
           <a:xfrm>
-            <a:off x="2423160" y="91440"/>
-            <a:ext cx="9235440" cy="502920"/>
+            <a:off x="2350008" y="91440"/>
+            <a:ext cx="8823960" cy="502920"/>
           </a:xfrm>
           <a:prstGeom prst="rect">
             <a:avLst/>
@@ -5893,7 +5893,7 @@
                   <a:srgbClr val="FFFFFF"/>
                 </a:solidFill>
               </a:rPr>
-              <a:t>Vos Indicateurs de Performance — Nomenclature FIDELIS</a:t>
+              <a:t>Indicateurs de Performance — Nomenclature FIDELIS</a:t>
             </a:r>
           </a:p>
         </p:txBody>
@@ -5914,8 +5914,8 @@
         </p:blipFill>
         <p:spPr>
           <a:xfrm>
-            <a:off x="11247120" y="0"/>
-            <a:ext cx="822960" cy="676656"/>
+            <a:off x="11228832" y="0"/>
+            <a:ext cx="841248" cy="676656"/>
           </a:xfrm>
           <a:prstGeom prst="rect">
             <a:avLst/>
@@ -5937,7 +5937,7 @@
             <a:avLst/>
           </a:prstGeom>
           <a:solidFill>
-            <a:srgbClr val="005555"/>
+            <a:srgbClr val="005050"/>
           </a:solidFill>
           <a:ln>
             <a:noFill/>
@@ -6014,7 +6014,7 @@
             <a:avLst/>
           </a:prstGeom>
           <a:solidFill>
-            <a:srgbClr val="005555"/>
+            <a:srgbClr val="005050"/>
           </a:solidFill>
           <a:ln>
             <a:noFill/>
@@ -6091,7 +6091,7 @@
             <a:avLst/>
           </a:prstGeom>
           <a:solidFill>
-            <a:srgbClr val="005555"/>
+            <a:srgbClr val="005050"/>
           </a:solidFill>
           <a:ln>
             <a:noFill/>
@@ -6168,7 +6168,7 @@
             <a:avLst/>
           </a:prstGeom>
           <a:solidFill>
-            <a:srgbClr val="005555"/>
+            <a:srgbClr val="005050"/>
           </a:solidFill>
           <a:ln>
             <a:noFill/>
@@ -6245,7 +6245,7 @@
             <a:avLst/>
           </a:prstGeom>
           <a:solidFill>
-            <a:srgbClr val="005555"/>
+            <a:srgbClr val="005050"/>
           </a:solidFill>
           <a:ln>
             <a:noFill/>
@@ -6322,7 +6322,7 @@
             <a:avLst/>
           </a:prstGeom>
           <a:solidFill>
-            <a:srgbClr val="005555"/>
+            <a:srgbClr val="005050"/>
           </a:solidFill>
           <a:ln>
             <a:noFill/>
@@ -6453,7 +6453,7 @@
             <a:r>
               <a:rPr sz="1000" b="1" i="0">
                 <a:solidFill>
-                  <a:srgbClr val="005555"/>
+                  <a:srgbClr val="005050"/>
                 </a:solidFill>
               </a:rPr>
               <a:t>Contacts Utiles / Heure</a:t>
@@ -6533,7 +6533,7 @@
                   <a:srgbClr val="1A1A1A"/>
                 </a:solidFill>
               </a:rPr>
-              <a:t>Nombre de contacts qualifiés (DON/INDÉCIS/REFUS) par heure de production</a:t>
+              <a:t>Nombre de contacts qualifiés par heure de production</a:t>
             </a:r>
           </a:p>
         </p:txBody>
@@ -6630,7 +6630,7 @@
             <a:avLst/>
           </a:prstGeom>
           <a:solidFill>
-            <a:srgbClr val="005555"/>
+            <a:srgbClr val="005050"/>
           </a:solidFill>
           <a:ln>
             <a:noFill/>
@@ -6761,7 +6761,7 @@
             <a:r>
               <a:rPr sz="1000" b="1" i="0">
                 <a:solidFill>
-                  <a:srgbClr val="005555"/>
+                  <a:srgbClr val="005050"/>
                 </a:solidFill>
               </a:rPr>
               <a:t>Taux de Transformation</a:t>
@@ -6841,7 +6841,7 @@
                   <a:srgbClr val="1A1A1A"/>
                 </a:solidFill>
               </a:rPr>
-              <a:t>% de PEL/PA obtenus parmi les Contacts Utiles — mesure l'efficacité au don régulier</a:t>
+              <a:t>% de PEL/PA obtenus parmi les Contacts Utiles</a:t>
             </a:r>
           </a:p>
         </p:txBody>
@@ -6938,7 +6938,7 @@
             <a:avLst/>
           </a:prstGeom>
           <a:solidFill>
-            <a:srgbClr val="005555"/>
+            <a:srgbClr val="005050"/>
           </a:solidFill>
           <a:ln>
             <a:noFill/>
@@ -7069,7 +7069,7 @@
             <a:r>
               <a:rPr sz="1000" b="1" i="0">
                 <a:solidFill>
-                  <a:srgbClr val="005555"/>
+                  <a:srgbClr val="005050"/>
                 </a:solidFill>
               </a:rPr>
               <a:t>Plan de Charge</a:t>
@@ -7149,7 +7149,7 @@
                   <a:srgbClr val="1A1A1A"/>
                 </a:solidFill>
               </a:rPr>
-              <a:t>Volume mensuel de dons réguliers à atteindre selon FIDELIS × UNICEF France</a:t>
+              <a:t>Volume mensuel de dons réguliers FIDELIS × UNICEF France</a:t>
             </a:r>
           </a:p>
         </p:txBody>
@@ -7246,7 +7246,7 @@
             <a:avLst/>
           </a:prstGeom>
           <a:solidFill>
-            <a:srgbClr val="005555"/>
+            <a:srgbClr val="005050"/>
           </a:solidFill>
           <a:ln>
             <a:noFill/>
@@ -7377,7 +7377,7 @@
             <a:r>
               <a:rPr sz="1000" b="1" i="0">
                 <a:solidFill>
-                  <a:srgbClr val="005555"/>
+                  <a:srgbClr val="005050"/>
                 </a:solidFill>
               </a:rPr>
               <a:t>Promesse En Ligne</a:t>
@@ -7457,7 +7457,7 @@
                   <a:srgbClr val="1A1A1A"/>
                 </a:solidFill>
               </a:rPr>
-              <a:t>Prospect ayant accepté de valider son don en ligne (lien envoyé en direct)</a:t>
+              <a:t>Contact ayant accepté de valider son don en ligne</a:t>
             </a:r>
           </a:p>
         </p:txBody>
@@ -7554,7 +7554,7 @@
             <a:avLst/>
           </a:prstGeom>
           <a:solidFill>
-            <a:srgbClr val="005555"/>
+            <a:srgbClr val="005050"/>
           </a:solidFill>
           <a:ln>
             <a:noFill/>
@@ -7685,7 +7685,7 @@
             <a:r>
               <a:rPr sz="1000" b="1" i="0">
                 <a:solidFill>
-                  <a:srgbClr val="005555"/>
+                  <a:srgbClr val="005050"/>
                 </a:solidFill>
               </a:rPr>
               <a:t>Prélèvement Automatique</a:t>
@@ -7765,7 +7765,7 @@
                   <a:srgbClr val="1A1A1A"/>
                 </a:solidFill>
               </a:rPr>
-              <a:t>Don régulier sécurisé par mandat SEPA (IBAN à chaud, PA en ligne, PA courrier)</a:t>
+              <a:t>Don régulier sécurisé par mandat SEPA</a:t>
             </a:r>
           </a:p>
         </p:txBody>
@@ -7862,7 +7862,7 @@
             <a:avLst/>
           </a:prstGeom>
           <a:solidFill>
-            <a:srgbClr val="005555"/>
+            <a:srgbClr val="005050"/>
           </a:solidFill>
           <a:ln>
             <a:noFill/>
@@ -7919,7 +7919,7 @@
                   <a:srgbClr val="FFFFFF"/>
                 </a:solidFill>
               </a:rPr>
-              <a:t>Qualification</a:t>
+              <a:t>Qualif.</a:t>
             </a:r>
           </a:p>
         </p:txBody>
@@ -7993,7 +7993,7 @@
             <a:r>
               <a:rPr sz="1000" b="1" i="0">
                 <a:solidFill>
-                  <a:srgbClr val="005555"/>
+                  <a:srgbClr val="005050"/>
                 </a:solidFill>
               </a:rPr>
               <a:t>Conformité des qualifications</a:t>
@@ -8073,7 +8073,7 @@
                   <a:srgbClr val="1A1A1A"/>
                 </a:solidFill>
               </a:rPr>
-              <a:t>Taux de qualifications d'appels correctement renseignées (DON/INDÉCIS/REFUS)</a:t>
+              <a:t>Qualifications correctes DON/INDÉCIS/REFUS</a:t>
             </a:r>
           </a:p>
         </p:txBody>
@@ -8188,7 +8188,7 @@
             <a:avLst/>
           </a:prstGeom>
           <a:solidFill>
-            <a:srgbClr val="F0F7F7"/>
+            <a:srgbClr val="005050"/>
           </a:solidFill>
           <a:ln>
             <a:noFill/>
@@ -8225,50 +8225,7 @@
         <p:spPr>
           <a:xfrm>
             <a:off x="0" y="0"/>
-            <a:ext cx="12188952" cy="685800"/>
-          </a:xfrm>
-          <a:prstGeom prst="rect">
-            <a:avLst/>
-          </a:prstGeom>
-          <a:solidFill>
-            <a:srgbClr val="005555"/>
-          </a:solidFill>
-          <a:ln>
-            <a:noFill/>
-          </a:ln>
-        </p:spPr>
-        <p:style>
-          <a:lnRef idx="1">
-            <a:schemeClr val="accent1"/>
-          </a:lnRef>
-          <a:fillRef idx="3">
-            <a:schemeClr val="accent1"/>
-          </a:fillRef>
-          <a:effectRef idx="2">
-            <a:schemeClr val="accent1"/>
-          </a:effectRef>
-          <a:fontRef idx="minor">
-            <a:schemeClr val="lt1"/>
-          </a:fontRef>
-        </p:style>
-        <p:txBody>
-          <a:bodyPr rtlCol="0" anchor="ctr"/>
-          <a:lstStyle/>
-          <a:p>
-            <a:pPr algn="ctr"/>
-          </a:p>
-        </p:txBody>
-      </p:sp>
-      <p:sp>
-        <p:nvSpPr>
-          <p:cNvPr id="4" name="Rectangle 3"/>
-          <p:cNvSpPr/>
-          <p:nvPr/>
-        </p:nvSpPr>
-        <p:spPr>
-          <a:xfrm>
-            <a:off x="0" y="667512"/>
-            <a:ext cx="12188952" cy="45720"/>
+            <a:ext cx="12188952" cy="73152"/>
           </a:xfrm>
           <a:prstGeom prst="rect">
             <a:avLst/>
@@ -8304,48 +8261,14 @@
       </p:sp>
       <p:sp>
         <p:nvSpPr>
-          <p:cNvPr id="5" name="TextBox 4"/>
-          <p:cNvSpPr txBox="1"/>
-          <p:nvPr/>
-        </p:nvSpPr>
-        <p:spPr>
-          <a:xfrm>
-            <a:off x="164592" y="73152"/>
-            <a:ext cx="2011680" cy="347472"/>
-          </a:xfrm>
-          <a:prstGeom prst="rect">
-            <a:avLst/>
-          </a:prstGeom>
-          <a:noFill/>
-        </p:spPr>
-        <p:txBody>
-          <a:bodyPr wrap="square">
-            <a:spAutoFit/>
-          </a:bodyPr>
-          <a:lstStyle/>
-          <a:p>
-            <a:pPr algn="l"/>
-            <a:r>
-              <a:rPr sz="1400" b="1" i="0">
-                <a:solidFill>
-                  <a:srgbClr val="FFFFFF"/>
-                </a:solidFill>
-              </a:rPr>
-              <a:t>SHY-Performance</a:t>
-            </a:r>
-          </a:p>
-        </p:txBody>
-      </p:sp>
-      <p:sp>
-        <p:nvSpPr>
-          <p:cNvPr id="6" name="Rectangle 5"/>
+          <p:cNvPr id="4" name="Rectangle 3"/>
           <p:cNvSpPr/>
           <p:nvPr/>
         </p:nvSpPr>
         <p:spPr>
           <a:xfrm>
-            <a:off x="2286000" y="91440"/>
-            <a:ext cx="36576" cy="502920"/>
+            <a:off x="0" y="6784848"/>
+            <a:ext cx="12188952" cy="73152"/>
           </a:xfrm>
           <a:prstGeom prst="rect">
             <a:avLst/>
@@ -8381,14 +8304,57 @@
       </p:sp>
       <p:sp>
         <p:nvSpPr>
-          <p:cNvPr id="7" name="TextBox 6"/>
+          <p:cNvPr id="5" name="Oval 4"/>
+          <p:cNvSpPr/>
+          <p:nvPr/>
+        </p:nvSpPr>
+        <p:spPr>
+          <a:xfrm>
+            <a:off x="4114800" y="1097280"/>
+            <a:ext cx="3931920" cy="3931920"/>
+          </a:xfrm>
+          <a:prstGeom prst="ellipse">
+            <a:avLst/>
+          </a:prstGeom>
+          <a:solidFill>
+            <a:srgbClr val="006A6A"/>
+          </a:solidFill>
+          <a:ln>
+            <a:noFill/>
+          </a:ln>
+        </p:spPr>
+        <p:style>
+          <a:lnRef idx="1">
+            <a:schemeClr val="accent1"/>
+          </a:lnRef>
+          <a:fillRef idx="3">
+            <a:schemeClr val="accent1"/>
+          </a:fillRef>
+          <a:effectRef idx="2">
+            <a:schemeClr val="accent1"/>
+          </a:effectRef>
+          <a:fontRef idx="minor">
+            <a:schemeClr val="lt1"/>
+          </a:fontRef>
+        </p:style>
+        <p:txBody>
+          <a:bodyPr rtlCol="0" anchor="ctr"/>
+          <a:lstStyle/>
+          <a:p>
+            <a:pPr algn="ctr"/>
+          </a:p>
+        </p:txBody>
+      </p:sp>
+      <p:sp>
+        <p:nvSpPr>
+          <p:cNvPr id="6" name="TextBox 5"/>
           <p:cNvSpPr txBox="1"/>
           <p:nvPr/>
         </p:nvSpPr>
         <p:spPr>
           <a:xfrm>
-            <a:off x="2423160" y="91440"/>
-            <a:ext cx="9235440" cy="502920"/>
+            <a:off x="5029200" y="2011680"/>
+            <a:ext cx="2103120" cy="1371600"/>
           </a:xfrm>
           <a:prstGeom prst="rect">
             <a:avLst/>
@@ -8401,21 +8367,191 @@
           </a:bodyPr>
           <a:lstStyle/>
           <a:p>
-            <a:pPr algn="l"/>
-            <a:r>
-              <a:rPr sz="1600" b="1" i="0">
+            <a:pPr algn="ctr"/>
+            <a:r>
+              <a:rPr sz="4800" b="0" i="0">
                 <a:solidFill>
                   <a:srgbClr val="FFFFFF"/>
                 </a:solidFill>
               </a:rPr>
-              <a:t>Les 4 Modes de Validation du Don — Votre Arsenal de Closing</a:t>
+              <a:t>🙏</a:t>
+            </a:r>
+          </a:p>
+        </p:txBody>
+      </p:sp>
+      <p:sp>
+        <p:nvSpPr>
+          <p:cNvPr id="7" name="TextBox 6"/>
+          <p:cNvSpPr txBox="1"/>
+          <p:nvPr/>
+        </p:nvSpPr>
+        <p:spPr>
+          <a:xfrm>
+            <a:off x="1371600" y="1280160"/>
+            <a:ext cx="9418320" cy="1097280"/>
+          </a:xfrm>
+          <a:prstGeom prst="rect">
+            <a:avLst/>
+          </a:prstGeom>
+          <a:noFill/>
+        </p:spPr>
+        <p:txBody>
+          <a:bodyPr wrap="square">
+            <a:spAutoFit/>
+          </a:bodyPr>
+          <a:lstStyle/>
+          <a:p>
+            <a:pPr algn="ctr"/>
+            <a:r>
+              <a:rPr sz="4600" b="1" i="0">
+                <a:solidFill>
+                  <a:srgbClr val="FFFFFF"/>
+                </a:solidFill>
+              </a:rPr>
+              <a:t>Merci à Tous !</a:t>
+            </a:r>
+          </a:p>
+        </p:txBody>
+      </p:sp>
+      <p:sp>
+        <p:nvSpPr>
+          <p:cNvPr id="8" name="TextBox 7"/>
+          <p:cNvSpPr txBox="1"/>
+          <p:nvPr/>
+        </p:nvSpPr>
+        <p:spPr>
+          <a:xfrm>
+            <a:off x="1371600" y="2606040"/>
+            <a:ext cx="9418320" cy="548640"/>
+          </a:xfrm>
+          <a:prstGeom prst="rect">
+            <a:avLst/>
+          </a:prstGeom>
+          <a:noFill/>
+        </p:spPr>
+        <p:txBody>
+          <a:bodyPr wrap="square">
+            <a:spAutoFit/>
+          </a:bodyPr>
+          <a:lstStyle/>
+          <a:p>
+            <a:pPr algn="ctr"/>
+            <a:r>
+              <a:rPr sz="1800" b="0" i="1">
+                <a:solidFill>
+                  <a:srgbClr val="CCEEEE"/>
+                </a:solidFill>
+              </a:rPr>
+              <a:t>Votre engagement fait la différence pour les enfants du monde entier.</a:t>
+            </a:r>
+          </a:p>
+        </p:txBody>
+      </p:sp>
+      <p:sp>
+        <p:nvSpPr>
+          <p:cNvPr id="9" name="TextBox 8"/>
+          <p:cNvSpPr txBox="1"/>
+          <p:nvPr/>
+        </p:nvSpPr>
+        <p:spPr>
+          <a:xfrm>
+            <a:off x="1371600" y="3246120"/>
+            <a:ext cx="9418320" cy="347472"/>
+          </a:xfrm>
+          <a:prstGeom prst="rect">
+            <a:avLst/>
+          </a:prstGeom>
+          <a:noFill/>
+        </p:spPr>
+        <p:txBody>
+          <a:bodyPr wrap="square">
+            <a:spAutoFit/>
+          </a:bodyPr>
+          <a:lstStyle/>
+          <a:p>
+            <a:pPr algn="ctr"/>
+            <a:r>
+              <a:rPr sz="1200" b="0" i="0">
+                <a:solidFill>
+                  <a:srgbClr val="88DDDD"/>
+                </a:solidFill>
+              </a:rPr>
+              <a:t>Book 1 — Synopsis &amp; Objectifs · Formation FIM</a:t>
+            </a:r>
+          </a:p>
+        </p:txBody>
+      </p:sp>
+      <p:sp>
+        <p:nvSpPr>
+          <p:cNvPr id="10" name="TextBox 9"/>
+          <p:cNvSpPr txBox="1"/>
+          <p:nvPr/>
+        </p:nvSpPr>
+        <p:spPr>
+          <a:xfrm>
+            <a:off x="1828800" y="3749039"/>
+            <a:ext cx="8531352" cy="457200"/>
+          </a:xfrm>
+          <a:prstGeom prst="rect">
+            <a:avLst/>
+          </a:prstGeom>
+          <a:noFill/>
+        </p:spPr>
+        <p:txBody>
+          <a:bodyPr wrap="square">
+            <a:spAutoFit/>
+          </a:bodyPr>
+          <a:lstStyle/>
+          <a:p>
+            <a:pPr algn="ctr"/>
+            <a:r>
+              <a:rPr sz="1400" b="0" i="1">
+                <a:solidFill>
+                  <a:srgbClr val="AADDDD"/>
+                </a:solidFill>
+              </a:rPr>
+              <a:t>« Le refus d'aujourd'hui peut être le don de demain »</a:t>
+            </a:r>
+          </a:p>
+        </p:txBody>
+      </p:sp>
+      <p:sp>
+        <p:nvSpPr>
+          <p:cNvPr id="11" name="TextBox 10"/>
+          <p:cNvSpPr txBox="1"/>
+          <p:nvPr/>
+        </p:nvSpPr>
+        <p:spPr>
+          <a:xfrm>
+            <a:off x="0" y="4572000"/>
+            <a:ext cx="12188952" cy="329184"/>
+          </a:xfrm>
+          <a:prstGeom prst="rect">
+            <a:avLst/>
+          </a:prstGeom>
+          <a:noFill/>
+        </p:spPr>
+        <p:txBody>
+          <a:bodyPr wrap="square">
+            <a:spAutoFit/>
+          </a:bodyPr>
+          <a:lstStyle/>
+          <a:p>
+            <a:pPr algn="ctr"/>
+            <a:r>
+              <a:rPr sz="1000" b="0" i="0">
+                <a:solidFill>
+                  <a:srgbClr val="88DDDD"/>
+                </a:solidFill>
+              </a:rPr>
+              <a:t>SHY-Performance  ·  Formation FIM  ·  UNICEF France  ·  V6-01062026SHY-TE</a:t>
             </a:r>
           </a:p>
         </p:txBody>
       </p:sp>
       <p:pic>
         <p:nvPicPr>
-          <p:cNvPr id="8" name="Picture 7" descr="shy_logo_v2.png"/>
+          <p:cNvPr id="12" name="Picture 11" descr="shy_logo_v2.png"/>
           <p:cNvPicPr>
             <a:picLocks noChangeAspect="1"/>
           </p:cNvPicPr>
@@ -8429,8 +8565,8 @@
         </p:blipFill>
         <p:spPr>
           <a:xfrm>
-            <a:off x="11247120" y="0"/>
-            <a:ext cx="822960" cy="676656"/>
+            <a:off x="5669280" y="5120640"/>
+            <a:ext cx="914400" cy="896112"/>
           </a:xfrm>
           <a:prstGeom prst="rect">
             <a:avLst/>
@@ -8439,57 +8575,14 @@
       </p:pic>
       <p:sp>
         <p:nvSpPr>
-          <p:cNvPr id="9" name="Rectangle 8"/>
-          <p:cNvSpPr/>
-          <p:nvPr/>
-        </p:nvSpPr>
-        <p:spPr>
-          <a:xfrm>
-            <a:off x="0" y="6492240"/>
-            <a:ext cx="12188952" cy="365760"/>
-          </a:xfrm>
-          <a:prstGeom prst="rect">
-            <a:avLst/>
-          </a:prstGeom>
-          <a:solidFill>
-            <a:srgbClr val="005555"/>
-          </a:solidFill>
-          <a:ln>
-            <a:noFill/>
-          </a:ln>
-        </p:spPr>
-        <p:style>
-          <a:lnRef idx="1">
-            <a:schemeClr val="accent1"/>
-          </a:lnRef>
-          <a:fillRef idx="3">
-            <a:schemeClr val="accent1"/>
-          </a:fillRef>
-          <a:effectRef idx="2">
-            <a:schemeClr val="accent1"/>
-          </a:effectRef>
-          <a:fontRef idx="minor">
-            <a:schemeClr val="lt1"/>
-          </a:fontRef>
-        </p:style>
-        <p:txBody>
-          <a:bodyPr rtlCol="0" anchor="ctr"/>
-          <a:lstStyle/>
-          <a:p>
-            <a:pPr algn="ctr"/>
-          </a:p>
-        </p:txBody>
-      </p:sp>
-      <p:sp>
-        <p:nvSpPr>
-          <p:cNvPr id="10" name="TextBox 9"/>
+          <p:cNvPr id="13" name="TextBox 12"/>
           <p:cNvSpPr txBox="1"/>
           <p:nvPr/>
         </p:nvSpPr>
         <p:spPr>
           <a:xfrm>
-            <a:off x="0" y="6519672"/>
-            <a:ext cx="12188952" cy="274320"/>
+            <a:off x="0" y="6035040"/>
+            <a:ext cx="12188952" cy="329184"/>
           </a:xfrm>
           <a:prstGeom prst="rect">
             <a:avLst/>
@@ -8504,734 +8597,12 @@
           <a:p>
             <a:pPr algn="ctr"/>
             <a:r>
-              <a:rPr sz="800" b="0" i="0">
+              <a:rPr sz="1000" b="1" i="0">
                 <a:solidFill>
                   <a:srgbClr val="FFFFFF"/>
                 </a:solidFill>
               </a:rPr>
-              <a:t>SHY-Performance  ·  Formation FIM  ·  UNICEF France  ·  V6-01062026SHY-TE</a:t>
-            </a:r>
-          </a:p>
-        </p:txBody>
-      </p:sp>
-      <p:sp>
-        <p:nvSpPr>
-          <p:cNvPr id="11" name="Rectangle 10"/>
-          <p:cNvSpPr/>
-          <p:nvPr/>
-        </p:nvSpPr>
-        <p:spPr>
-          <a:xfrm>
-            <a:off x="274320" y="804672"/>
-            <a:ext cx="2816352" cy="594360"/>
-          </a:xfrm>
-          <a:prstGeom prst="rect">
-            <a:avLst/>
-          </a:prstGeom>
-          <a:solidFill>
-            <a:srgbClr val="005555"/>
-          </a:solidFill>
-          <a:ln>
-            <a:noFill/>
-          </a:ln>
-        </p:spPr>
-        <p:style>
-          <a:lnRef idx="1">
-            <a:schemeClr val="accent1"/>
-          </a:lnRef>
-          <a:fillRef idx="3">
-            <a:schemeClr val="accent1"/>
-          </a:fillRef>
-          <a:effectRef idx="2">
-            <a:schemeClr val="accent1"/>
-          </a:effectRef>
-          <a:fontRef idx="minor">
-            <a:schemeClr val="lt1"/>
-          </a:fontRef>
-        </p:style>
-        <p:txBody>
-          <a:bodyPr rtlCol="0" anchor="ctr"/>
-          <a:lstStyle/>
-          <a:p>
-            <a:pPr algn="ctr"/>
-          </a:p>
-        </p:txBody>
-      </p:sp>
-      <p:sp>
-        <p:nvSpPr>
-          <p:cNvPr id="12" name="TextBox 11"/>
-          <p:cNvSpPr txBox="1"/>
-          <p:nvPr/>
-        </p:nvSpPr>
-        <p:spPr>
-          <a:xfrm>
-            <a:off x="384048" y="822960"/>
-            <a:ext cx="2596896" cy="557784"/>
-          </a:xfrm>
-          <a:prstGeom prst="rect">
-            <a:avLst/>
-          </a:prstGeom>
-          <a:noFill/>
-        </p:spPr>
-        <p:txBody>
-          <a:bodyPr wrap="square">
-            <a:spAutoFit/>
-          </a:bodyPr>
-          <a:lstStyle/>
-          <a:p>
-            <a:pPr algn="ctr"/>
-            <a:r>
-              <a:rPr sz="1200" b="1" i="0">
-                <a:solidFill>
-                  <a:srgbClr val="FFFFFF"/>
-                </a:solidFill>
-              </a:rPr>
-              <a:t>MODE 1
-IBAN à Chaud</a:t>
-            </a:r>
-          </a:p>
-        </p:txBody>
-      </p:sp>
-      <p:sp>
-        <p:nvSpPr>
-          <p:cNvPr id="13" name="Rectangle 12"/>
-          <p:cNvSpPr/>
-          <p:nvPr/>
-        </p:nvSpPr>
-        <p:spPr>
-          <a:xfrm>
-            <a:off x="274320" y="1399032"/>
-            <a:ext cx="2816352" cy="4114800"/>
-          </a:xfrm>
-          <a:prstGeom prst="rect">
-            <a:avLst/>
-          </a:prstGeom>
-          <a:solidFill>
-            <a:srgbClr val="FFFFFF"/>
-          </a:solidFill>
-          <a:ln w="19050">
-            <a:solidFill>
-              <a:srgbClr val="005555"/>
-            </a:solidFill>
-          </a:ln>
-        </p:spPr>
-        <p:style>
-          <a:lnRef idx="1">
-            <a:schemeClr val="accent1"/>
-          </a:lnRef>
-          <a:fillRef idx="3">
-            <a:schemeClr val="accent1"/>
-          </a:fillRef>
-          <a:effectRef idx="2">
-            <a:schemeClr val="accent1"/>
-          </a:effectRef>
-          <a:fontRef idx="minor">
-            <a:schemeClr val="lt1"/>
-          </a:fontRef>
-        </p:style>
-        <p:txBody>
-          <a:bodyPr rtlCol="0" anchor="ctr"/>
-          <a:lstStyle/>
-          <a:p>
-            <a:pPr algn="ctr"/>
-          </a:p>
-        </p:txBody>
-      </p:sp>
-      <p:sp>
-        <p:nvSpPr>
-          <p:cNvPr id="14" name="TextBox 13"/>
-          <p:cNvSpPr txBox="1"/>
-          <p:nvPr/>
-        </p:nvSpPr>
-        <p:spPr>
-          <a:xfrm>
-            <a:off x="411479" y="1472184"/>
-            <a:ext cx="2542032" cy="3877056"/>
-          </a:xfrm>
-          <a:prstGeom prst="rect">
-            <a:avLst/>
-          </a:prstGeom>
-          <a:noFill/>
-        </p:spPr>
-        <p:txBody>
-          <a:bodyPr wrap="square">
-            <a:spAutoFit/>
-          </a:bodyPr>
-          <a:lstStyle/>
-          <a:p>
-            <a:pPr algn="l"/>
-            <a:r>
-              <a:rPr sz="1000" b="0" i="0">
-                <a:solidFill>
-                  <a:srgbClr val="1A1A1A"/>
-                </a:solidFill>
-              </a:rPr>
-              <a:t>Le prospect dicte son IBAN directement lors de l'appel.
-✔ Validation immédiate
-✔ Sécurisation mandat SEPA
-✔ Confirmation par SMS
-→ Mode le plus efficace
-Prioritaire en conquête</a:t>
-            </a:r>
-          </a:p>
-        </p:txBody>
-      </p:sp>
-      <p:sp>
-        <p:nvSpPr>
-          <p:cNvPr id="15" name="Rectangle 14"/>
-          <p:cNvSpPr/>
-          <p:nvPr/>
-        </p:nvSpPr>
-        <p:spPr>
-          <a:xfrm>
-            <a:off x="3200400" y="804672"/>
-            <a:ext cx="2816352" cy="594360"/>
-          </a:xfrm>
-          <a:prstGeom prst="rect">
-            <a:avLst/>
-          </a:prstGeom>
-          <a:solidFill>
-            <a:srgbClr val="008080"/>
-          </a:solidFill>
-          <a:ln>
-            <a:noFill/>
-          </a:ln>
-        </p:spPr>
-        <p:style>
-          <a:lnRef idx="1">
-            <a:schemeClr val="accent1"/>
-          </a:lnRef>
-          <a:fillRef idx="3">
-            <a:schemeClr val="accent1"/>
-          </a:fillRef>
-          <a:effectRef idx="2">
-            <a:schemeClr val="accent1"/>
-          </a:effectRef>
-          <a:fontRef idx="minor">
-            <a:schemeClr val="lt1"/>
-          </a:fontRef>
-        </p:style>
-        <p:txBody>
-          <a:bodyPr rtlCol="0" anchor="ctr"/>
-          <a:lstStyle/>
-          <a:p>
-            <a:pPr algn="ctr"/>
-          </a:p>
-        </p:txBody>
-      </p:sp>
-      <p:sp>
-        <p:nvSpPr>
-          <p:cNvPr id="16" name="TextBox 15"/>
-          <p:cNvSpPr txBox="1"/>
-          <p:nvPr/>
-        </p:nvSpPr>
-        <p:spPr>
-          <a:xfrm>
-            <a:off x="3310128" y="822960"/>
-            <a:ext cx="2596896" cy="557784"/>
-          </a:xfrm>
-          <a:prstGeom prst="rect">
-            <a:avLst/>
-          </a:prstGeom>
-          <a:noFill/>
-        </p:spPr>
-        <p:txBody>
-          <a:bodyPr wrap="square">
-            <a:spAutoFit/>
-          </a:bodyPr>
-          <a:lstStyle/>
-          <a:p>
-            <a:pPr algn="ctr"/>
-            <a:r>
-              <a:rPr sz="1200" b="1" i="0">
-                <a:solidFill>
-                  <a:srgbClr val="FFFFFF"/>
-                </a:solidFill>
-              </a:rPr>
-              <a:t>MODE 2
-PA en Ligne — Direct</a:t>
-            </a:r>
-          </a:p>
-        </p:txBody>
-      </p:sp>
-      <p:sp>
-        <p:nvSpPr>
-          <p:cNvPr id="17" name="Rectangle 16"/>
-          <p:cNvSpPr/>
-          <p:nvPr/>
-        </p:nvSpPr>
-        <p:spPr>
-          <a:xfrm>
-            <a:off x="3200400" y="1399032"/>
-            <a:ext cx="2816352" cy="4114800"/>
-          </a:xfrm>
-          <a:prstGeom prst="rect">
-            <a:avLst/>
-          </a:prstGeom>
-          <a:solidFill>
-            <a:srgbClr val="FFFFFF"/>
-          </a:solidFill>
-          <a:ln w="19050">
-            <a:solidFill>
-              <a:srgbClr val="008080"/>
-            </a:solidFill>
-          </a:ln>
-        </p:spPr>
-        <p:style>
-          <a:lnRef idx="1">
-            <a:schemeClr val="accent1"/>
-          </a:lnRef>
-          <a:fillRef idx="3">
-            <a:schemeClr val="accent1"/>
-          </a:fillRef>
-          <a:effectRef idx="2">
-            <a:schemeClr val="accent1"/>
-          </a:effectRef>
-          <a:fontRef idx="minor">
-            <a:schemeClr val="lt1"/>
-          </a:fontRef>
-        </p:style>
-        <p:txBody>
-          <a:bodyPr rtlCol="0" anchor="ctr"/>
-          <a:lstStyle/>
-          <a:p>
-            <a:pPr algn="ctr"/>
-          </a:p>
-        </p:txBody>
-      </p:sp>
-      <p:sp>
-        <p:nvSpPr>
-          <p:cNvPr id="18" name="TextBox 17"/>
-          <p:cNvSpPr txBox="1"/>
-          <p:nvPr/>
-        </p:nvSpPr>
-        <p:spPr>
-          <a:xfrm>
-            <a:off x="3337560" y="1472184"/>
-            <a:ext cx="2542032" cy="3877056"/>
-          </a:xfrm>
-          <a:prstGeom prst="rect">
-            <a:avLst/>
-          </a:prstGeom>
-          <a:noFill/>
-        </p:spPr>
-        <p:txBody>
-          <a:bodyPr wrap="square">
-            <a:spAutoFit/>
-          </a:bodyPr>
-          <a:lstStyle/>
-          <a:p>
-            <a:pPr algn="l"/>
-            <a:r>
-              <a:rPr sz="1000" b="0" i="0">
-                <a:solidFill>
-                  <a:srgbClr val="1A1A1A"/>
-                </a:solidFill>
-              </a:rPr>
-              <a:t>Vous envoyez un lien de paiement sécurisé pendant l'appel.
-✔ Prospect valide seul en temps réel
-✔ Confirmation email automatique
-✔ Zéro saisie IBAN par téléphone
-→ Pour les prospects méfiants sur l'IBAN</a:t>
-            </a:r>
-          </a:p>
-        </p:txBody>
-      </p:sp>
-      <p:sp>
-        <p:nvSpPr>
-          <p:cNvPr id="19" name="Rectangle 18"/>
-          <p:cNvSpPr/>
-          <p:nvPr/>
-        </p:nvSpPr>
-        <p:spPr>
-          <a:xfrm>
-            <a:off x="6126480" y="804672"/>
-            <a:ext cx="2816352" cy="594360"/>
-          </a:xfrm>
-          <a:prstGeom prst="rect">
-            <a:avLst/>
-          </a:prstGeom>
-          <a:solidFill>
-            <a:srgbClr val="006A6A"/>
-          </a:solidFill>
-          <a:ln>
-            <a:noFill/>
-          </a:ln>
-        </p:spPr>
-        <p:style>
-          <a:lnRef idx="1">
-            <a:schemeClr val="accent1"/>
-          </a:lnRef>
-          <a:fillRef idx="3">
-            <a:schemeClr val="accent1"/>
-          </a:fillRef>
-          <a:effectRef idx="2">
-            <a:schemeClr val="accent1"/>
-          </a:effectRef>
-          <a:fontRef idx="minor">
-            <a:schemeClr val="lt1"/>
-          </a:fontRef>
-        </p:style>
-        <p:txBody>
-          <a:bodyPr rtlCol="0" anchor="ctr"/>
-          <a:lstStyle/>
-          <a:p>
-            <a:pPr algn="ctr"/>
-          </a:p>
-        </p:txBody>
-      </p:sp>
-      <p:sp>
-        <p:nvSpPr>
-          <p:cNvPr id="20" name="TextBox 19"/>
-          <p:cNvSpPr txBox="1"/>
-          <p:nvPr/>
-        </p:nvSpPr>
-        <p:spPr>
-          <a:xfrm>
-            <a:off x="6236208" y="822960"/>
-            <a:ext cx="2596896" cy="557784"/>
-          </a:xfrm>
-          <a:prstGeom prst="rect">
-            <a:avLst/>
-          </a:prstGeom>
-          <a:noFill/>
-        </p:spPr>
-        <p:txBody>
-          <a:bodyPr wrap="square">
-            <a:spAutoFit/>
-          </a:bodyPr>
-          <a:lstStyle/>
-          <a:p>
-            <a:pPr algn="ctr"/>
-            <a:r>
-              <a:rPr sz="1200" b="1" i="0">
-                <a:solidFill>
-                  <a:srgbClr val="FFFFFF"/>
-                </a:solidFill>
-              </a:rPr>
-              <a:t>MODE 3
-Promesse PA en Ligne (PEL)</a:t>
-            </a:r>
-          </a:p>
-        </p:txBody>
-      </p:sp>
-      <p:sp>
-        <p:nvSpPr>
-          <p:cNvPr id="21" name="Rectangle 20"/>
-          <p:cNvSpPr/>
-          <p:nvPr/>
-        </p:nvSpPr>
-        <p:spPr>
-          <a:xfrm>
-            <a:off x="6126480" y="1399032"/>
-            <a:ext cx="2816352" cy="4114800"/>
-          </a:xfrm>
-          <a:prstGeom prst="rect">
-            <a:avLst/>
-          </a:prstGeom>
-          <a:solidFill>
-            <a:srgbClr val="FFFFFF"/>
-          </a:solidFill>
-          <a:ln w="19050">
-            <a:solidFill>
-              <a:srgbClr val="006A6A"/>
-            </a:solidFill>
-          </a:ln>
-        </p:spPr>
-        <p:style>
-          <a:lnRef idx="1">
-            <a:schemeClr val="accent1"/>
-          </a:lnRef>
-          <a:fillRef idx="3">
-            <a:schemeClr val="accent1"/>
-          </a:fillRef>
-          <a:effectRef idx="2">
-            <a:schemeClr val="accent1"/>
-          </a:effectRef>
-          <a:fontRef idx="minor">
-            <a:schemeClr val="lt1"/>
-          </a:fontRef>
-        </p:style>
-        <p:txBody>
-          <a:bodyPr rtlCol="0" anchor="ctr"/>
-          <a:lstStyle/>
-          <a:p>
-            <a:pPr algn="ctr"/>
-          </a:p>
-        </p:txBody>
-      </p:sp>
-      <p:sp>
-        <p:nvSpPr>
-          <p:cNvPr id="22" name="TextBox 21"/>
-          <p:cNvSpPr txBox="1"/>
-          <p:nvPr/>
-        </p:nvSpPr>
-        <p:spPr>
-          <a:xfrm>
-            <a:off x="6263640" y="1472184"/>
-            <a:ext cx="2542032" cy="3877056"/>
-          </a:xfrm>
-          <a:prstGeom prst="rect">
-            <a:avLst/>
-          </a:prstGeom>
-          <a:noFill/>
-        </p:spPr>
-        <p:txBody>
-          <a:bodyPr wrap="square">
-            <a:spAutoFit/>
-          </a:bodyPr>
-          <a:lstStyle/>
-          <a:p>
-            <a:pPr algn="l"/>
-            <a:r>
-              <a:rPr sz="1000" b="0" i="0">
-                <a:solidFill>
-                  <a:srgbClr val="1A1A1A"/>
-                </a:solidFill>
-              </a:rPr>
-              <a:t>Le prospect s'engage à valider le lien après l'appel.
-✔ Lien envoyé par SMS / email
-✔ Relance automatique J+1
-✔ Comptabilisé dans le TX Transfo
-→ Pour les indécis à fort potentiel</a:t>
-            </a:r>
-          </a:p>
-        </p:txBody>
-      </p:sp>
-      <p:sp>
-        <p:nvSpPr>
-          <p:cNvPr id="23" name="Rectangle 22"/>
-          <p:cNvSpPr/>
-          <p:nvPr/>
-        </p:nvSpPr>
-        <p:spPr>
-          <a:xfrm>
-            <a:off x="9052560" y="804672"/>
-            <a:ext cx="2816352" cy="594360"/>
-          </a:xfrm>
-          <a:prstGeom prst="rect">
-            <a:avLst/>
-          </a:prstGeom>
-          <a:solidFill>
-            <a:srgbClr val="00AAAA"/>
-          </a:solidFill>
-          <a:ln>
-            <a:noFill/>
-          </a:ln>
-        </p:spPr>
-        <p:style>
-          <a:lnRef idx="1">
-            <a:schemeClr val="accent1"/>
-          </a:lnRef>
-          <a:fillRef idx="3">
-            <a:schemeClr val="accent1"/>
-          </a:fillRef>
-          <a:effectRef idx="2">
-            <a:schemeClr val="accent1"/>
-          </a:effectRef>
-          <a:fontRef idx="minor">
-            <a:schemeClr val="lt1"/>
-          </a:fontRef>
-        </p:style>
-        <p:txBody>
-          <a:bodyPr rtlCol="0" anchor="ctr"/>
-          <a:lstStyle/>
-          <a:p>
-            <a:pPr algn="ctr"/>
-          </a:p>
-        </p:txBody>
-      </p:sp>
-      <p:sp>
-        <p:nvSpPr>
-          <p:cNvPr id="24" name="TextBox 23"/>
-          <p:cNvSpPr txBox="1"/>
-          <p:nvPr/>
-        </p:nvSpPr>
-        <p:spPr>
-          <a:xfrm>
-            <a:off x="9162288" y="822960"/>
-            <a:ext cx="2596896" cy="557784"/>
-          </a:xfrm>
-          <a:prstGeom prst="rect">
-            <a:avLst/>
-          </a:prstGeom>
-          <a:noFill/>
-        </p:spPr>
-        <p:txBody>
-          <a:bodyPr wrap="square">
-            <a:spAutoFit/>
-          </a:bodyPr>
-          <a:lstStyle/>
-          <a:p>
-            <a:pPr algn="ctr"/>
-            <a:r>
-              <a:rPr sz="1200" b="1" i="0">
-                <a:solidFill>
-                  <a:srgbClr val="FFFFFF"/>
-                </a:solidFill>
-              </a:rPr>
-              <a:t>MODE 4
-PA Courrier</a:t>
-            </a:r>
-          </a:p>
-        </p:txBody>
-      </p:sp>
-      <p:sp>
-        <p:nvSpPr>
-          <p:cNvPr id="25" name="Rectangle 24"/>
-          <p:cNvSpPr/>
-          <p:nvPr/>
-        </p:nvSpPr>
-        <p:spPr>
-          <a:xfrm>
-            <a:off x="9052560" y="1399032"/>
-            <a:ext cx="2816352" cy="4114800"/>
-          </a:xfrm>
-          <a:prstGeom prst="rect">
-            <a:avLst/>
-          </a:prstGeom>
-          <a:solidFill>
-            <a:srgbClr val="FFFFFF"/>
-          </a:solidFill>
-          <a:ln w="19050">
-            <a:solidFill>
-              <a:srgbClr val="00AAAA"/>
-            </a:solidFill>
-          </a:ln>
-        </p:spPr>
-        <p:style>
-          <a:lnRef idx="1">
-            <a:schemeClr val="accent1"/>
-          </a:lnRef>
-          <a:fillRef idx="3">
-            <a:schemeClr val="accent1"/>
-          </a:fillRef>
-          <a:effectRef idx="2">
-            <a:schemeClr val="accent1"/>
-          </a:effectRef>
-          <a:fontRef idx="minor">
-            <a:schemeClr val="lt1"/>
-          </a:fontRef>
-        </p:style>
-        <p:txBody>
-          <a:bodyPr rtlCol="0" anchor="ctr"/>
-          <a:lstStyle/>
-          <a:p>
-            <a:pPr algn="ctr"/>
-          </a:p>
-        </p:txBody>
-      </p:sp>
-      <p:sp>
-        <p:nvSpPr>
-          <p:cNvPr id="26" name="TextBox 25"/>
-          <p:cNvSpPr txBox="1"/>
-          <p:nvPr/>
-        </p:nvSpPr>
-        <p:spPr>
-          <a:xfrm>
-            <a:off x="9189720" y="1472184"/>
-            <a:ext cx="2542032" cy="3877056"/>
-          </a:xfrm>
-          <a:prstGeom prst="rect">
-            <a:avLst/>
-          </a:prstGeom>
-          <a:noFill/>
-        </p:spPr>
-        <p:txBody>
-          <a:bodyPr wrap="square">
-            <a:spAutoFit/>
-          </a:bodyPr>
-          <a:lstStyle/>
-          <a:p>
-            <a:pPr algn="l"/>
-            <a:r>
-              <a:rPr sz="1000" b="0" i="0">
-                <a:solidFill>
-                  <a:srgbClr val="1A1A1A"/>
-                </a:solidFill>
-              </a:rPr>
-              <a:t>Envoi d'un formulaire papier avec enveloppe T pré-affranchie.
-✔ Pour les seniors moins digitaux
-✔ Mandat SEPA envoyé par voie postale
-✔ Délai de retour : 5–10 jours
-→ Alternative quand les autres modes échouent</a:t>
-            </a:r>
-          </a:p>
-        </p:txBody>
-      </p:sp>
-      <p:sp>
-        <p:nvSpPr>
-          <p:cNvPr id="27" name="Rectangle 26"/>
-          <p:cNvSpPr/>
-          <p:nvPr/>
-        </p:nvSpPr>
-        <p:spPr>
-          <a:xfrm>
-            <a:off x="274320" y="5669280"/>
-            <a:ext cx="11640312" cy="402336"/>
-          </a:xfrm>
-          <a:prstGeom prst="rect">
-            <a:avLst/>
-          </a:prstGeom>
-          <a:solidFill>
-            <a:srgbClr val="008080"/>
-          </a:solidFill>
-          <a:ln>
-            <a:noFill/>
-          </a:ln>
-        </p:spPr>
-        <p:style>
-          <a:lnRef idx="1">
-            <a:schemeClr val="accent1"/>
-          </a:lnRef>
-          <a:fillRef idx="3">
-            <a:schemeClr val="accent1"/>
-          </a:fillRef>
-          <a:effectRef idx="2">
-            <a:schemeClr val="accent1"/>
-          </a:effectRef>
-          <a:fontRef idx="minor">
-            <a:schemeClr val="lt1"/>
-          </a:fontRef>
-        </p:style>
-        <p:txBody>
-          <a:bodyPr rtlCol="0" anchor="ctr"/>
-          <a:lstStyle/>
-          <a:p>
-            <a:pPr algn="ctr"/>
-          </a:p>
-        </p:txBody>
-      </p:sp>
-      <p:sp>
-        <p:nvSpPr>
-          <p:cNvPr id="28" name="TextBox 27"/>
-          <p:cNvSpPr txBox="1"/>
-          <p:nvPr/>
-        </p:nvSpPr>
-        <p:spPr>
-          <a:xfrm>
-            <a:off x="411479" y="5742432"/>
-            <a:ext cx="11365992" cy="256032"/>
-          </a:xfrm>
-          <a:prstGeom prst="rect">
-            <a:avLst/>
-          </a:prstGeom>
-          <a:noFill/>
-        </p:spPr>
-        <p:txBody>
-          <a:bodyPr wrap="square">
-            <a:spAutoFit/>
-          </a:bodyPr>
-          <a:lstStyle/>
-          <a:p>
-            <a:pPr algn="l"/>
-            <a:r>
-              <a:rPr sz="1000" b="0" i="0">
-                <a:solidFill>
-                  <a:srgbClr val="FFFFFF"/>
-                </a:solidFill>
-              </a:rPr>
-              <a:t>Votre priorité : proposer le MODE 1 (IBAN à chaud) en premier. Si refus, enchaîner Mode 2 → Mode 3 → Mode 4. Ne jamais sauter directement au Mode 4.</a:t>
+              <a:t>SHY-Performance  ×  FIDELIS  ×  UNICEF France</a:t>
             </a:r>
           </a:p>
         </p:txBody>
